--- a/Rust Report.pptx
+++ b/Rust Report.pptx
@@ -5,19 +5,20 @@
     <p:sldMasterId id="2147483648" r:id="rId1"/>
   </p:sldMasterIdLst>
   <p:notesMasterIdLst>
-    <p:notesMasterId r:id="rId13"/>
+    <p:notesMasterId r:id="rId10"/>
   </p:notesMasterIdLst>
   <p:sldIdLst>
     <p:sldId id="256" r:id="rId3"/>
     <p:sldId id="257" r:id="rId4"/>
     <p:sldId id="258" r:id="rId5"/>
     <p:sldId id="259" r:id="rId6"/>
-    <p:sldId id="260" r:id="rId7"/>
-    <p:sldId id="261" r:id="rId8"/>
-    <p:sldId id="262" r:id="rId9"/>
-    <p:sldId id="263" r:id="rId10"/>
+    <p:sldId id="266" r:id="rId7"/>
+    <p:sldId id="262" r:id="rId8"/>
+    <p:sldId id="263" r:id="rId9"/>
     <p:sldId id="264" r:id="rId11"/>
-    <p:sldId id="265" r:id="rId12"/>
+    <p:sldId id="267" r:id="rId12"/>
+    <p:sldId id="265" r:id="rId13"/>
+    <p:sldId id="268" r:id="rId14"/>
   </p:sldIdLst>
   <p:sldSz cx="12192000" cy="6858000"/>
   <p:notesSz cx="6858000" cy="9144000"/>
@@ -480,6 +481,58 @@
     </a:lvl9pPr>
   </p:notesStyle>
 </p:notesMaster>
+</file>
+
+<file path=ppt/notesSlides/notesSlide1.xml><?xml version="1.0" encoding="utf-8"?>
+<p:notes xmlns:a="http://schemas.openxmlformats.org/drawingml/2006/main" xmlns:r="http://schemas.openxmlformats.org/officeDocument/2006/relationships" xmlns:p="http://schemas.openxmlformats.org/presentationml/2006/main">
+  <p:cSld>
+    <p:spTree>
+      <p:nvGrpSpPr>
+        <p:cNvPr id="1" name=""/>
+        <p:cNvGrpSpPr/>
+        <p:nvPr/>
+      </p:nvGrpSpPr>
+      <p:grpSpPr/>
+      <p:sp>
+        <p:nvSpPr>
+          <p:cNvPr id="2" name="幻灯片图像占位符 1"/>
+          <p:cNvSpPr>
+            <a:spLocks noGrp="1"/>
+          </p:cNvSpPr>
+          <p:nvPr>
+            <p:ph type="sldImg" idx="2"/>
+          </p:nvPr>
+        </p:nvSpPr>
+        <p:spPr/>
+      </p:sp>
+      <p:sp>
+        <p:nvSpPr>
+          <p:cNvPr id="3" name="文本占位符 2"/>
+          <p:cNvSpPr>
+            <a:spLocks noGrp="1"/>
+          </p:cNvSpPr>
+          <p:nvPr>
+            <p:ph type="body" idx="3"/>
+          </p:nvPr>
+        </p:nvSpPr>
+        <p:spPr/>
+        <p:txBody>
+          <a:bodyPr/>
+          <a:p>
+            <a:r>
+              <a:rPr lang="zh-CN" altLang="en-US"/>
+              <a:t>比如整数转换成浮点数</a:t>
+            </a:r>
+            <a:endParaRPr lang="zh-CN" altLang="en-US"/>
+          </a:p>
+        </p:txBody>
+      </p:sp>
+    </p:spTree>
+  </p:cSld>
+  <p:clrMapOvr>
+    <a:masterClrMapping/>
+  </p:clrMapOvr>
+</p:notes>
 </file>
 
 <file path=ppt/slideLayouts/slideLayout1.xml><?xml version="1.0" encoding="utf-8"?>
@@ -3451,37 +3504,44 @@
             </p:custDataLst>
           </p:nvPr>
         </p:nvSpPr>
-        <p:spPr/>
+        <p:spPr>
+          <a:xfrm>
+            <a:off x="1196340" y="2343150"/>
+            <a:ext cx="9799320" cy="1426845"/>
+          </a:xfrm>
+        </p:spPr>
         <p:txBody>
-          <a:bodyPr>
-            <a:normAutofit fontScale="90000"/>
-          </a:bodyPr>
-          <a:p>
-            <a:r>
-              <a:rPr lang="en-US" altLang="zh-CN"/>
+          <a:bodyPr/>
+          <a:p>
+            <a:r>
+              <a:rPr lang="en-US" altLang="zh-CN" sz="3200"/>
+              <a:t>——</a:t>
+            </a:r>
+            <a:r>
+              <a:rPr lang="zh-CN" altLang="en-US" sz="3200"/>
+              <a:t>在</a:t>
+            </a:r>
+            <a:r>
+              <a:rPr lang="en-US" altLang="zh-CN" sz="3200"/>
               <a:t>Rust</a:t>
             </a:r>
             <a:r>
-              <a:rPr lang="zh-CN" altLang="en-US"/>
+              <a:rPr lang="zh-CN" altLang="en-US" sz="3200"/>
               <a:t>编译器标准库中集成</a:t>
             </a:r>
             <a:r>
-              <a:rPr lang="en-US" altLang="zh-CN"/>
+              <a:rPr lang="en-US" altLang="zh-CN" sz="3200"/>
               <a:t>Aarch64 SVE</a:t>
             </a:r>
             <a:r>
-              <a:rPr lang="zh-CN" altLang="en-US"/>
+              <a:rPr lang="zh-CN" altLang="en-US" sz="3200"/>
               <a:t>类型和</a:t>
             </a:r>
             <a:r>
-              <a:rPr lang="en-US" altLang="zh-CN"/>
+              <a:rPr lang="en-US" altLang="zh-CN" sz="3200"/>
               <a:t>Intrinsics</a:t>
             </a:r>
-            <a:r>
-              <a:rPr lang="zh-CN" altLang="en-US"/>
-              <a:t>函数</a:t>
-            </a:r>
-            <a:endParaRPr lang="zh-CN" altLang="en-US"/>
+            <a:endParaRPr lang="zh-CN" altLang="en-US" sz="3200"/>
           </a:p>
         </p:txBody>
       </p:sp>
@@ -3500,7 +3560,7 @@
         </p:nvSpPr>
         <p:spPr>
           <a:xfrm>
-            <a:off x="4145915" y="3560445"/>
+            <a:off x="3804920" y="4241800"/>
             <a:ext cx="5621655" cy="1472565"/>
           </a:xfrm>
         </p:spPr>
@@ -3572,7 +3632,7 @@
                   <a:schemeClr val="tx1"/>
                 </a:solidFill>
               </a:rPr>
-              <a:t>2025.12.1</a:t>
+              <a:t>2025.12.4</a:t>
             </a:r>
             <a:endParaRPr lang="en-US" altLang="zh-CN">
               <a:solidFill>
@@ -3582,9 +3642,80 @@
           </a:p>
         </p:txBody>
       </p:sp>
+      <p:sp>
+        <p:nvSpPr>
+          <p:cNvPr id="4" name="标题 1"/>
+          <p:cNvSpPr>
+            <a:spLocks noGrp="1"/>
+          </p:cNvSpPr>
+          <p:nvPr>
+            <p:custDataLst>
+              <p:tags r:id="rId3"/>
+            </p:custDataLst>
+          </p:nvPr>
+        </p:nvSpPr>
+        <p:spPr>
+          <a:xfrm>
+            <a:off x="615315" y="812800"/>
+            <a:ext cx="10645775" cy="1250950"/>
+          </a:xfrm>
+          <a:prstGeom prst="rect">
+            <a:avLst/>
+          </a:prstGeom>
+        </p:spPr>
+        <p:txBody>
+          <a:bodyPr vert="horz" lIns="90000" tIns="46800" rIns="90000" bIns="46800" rtlCol="0" anchor="b" anchorCtr="0"/>
+          <a:lstStyle>
+            <a:lvl1pPr algn="ctr" defTabSz="914400" rtl="0" eaLnBrk="1" fontAlgn="auto" latinLnBrk="0" hangingPunct="1">
+              <a:lnSpc>
+                <a:spcPct val="100000"/>
+              </a:lnSpc>
+              <a:spcBef>
+                <a:spcPct val="0"/>
+              </a:spcBef>
+              <a:buNone/>
+              <a:defRPr sz="6000" b="0" u="none" strike="noStrike" kern="1200" cap="none" spc="300" normalizeH="0" baseline="0">
+                <a:solidFill>
+                  <a:schemeClr val="tx1">
+                    <a:lumMod val="85000"/>
+                    <a:lumOff val="15000"/>
+                  </a:schemeClr>
+                </a:solidFill>
+                <a:uFillTx/>
+                <a:latin typeface="+mj-lt"/>
+                <a:ea typeface="+mj-ea"/>
+                <a:cs typeface="+mj-cs"/>
+              </a:defRPr>
+            </a:lvl1pPr>
+          </a:lstStyle>
+          <a:p>
+            <a:r>
+              <a:rPr lang="en-US" altLang="zh-CN" sz="5400" b="1">
+                <a:latin typeface="微软雅黑" panose="020B0503020204020204" charset="-122"/>
+                <a:ea typeface="微软雅黑" panose="020B0503020204020204" charset="-122"/>
+                <a:cs typeface="微软雅黑" panose="020B0503020204020204" charset="-122"/>
+              </a:rPr>
+              <a:t>Rust SVE </a:t>
+            </a:r>
+            <a:r>
+              <a:rPr lang="zh-CN" altLang="en-US" sz="5400" b="1">
+                <a:latin typeface="微软雅黑" panose="020B0503020204020204" charset="-122"/>
+                <a:ea typeface="微软雅黑" panose="020B0503020204020204" charset="-122"/>
+                <a:cs typeface="微软雅黑" panose="020B0503020204020204" charset="-122"/>
+              </a:rPr>
+              <a:t>集成工作阶段性汇报</a:t>
+            </a:r>
+            <a:endParaRPr lang="zh-CN" altLang="en-US" sz="5400" b="1">
+              <a:latin typeface="微软雅黑" panose="020B0503020204020204" charset="-122"/>
+              <a:ea typeface="微软雅黑" panose="020B0503020204020204" charset="-122"/>
+              <a:cs typeface="微软雅黑" panose="020B0503020204020204" charset="-122"/>
+            </a:endParaRPr>
+          </a:p>
+        </p:txBody>
+      </p:sp>
     </p:spTree>
     <p:custDataLst>
-      <p:tags r:id="rId3"/>
+      <p:tags r:id="rId4"/>
     </p:custDataLst>
   </p:cSld>
   <p:clrMapOvr>
@@ -3621,10 +3752,10 @@
           <a:bodyPr/>
           <a:p>
             <a:r>
-              <a:rPr lang="zh-CN" altLang="en-US"/>
-              <a:t>四、未来工作</a:t>
-            </a:r>
-            <a:endParaRPr lang="zh-CN" altLang="en-US"/>
+              <a:rPr lang="zh-CN" altLang="en-US" b="1"/>
+              <a:t>三、总结与展望</a:t>
+            </a:r>
+            <a:endParaRPr lang="zh-CN" altLang="en-US" b="1"/>
           </a:p>
         </p:txBody>
       </p:sp>
@@ -3643,16 +3774,14 @@
         <p:spPr>
           <a:xfrm>
             <a:off x="608330" y="1539240"/>
-            <a:ext cx="9093200" cy="2672080"/>
+            <a:ext cx="10968355" cy="5016500"/>
           </a:xfrm>
           <a:prstGeom prst="rect">
             <a:avLst/>
           </a:prstGeom>
         </p:spPr>
         <p:txBody>
-          <a:bodyPr vert="horz" lIns="90000" tIns="46800" rIns="90000" bIns="46800" rtlCol="0">
-            <a:normAutofit/>
-          </a:bodyPr>
+          <a:bodyPr vert="horz" lIns="90000" tIns="46800" rIns="90000" bIns="46800" rtlCol="0"/>
           <a:lstStyle>
             <a:lvl1pPr marL="228600" indent="-228600" algn="l" defTabSz="914400" rtl="0" eaLnBrk="1" fontAlgn="auto" latinLnBrk="0" hangingPunct="1">
               <a:lnSpc>
@@ -3863,7 +3992,34 @@
               <a:buNone/>
             </a:pPr>
             <a:r>
-              <a:rPr lang="en-US" altLang="zh-CN">
+              <a:rPr lang="zh-CN" altLang="en-US" sz="2400" b="1">
+                <a:solidFill>
+                  <a:srgbClr val="C00000"/>
+                </a:solidFill>
+                <a:latin typeface="微软雅黑" panose="020B0503020204020204" charset="-122"/>
+                <a:ea typeface="微软雅黑" panose="020B0503020204020204" charset="-122"/>
+                <a:cs typeface="微软雅黑" panose="020B0503020204020204" charset="-122"/>
+              </a:rPr>
+              <a:t>阶段性成果总结</a:t>
+            </a:r>
+            <a:endParaRPr lang="zh-CN" altLang="en-US" sz="2400" b="1">
+              <a:solidFill>
+                <a:srgbClr val="C00000"/>
+              </a:solidFill>
+              <a:latin typeface="微软雅黑" panose="020B0503020204020204" charset="-122"/>
+              <a:ea typeface="微软雅黑" panose="020B0503020204020204" charset="-122"/>
+              <a:cs typeface="微软雅黑" panose="020B0503020204020204" charset="-122"/>
+            </a:endParaRPr>
+          </a:p>
+          <a:p>
+            <a:pPr marL="0" indent="0">
+              <a:spcBef>
+                <a:spcPts val="1000"/>
+              </a:spcBef>
+              <a:buNone/>
+            </a:pPr>
+            <a:r>
+              <a:rPr lang="en-US" altLang="zh-CN" sz="2000">
                 <a:solidFill>
                   <a:schemeClr val="tx1"/>
                 </a:solidFill>
@@ -3874,83 +4030,239 @@
               <a:t>1. </a:t>
             </a:r>
             <a:r>
-              <a:rPr lang="zh-CN" altLang="en-US">
-                <a:solidFill>
-                  <a:schemeClr val="tx1"/>
-                </a:solidFill>
-                <a:latin typeface="微软雅黑" panose="020B0503020204020204" charset="-122"/>
-                <a:ea typeface="微软雅黑" panose="020B0503020204020204" charset="-122"/>
-                <a:cs typeface="微软雅黑" panose="020B0503020204020204" charset="-122"/>
-              </a:rPr>
-              <a:t>持续跟踪</a:t>
-            </a:r>
-            <a:r>
-              <a:rPr lang="en-US" altLang="zh-CN">
-                <a:solidFill>
-                  <a:schemeClr val="tx1"/>
-                </a:solidFill>
-                <a:latin typeface="微软雅黑" panose="020B0503020204020204" charset="-122"/>
-                <a:ea typeface="微软雅黑" panose="020B0503020204020204" charset="-122"/>
-                <a:cs typeface="微软雅黑" panose="020B0503020204020204" charset="-122"/>
-              </a:rPr>
-              <a:t> rustc_scalable_vector RFC </a:t>
-            </a:r>
-            <a:r>
-              <a:rPr lang="zh-CN" altLang="en-US">
-                <a:solidFill>
-                  <a:schemeClr val="tx1"/>
-                </a:solidFill>
-                <a:latin typeface="微软雅黑" panose="020B0503020204020204" charset="-122"/>
-                <a:ea typeface="微软雅黑" panose="020B0503020204020204" charset="-122"/>
-                <a:cs typeface="微软雅黑" panose="020B0503020204020204" charset="-122"/>
-              </a:rPr>
-              <a:t>和</a:t>
-            </a:r>
-            <a:r>
-              <a:rPr lang="en-US" altLang="zh-CN">
-                <a:solidFill>
-                  <a:schemeClr val="tx1"/>
-                </a:solidFill>
-                <a:latin typeface="微软雅黑" panose="020B0503020204020204" charset="-122"/>
-                <a:ea typeface="微软雅黑" panose="020B0503020204020204" charset="-122"/>
-                <a:cs typeface="微软雅黑" panose="020B0503020204020204" charset="-122"/>
-              </a:rPr>
-              <a:t> Scalable Vectors </a:t>
-            </a:r>
-            <a:r>
-              <a:rPr lang="zh-CN" altLang="en-US">
-                <a:solidFill>
-                  <a:schemeClr val="tx1"/>
-                </a:solidFill>
-                <a:latin typeface="微软雅黑" panose="020B0503020204020204" charset="-122"/>
-                <a:ea typeface="微软雅黑" panose="020B0503020204020204" charset="-122"/>
-                <a:cs typeface="微软雅黑" panose="020B0503020204020204" charset="-122"/>
-              </a:rPr>
-              <a:t>跟踪</a:t>
-            </a:r>
-            <a:r>
-              <a:rPr lang="en-US" altLang="zh-CN">
-                <a:solidFill>
-                  <a:schemeClr val="tx1"/>
-                </a:solidFill>
-                <a:latin typeface="微软雅黑" panose="020B0503020204020204" charset="-122"/>
-                <a:ea typeface="微软雅黑" panose="020B0503020204020204" charset="-122"/>
-                <a:cs typeface="微软雅黑" panose="020B0503020204020204" charset="-122"/>
-              </a:rPr>
-              <a:t> Issue </a:t>
-            </a:r>
-            <a:r>
-              <a:rPr lang="zh-CN" altLang="en-US">
-                <a:solidFill>
-                  <a:schemeClr val="tx1"/>
-                </a:solidFill>
-                <a:latin typeface="微软雅黑" panose="020B0503020204020204" charset="-122"/>
-                <a:ea typeface="微软雅黑" panose="020B0503020204020204" charset="-122"/>
-                <a:cs typeface="微软雅黑" panose="020B0503020204020204" charset="-122"/>
-              </a:rPr>
-              <a:t>的进展，随官方最终定稿，对本地实现的属性命名、语义进行同步调整，避免分叉。</a:t>
-            </a:r>
-            <a:endParaRPr lang="zh-CN" altLang="en-US">
+              <a:rPr lang="zh-CN" altLang="en-US" sz="2000">
+                <a:solidFill>
+                  <a:schemeClr val="tx1"/>
+                </a:solidFill>
+                <a:latin typeface="微软雅黑" panose="020B0503020204020204" charset="-122"/>
+                <a:ea typeface="微软雅黑" panose="020B0503020204020204" charset="-122"/>
+                <a:cs typeface="微软雅黑" panose="020B0503020204020204" charset="-122"/>
+              </a:rPr>
+              <a:t>集成了核心</a:t>
+            </a:r>
+            <a:r>
+              <a:rPr lang="en-US" altLang="zh-CN" sz="2000">
+                <a:solidFill>
+                  <a:schemeClr val="tx1"/>
+                </a:solidFill>
+                <a:latin typeface="微软雅黑" panose="020B0503020204020204" charset="-122"/>
+                <a:ea typeface="微软雅黑" panose="020B0503020204020204" charset="-122"/>
+                <a:cs typeface="微软雅黑" panose="020B0503020204020204" charset="-122"/>
+              </a:rPr>
+              <a:t> SVE </a:t>
+            </a:r>
+            <a:r>
+              <a:rPr lang="zh-CN" altLang="en-US" sz="2000">
+                <a:solidFill>
+                  <a:schemeClr val="tx1"/>
+                </a:solidFill>
+                <a:latin typeface="微软雅黑" panose="020B0503020204020204" charset="-122"/>
+                <a:ea typeface="微软雅黑" panose="020B0503020204020204" charset="-122"/>
+                <a:cs typeface="微软雅黑" panose="020B0503020204020204" charset="-122"/>
+              </a:rPr>
+              <a:t>类型和</a:t>
+            </a:r>
+            <a:r>
+              <a:rPr lang="en-US" altLang="zh-CN" sz="2000">
+                <a:solidFill>
+                  <a:schemeClr val="tx1"/>
+                </a:solidFill>
+                <a:latin typeface="微软雅黑" panose="020B0503020204020204" charset="-122"/>
+                <a:ea typeface="微软雅黑" panose="020B0503020204020204" charset="-122"/>
+                <a:cs typeface="微软雅黑" panose="020B0503020204020204" charset="-122"/>
+              </a:rPr>
+              <a:t> 1852 </a:t>
+            </a:r>
+            <a:r>
+              <a:rPr lang="zh-CN" altLang="en-US" sz="2000">
+                <a:solidFill>
+                  <a:schemeClr val="tx1"/>
+                </a:solidFill>
+                <a:latin typeface="微软雅黑" panose="020B0503020204020204" charset="-122"/>
+                <a:ea typeface="微软雅黑" panose="020B0503020204020204" charset="-122"/>
+                <a:cs typeface="微软雅黑" panose="020B0503020204020204" charset="-122"/>
+              </a:rPr>
+              <a:t>个</a:t>
+            </a:r>
+            <a:r>
+              <a:rPr lang="en-US" altLang="zh-CN" sz="2000">
+                <a:solidFill>
+                  <a:schemeClr val="tx1"/>
+                </a:solidFill>
+                <a:latin typeface="微软雅黑" panose="020B0503020204020204" charset="-122"/>
+                <a:ea typeface="微软雅黑" panose="020B0503020204020204" charset="-122"/>
+                <a:cs typeface="微软雅黑" panose="020B0503020204020204" charset="-122"/>
+              </a:rPr>
+              <a:t> Intrinsics</a:t>
+            </a:r>
+            <a:r>
+              <a:rPr lang="zh-CN" altLang="en-US" sz="2000">
+                <a:solidFill>
+                  <a:schemeClr val="tx1"/>
+                </a:solidFill>
+                <a:latin typeface="微软雅黑" panose="020B0503020204020204" charset="-122"/>
+                <a:ea typeface="微软雅黑" panose="020B0503020204020204" charset="-122"/>
+                <a:cs typeface="微软雅黑" panose="020B0503020204020204" charset="-122"/>
+              </a:rPr>
+              <a:t>，相关编译错误已全部解决，</a:t>
+            </a:r>
+            <a:r>
+              <a:rPr lang="zh-CN" altLang="en-US" sz="2000">
+                <a:solidFill>
+                  <a:schemeClr val="tx1"/>
+                </a:solidFill>
+                <a:latin typeface="微软雅黑" panose="020B0503020204020204" charset="-122"/>
+                <a:ea typeface="微软雅黑" panose="020B0503020204020204" charset="-122"/>
+                <a:cs typeface="微软雅黑" panose="020B0503020204020204" charset="-122"/>
+                <a:sym typeface="+mn-ea"/>
+              </a:rPr>
+              <a:t>在本地分支上打通了</a:t>
+            </a:r>
+            <a:r>
+              <a:rPr lang="zh-CN" altLang="en-US" sz="2000" b="1">
+                <a:solidFill>
+                  <a:srgbClr val="C00000"/>
+                </a:solidFill>
+                <a:latin typeface="微软雅黑" panose="020B0503020204020204" charset="-122"/>
+                <a:ea typeface="微软雅黑" panose="020B0503020204020204" charset="-122"/>
+                <a:cs typeface="微软雅黑" panose="020B0503020204020204" charset="-122"/>
+                <a:sym typeface="+mn-ea"/>
+              </a:rPr>
+              <a:t>类型定义</a:t>
+            </a:r>
+            <a:r>
+              <a:rPr lang="en-US" altLang="zh-CN" sz="2000" b="1">
+                <a:solidFill>
+                  <a:srgbClr val="C00000"/>
+                </a:solidFill>
+                <a:latin typeface="微软雅黑" panose="020B0503020204020204" charset="-122"/>
+                <a:ea typeface="微软雅黑" panose="020B0503020204020204" charset="-122"/>
+                <a:cs typeface="微软雅黑" panose="020B0503020204020204" charset="-122"/>
+                <a:sym typeface="+mn-ea"/>
+              </a:rPr>
+              <a:t> </a:t>
+            </a:r>
+            <a:r>
+              <a:rPr lang="en-US" altLang="en-US" sz="2000" b="1">
+                <a:solidFill>
+                  <a:srgbClr val="C00000"/>
+                </a:solidFill>
+                <a:latin typeface="微软雅黑" panose="020B0503020204020204" charset="-122"/>
+                <a:ea typeface="微软雅黑" panose="020B0503020204020204" charset="-122"/>
+                <a:cs typeface="微软雅黑" panose="020B0503020204020204" charset="-122"/>
+                <a:sym typeface="+mn-ea"/>
+              </a:rPr>
+              <a:t>→</a:t>
+            </a:r>
+            <a:r>
+              <a:rPr lang="en-US" altLang="zh-CN" sz="2000" b="1">
+                <a:solidFill>
+                  <a:srgbClr val="C00000"/>
+                </a:solidFill>
+                <a:latin typeface="微软雅黑" panose="020B0503020204020204" charset="-122"/>
+                <a:ea typeface="微软雅黑" panose="020B0503020204020204" charset="-122"/>
+                <a:cs typeface="微软雅黑" panose="020B0503020204020204" charset="-122"/>
+                <a:sym typeface="+mn-ea"/>
+              </a:rPr>
+              <a:t> Intrinsics </a:t>
+            </a:r>
+            <a:r>
+              <a:rPr lang="zh-CN" altLang="en-US" sz="2000" b="1">
+                <a:solidFill>
+                  <a:srgbClr val="C00000"/>
+                </a:solidFill>
+                <a:latin typeface="微软雅黑" panose="020B0503020204020204" charset="-122"/>
+                <a:ea typeface="微软雅黑" panose="020B0503020204020204" charset="-122"/>
+                <a:cs typeface="微软雅黑" panose="020B0503020204020204" charset="-122"/>
+                <a:sym typeface="+mn-ea"/>
+              </a:rPr>
+              <a:t>封装</a:t>
+            </a:r>
+            <a:r>
+              <a:rPr lang="en-US" altLang="zh-CN" sz="2000" b="1">
+                <a:solidFill>
+                  <a:srgbClr val="C00000"/>
+                </a:solidFill>
+                <a:latin typeface="微软雅黑" panose="020B0503020204020204" charset="-122"/>
+                <a:ea typeface="微软雅黑" panose="020B0503020204020204" charset="-122"/>
+                <a:cs typeface="微软雅黑" panose="020B0503020204020204" charset="-122"/>
+                <a:sym typeface="+mn-ea"/>
+              </a:rPr>
+              <a:t> </a:t>
+            </a:r>
+            <a:r>
+              <a:rPr lang="en-US" altLang="en-US" sz="2000" b="1">
+                <a:solidFill>
+                  <a:srgbClr val="C00000"/>
+                </a:solidFill>
+                <a:latin typeface="微软雅黑" panose="020B0503020204020204" charset="-122"/>
+                <a:ea typeface="微软雅黑" panose="020B0503020204020204" charset="-122"/>
+                <a:cs typeface="微软雅黑" panose="020B0503020204020204" charset="-122"/>
+                <a:sym typeface="+mn-ea"/>
+              </a:rPr>
+              <a:t>→</a:t>
+            </a:r>
+            <a:r>
+              <a:rPr lang="en-US" altLang="zh-CN" sz="2000" b="1">
+                <a:solidFill>
+                  <a:srgbClr val="C00000"/>
+                </a:solidFill>
+                <a:latin typeface="微软雅黑" panose="020B0503020204020204" charset="-122"/>
+                <a:ea typeface="微软雅黑" panose="020B0503020204020204" charset="-122"/>
+                <a:cs typeface="微软雅黑" panose="020B0503020204020204" charset="-122"/>
+                <a:sym typeface="+mn-ea"/>
+              </a:rPr>
+              <a:t> </a:t>
+            </a:r>
+            <a:r>
+              <a:rPr lang="zh-CN" altLang="zh-CN" sz="2000" b="1">
+                <a:solidFill>
+                  <a:srgbClr val="C00000"/>
+                </a:solidFill>
+                <a:latin typeface="微软雅黑" panose="020B0503020204020204" charset="-122"/>
+                <a:ea typeface="微软雅黑" panose="020B0503020204020204" charset="-122"/>
+                <a:cs typeface="微软雅黑" panose="020B0503020204020204" charset="-122"/>
+                <a:sym typeface="+mn-ea"/>
+              </a:rPr>
+              <a:t>源码</a:t>
+            </a:r>
+            <a:r>
+              <a:rPr lang="zh-CN" altLang="en-US" sz="2000" b="1">
+                <a:solidFill>
+                  <a:srgbClr val="C00000"/>
+                </a:solidFill>
+                <a:latin typeface="微软雅黑" panose="020B0503020204020204" charset="-122"/>
+                <a:ea typeface="微软雅黑" panose="020B0503020204020204" charset="-122"/>
+                <a:cs typeface="微软雅黑" panose="020B0503020204020204" charset="-122"/>
+                <a:sym typeface="+mn-ea"/>
+              </a:rPr>
+              <a:t>编译生成</a:t>
+            </a:r>
+            <a:r>
+              <a:rPr lang="en-US" altLang="zh-CN" sz="2000" b="1">
+                <a:solidFill>
+                  <a:srgbClr val="C00000"/>
+                </a:solidFill>
+                <a:latin typeface="微软雅黑" panose="020B0503020204020204" charset="-122"/>
+                <a:ea typeface="微软雅黑" panose="020B0503020204020204" charset="-122"/>
+                <a:cs typeface="微软雅黑" panose="020B0503020204020204" charset="-122"/>
+                <a:sym typeface="+mn-ea"/>
+              </a:rPr>
+              <a:t> IR</a:t>
+            </a:r>
+            <a:r>
+              <a:rPr lang="zh-CN" altLang="en-US" sz="2000">
+                <a:solidFill>
+                  <a:schemeClr val="tx1"/>
+                </a:solidFill>
+                <a:latin typeface="微软雅黑" panose="020B0503020204020204" charset="-122"/>
+                <a:ea typeface="微软雅黑" panose="020B0503020204020204" charset="-122"/>
+                <a:cs typeface="微软雅黑" panose="020B0503020204020204" charset="-122"/>
+                <a:sym typeface="+mn-ea"/>
+              </a:rPr>
+              <a:t>的链路</a:t>
+            </a:r>
+            <a:endParaRPr lang="zh-CN" altLang="en-US" sz="2000">
               <a:solidFill>
                 <a:schemeClr val="tx1"/>
               </a:solidFill>
@@ -3961,10 +4273,13 @@
           </a:p>
           <a:p>
             <a:pPr marL="0" indent="0">
+              <a:spcBef>
+                <a:spcPts val="1000"/>
+              </a:spcBef>
               <a:buNone/>
             </a:pPr>
             <a:r>
-              <a:rPr lang="en-US" altLang="zh-CN">
+              <a:rPr lang="en-US" altLang="zh-CN" sz="2000">
                 <a:solidFill>
                   <a:schemeClr val="tx1"/>
                 </a:solidFill>
@@ -3975,39 +4290,28 @@
               <a:t>2. </a:t>
             </a:r>
             <a:r>
-              <a:rPr lang="zh-CN" altLang="en-US">
-                <a:solidFill>
-                  <a:schemeClr val="tx1"/>
-                </a:solidFill>
-                <a:latin typeface="微软雅黑" panose="020B0503020204020204" charset="-122"/>
-                <a:ea typeface="微软雅黑" panose="020B0503020204020204" charset="-122"/>
-                <a:cs typeface="微软雅黑" panose="020B0503020204020204" charset="-122"/>
-              </a:rPr>
-              <a:t>在现有编译级验证基础上，增加运行时行为测试，确认结果正确性，后续还可以在目标硬件上对比标量</a:t>
-            </a:r>
-            <a:r>
-              <a:rPr lang="en-US" altLang="zh-CN">
-                <a:solidFill>
-                  <a:schemeClr val="tx1"/>
-                </a:solidFill>
-                <a:latin typeface="微软雅黑" panose="020B0503020204020204" charset="-122"/>
-                <a:ea typeface="微软雅黑" panose="020B0503020204020204" charset="-122"/>
-                <a:cs typeface="微软雅黑" panose="020B0503020204020204" charset="-122"/>
-              </a:rPr>
-              <a:t> / NEON / SVE </a:t>
-            </a:r>
-            <a:r>
-              <a:rPr lang="zh-CN" altLang="en-US">
-                <a:solidFill>
-                  <a:schemeClr val="tx1"/>
-                </a:solidFill>
-                <a:latin typeface="微软雅黑" panose="020B0503020204020204" charset="-122"/>
-                <a:ea typeface="微软雅黑" panose="020B0503020204020204" charset="-122"/>
-                <a:cs typeface="微软雅黑" panose="020B0503020204020204" charset="-122"/>
-              </a:rPr>
-              <a:t>性能，评估收益。</a:t>
-            </a:r>
-            <a:endParaRPr lang="zh-CN" altLang="en-US">
+              <a:rPr lang="zh-CN" altLang="en-US" sz="2000">
+                <a:solidFill>
+                  <a:schemeClr val="tx1"/>
+                </a:solidFill>
+                <a:latin typeface="微软雅黑" panose="020B0503020204020204" charset="-122"/>
+                <a:ea typeface="微软雅黑" panose="020B0503020204020204" charset="-122"/>
+                <a:cs typeface="微软雅黑" panose="020B0503020204020204" charset="-122"/>
+              </a:rPr>
+              <a:t>针对</a:t>
+            </a:r>
+            <a:r>
+              <a:rPr lang="zh-CN" altLang="en-US" sz="2000">
+                <a:solidFill>
+                  <a:schemeClr val="tx1"/>
+                </a:solidFill>
+                <a:latin typeface="微软雅黑" panose="020B0503020204020204" charset="-122"/>
+                <a:ea typeface="微软雅黑" panose="020B0503020204020204" charset="-122"/>
+                <a:cs typeface="微软雅黑" panose="020B0503020204020204" charset="-122"/>
+              </a:rPr>
+              <a:t>关键技术难点，已形成解决方案：</a:t>
+            </a:r>
+            <a:endParaRPr lang="en-US" altLang="zh-CN" sz="2000">
               <a:solidFill>
                 <a:schemeClr val="tx1"/>
               </a:solidFill>
@@ -4017,11 +4321,122 @@
             </a:endParaRPr>
           </a:p>
           <a:p>
+            <a:pPr lvl="1">
+              <a:spcBef>
+                <a:spcPts val="1000"/>
+              </a:spcBef>
+              <a:buFont typeface="Wingdings" panose="05000000000000000000" charset="0"/>
+              <a:buChar char="Ø"/>
+            </a:pPr>
+            <a:r>
+              <a:rPr lang="zh-CN" altLang="en-US" sz="1800">
+                <a:solidFill>
+                  <a:schemeClr val="tx1"/>
+                </a:solidFill>
+                <a:latin typeface="微软雅黑" panose="020B0503020204020204" charset="-122"/>
+                <a:ea typeface="微软雅黑" panose="020B0503020204020204" charset="-122"/>
+                <a:cs typeface="微软雅黑" panose="020B0503020204020204" charset="-122"/>
+              </a:rPr>
+              <a:t>类型转换适配层</a:t>
+            </a:r>
+            <a:endParaRPr lang="en-US" altLang="zh-CN" sz="1800">
+              <a:solidFill>
+                <a:schemeClr val="tx1"/>
+              </a:solidFill>
+              <a:latin typeface="微软雅黑" panose="020B0503020204020204" charset="-122"/>
+              <a:ea typeface="微软雅黑" panose="020B0503020204020204" charset="-122"/>
+              <a:cs typeface="微软雅黑" panose="020B0503020204020204" charset="-122"/>
+            </a:endParaRPr>
+          </a:p>
+          <a:p>
+            <a:pPr lvl="1">
+              <a:spcBef>
+                <a:spcPts val="1000"/>
+              </a:spcBef>
+              <a:buFont typeface="Wingdings" panose="05000000000000000000" charset="0"/>
+              <a:buChar char="Ø"/>
+            </a:pPr>
+            <a:r>
+              <a:rPr lang="zh-CN" altLang="en-US" sz="1800">
+                <a:solidFill>
+                  <a:schemeClr val="tx1"/>
+                </a:solidFill>
+                <a:latin typeface="微软雅黑" panose="020B0503020204020204" charset="-122"/>
+                <a:ea typeface="微软雅黑" panose="020B0503020204020204" charset="-122"/>
+                <a:cs typeface="微软雅黑" panose="020B0503020204020204" charset="-122"/>
+              </a:rPr>
+              <a:t>统一标准谓词类型</a:t>
+            </a:r>
+            <a:endParaRPr lang="en-US" altLang="zh-CN" sz="1800">
+              <a:solidFill>
+                <a:schemeClr val="tx1"/>
+              </a:solidFill>
+              <a:latin typeface="微软雅黑" panose="020B0503020204020204" charset="-122"/>
+              <a:ea typeface="微软雅黑" panose="020B0503020204020204" charset="-122"/>
+              <a:cs typeface="微软雅黑" panose="020B0503020204020204" charset="-122"/>
+            </a:endParaRPr>
+          </a:p>
+          <a:p>
+            <a:pPr lvl="1">
+              <a:spcBef>
+                <a:spcPts val="1000"/>
+              </a:spcBef>
+              <a:buFont typeface="Wingdings" panose="05000000000000000000" charset="0"/>
+              <a:buChar char="Ø"/>
+            </a:pPr>
+            <a:r>
+              <a:rPr lang="en-US" altLang="zh-CN" sz="1800">
+                <a:solidFill>
+                  <a:schemeClr val="tx1"/>
+                </a:solidFill>
+                <a:latin typeface="微软雅黑" panose="020B0503020204020204" charset="-122"/>
+                <a:ea typeface="微软雅黑" panose="020B0503020204020204" charset="-122"/>
+                <a:cs typeface="微软雅黑" panose="020B0503020204020204" charset="-122"/>
+                <a:sym typeface="+mn-ea"/>
+              </a:rPr>
+              <a:t>SVE </a:t>
+            </a:r>
+            <a:r>
+              <a:rPr lang="zh-CN" altLang="en-US" sz="1800">
+                <a:solidFill>
+                  <a:schemeClr val="tx1"/>
+                </a:solidFill>
+                <a:latin typeface="微软雅黑" panose="020B0503020204020204" charset="-122"/>
+                <a:ea typeface="微软雅黑" panose="020B0503020204020204" charset="-122"/>
+                <a:cs typeface="微软雅黑" panose="020B0503020204020204" charset="-122"/>
+                <a:sym typeface="+mn-ea"/>
+              </a:rPr>
+              <a:t>函数</a:t>
+            </a:r>
+            <a:r>
+              <a:rPr lang="zh-CN" altLang="en-US" sz="1800">
+                <a:solidFill>
+                  <a:schemeClr val="tx1"/>
+                </a:solidFill>
+                <a:latin typeface="微软雅黑" panose="020B0503020204020204" charset="-122"/>
+                <a:ea typeface="微软雅黑" panose="020B0503020204020204" charset="-122"/>
+                <a:cs typeface="微软雅黑" panose="020B0503020204020204" charset="-122"/>
+              </a:rPr>
+              <a:t>代码生成器</a:t>
+            </a:r>
+            <a:endParaRPr lang="en-US" altLang="zh-CN" sz="1775">
+              <a:solidFill>
+                <a:schemeClr val="tx1"/>
+              </a:solidFill>
+              <a:latin typeface="微软雅黑" panose="020B0503020204020204" charset="-122"/>
+              <a:ea typeface="微软雅黑" panose="020B0503020204020204" charset="-122"/>
+              <a:cs typeface="微软雅黑" panose="020B0503020204020204" charset="-122"/>
+            </a:endParaRPr>
+          </a:p>
+          <a:p>
             <a:pPr marL="0" indent="0">
+              <a:spcBef>
+                <a:spcPts val="1000"/>
+              </a:spcBef>
               <a:buNone/>
             </a:pPr>
             <a:r>
-              <a:rPr lang="en-US" altLang="zh-CN">
+              <a:rPr lang="en-US" altLang="zh-CN" sz="2000">
                 <a:solidFill>
                   <a:schemeClr val="tx1"/>
                 </a:solidFill>
@@ -4032,62 +4447,77 @@
               <a:t>3. </a:t>
             </a:r>
             <a:r>
-              <a:rPr lang="zh-CN" altLang="en-US">
-                <a:solidFill>
-                  <a:schemeClr val="tx1"/>
-                </a:solidFill>
-                <a:latin typeface="微软雅黑" panose="020B0503020204020204" charset="-122"/>
-                <a:ea typeface="微软雅黑" panose="020B0503020204020204" charset="-122"/>
-                <a:cs typeface="微软雅黑" panose="020B0503020204020204" charset="-122"/>
-              </a:rPr>
-              <a:t>在社区接口趋于稳定后，将提交</a:t>
-            </a:r>
-            <a:r>
-              <a:rPr lang="en-US" altLang="zh-CN">
-                <a:solidFill>
-                  <a:schemeClr val="tx1"/>
-                </a:solidFill>
-                <a:latin typeface="微软雅黑" panose="020B0503020204020204" charset="-122"/>
-                <a:ea typeface="微软雅黑" panose="020B0503020204020204" charset="-122"/>
-                <a:cs typeface="微软雅黑" panose="020B0503020204020204" charset="-122"/>
-              </a:rPr>
-              <a:t>PR </a:t>
-            </a:r>
-            <a:r>
-              <a:rPr lang="zh-CN" altLang="en-US">
-                <a:solidFill>
-                  <a:schemeClr val="tx1"/>
-                </a:solidFill>
-                <a:latin typeface="微软雅黑" panose="020B0503020204020204" charset="-122"/>
-                <a:ea typeface="微软雅黑" panose="020B0503020204020204" charset="-122"/>
-                <a:cs typeface="微软雅黑" panose="020B0503020204020204" charset="-122"/>
-              </a:rPr>
-              <a:t>至</a:t>
-            </a:r>
-            <a:r>
-              <a:rPr lang="en-US" altLang="zh-CN">
-                <a:solidFill>
-                  <a:schemeClr val="tx1"/>
-                </a:solidFill>
-                <a:latin typeface="微软雅黑" panose="020B0503020204020204" charset="-122"/>
-                <a:ea typeface="微软雅黑" panose="020B0503020204020204" charset="-122"/>
-                <a:cs typeface="微软雅黑" panose="020B0503020204020204" charset="-122"/>
-              </a:rPr>
-              <a:t> rust-lang/stdarch</a:t>
-            </a:r>
-            <a:r>
-              <a:rPr lang="zh-CN" altLang="en-US">
-                <a:solidFill>
-                  <a:schemeClr val="tx1"/>
-                </a:solidFill>
-                <a:latin typeface="微软雅黑" panose="020B0503020204020204" charset="-122"/>
-                <a:ea typeface="微软雅黑" panose="020B0503020204020204" charset="-122"/>
-                <a:cs typeface="微软雅黑" panose="020B0503020204020204" charset="-122"/>
-              </a:rPr>
-              <a:t>，争取形成实际的</a:t>
-            </a:r>
-            <a:r>
-              <a:rPr lang="en-US" altLang="zh-CN">
+              <a:rPr lang="zh-CN" altLang="en-US" sz="2000">
+                <a:solidFill>
+                  <a:schemeClr val="tx1"/>
+                </a:solidFill>
+                <a:latin typeface="微软雅黑" panose="020B0503020204020204" charset="-122"/>
+                <a:ea typeface="微软雅黑" panose="020B0503020204020204" charset="-122"/>
+                <a:cs typeface="微软雅黑" panose="020B0503020204020204" charset="-122"/>
+              </a:rPr>
+              <a:t>参考了相关</a:t>
+            </a:r>
+            <a:r>
+              <a:rPr lang="en-US" altLang="zh-CN" sz="2000">
+                <a:solidFill>
+                  <a:schemeClr val="tx1"/>
+                </a:solidFill>
+                <a:latin typeface="微软雅黑" panose="020B0503020204020204" charset="-122"/>
+                <a:ea typeface="微软雅黑" panose="020B0503020204020204" charset="-122"/>
+                <a:cs typeface="微软雅黑" panose="020B0503020204020204" charset="-122"/>
+                <a:sym typeface="+mn-ea"/>
+              </a:rPr>
+              <a:t>RFC</a:t>
+            </a:r>
+            <a:r>
+              <a:rPr lang="zh-CN" altLang="en-US" sz="2000">
+                <a:solidFill>
+                  <a:schemeClr val="tx1"/>
+                </a:solidFill>
+                <a:latin typeface="微软雅黑" panose="020B0503020204020204" charset="-122"/>
+                <a:ea typeface="微软雅黑" panose="020B0503020204020204" charset="-122"/>
+                <a:cs typeface="微软雅黑" panose="020B0503020204020204" charset="-122"/>
+                <a:sym typeface="+mn-ea"/>
+              </a:rPr>
+              <a:t>和实验性</a:t>
+            </a:r>
+            <a:r>
+              <a:rPr lang="en-US" altLang="zh-CN" sz="2000">
+                <a:solidFill>
+                  <a:schemeClr val="tx1"/>
+                </a:solidFill>
+                <a:latin typeface="微软雅黑" panose="020B0503020204020204" charset="-122"/>
+                <a:ea typeface="微软雅黑" panose="020B0503020204020204" charset="-122"/>
+                <a:cs typeface="微软雅黑" panose="020B0503020204020204" charset="-122"/>
+                <a:sym typeface="+mn-ea"/>
+              </a:rPr>
+              <a:t> PR</a:t>
+            </a:r>
+            <a:r>
+              <a:rPr lang="zh-CN" altLang="en-US" sz="2000">
+                <a:solidFill>
+                  <a:schemeClr val="tx1"/>
+                </a:solidFill>
+                <a:latin typeface="微软雅黑" panose="020B0503020204020204" charset="-122"/>
+                <a:ea typeface="微软雅黑" panose="020B0503020204020204" charset="-122"/>
+                <a:cs typeface="微软雅黑" panose="020B0503020204020204" charset="-122"/>
+                <a:sym typeface="+mn-ea"/>
+              </a:rPr>
+              <a:t>，</a:t>
+            </a:r>
+            <a:r>
+              <a:rPr lang="zh-CN" altLang="en-US" sz="2000">
+                <a:solidFill>
+                  <a:schemeClr val="tx1"/>
+                </a:solidFill>
+                <a:latin typeface="微软雅黑" panose="020B0503020204020204" charset="-122"/>
+                <a:ea typeface="微软雅黑" panose="020B0503020204020204" charset="-122"/>
+                <a:cs typeface="微软雅黑" panose="020B0503020204020204" charset="-122"/>
+              </a:rPr>
+              <a:t>与社区方向对齐，具备后续提交</a:t>
+            </a:r>
+            <a:r>
+              <a:rPr lang="en-US" altLang="zh-CN" sz="2000">
                 <a:solidFill>
                   <a:schemeClr val="tx1"/>
                 </a:solidFill>
@@ -4098,17 +4528,17 @@
               <a:t> upstream </a:t>
             </a:r>
             <a:r>
-              <a:rPr lang="zh-CN" altLang="en-US">
-                <a:solidFill>
-                  <a:schemeClr val="tx1"/>
-                </a:solidFill>
-                <a:latin typeface="微软雅黑" panose="020B0503020204020204" charset="-122"/>
-                <a:ea typeface="微软雅黑" panose="020B0503020204020204" charset="-122"/>
-                <a:cs typeface="微软雅黑" panose="020B0503020204020204" charset="-122"/>
-              </a:rPr>
-              <a:t>贡献。</a:t>
-            </a:r>
-            <a:endParaRPr lang="zh-CN" altLang="en-US">
+              <a:rPr lang="zh-CN" altLang="en-US" sz="2000">
+                <a:solidFill>
+                  <a:schemeClr val="tx1"/>
+                </a:solidFill>
+                <a:latin typeface="微软雅黑" panose="020B0503020204020204" charset="-122"/>
+                <a:ea typeface="微软雅黑" panose="020B0503020204020204" charset="-122"/>
+                <a:cs typeface="微软雅黑" panose="020B0503020204020204" charset="-122"/>
+              </a:rPr>
+              <a:t>的基础</a:t>
+            </a:r>
+            <a:endParaRPr lang="zh-CN" altLang="en-US" sz="2000">
               <a:solidFill>
                 <a:schemeClr val="tx1"/>
               </a:solidFill>
@@ -4130,7 +4560,7 @@
 </p:sld>
 </file>
 
-<file path=ppt/slides/slide2.xml><?xml version="1.0" encoding="utf-8"?>
+<file path=ppt/slides/slide11.xml><?xml version="1.0" encoding="utf-8"?>
 <p:sld xmlns:a="http://schemas.openxmlformats.org/drawingml/2006/main" xmlns:r="http://schemas.openxmlformats.org/officeDocument/2006/relationships" xmlns:p="http://schemas.openxmlformats.org/presentationml/2006/main">
   <p:cSld>
     <p:spTree>
@@ -4158,10 +4588,742 @@
           <a:bodyPr/>
           <a:p>
             <a:r>
-              <a:rPr lang="zh-CN" altLang="en-US"/>
+              <a:rPr lang="zh-CN" altLang="en-US" b="1"/>
+              <a:t>三、总结与展望</a:t>
+            </a:r>
+            <a:endParaRPr lang="zh-CN" altLang="en-US" b="1"/>
+          </a:p>
+        </p:txBody>
+      </p:sp>
+      <p:sp>
+        <p:nvSpPr>
+          <p:cNvPr id="4" name="内容占位符 2"/>
+          <p:cNvSpPr>
+            <a:spLocks noGrp="1"/>
+          </p:cNvSpPr>
+          <p:nvPr>
+            <p:custDataLst>
+              <p:tags r:id="rId2"/>
+            </p:custDataLst>
+          </p:nvPr>
+        </p:nvSpPr>
+        <p:spPr>
+          <a:xfrm>
+            <a:off x="608330" y="1539240"/>
+            <a:ext cx="10160635" cy="4707890"/>
+          </a:xfrm>
+          <a:prstGeom prst="rect">
+            <a:avLst/>
+          </a:prstGeom>
+        </p:spPr>
+        <p:txBody>
+          <a:bodyPr vert="horz" lIns="90000" tIns="46800" rIns="90000" bIns="46800" rtlCol="0"/>
+          <a:lstStyle>
+            <a:lvl1pPr marL="228600" indent="-228600" algn="l" defTabSz="914400" rtl="0" eaLnBrk="1" fontAlgn="auto" latinLnBrk="0" hangingPunct="1">
+              <a:lnSpc>
+                <a:spcPct val="130000"/>
+              </a:lnSpc>
+              <a:spcBef>
+                <a:spcPts val="0"/>
+              </a:spcBef>
+              <a:spcAft>
+                <a:spcPts val="1000"/>
+              </a:spcAft>
+              <a:buFont typeface="Arial" panose="020B0604020202020204" pitchFamily="34" charset="0"/>
+              <a:buChar char="●"/>
+              <a:defRPr sz="1800" u="none" strike="noStrike" kern="1200" cap="none" spc="150" normalizeH="0" baseline="0">
+                <a:solidFill>
+                  <a:schemeClr val="tx1">
+                    <a:lumMod val="65000"/>
+                    <a:lumOff val="35000"/>
+                  </a:schemeClr>
+                </a:solidFill>
+                <a:uFillTx/>
+                <a:latin typeface="+mn-lt"/>
+                <a:ea typeface="+mn-ea"/>
+                <a:cs typeface="+mn-cs"/>
+              </a:defRPr>
+            </a:lvl1pPr>
+            <a:lvl2pPr marL="685800" indent="-228600" algn="l" defTabSz="914400" rtl="0" eaLnBrk="1" fontAlgn="auto" latinLnBrk="0" hangingPunct="1">
+              <a:lnSpc>
+                <a:spcPct val="120000"/>
+              </a:lnSpc>
+              <a:spcBef>
+                <a:spcPts val="0"/>
+              </a:spcBef>
+              <a:spcAft>
+                <a:spcPts val="600"/>
+              </a:spcAft>
+              <a:buFont typeface="Arial" panose="020B0604020202020204" pitchFamily="34" charset="0"/>
+              <a:buChar char="●"/>
+              <a:tabLst>
+                <a:tab pos="1609725" algn="l"/>
+                <a:tab pos="1609725" algn="l"/>
+                <a:tab pos="1609725" algn="l"/>
+                <a:tab pos="1609725" algn="l"/>
+              </a:tabLst>
+              <a:defRPr sz="1600" u="none" strike="noStrike" kern="1200" cap="none" spc="150" normalizeH="0" baseline="0">
+                <a:solidFill>
+                  <a:schemeClr val="tx1">
+                    <a:lumMod val="65000"/>
+                    <a:lumOff val="35000"/>
+                  </a:schemeClr>
+                </a:solidFill>
+                <a:uFillTx/>
+                <a:latin typeface="+mn-lt"/>
+                <a:ea typeface="+mn-ea"/>
+                <a:cs typeface="+mn-cs"/>
+              </a:defRPr>
+            </a:lvl2pPr>
+            <a:lvl3pPr marL="1143000" indent="-228600" algn="l" defTabSz="914400" rtl="0" eaLnBrk="1" fontAlgn="auto" latinLnBrk="0" hangingPunct="1">
+              <a:lnSpc>
+                <a:spcPct val="120000"/>
+              </a:lnSpc>
+              <a:spcBef>
+                <a:spcPts val="0"/>
+              </a:spcBef>
+              <a:spcAft>
+                <a:spcPts val="600"/>
+              </a:spcAft>
+              <a:buFont typeface="Arial" panose="020B0604020202020204" pitchFamily="34" charset="0"/>
+              <a:buChar char="●"/>
+              <a:defRPr sz="1600" u="none" strike="noStrike" kern="1200" cap="none" spc="150" normalizeH="0" baseline="0">
+                <a:solidFill>
+                  <a:schemeClr val="tx1">
+                    <a:lumMod val="65000"/>
+                    <a:lumOff val="35000"/>
+                  </a:schemeClr>
+                </a:solidFill>
+                <a:uFillTx/>
+                <a:latin typeface="+mn-lt"/>
+                <a:ea typeface="+mn-ea"/>
+                <a:cs typeface="+mn-cs"/>
+              </a:defRPr>
+            </a:lvl3pPr>
+            <a:lvl4pPr marL="1600200" indent="-228600" algn="l" defTabSz="914400" rtl="0" eaLnBrk="1" fontAlgn="auto" latinLnBrk="0" hangingPunct="1">
+              <a:lnSpc>
+                <a:spcPct val="120000"/>
+              </a:lnSpc>
+              <a:spcBef>
+                <a:spcPts val="0"/>
+              </a:spcBef>
+              <a:spcAft>
+                <a:spcPts val="300"/>
+              </a:spcAft>
+              <a:buFont typeface="Wingdings" panose="05000000000000000000" charset="0"/>
+              <a:buChar char=""/>
+              <a:defRPr sz="1400" u="none" strike="noStrike" kern="1200" cap="none" spc="150" normalizeH="0" baseline="0">
+                <a:solidFill>
+                  <a:schemeClr val="tx1">
+                    <a:lumMod val="65000"/>
+                    <a:lumOff val="35000"/>
+                  </a:schemeClr>
+                </a:solidFill>
+                <a:uFillTx/>
+                <a:latin typeface="+mn-lt"/>
+                <a:ea typeface="+mn-ea"/>
+                <a:cs typeface="+mn-cs"/>
+              </a:defRPr>
+            </a:lvl4pPr>
+            <a:lvl5pPr marL="2057400" indent="-228600" algn="l" defTabSz="914400" rtl="0" eaLnBrk="1" fontAlgn="auto" latinLnBrk="0" hangingPunct="1">
+              <a:lnSpc>
+                <a:spcPct val="120000"/>
+              </a:lnSpc>
+              <a:spcBef>
+                <a:spcPts val="0"/>
+              </a:spcBef>
+              <a:spcAft>
+                <a:spcPts val="300"/>
+              </a:spcAft>
+              <a:buFont typeface="Arial" panose="020B0604020202020204" pitchFamily="34" charset="0"/>
+              <a:buChar char="•"/>
+              <a:defRPr sz="1400" u="none" strike="noStrike" kern="1200" cap="none" spc="150" normalizeH="0" baseline="0">
+                <a:solidFill>
+                  <a:schemeClr val="tx1">
+                    <a:lumMod val="65000"/>
+                    <a:lumOff val="35000"/>
+                  </a:schemeClr>
+                </a:solidFill>
+                <a:uFillTx/>
+                <a:latin typeface="+mn-lt"/>
+                <a:ea typeface="+mn-ea"/>
+                <a:cs typeface="+mn-cs"/>
+              </a:defRPr>
+            </a:lvl5pPr>
+            <a:lvl6pPr marL="2514600" indent="-228600" algn="l" defTabSz="914400" rtl="0" eaLnBrk="1" latinLnBrk="0" hangingPunct="1">
+              <a:lnSpc>
+                <a:spcPct val="90000"/>
+              </a:lnSpc>
+              <a:spcBef>
+                <a:spcPts val="500"/>
+              </a:spcBef>
+              <a:buFont typeface="Arial" panose="020B0604020202020204" pitchFamily="34" charset="0"/>
+              <a:buChar char="•"/>
+              <a:defRPr sz="1800" kern="1200">
+                <a:solidFill>
+                  <a:schemeClr val="tx1"/>
+                </a:solidFill>
+                <a:latin typeface="+mn-lt"/>
+                <a:ea typeface="+mn-ea"/>
+                <a:cs typeface="+mn-cs"/>
+              </a:defRPr>
+            </a:lvl6pPr>
+            <a:lvl7pPr marL="2971800" indent="-228600" algn="l" defTabSz="914400" rtl="0" eaLnBrk="1" latinLnBrk="0" hangingPunct="1">
+              <a:lnSpc>
+                <a:spcPct val="90000"/>
+              </a:lnSpc>
+              <a:spcBef>
+                <a:spcPts val="500"/>
+              </a:spcBef>
+              <a:buFont typeface="Arial" panose="020B0604020202020204" pitchFamily="34" charset="0"/>
+              <a:buChar char="•"/>
+              <a:defRPr sz="1800" kern="1200">
+                <a:solidFill>
+                  <a:schemeClr val="tx1"/>
+                </a:solidFill>
+                <a:latin typeface="+mn-lt"/>
+                <a:ea typeface="+mn-ea"/>
+                <a:cs typeface="+mn-cs"/>
+              </a:defRPr>
+            </a:lvl7pPr>
+            <a:lvl8pPr marL="3429000" indent="-228600" algn="l" defTabSz="914400" rtl="0" eaLnBrk="1" latinLnBrk="0" hangingPunct="1">
+              <a:lnSpc>
+                <a:spcPct val="90000"/>
+              </a:lnSpc>
+              <a:spcBef>
+                <a:spcPts val="500"/>
+              </a:spcBef>
+              <a:buFont typeface="Arial" panose="020B0604020202020204" pitchFamily="34" charset="0"/>
+              <a:buChar char="•"/>
+              <a:defRPr sz="1800" kern="1200">
+                <a:solidFill>
+                  <a:schemeClr val="tx1"/>
+                </a:solidFill>
+                <a:latin typeface="+mn-lt"/>
+                <a:ea typeface="+mn-ea"/>
+                <a:cs typeface="+mn-cs"/>
+              </a:defRPr>
+            </a:lvl8pPr>
+            <a:lvl9pPr marL="3886200" indent="-228600" algn="l" defTabSz="914400" rtl="0" eaLnBrk="1" latinLnBrk="0" hangingPunct="1">
+              <a:lnSpc>
+                <a:spcPct val="90000"/>
+              </a:lnSpc>
+              <a:spcBef>
+                <a:spcPts val="500"/>
+              </a:spcBef>
+              <a:buFont typeface="Arial" panose="020B0604020202020204" pitchFamily="34" charset="0"/>
+              <a:buChar char="•"/>
+              <a:defRPr sz="1800" kern="1200">
+                <a:solidFill>
+                  <a:schemeClr val="tx1"/>
+                </a:solidFill>
+                <a:latin typeface="+mn-lt"/>
+                <a:ea typeface="+mn-ea"/>
+                <a:cs typeface="+mn-cs"/>
+              </a:defRPr>
+            </a:lvl9pPr>
+          </a:lstStyle>
+          <a:p>
+            <a:pPr marL="0" indent="0">
+              <a:buNone/>
+            </a:pPr>
+            <a:r>
+              <a:rPr lang="zh-CN" altLang="en-US" sz="2400" b="1">
+                <a:solidFill>
+                  <a:srgbClr val="C00000"/>
+                </a:solidFill>
+                <a:latin typeface="微软雅黑" panose="020B0503020204020204" charset="-122"/>
+                <a:ea typeface="微软雅黑" panose="020B0503020204020204" charset="-122"/>
+                <a:cs typeface="微软雅黑" panose="020B0503020204020204" charset="-122"/>
+              </a:rPr>
+              <a:t>后续工作重点</a:t>
+            </a:r>
+            <a:endParaRPr lang="zh-CN" altLang="en-US" sz="2400" b="1">
+              <a:solidFill>
+                <a:srgbClr val="C00000"/>
+              </a:solidFill>
+              <a:latin typeface="微软雅黑" panose="020B0503020204020204" charset="-122"/>
+              <a:ea typeface="微软雅黑" panose="020B0503020204020204" charset="-122"/>
+              <a:cs typeface="微软雅黑" panose="020B0503020204020204" charset="-122"/>
+            </a:endParaRPr>
+          </a:p>
+          <a:p>
+            <a:pPr marL="457200" indent="-457200">
+              <a:buAutoNum type="arabicPeriod"/>
+            </a:pPr>
+            <a:r>
+              <a:rPr lang="zh-CN" altLang="en-US" sz="2000" b="1">
+                <a:solidFill>
+                  <a:schemeClr val="tx1"/>
+                </a:solidFill>
+                <a:latin typeface="微软雅黑" panose="020B0503020204020204" charset="-122"/>
+                <a:ea typeface="微软雅黑" panose="020B0503020204020204" charset="-122"/>
+                <a:cs typeface="微软雅黑" panose="020B0503020204020204" charset="-122"/>
+              </a:rPr>
+              <a:t>持续跟进社区</a:t>
+            </a:r>
+            <a:r>
+              <a:rPr lang="en-US" altLang="zh-CN" sz="2000" b="1">
+                <a:solidFill>
+                  <a:schemeClr val="tx1"/>
+                </a:solidFill>
+                <a:latin typeface="微软雅黑" panose="020B0503020204020204" charset="-122"/>
+                <a:ea typeface="微软雅黑" panose="020B0503020204020204" charset="-122"/>
+                <a:cs typeface="微软雅黑" panose="020B0503020204020204" charset="-122"/>
+              </a:rPr>
+              <a:t> RFC / Tracking Issue/ </a:t>
+            </a:r>
+            <a:r>
+              <a:rPr lang="zh-CN" altLang="en-US" sz="2000" b="1">
+                <a:solidFill>
+                  <a:schemeClr val="tx1"/>
+                </a:solidFill>
+                <a:latin typeface="微软雅黑" panose="020B0503020204020204" charset="-122"/>
+                <a:ea typeface="微软雅黑" panose="020B0503020204020204" charset="-122"/>
+                <a:cs typeface="微软雅黑" panose="020B0503020204020204" charset="-122"/>
+                <a:sym typeface="+mn-ea"/>
+              </a:rPr>
+              <a:t>实验性</a:t>
+            </a:r>
+            <a:r>
+              <a:rPr lang="en-US" altLang="zh-CN" sz="2000" b="1">
+                <a:solidFill>
+                  <a:schemeClr val="tx1"/>
+                </a:solidFill>
+                <a:latin typeface="微软雅黑" panose="020B0503020204020204" charset="-122"/>
+                <a:ea typeface="微软雅黑" panose="020B0503020204020204" charset="-122"/>
+                <a:cs typeface="微软雅黑" panose="020B0503020204020204" charset="-122"/>
+                <a:sym typeface="+mn-ea"/>
+              </a:rPr>
+              <a:t> PR</a:t>
+            </a:r>
+            <a:endParaRPr lang="en-US" altLang="zh-CN" sz="2000" b="1">
+              <a:solidFill>
+                <a:schemeClr val="tx1"/>
+              </a:solidFill>
+              <a:latin typeface="微软雅黑" panose="020B0503020204020204" charset="-122"/>
+              <a:ea typeface="微软雅黑" panose="020B0503020204020204" charset="-122"/>
+              <a:cs typeface="微软雅黑" panose="020B0503020204020204" charset="-122"/>
+            </a:endParaRPr>
+          </a:p>
+          <a:p>
+            <a:pPr lvl="1">
+              <a:buFont typeface="Wingdings" panose="05000000000000000000" charset="0"/>
+              <a:buChar char="Ø"/>
+            </a:pPr>
+            <a:r>
+              <a:rPr lang="zh-CN" altLang="en-US" sz="1775">
+                <a:solidFill>
+                  <a:schemeClr val="tx1"/>
+                </a:solidFill>
+                <a:latin typeface="微软雅黑" panose="020B0503020204020204" charset="-122"/>
+                <a:ea typeface="微软雅黑" panose="020B0503020204020204" charset="-122"/>
+                <a:cs typeface="微软雅黑" panose="020B0503020204020204" charset="-122"/>
+              </a:rPr>
+              <a:t>紧跟</a:t>
+            </a:r>
+            <a:r>
+              <a:rPr lang="en-US" altLang="zh-CN" sz="1775">
+                <a:solidFill>
+                  <a:schemeClr val="tx1"/>
+                </a:solidFill>
+                <a:latin typeface="微软雅黑" panose="020B0503020204020204" charset="-122"/>
+                <a:ea typeface="微软雅黑" panose="020B0503020204020204" charset="-122"/>
+                <a:cs typeface="微软雅黑" panose="020B0503020204020204" charset="-122"/>
+                <a:sym typeface="+mn-ea"/>
+              </a:rPr>
+              <a:t>Scalable Vectors </a:t>
+            </a:r>
+            <a:r>
+              <a:rPr lang="zh-CN" altLang="zh-CN" sz="1775">
+                <a:solidFill>
+                  <a:schemeClr val="tx1"/>
+                </a:solidFill>
+                <a:latin typeface="微软雅黑" panose="020B0503020204020204" charset="-122"/>
+                <a:ea typeface="微软雅黑" panose="020B0503020204020204" charset="-122"/>
+                <a:cs typeface="微软雅黑" panose="020B0503020204020204" charset="-122"/>
+                <a:sym typeface="+mn-ea"/>
+              </a:rPr>
+              <a:t>表示方案中</a:t>
+            </a:r>
+            <a:r>
+              <a:rPr lang="en-US" altLang="zh-CN" sz="1775">
+                <a:solidFill>
+                  <a:schemeClr val="tx1"/>
+                </a:solidFill>
+                <a:latin typeface="微软雅黑" panose="020B0503020204020204" charset="-122"/>
+                <a:ea typeface="微软雅黑" panose="020B0503020204020204" charset="-122"/>
+                <a:cs typeface="微软雅黑" panose="020B0503020204020204" charset="-122"/>
+              </a:rPr>
+              <a:t> </a:t>
+            </a:r>
+            <a:r>
+              <a:rPr lang="en-US" altLang="zh-CN" sz="1775">
+                <a:solidFill>
+                  <a:schemeClr val="tx1"/>
+                </a:solidFill>
+                <a:latin typeface="微软雅黑" panose="020B0503020204020204" charset="-122"/>
+                <a:ea typeface="微软雅黑" panose="020B0503020204020204" charset="-122"/>
+                <a:cs typeface="微软雅黑" panose="020B0503020204020204" charset="-122"/>
+                <a:sym typeface="+mn-ea"/>
+              </a:rPr>
+              <a:t>#[rustc_scalable_vector(N)]</a:t>
+            </a:r>
+            <a:r>
+              <a:rPr lang="en-US" altLang="zh-CN" sz="1775">
+                <a:solidFill>
+                  <a:schemeClr val="tx1"/>
+                </a:solidFill>
+                <a:latin typeface="微软雅黑" panose="020B0503020204020204" charset="-122"/>
+                <a:ea typeface="微软雅黑" panose="020B0503020204020204" charset="-122"/>
+                <a:cs typeface="微软雅黑" panose="020B0503020204020204" charset="-122"/>
+              </a:rPr>
+              <a:t> </a:t>
+            </a:r>
+            <a:r>
+              <a:rPr lang="zh-CN" altLang="en-US" sz="1775">
+                <a:solidFill>
+                  <a:schemeClr val="tx1"/>
+                </a:solidFill>
+                <a:latin typeface="微软雅黑" panose="020B0503020204020204" charset="-122"/>
+                <a:ea typeface="微软雅黑" panose="020B0503020204020204" charset="-122"/>
+                <a:cs typeface="微软雅黑" panose="020B0503020204020204" charset="-122"/>
+              </a:rPr>
+              <a:t>属性的设计演进</a:t>
+            </a:r>
+            <a:endParaRPr lang="en-US" altLang="zh-CN" sz="1775">
+              <a:solidFill>
+                <a:schemeClr val="tx1"/>
+              </a:solidFill>
+              <a:latin typeface="微软雅黑" panose="020B0503020204020204" charset="-122"/>
+              <a:ea typeface="微软雅黑" panose="020B0503020204020204" charset="-122"/>
+              <a:cs typeface="微软雅黑" panose="020B0503020204020204" charset="-122"/>
+            </a:endParaRPr>
+          </a:p>
+          <a:p>
+            <a:pPr lvl="1">
+              <a:buFont typeface="Wingdings" panose="05000000000000000000" charset="0"/>
+              <a:buChar char="Ø"/>
+            </a:pPr>
+            <a:r>
+              <a:rPr lang="zh-CN" altLang="en-US" sz="1775">
+                <a:solidFill>
+                  <a:schemeClr val="tx1"/>
+                </a:solidFill>
+                <a:latin typeface="微软雅黑" panose="020B0503020204020204" charset="-122"/>
+                <a:ea typeface="微软雅黑" panose="020B0503020204020204" charset="-122"/>
+                <a:cs typeface="微软雅黑" panose="020B0503020204020204" charset="-122"/>
+              </a:rPr>
+              <a:t>及时对齐本地实现的属性命名与语义，避免与上游分叉</a:t>
+            </a:r>
+            <a:endParaRPr lang="en-US" altLang="zh-CN" sz="1775">
+              <a:solidFill>
+                <a:schemeClr val="tx1"/>
+              </a:solidFill>
+              <a:latin typeface="微软雅黑" panose="020B0503020204020204" charset="-122"/>
+              <a:ea typeface="微软雅黑" panose="020B0503020204020204" charset="-122"/>
+              <a:cs typeface="微软雅黑" panose="020B0503020204020204" charset="-122"/>
+            </a:endParaRPr>
+          </a:p>
+          <a:p>
+            <a:pPr marL="457200" indent="-457200">
+              <a:buAutoNum type="arabicPeriod"/>
+            </a:pPr>
+            <a:r>
+              <a:rPr lang="zh-CN" altLang="en-US" sz="2000" b="1">
+                <a:solidFill>
+                  <a:schemeClr val="tx1"/>
+                </a:solidFill>
+                <a:latin typeface="微软雅黑" panose="020B0503020204020204" charset="-122"/>
+                <a:ea typeface="微软雅黑" panose="020B0503020204020204" charset="-122"/>
+                <a:cs typeface="微软雅黑" panose="020B0503020204020204" charset="-122"/>
+              </a:rPr>
+              <a:t>补充运行时验证与性能评估</a:t>
+            </a:r>
+            <a:endParaRPr lang="en-US" altLang="zh-CN" sz="2000" b="1">
+              <a:solidFill>
+                <a:schemeClr val="tx1"/>
+              </a:solidFill>
+              <a:latin typeface="微软雅黑" panose="020B0503020204020204" charset="-122"/>
+              <a:ea typeface="微软雅黑" panose="020B0503020204020204" charset="-122"/>
+              <a:cs typeface="微软雅黑" panose="020B0503020204020204" charset="-122"/>
+            </a:endParaRPr>
+          </a:p>
+          <a:p>
+            <a:pPr lvl="1">
+              <a:buFont typeface="Wingdings" panose="05000000000000000000" charset="0"/>
+              <a:buChar char="Ø"/>
+            </a:pPr>
+            <a:r>
+              <a:rPr lang="zh-CN" altLang="en-US" sz="1775">
+                <a:solidFill>
+                  <a:schemeClr val="tx1"/>
+                </a:solidFill>
+                <a:latin typeface="微软雅黑" panose="020B0503020204020204" charset="-122"/>
+                <a:ea typeface="微软雅黑" panose="020B0503020204020204" charset="-122"/>
+                <a:cs typeface="微软雅黑" panose="020B0503020204020204" charset="-122"/>
+              </a:rPr>
+              <a:t>在现有编译级验证的基础上，增加运行时行为测试</a:t>
+            </a:r>
+            <a:endParaRPr lang="en-US" altLang="zh-CN" sz="1775">
+              <a:solidFill>
+                <a:schemeClr val="tx1"/>
+              </a:solidFill>
+              <a:latin typeface="微软雅黑" panose="020B0503020204020204" charset="-122"/>
+              <a:ea typeface="微软雅黑" panose="020B0503020204020204" charset="-122"/>
+              <a:cs typeface="微软雅黑" panose="020B0503020204020204" charset="-122"/>
+            </a:endParaRPr>
+          </a:p>
+          <a:p>
+            <a:pPr lvl="1">
+              <a:buFont typeface="Wingdings" panose="05000000000000000000" charset="0"/>
+              <a:buChar char="Ø"/>
+            </a:pPr>
+            <a:r>
+              <a:rPr lang="zh-CN" altLang="en-US" sz="1775">
+                <a:solidFill>
+                  <a:schemeClr val="tx1"/>
+                </a:solidFill>
+                <a:latin typeface="微软雅黑" panose="020B0503020204020204" charset="-122"/>
+                <a:ea typeface="微软雅黑" panose="020B0503020204020204" charset="-122"/>
+                <a:cs typeface="微软雅黑" panose="020B0503020204020204" charset="-122"/>
+              </a:rPr>
+              <a:t>在目标硬件上对比标量</a:t>
+            </a:r>
+            <a:r>
+              <a:rPr lang="en-US" altLang="zh-CN" sz="1775">
+                <a:solidFill>
+                  <a:schemeClr val="tx1"/>
+                </a:solidFill>
+                <a:latin typeface="微软雅黑" panose="020B0503020204020204" charset="-122"/>
+                <a:ea typeface="微软雅黑" panose="020B0503020204020204" charset="-122"/>
+                <a:cs typeface="微软雅黑" panose="020B0503020204020204" charset="-122"/>
+              </a:rPr>
+              <a:t> / NEON / SVE </a:t>
+            </a:r>
+            <a:r>
+              <a:rPr lang="zh-CN" altLang="en-US" sz="1775">
+                <a:solidFill>
+                  <a:schemeClr val="tx1"/>
+                </a:solidFill>
+                <a:latin typeface="微软雅黑" panose="020B0503020204020204" charset="-122"/>
+                <a:ea typeface="微软雅黑" panose="020B0503020204020204" charset="-122"/>
+                <a:cs typeface="微软雅黑" panose="020B0503020204020204" charset="-122"/>
+              </a:rPr>
+              <a:t>性能，评估收益和优化空间</a:t>
+            </a:r>
+            <a:endParaRPr lang="en-US" altLang="zh-CN" sz="1775">
+              <a:solidFill>
+                <a:schemeClr val="tx1"/>
+              </a:solidFill>
+              <a:latin typeface="微软雅黑" panose="020B0503020204020204" charset="-122"/>
+              <a:ea typeface="微软雅黑" panose="020B0503020204020204" charset="-122"/>
+              <a:cs typeface="微软雅黑" panose="020B0503020204020204" charset="-122"/>
+            </a:endParaRPr>
+          </a:p>
+          <a:p>
+            <a:pPr marL="457200" indent="-457200">
+              <a:buAutoNum type="arabicPeriod"/>
+            </a:pPr>
+            <a:r>
+              <a:rPr lang="zh-CN" altLang="en-US" sz="2000" b="1">
+                <a:solidFill>
+                  <a:schemeClr val="tx1"/>
+                </a:solidFill>
+                <a:latin typeface="微软雅黑" panose="020B0503020204020204" charset="-122"/>
+                <a:ea typeface="微软雅黑" panose="020B0503020204020204" charset="-122"/>
+                <a:cs typeface="微软雅黑" panose="020B0503020204020204" charset="-122"/>
+              </a:rPr>
+              <a:t>推动社区</a:t>
+            </a:r>
+            <a:r>
+              <a:rPr lang="en-US" altLang="zh-CN" sz="2000" b="1">
+                <a:solidFill>
+                  <a:schemeClr val="tx1"/>
+                </a:solidFill>
+                <a:latin typeface="微软雅黑" panose="020B0503020204020204" charset="-122"/>
+                <a:ea typeface="微软雅黑" panose="020B0503020204020204" charset="-122"/>
+                <a:cs typeface="微软雅黑" panose="020B0503020204020204" charset="-122"/>
+              </a:rPr>
+              <a:t> upstream </a:t>
+            </a:r>
+            <a:r>
+              <a:rPr lang="zh-CN" altLang="en-US" sz="2000" b="1">
+                <a:solidFill>
+                  <a:schemeClr val="tx1"/>
+                </a:solidFill>
+                <a:latin typeface="微软雅黑" panose="020B0503020204020204" charset="-122"/>
+                <a:ea typeface="微软雅黑" panose="020B0503020204020204" charset="-122"/>
+                <a:cs typeface="微软雅黑" panose="020B0503020204020204" charset="-122"/>
+              </a:rPr>
+              <a:t>贡献</a:t>
+            </a:r>
+            <a:endParaRPr lang="en-US" altLang="zh-CN" sz="2000" b="1">
+              <a:solidFill>
+                <a:schemeClr val="tx1"/>
+              </a:solidFill>
+              <a:latin typeface="微软雅黑" panose="020B0503020204020204" charset="-122"/>
+              <a:ea typeface="微软雅黑" panose="020B0503020204020204" charset="-122"/>
+              <a:cs typeface="微软雅黑" panose="020B0503020204020204" charset="-122"/>
+            </a:endParaRPr>
+          </a:p>
+          <a:p>
+            <a:pPr lvl="1">
+              <a:buFont typeface="Wingdings" panose="05000000000000000000" charset="0"/>
+              <a:buChar char="Ø"/>
+            </a:pPr>
+            <a:r>
+              <a:rPr lang="zh-CN" altLang="en-US" sz="1775">
+                <a:solidFill>
+                  <a:schemeClr val="tx1"/>
+                </a:solidFill>
+                <a:latin typeface="微软雅黑" panose="020B0503020204020204" charset="-122"/>
+                <a:ea typeface="微软雅黑" panose="020B0503020204020204" charset="-122"/>
+                <a:cs typeface="微软雅黑" panose="020B0503020204020204" charset="-122"/>
+              </a:rPr>
+              <a:t>在社区接口趋于稳定后，整理本地工作为</a:t>
+            </a:r>
+            <a:r>
+              <a:rPr lang="en-US" altLang="zh-CN" sz="1775">
+                <a:solidFill>
+                  <a:schemeClr val="tx1"/>
+                </a:solidFill>
+                <a:latin typeface="微软雅黑" panose="020B0503020204020204" charset="-122"/>
+                <a:ea typeface="微软雅黑" panose="020B0503020204020204" charset="-122"/>
+                <a:cs typeface="微软雅黑" panose="020B0503020204020204" charset="-122"/>
+              </a:rPr>
+              <a:t> PR</a:t>
+            </a:r>
+            <a:r>
+              <a:rPr lang="zh-CN" altLang="en-US" sz="1775">
+                <a:solidFill>
+                  <a:schemeClr val="tx1"/>
+                </a:solidFill>
+                <a:latin typeface="微软雅黑" panose="020B0503020204020204" charset="-122"/>
+                <a:ea typeface="微软雅黑" panose="020B0503020204020204" charset="-122"/>
+                <a:cs typeface="微软雅黑" panose="020B0503020204020204" charset="-122"/>
+              </a:rPr>
+              <a:t>，提交到</a:t>
+            </a:r>
+            <a:r>
+              <a:rPr lang="en-US" altLang="zh-CN" sz="1775">
+                <a:solidFill>
+                  <a:schemeClr val="tx1"/>
+                </a:solidFill>
+                <a:latin typeface="微软雅黑" panose="020B0503020204020204" charset="-122"/>
+                <a:ea typeface="微软雅黑" panose="020B0503020204020204" charset="-122"/>
+                <a:cs typeface="微软雅黑" panose="020B0503020204020204" charset="-122"/>
+              </a:rPr>
+              <a:t> rust-lang/stdarch</a:t>
+            </a:r>
+            <a:endParaRPr lang="en-US" altLang="zh-CN" sz="1775">
+              <a:solidFill>
+                <a:schemeClr val="tx1"/>
+              </a:solidFill>
+              <a:latin typeface="微软雅黑" panose="020B0503020204020204" charset="-122"/>
+              <a:ea typeface="微软雅黑" panose="020B0503020204020204" charset="-122"/>
+              <a:cs typeface="微软雅黑" panose="020B0503020204020204" charset="-122"/>
+            </a:endParaRPr>
+          </a:p>
+          <a:p>
+            <a:pPr lvl="1">
+              <a:buFont typeface="Wingdings" panose="05000000000000000000" charset="0"/>
+              <a:buChar char="Ø"/>
+            </a:pPr>
+            <a:r>
+              <a:rPr lang="zh-CN" altLang="en-US" sz="1775">
+                <a:solidFill>
+                  <a:schemeClr val="tx1"/>
+                </a:solidFill>
+                <a:latin typeface="微软雅黑" panose="020B0503020204020204" charset="-122"/>
+                <a:ea typeface="微软雅黑" panose="020B0503020204020204" charset="-122"/>
+                <a:cs typeface="微软雅黑" panose="020B0503020204020204" charset="-122"/>
+              </a:rPr>
+              <a:t>争取将现有成果转化为正式</a:t>
+            </a:r>
+            <a:r>
+              <a:rPr lang="en-US" altLang="zh-CN" sz="1775">
+                <a:solidFill>
+                  <a:schemeClr val="tx1"/>
+                </a:solidFill>
+                <a:latin typeface="微软雅黑" panose="020B0503020204020204" charset="-122"/>
+                <a:ea typeface="微软雅黑" panose="020B0503020204020204" charset="-122"/>
+                <a:cs typeface="微软雅黑" panose="020B0503020204020204" charset="-122"/>
+              </a:rPr>
+              <a:t> upstream </a:t>
+            </a:r>
+            <a:r>
+              <a:rPr lang="zh-CN" altLang="en-US" sz="1775">
+                <a:solidFill>
+                  <a:schemeClr val="tx1"/>
+                </a:solidFill>
+                <a:latin typeface="微软雅黑" panose="020B0503020204020204" charset="-122"/>
+                <a:ea typeface="微软雅黑" panose="020B0503020204020204" charset="-122"/>
+                <a:cs typeface="微软雅黑" panose="020B0503020204020204" charset="-122"/>
+              </a:rPr>
+              <a:t>贡献</a:t>
+            </a:r>
+            <a:endParaRPr lang="zh-CN" altLang="en-US" sz="1775">
+              <a:solidFill>
+                <a:schemeClr val="tx1"/>
+              </a:solidFill>
+              <a:latin typeface="微软雅黑" panose="020B0503020204020204" charset="-122"/>
+              <a:ea typeface="微软雅黑" panose="020B0503020204020204" charset="-122"/>
+              <a:cs typeface="微软雅黑" panose="020B0503020204020204" charset="-122"/>
+            </a:endParaRPr>
+          </a:p>
+        </p:txBody>
+      </p:sp>
+    </p:spTree>
+    <p:custDataLst>
+      <p:tags r:id="rId3"/>
+    </p:custDataLst>
+  </p:cSld>
+  <p:clrMapOvr>
+    <a:masterClrMapping/>
+  </p:clrMapOvr>
+</p:sld>
+</file>
+
+<file path=ppt/slides/slide2.xml><?xml version="1.0" encoding="utf-8"?>
+<p:sld xmlns:a="http://schemas.openxmlformats.org/drawingml/2006/main" xmlns:r="http://schemas.openxmlformats.org/officeDocument/2006/relationships" xmlns:p="http://schemas.openxmlformats.org/presentationml/2006/main">
+  <p:cSld>
+    <p:spTree>
+      <p:nvGrpSpPr>
+        <p:cNvPr id="1" name=""/>
+        <p:cNvGrpSpPr/>
+        <p:nvPr/>
+      </p:nvGrpSpPr>
+      <p:grpSpPr/>
+      <p:sp>
+        <p:nvSpPr>
+          <p:cNvPr id="2" name="标题 1"/>
+          <p:cNvSpPr>
+            <a:spLocks noGrp="1"/>
+          </p:cNvSpPr>
+          <p:nvPr>
+            <p:ph type="title"/>
+            <p:custDataLst>
+              <p:tags r:id="rId1"/>
+            </p:custDataLst>
+          </p:nvPr>
+        </p:nvSpPr>
+        <p:spPr>
+          <a:xfrm>
+            <a:off x="1990725" y="1153160"/>
+            <a:ext cx="5487670" cy="705485"/>
+          </a:xfrm>
+        </p:spPr>
+        <p:txBody>
+          <a:bodyPr>
+            <a:noAutofit/>
+          </a:bodyPr>
+          <a:p>
+            <a:r>
+              <a:rPr lang="zh-CN" altLang="en-US" sz="6000" b="1"/>
               <a:t>目录</a:t>
             </a:r>
-            <a:endParaRPr lang="zh-CN" altLang="en-US"/>
+            <a:endParaRPr lang="zh-CN" altLang="en-US" sz="6000" b="1"/>
           </a:p>
         </p:txBody>
       </p:sp>
@@ -4178,7 +5340,12 @@
             </p:custDataLst>
           </p:nvPr>
         </p:nvSpPr>
-        <p:spPr/>
+        <p:spPr>
+          <a:xfrm>
+            <a:off x="1990725" y="2174875"/>
+            <a:ext cx="9262745" cy="3520440"/>
+          </a:xfrm>
+        </p:spPr>
         <p:txBody>
           <a:bodyPr/>
           <a:p>
@@ -4186,14 +5353,14 @@
               <a:buNone/>
             </a:pPr>
             <a:r>
-              <a:rPr lang="zh-CN" altLang="en-US">
+              <a:rPr lang="zh-CN" altLang="en-US" sz="4800">
                 <a:solidFill>
                   <a:schemeClr val="tx1"/>
                 </a:solidFill>
               </a:rPr>
               <a:t>一、项目概况</a:t>
             </a:r>
-            <a:endParaRPr lang="zh-CN" altLang="en-US">
+            <a:endParaRPr lang="zh-CN" altLang="en-US" sz="4800">
               <a:solidFill>
                 <a:schemeClr val="tx1"/>
               </a:solidFill>
@@ -4204,14 +5371,14 @@
               <a:buNone/>
             </a:pPr>
             <a:r>
-              <a:rPr lang="zh-CN" altLang="en-US">
-                <a:solidFill>
-                  <a:schemeClr val="tx1"/>
-                </a:solidFill>
-              </a:rPr>
-              <a:t>二、当前社区进展</a:t>
-            </a:r>
-            <a:endParaRPr lang="zh-CN" altLang="en-US">
+              <a:rPr lang="zh-CN" altLang="en-US" sz="4800">
+                <a:solidFill>
+                  <a:schemeClr val="tx1"/>
+                </a:solidFill>
+              </a:rPr>
+              <a:t>二、关键难点与解决方案</a:t>
+            </a:r>
+            <a:endParaRPr lang="zh-CN" altLang="en-US" sz="4800">
               <a:solidFill>
                 <a:schemeClr val="tx1"/>
               </a:solidFill>
@@ -4222,32 +5389,14 @@
               <a:buNone/>
             </a:pPr>
             <a:r>
-              <a:rPr lang="zh-CN" altLang="en-US">
-                <a:solidFill>
-                  <a:schemeClr val="tx1"/>
-                </a:solidFill>
-              </a:rPr>
-              <a:t>三、关键难点与解决方案</a:t>
-            </a:r>
-            <a:endParaRPr lang="zh-CN" altLang="en-US">
-              <a:solidFill>
-                <a:schemeClr val="tx1"/>
-              </a:solidFill>
-            </a:endParaRPr>
-          </a:p>
-          <a:p>
-            <a:pPr marL="0" indent="0">
-              <a:buNone/>
-            </a:pPr>
-            <a:r>
-              <a:rPr lang="zh-CN" altLang="en-US">
-                <a:solidFill>
-                  <a:schemeClr val="tx1"/>
-                </a:solidFill>
-              </a:rPr>
-              <a:t>四、未来工作</a:t>
-            </a:r>
-            <a:endParaRPr lang="zh-CN" altLang="en-US">
+              <a:rPr lang="zh-CN" altLang="en-US" sz="4800">
+                <a:solidFill>
+                  <a:schemeClr val="tx1"/>
+                </a:solidFill>
+              </a:rPr>
+              <a:t>三、总结与展望</a:t>
+            </a:r>
+            <a:endParaRPr lang="zh-CN" altLang="en-US" sz="4800">
               <a:solidFill>
                 <a:schemeClr val="tx1"/>
               </a:solidFill>
@@ -4294,10 +5443,10 @@
           <a:bodyPr/>
           <a:p>
             <a:r>
-              <a:rPr lang="zh-CN" altLang="en-US"/>
+              <a:rPr lang="zh-CN" altLang="en-US" b="1"/>
               <a:t>一、项目概况</a:t>
             </a:r>
-            <a:endParaRPr lang="zh-CN" altLang="en-US"/>
+            <a:endParaRPr lang="zh-CN" altLang="en-US" b="1"/>
           </a:p>
         </p:txBody>
       </p:sp>
@@ -4316,18 +5465,34 @@
         </p:nvSpPr>
         <p:spPr>
           <a:xfrm>
-            <a:off x="608330" y="1490345"/>
-            <a:ext cx="10968990" cy="1668780"/>
+            <a:off x="320040" y="1399540"/>
+            <a:ext cx="11447145" cy="4983480"/>
           </a:xfrm>
         </p:spPr>
         <p:txBody>
-          <a:bodyPr/>
-          <a:p>
-            <a:pPr marL="0" indent="0">
+          <a:bodyPr>
+            <a:noAutofit/>
+          </a:bodyPr>
+          <a:p>
+            <a:pPr marL="0" indent="0" algn="l">
+              <a:lnSpc>
+                <a:spcPct val="130000"/>
+              </a:lnSpc>
               <a:buNone/>
             </a:pPr>
             <a:r>
-              <a:rPr lang="zh-CN" altLang="en-US">
+              <a:rPr lang="zh-CN" altLang="en-US" sz="2400" b="1">
+                <a:solidFill>
+                  <a:srgbClr val="C00000"/>
+                </a:solidFill>
+                <a:latin typeface="微软雅黑" panose="020B0503020204020204" charset="-122"/>
+                <a:ea typeface="微软雅黑" panose="020B0503020204020204" charset="-122"/>
+                <a:cs typeface="微软雅黑" panose="020B0503020204020204" charset="-122"/>
+              </a:rPr>
+              <a:t>项目背景：</a:t>
+            </a:r>
+            <a:r>
+              <a:rPr lang="zh-CN" altLang="en-US" sz="2400">
                 <a:solidFill>
                   <a:schemeClr val="tx1"/>
                 </a:solidFill>
@@ -4338,7 +5503,7 @@
               <a:t>本项目基于</a:t>
             </a:r>
             <a:r>
-              <a:rPr lang="en-US" altLang="zh-CN">
+              <a:rPr lang="en-US" altLang="zh-CN" sz="2400" b="1">
                 <a:solidFill>
                   <a:schemeClr val="tx1"/>
                 </a:solidFill>
@@ -4349,7 +5514,7 @@
               <a:t>RFC 3838</a:t>
             </a:r>
             <a:r>
-              <a:rPr lang="zh-CN" altLang="en-US">
+              <a:rPr lang="zh-CN" altLang="en-US" sz="2400">
                 <a:solidFill>
                   <a:schemeClr val="tx1"/>
                 </a:solidFill>
@@ -4360,7 +5525,7 @@
               <a:t>和</a:t>
             </a:r>
             <a:r>
-              <a:rPr lang="en-US" altLang="zh-CN">
+              <a:rPr lang="en-US" altLang="zh-CN" sz="2400" b="1">
                 <a:solidFill>
                   <a:schemeClr val="tx1"/>
                 </a:solidFill>
@@ -4371,215 +5536,86 @@
               <a:t>PR143924</a:t>
             </a:r>
             <a:r>
-              <a:rPr lang="zh-CN" altLang="en-US">
-                <a:solidFill>
-                  <a:schemeClr val="tx1"/>
-                </a:solidFill>
-                <a:latin typeface="微软雅黑" panose="020B0503020204020204" charset="-122"/>
-                <a:ea typeface="微软雅黑" panose="020B0503020204020204" charset="-122"/>
-                <a:cs typeface="微软雅黑" panose="020B0503020204020204" charset="-122"/>
-              </a:rPr>
-              <a:t>开展工作，目标是在</a:t>
-            </a:r>
-            <a:r>
-              <a:rPr lang="en-US" altLang="zh-CN">
-                <a:solidFill>
-                  <a:schemeClr val="tx1"/>
-                </a:solidFill>
-                <a:latin typeface="微软雅黑" panose="020B0503020204020204" charset="-122"/>
-                <a:ea typeface="微软雅黑" panose="020B0503020204020204" charset="-122"/>
-                <a:cs typeface="微软雅黑" panose="020B0503020204020204" charset="-122"/>
-              </a:rPr>
-              <a:t> Rust </a:t>
-            </a:r>
-            <a:r>
-              <a:rPr lang="zh-CN" altLang="en-US">
-                <a:solidFill>
-                  <a:schemeClr val="tx1"/>
-                </a:solidFill>
-                <a:latin typeface="微软雅黑" panose="020B0503020204020204" charset="-122"/>
-                <a:ea typeface="微软雅黑" panose="020B0503020204020204" charset="-122"/>
-                <a:cs typeface="微软雅黑" panose="020B0503020204020204" charset="-122"/>
-              </a:rPr>
-              <a:t>的</a:t>
-            </a:r>
-            <a:r>
-              <a:rPr lang="en-US" altLang="zh-CN">
-                <a:solidFill>
-                  <a:schemeClr val="tx1"/>
-                </a:solidFill>
-                <a:latin typeface="微软雅黑" panose="020B0503020204020204" charset="-122"/>
-                <a:ea typeface="微软雅黑" panose="020B0503020204020204" charset="-122"/>
-                <a:cs typeface="微软雅黑" panose="020B0503020204020204" charset="-122"/>
-              </a:rPr>
-              <a:t> stdarch </a:t>
-            </a:r>
-            <a:r>
-              <a:rPr lang="zh-CN" altLang="en-US">
-                <a:solidFill>
-                  <a:schemeClr val="tx1"/>
-                </a:solidFill>
-                <a:latin typeface="微软雅黑" panose="020B0503020204020204" charset="-122"/>
-                <a:ea typeface="微软雅黑" panose="020B0503020204020204" charset="-122"/>
-                <a:cs typeface="微软雅黑" panose="020B0503020204020204" charset="-122"/>
-              </a:rPr>
-              <a:t>框架中完整接入</a:t>
-            </a:r>
-            <a:r>
-              <a:rPr lang="en-US" altLang="zh-CN">
-                <a:solidFill>
-                  <a:schemeClr val="tx1"/>
-                </a:solidFill>
-                <a:latin typeface="微软雅黑" panose="020B0503020204020204" charset="-122"/>
-                <a:ea typeface="微软雅黑" panose="020B0503020204020204" charset="-122"/>
-                <a:cs typeface="微软雅黑" panose="020B0503020204020204" charset="-122"/>
-              </a:rPr>
-              <a:t> Aarch64 SVE/SVE2 </a:t>
-            </a:r>
-            <a:r>
-              <a:rPr lang="zh-CN" altLang="en-US">
-                <a:solidFill>
-                  <a:schemeClr val="tx1"/>
-                </a:solidFill>
-                <a:latin typeface="微软雅黑" panose="020B0503020204020204" charset="-122"/>
-                <a:ea typeface="微软雅黑" panose="020B0503020204020204" charset="-122"/>
-                <a:cs typeface="微软雅黑" panose="020B0503020204020204" charset="-122"/>
-              </a:rPr>
-              <a:t>的可扩展向量类型和对应</a:t>
-            </a:r>
-            <a:r>
-              <a:rPr lang="en-US" altLang="zh-CN">
-                <a:solidFill>
-                  <a:schemeClr val="tx1"/>
-                </a:solidFill>
-                <a:latin typeface="微软雅黑" panose="020B0503020204020204" charset="-122"/>
-                <a:ea typeface="微软雅黑" panose="020B0503020204020204" charset="-122"/>
-                <a:cs typeface="微软雅黑" panose="020B0503020204020204" charset="-122"/>
-              </a:rPr>
-              <a:t> Intrinsics</a:t>
-            </a:r>
-            <a:r>
-              <a:rPr lang="zh-CN" altLang="en-US">
-                <a:solidFill>
-                  <a:schemeClr val="tx1"/>
-                </a:solidFill>
-                <a:latin typeface="微软雅黑" panose="020B0503020204020204" charset="-122"/>
-                <a:ea typeface="微软雅黑" panose="020B0503020204020204" charset="-122"/>
-                <a:cs typeface="微软雅黑" panose="020B0503020204020204" charset="-122"/>
-              </a:rPr>
-              <a:t>，使编译器在</a:t>
-            </a:r>
-            <a:r>
-              <a:rPr lang="en-US" altLang="zh-CN">
-                <a:solidFill>
-                  <a:schemeClr val="tx1"/>
-                </a:solidFill>
-                <a:latin typeface="微软雅黑" panose="020B0503020204020204" charset="-122"/>
-                <a:ea typeface="微软雅黑" panose="020B0503020204020204" charset="-122"/>
-                <a:cs typeface="微软雅黑" panose="020B0503020204020204" charset="-122"/>
-              </a:rPr>
-              <a:t> AArch64 </a:t>
-            </a:r>
-            <a:r>
-              <a:rPr lang="zh-CN" altLang="en-US">
-                <a:solidFill>
-                  <a:schemeClr val="tx1"/>
-                </a:solidFill>
-                <a:latin typeface="微软雅黑" panose="020B0503020204020204" charset="-122"/>
-                <a:ea typeface="微软雅黑" panose="020B0503020204020204" charset="-122"/>
-                <a:cs typeface="微软雅黑" panose="020B0503020204020204" charset="-122"/>
-              </a:rPr>
-              <a:t>目标上能够识别并正确处理</a:t>
-            </a:r>
-            <a:r>
-              <a:rPr lang="en-US" altLang="zh-CN">
-                <a:solidFill>
-                  <a:schemeClr val="tx1"/>
-                </a:solidFill>
-                <a:latin typeface="微软雅黑" panose="020B0503020204020204" charset="-122"/>
-                <a:ea typeface="微软雅黑" panose="020B0503020204020204" charset="-122"/>
-                <a:cs typeface="微软雅黑" panose="020B0503020204020204" charset="-122"/>
-              </a:rPr>
-              <a:t> #[rustc_scalable_vector(N)] </a:t>
-            </a:r>
-            <a:r>
-              <a:rPr lang="zh-CN" altLang="en-US">
-                <a:solidFill>
-                  <a:schemeClr val="tx1"/>
-                </a:solidFill>
-                <a:latin typeface="微软雅黑" panose="020B0503020204020204" charset="-122"/>
-                <a:ea typeface="微软雅黑" panose="020B0503020204020204" charset="-122"/>
-                <a:cs typeface="微软雅黑" panose="020B0503020204020204" charset="-122"/>
-              </a:rPr>
-              <a:t>这类</a:t>
-            </a:r>
-            <a:r>
-              <a:rPr lang="en-US" altLang="zh-CN">
-                <a:solidFill>
-                  <a:schemeClr val="tx1"/>
-                </a:solidFill>
-                <a:latin typeface="微软雅黑" panose="020B0503020204020204" charset="-122"/>
-                <a:ea typeface="微软雅黑" panose="020B0503020204020204" charset="-122"/>
-                <a:cs typeface="微软雅黑" panose="020B0503020204020204" charset="-122"/>
-              </a:rPr>
-              <a:t> SVE </a:t>
-            </a:r>
-            <a:r>
-              <a:rPr lang="zh-CN" altLang="en-US">
-                <a:solidFill>
-                  <a:schemeClr val="tx1"/>
-                </a:solidFill>
-                <a:latin typeface="微软雅黑" panose="020B0503020204020204" charset="-122"/>
-                <a:ea typeface="微软雅黑" panose="020B0503020204020204" charset="-122"/>
-                <a:cs typeface="微软雅黑" panose="020B0503020204020204" charset="-122"/>
-              </a:rPr>
-              <a:t>可扩展向量类型，并在标准库中对外提供稳定的</a:t>
-            </a:r>
-            <a:r>
-              <a:rPr lang="en-US" altLang="zh-CN">
-                <a:solidFill>
-                  <a:schemeClr val="tx1"/>
-                </a:solidFill>
-                <a:latin typeface="微软雅黑" panose="020B0503020204020204" charset="-122"/>
-                <a:ea typeface="微软雅黑" panose="020B0503020204020204" charset="-122"/>
-                <a:cs typeface="微软雅黑" panose="020B0503020204020204" charset="-122"/>
-              </a:rPr>
-              <a:t> SVE </a:t>
-            </a:r>
-            <a:r>
-              <a:rPr lang="zh-CN" altLang="en-US">
-                <a:solidFill>
-                  <a:schemeClr val="tx1"/>
-                </a:solidFill>
-                <a:latin typeface="微软雅黑" panose="020B0503020204020204" charset="-122"/>
-                <a:ea typeface="微软雅黑" panose="020B0503020204020204" charset="-122"/>
-                <a:cs typeface="微软雅黑" panose="020B0503020204020204" charset="-122"/>
-              </a:rPr>
-              <a:t>类型与</a:t>
-            </a:r>
-            <a:r>
-              <a:rPr lang="en-US" altLang="zh-CN">
-                <a:solidFill>
-                  <a:schemeClr val="tx1"/>
-                </a:solidFill>
-                <a:latin typeface="微软雅黑" panose="020B0503020204020204" charset="-122"/>
-                <a:ea typeface="微软雅黑" panose="020B0503020204020204" charset="-122"/>
-                <a:cs typeface="微软雅黑" panose="020B0503020204020204" charset="-122"/>
-              </a:rPr>
-              <a:t> Intrinsics API</a:t>
-            </a:r>
-            <a:r>
-              <a:rPr lang="zh-CN" altLang="en-US">
-                <a:solidFill>
-                  <a:schemeClr val="tx1"/>
-                </a:solidFill>
-                <a:latin typeface="微软雅黑" panose="020B0503020204020204" charset="-122"/>
-                <a:ea typeface="微软雅黑" panose="020B0503020204020204" charset="-122"/>
-                <a:cs typeface="微软雅黑" panose="020B0503020204020204" charset="-122"/>
-              </a:rPr>
-              <a:t>。</a:t>
-            </a:r>
-            <a:endParaRPr lang="zh-CN" altLang="en-US">
+              <a:rPr lang="zh-CN" altLang="en-US" sz="2400">
+                <a:solidFill>
+                  <a:schemeClr val="tx1"/>
+                </a:solidFill>
+                <a:latin typeface="微软雅黑" panose="020B0503020204020204" charset="-122"/>
+                <a:ea typeface="微软雅黑" panose="020B0503020204020204" charset="-122"/>
+                <a:cs typeface="微软雅黑" panose="020B0503020204020204" charset="-122"/>
+              </a:rPr>
+              <a:t>开展工作，</a:t>
+            </a:r>
+            <a:r>
+              <a:rPr lang="en-US" altLang="zh-CN" sz="2400" b="1">
+                <a:solidFill>
+                  <a:schemeClr val="tx1"/>
+                </a:solidFill>
+                <a:latin typeface="微软雅黑" panose="020B0503020204020204" charset="-122"/>
+                <a:ea typeface="微软雅黑" panose="020B0503020204020204" charset="-122"/>
+                <a:cs typeface="微软雅黑" panose="020B0503020204020204" charset="-122"/>
+                <a:sym typeface="+mn-ea"/>
+              </a:rPr>
+              <a:t>RFC 3838</a:t>
+            </a:r>
+            <a:r>
+              <a:rPr lang="zh-CN" altLang="en-US" sz="2400">
+                <a:solidFill>
+                  <a:schemeClr val="tx1"/>
+                </a:solidFill>
+                <a:latin typeface="微软雅黑" panose="020B0503020204020204" charset="-122"/>
+                <a:ea typeface="微软雅黑" panose="020B0503020204020204" charset="-122"/>
+                <a:cs typeface="微软雅黑" panose="020B0503020204020204" charset="-122"/>
+              </a:rPr>
+              <a:t>引入了一个新属性</a:t>
+            </a:r>
+            <a:r>
+              <a:rPr lang="en-US" altLang="zh-CN" sz="2400" b="1">
+                <a:solidFill>
+                  <a:srgbClr val="C00000"/>
+                </a:solidFill>
+                <a:latin typeface="微软雅黑" panose="020B0503020204020204" charset="-122"/>
+                <a:ea typeface="微软雅黑" panose="020B0503020204020204" charset="-122"/>
+                <a:cs typeface="微软雅黑" panose="020B0503020204020204" charset="-122"/>
+              </a:rPr>
+              <a:t>[rustc_scalable_vector(N)]</a:t>
+            </a:r>
+            <a:r>
+              <a:rPr lang="zh-CN" altLang="en-US" sz="2400">
+                <a:solidFill>
+                  <a:schemeClr val="tx1"/>
+                </a:solidFill>
+                <a:latin typeface="微软雅黑" panose="020B0503020204020204" charset="-122"/>
+                <a:ea typeface="微软雅黑" panose="020B0503020204020204" charset="-122"/>
+                <a:cs typeface="微软雅黑" panose="020B0503020204020204" charset="-122"/>
+              </a:rPr>
+              <a:t>，</a:t>
+            </a:r>
+            <a:r>
+              <a:rPr lang="en-US" altLang="zh-CN" sz="2400" b="1">
+                <a:solidFill>
+                  <a:schemeClr val="tx1"/>
+                </a:solidFill>
+                <a:latin typeface="微软雅黑" panose="020B0503020204020204" charset="-122"/>
+                <a:ea typeface="微软雅黑" panose="020B0503020204020204" charset="-122"/>
+                <a:cs typeface="微软雅黑" panose="020B0503020204020204" charset="-122"/>
+                <a:sym typeface="+mn-ea"/>
+              </a:rPr>
+              <a:t>PR143924</a:t>
+            </a:r>
+            <a:r>
+              <a:rPr lang="zh-CN" altLang="en-US" sz="2400">
+                <a:solidFill>
+                  <a:schemeClr val="tx1"/>
+                </a:solidFill>
+                <a:latin typeface="微软雅黑" panose="020B0503020204020204" charset="-122"/>
+                <a:ea typeface="微软雅黑" panose="020B0503020204020204" charset="-122"/>
+                <a:cs typeface="微软雅黑" panose="020B0503020204020204" charset="-122"/>
+                <a:sym typeface="+mn-ea"/>
+              </a:rPr>
+              <a:t>初步实现了该属性。</a:t>
+            </a:r>
+            <a:endParaRPr lang="en-US" altLang="zh-CN" sz="2400">
               <a:solidFill>
                 <a:schemeClr val="tx1"/>
               </a:solidFill>
@@ -4588,255 +5624,67 @@
               <a:cs typeface="微软雅黑" panose="020B0503020204020204" charset="-122"/>
             </a:endParaRPr>
           </a:p>
-        </p:txBody>
-      </p:sp>
-      <p:sp>
-        <p:nvSpPr>
-          <p:cNvPr id="4" name="内容占位符 2"/>
-          <p:cNvSpPr>
-            <a:spLocks noGrp="1"/>
-          </p:cNvSpPr>
-          <p:nvPr>
-            <p:custDataLst>
-              <p:tags r:id="rId3"/>
-            </p:custDataLst>
-          </p:nvPr>
-        </p:nvSpPr>
-        <p:spPr>
-          <a:xfrm>
-            <a:off x="608330" y="3053715"/>
-            <a:ext cx="5845810" cy="1892935"/>
-          </a:xfrm>
-          <a:prstGeom prst="rect">
-            <a:avLst/>
-          </a:prstGeom>
-        </p:spPr>
-        <p:txBody>
-          <a:bodyPr vert="horz" lIns="90000" tIns="46800" rIns="90000" bIns="46800" rtlCol="0">
-            <a:normAutofit fontScale="80000"/>
-          </a:bodyPr>
-          <a:lstStyle>
-            <a:lvl1pPr marL="228600" indent="-228600" algn="l" defTabSz="914400" rtl="0" eaLnBrk="1" fontAlgn="auto" latinLnBrk="0" hangingPunct="1">
+          <a:p>
+            <a:pPr marL="0" indent="0" algn="l">
               <a:lnSpc>
                 <a:spcPct val="130000"/>
               </a:lnSpc>
               <a:spcBef>
-                <a:spcPts val="0"/>
+                <a:spcPts val="1500"/>
               </a:spcBef>
-              <a:spcAft>
-                <a:spcPts val="1000"/>
-              </a:spcAft>
-              <a:buFont typeface="Arial" panose="020B0604020202020204" pitchFamily="34" charset="0"/>
-              <a:buChar char="●"/>
-              <a:defRPr sz="1800" u="none" strike="noStrike" kern="1200" cap="none" spc="150" normalizeH="0" baseline="0">
-                <a:solidFill>
-                  <a:schemeClr val="tx1">
-                    <a:lumMod val="65000"/>
-                    <a:lumOff val="35000"/>
-                  </a:schemeClr>
-                </a:solidFill>
-                <a:uFillTx/>
-                <a:latin typeface="+mn-lt"/>
-                <a:ea typeface="+mn-ea"/>
-                <a:cs typeface="+mn-cs"/>
-              </a:defRPr>
-            </a:lvl1pPr>
-            <a:lvl2pPr marL="685800" indent="-228600" algn="l" defTabSz="914400" rtl="0" eaLnBrk="1" fontAlgn="auto" latinLnBrk="0" hangingPunct="1">
-              <a:lnSpc>
-                <a:spcPct val="120000"/>
-              </a:lnSpc>
-              <a:spcBef>
-                <a:spcPts val="0"/>
-              </a:spcBef>
-              <a:spcAft>
-                <a:spcPts val="600"/>
-              </a:spcAft>
-              <a:buFont typeface="Arial" panose="020B0604020202020204" pitchFamily="34" charset="0"/>
-              <a:buChar char="●"/>
-              <a:tabLst>
-                <a:tab pos="1609725" algn="l"/>
-                <a:tab pos="1609725" algn="l"/>
-                <a:tab pos="1609725" algn="l"/>
-                <a:tab pos="1609725" algn="l"/>
-              </a:tabLst>
-              <a:defRPr sz="1600" u="none" strike="noStrike" kern="1200" cap="none" spc="150" normalizeH="0" baseline="0">
-                <a:solidFill>
-                  <a:schemeClr val="tx1">
-                    <a:lumMod val="65000"/>
-                    <a:lumOff val="35000"/>
-                  </a:schemeClr>
-                </a:solidFill>
-                <a:uFillTx/>
-                <a:latin typeface="+mn-lt"/>
-                <a:ea typeface="+mn-ea"/>
-                <a:cs typeface="+mn-cs"/>
-              </a:defRPr>
-            </a:lvl2pPr>
-            <a:lvl3pPr marL="1143000" indent="-228600" algn="l" defTabSz="914400" rtl="0" eaLnBrk="1" fontAlgn="auto" latinLnBrk="0" hangingPunct="1">
-              <a:lnSpc>
-                <a:spcPct val="120000"/>
-              </a:lnSpc>
-              <a:spcBef>
-                <a:spcPts val="0"/>
-              </a:spcBef>
-              <a:spcAft>
-                <a:spcPts val="600"/>
-              </a:spcAft>
-              <a:buFont typeface="Arial" panose="020B0604020202020204" pitchFamily="34" charset="0"/>
-              <a:buChar char="●"/>
-              <a:defRPr sz="1600" u="none" strike="noStrike" kern="1200" cap="none" spc="150" normalizeH="0" baseline="0">
-                <a:solidFill>
-                  <a:schemeClr val="tx1">
-                    <a:lumMod val="65000"/>
-                    <a:lumOff val="35000"/>
-                  </a:schemeClr>
-                </a:solidFill>
-                <a:uFillTx/>
-                <a:latin typeface="+mn-lt"/>
-                <a:ea typeface="+mn-ea"/>
-                <a:cs typeface="+mn-cs"/>
-              </a:defRPr>
-            </a:lvl3pPr>
-            <a:lvl4pPr marL="1600200" indent="-228600" algn="l" defTabSz="914400" rtl="0" eaLnBrk="1" fontAlgn="auto" latinLnBrk="0" hangingPunct="1">
-              <a:lnSpc>
-                <a:spcPct val="120000"/>
-              </a:lnSpc>
-              <a:spcBef>
-                <a:spcPts val="0"/>
-              </a:spcBef>
-              <a:spcAft>
-                <a:spcPts val="300"/>
-              </a:spcAft>
-              <a:buFont typeface="Wingdings" panose="05000000000000000000" charset="0"/>
-              <a:buChar char=""/>
-              <a:defRPr sz="1400" u="none" strike="noStrike" kern="1200" cap="none" spc="150" normalizeH="0" baseline="0">
-                <a:solidFill>
-                  <a:schemeClr val="tx1">
-                    <a:lumMod val="65000"/>
-                    <a:lumOff val="35000"/>
-                  </a:schemeClr>
-                </a:solidFill>
-                <a:uFillTx/>
-                <a:latin typeface="+mn-lt"/>
-                <a:ea typeface="+mn-ea"/>
-                <a:cs typeface="+mn-cs"/>
-              </a:defRPr>
-            </a:lvl4pPr>
-            <a:lvl5pPr marL="2057400" indent="-228600" algn="l" defTabSz="914400" rtl="0" eaLnBrk="1" fontAlgn="auto" latinLnBrk="0" hangingPunct="1">
-              <a:lnSpc>
-                <a:spcPct val="120000"/>
-              </a:lnSpc>
-              <a:spcBef>
-                <a:spcPts val="0"/>
-              </a:spcBef>
-              <a:spcAft>
-                <a:spcPts val="300"/>
-              </a:spcAft>
-              <a:buFont typeface="Arial" panose="020B0604020202020204" pitchFamily="34" charset="0"/>
-              <a:buChar char="•"/>
-              <a:defRPr sz="1400" u="none" strike="noStrike" kern="1200" cap="none" spc="150" normalizeH="0" baseline="0">
-                <a:solidFill>
-                  <a:schemeClr val="tx1">
-                    <a:lumMod val="65000"/>
-                    <a:lumOff val="35000"/>
-                  </a:schemeClr>
-                </a:solidFill>
-                <a:uFillTx/>
-                <a:latin typeface="+mn-lt"/>
-                <a:ea typeface="+mn-ea"/>
-                <a:cs typeface="+mn-cs"/>
-              </a:defRPr>
-            </a:lvl5pPr>
-            <a:lvl6pPr marL="2514600" indent="-228600" algn="l" defTabSz="914400" rtl="0" eaLnBrk="1" latinLnBrk="0" hangingPunct="1">
-              <a:lnSpc>
-                <a:spcPct val="90000"/>
-              </a:lnSpc>
-              <a:spcBef>
-                <a:spcPts val="500"/>
-              </a:spcBef>
-              <a:buFont typeface="Arial" panose="020B0604020202020204" pitchFamily="34" charset="0"/>
-              <a:buChar char="•"/>
-              <a:defRPr sz="1800" kern="1200">
-                <a:solidFill>
-                  <a:schemeClr val="tx1"/>
-                </a:solidFill>
-                <a:latin typeface="+mn-lt"/>
-                <a:ea typeface="+mn-ea"/>
-                <a:cs typeface="+mn-cs"/>
-              </a:defRPr>
-            </a:lvl6pPr>
-            <a:lvl7pPr marL="2971800" indent="-228600" algn="l" defTabSz="914400" rtl="0" eaLnBrk="1" latinLnBrk="0" hangingPunct="1">
-              <a:lnSpc>
-                <a:spcPct val="90000"/>
-              </a:lnSpc>
-              <a:spcBef>
-                <a:spcPts val="500"/>
-              </a:spcBef>
-              <a:buFont typeface="Arial" panose="020B0604020202020204" pitchFamily="34" charset="0"/>
-              <a:buChar char="•"/>
-              <a:defRPr sz="1800" kern="1200">
-                <a:solidFill>
-                  <a:schemeClr val="tx1"/>
-                </a:solidFill>
-                <a:latin typeface="+mn-lt"/>
-                <a:ea typeface="+mn-ea"/>
-                <a:cs typeface="+mn-cs"/>
-              </a:defRPr>
-            </a:lvl7pPr>
-            <a:lvl8pPr marL="3429000" indent="-228600" algn="l" defTabSz="914400" rtl="0" eaLnBrk="1" latinLnBrk="0" hangingPunct="1">
-              <a:lnSpc>
-                <a:spcPct val="90000"/>
-              </a:lnSpc>
-              <a:spcBef>
-                <a:spcPts val="500"/>
-              </a:spcBef>
-              <a:buFont typeface="Arial" panose="020B0604020202020204" pitchFamily="34" charset="0"/>
-              <a:buChar char="•"/>
-              <a:defRPr sz="1800" kern="1200">
-                <a:solidFill>
-                  <a:schemeClr val="tx1"/>
-                </a:solidFill>
-                <a:latin typeface="+mn-lt"/>
-                <a:ea typeface="+mn-ea"/>
-                <a:cs typeface="+mn-cs"/>
-              </a:defRPr>
-            </a:lvl8pPr>
-            <a:lvl9pPr marL="3886200" indent="-228600" algn="l" defTabSz="914400" rtl="0" eaLnBrk="1" latinLnBrk="0" hangingPunct="1">
-              <a:lnSpc>
-                <a:spcPct val="90000"/>
-              </a:lnSpc>
-              <a:spcBef>
-                <a:spcPts val="500"/>
-              </a:spcBef>
-              <a:buFont typeface="Arial" panose="020B0604020202020204" pitchFamily="34" charset="0"/>
-              <a:buChar char="•"/>
-              <a:defRPr sz="1800" kern="1200">
-                <a:solidFill>
-                  <a:schemeClr val="tx1"/>
-                </a:solidFill>
-                <a:latin typeface="+mn-lt"/>
-                <a:ea typeface="+mn-ea"/>
-                <a:cs typeface="+mn-cs"/>
-              </a:defRPr>
-            </a:lvl9pPr>
-          </a:lstStyle>
-          <a:p>
-            <a:pPr marL="0" indent="0">
               <a:buNone/>
             </a:pPr>
             <a:r>
-              <a:rPr lang="zh-CN" altLang="en-US">
-                <a:solidFill>
-                  <a:schemeClr val="tx1"/>
-                </a:solidFill>
-                <a:latin typeface="微软雅黑" panose="020B0503020204020204" charset="-122"/>
-                <a:ea typeface="微软雅黑" panose="020B0503020204020204" charset="-122"/>
-                <a:cs typeface="微软雅黑" panose="020B0503020204020204" charset="-122"/>
-              </a:rPr>
-              <a:t>目前，已在本地</a:t>
-            </a:r>
-            <a:r>
-              <a:rPr lang="en-US" altLang="zh-CN">
+              <a:rPr lang="zh-CN" altLang="en-US" sz="2400" b="1">
+                <a:solidFill>
+                  <a:srgbClr val="C00000"/>
+                </a:solidFill>
+                <a:latin typeface="微软雅黑" panose="020B0503020204020204" charset="-122"/>
+                <a:ea typeface="微软雅黑" panose="020B0503020204020204" charset="-122"/>
+                <a:cs typeface="微软雅黑" panose="020B0503020204020204" charset="-122"/>
+              </a:rPr>
+              <a:t>项目目标：</a:t>
+            </a:r>
+            <a:endParaRPr lang="zh-CN" altLang="en-US" sz="2400" b="1">
+              <a:solidFill>
+                <a:srgbClr val="C00000"/>
+              </a:solidFill>
+              <a:latin typeface="微软雅黑" panose="020B0503020204020204" charset="-122"/>
+              <a:ea typeface="微软雅黑" panose="020B0503020204020204" charset="-122"/>
+              <a:cs typeface="微软雅黑" panose="020B0503020204020204" charset="-122"/>
+            </a:endParaRPr>
+          </a:p>
+          <a:p>
+            <a:pPr marL="0" indent="0" algn="l">
+              <a:lnSpc>
+                <a:spcPct val="130000"/>
+              </a:lnSpc>
+              <a:buNone/>
+            </a:pPr>
+            <a:r>
+              <a:rPr lang="en-US" altLang="zh-CN" sz="2400">
+                <a:solidFill>
+                  <a:schemeClr val="tx1"/>
+                </a:solidFill>
+                <a:latin typeface="微软雅黑" panose="020B0503020204020204" charset="-122"/>
+                <a:ea typeface="微软雅黑" panose="020B0503020204020204" charset="-122"/>
+                <a:cs typeface="微软雅黑" panose="020B0503020204020204" charset="-122"/>
+              </a:rPr>
+              <a:t>1. </a:t>
+            </a:r>
+            <a:r>
+              <a:rPr lang="zh-CN" altLang="en-US" sz="2400">
+                <a:solidFill>
+                  <a:schemeClr val="tx1"/>
+                </a:solidFill>
+                <a:latin typeface="微软雅黑" panose="020B0503020204020204" charset="-122"/>
+                <a:ea typeface="微软雅黑" panose="020B0503020204020204" charset="-122"/>
+                <a:cs typeface="微软雅黑" panose="020B0503020204020204" charset="-122"/>
+              </a:rPr>
+              <a:t>在</a:t>
+            </a:r>
+            <a:r>
+              <a:rPr lang="en-US" altLang="zh-CN" sz="2400">
                 <a:solidFill>
                   <a:schemeClr val="tx1"/>
                 </a:solidFill>
@@ -4847,182 +5695,83 @@
               <a:t> Rust </a:t>
             </a:r>
             <a:r>
-              <a:rPr lang="zh-CN" altLang="en-US">
-                <a:solidFill>
-                  <a:schemeClr val="tx1"/>
-                </a:solidFill>
-                <a:latin typeface="微软雅黑" panose="020B0503020204020204" charset="-122"/>
-                <a:ea typeface="微软雅黑" panose="020B0503020204020204" charset="-122"/>
-                <a:cs typeface="微软雅黑" panose="020B0503020204020204" charset="-122"/>
-              </a:rPr>
-              <a:t>分支上打通从类型定义、</a:t>
-            </a:r>
-            <a:r>
-              <a:rPr lang="en-US" altLang="zh-CN">
-                <a:solidFill>
-                  <a:schemeClr val="tx1"/>
-                </a:solidFill>
-                <a:latin typeface="微软雅黑" panose="020B0503020204020204" charset="-122"/>
-                <a:ea typeface="微软雅黑" panose="020B0503020204020204" charset="-122"/>
-                <a:cs typeface="微软雅黑" panose="020B0503020204020204" charset="-122"/>
-              </a:rPr>
-              <a:t>Intrinsics </a:t>
-            </a:r>
-            <a:r>
-              <a:rPr lang="zh-CN" altLang="en-US">
-                <a:solidFill>
-                  <a:schemeClr val="tx1"/>
-                </a:solidFill>
-                <a:latin typeface="微软雅黑" panose="020B0503020204020204" charset="-122"/>
-                <a:ea typeface="微软雅黑" panose="020B0503020204020204" charset="-122"/>
-                <a:cs typeface="微软雅黑" panose="020B0503020204020204" charset="-122"/>
-              </a:rPr>
-              <a:t>封装到编译全链路，核心</a:t>
-            </a:r>
-            <a:r>
-              <a:rPr lang="en-US" altLang="zh-CN">
-                <a:solidFill>
-                  <a:schemeClr val="tx1"/>
-                </a:solidFill>
-                <a:latin typeface="微软雅黑" panose="020B0503020204020204" charset="-122"/>
-                <a:ea typeface="微软雅黑" panose="020B0503020204020204" charset="-122"/>
-                <a:cs typeface="微软雅黑" panose="020B0503020204020204" charset="-122"/>
-              </a:rPr>
-              <a:t> SVE </a:t>
-            </a:r>
-            <a:r>
-              <a:rPr lang="zh-CN" altLang="en-US">
-                <a:solidFill>
-                  <a:schemeClr val="tx1"/>
-                </a:solidFill>
-                <a:latin typeface="微软雅黑" panose="020B0503020204020204" charset="-122"/>
-                <a:ea typeface="微软雅黑" panose="020B0503020204020204" charset="-122"/>
-                <a:cs typeface="微软雅黑" panose="020B0503020204020204" charset="-122"/>
-              </a:rPr>
-              <a:t>类型和</a:t>
-            </a:r>
-            <a:r>
-              <a:rPr lang="en-US" altLang="zh-CN">
-                <a:solidFill>
-                  <a:schemeClr val="tx1"/>
-                </a:solidFill>
-                <a:latin typeface="微软雅黑" panose="020B0503020204020204" charset="-122"/>
-                <a:ea typeface="微软雅黑" panose="020B0503020204020204" charset="-122"/>
-                <a:cs typeface="微软雅黑" panose="020B0503020204020204" charset="-122"/>
-              </a:rPr>
-              <a:t> 1852 </a:t>
-            </a:r>
-            <a:r>
-              <a:rPr lang="zh-CN" altLang="en-US">
-                <a:solidFill>
-                  <a:schemeClr val="tx1"/>
-                </a:solidFill>
-                <a:latin typeface="微软雅黑" panose="020B0503020204020204" charset="-122"/>
-                <a:ea typeface="微软雅黑" panose="020B0503020204020204" charset="-122"/>
-                <a:cs typeface="微软雅黑" panose="020B0503020204020204" charset="-122"/>
-              </a:rPr>
-              <a:t>个</a:t>
-            </a:r>
-            <a:r>
-              <a:rPr lang="en-US" altLang="zh-CN">
-                <a:solidFill>
-                  <a:schemeClr val="tx1"/>
-                </a:solidFill>
-                <a:latin typeface="微软雅黑" panose="020B0503020204020204" charset="-122"/>
-                <a:ea typeface="微软雅黑" panose="020B0503020204020204" charset="-122"/>
-                <a:cs typeface="微软雅黑" panose="020B0503020204020204" charset="-122"/>
-              </a:rPr>
-              <a:t> Intrinsics </a:t>
-            </a:r>
-            <a:r>
-              <a:rPr lang="zh-CN" altLang="en-US">
-                <a:solidFill>
-                  <a:schemeClr val="tx1"/>
-                </a:solidFill>
-                <a:latin typeface="微软雅黑" panose="020B0503020204020204" charset="-122"/>
-                <a:ea typeface="微软雅黑" panose="020B0503020204020204" charset="-122"/>
-                <a:cs typeface="微软雅黑" panose="020B0503020204020204" charset="-122"/>
-              </a:rPr>
-              <a:t>已完成集成，相关编译错误全部解决，测试代码可以顺利通过编译生成</a:t>
-            </a:r>
-            <a:r>
-              <a:rPr lang="en-US" altLang="zh-CN">
-                <a:solidFill>
-                  <a:schemeClr val="tx1"/>
-                </a:solidFill>
-                <a:latin typeface="微软雅黑" panose="020B0503020204020204" charset="-122"/>
-                <a:ea typeface="微软雅黑" panose="020B0503020204020204" charset="-122"/>
-                <a:cs typeface="微软雅黑" panose="020B0503020204020204" charset="-122"/>
-              </a:rPr>
-              <a:t>IR</a:t>
-            </a:r>
-            <a:r>
-              <a:rPr lang="zh-CN" altLang="en-US">
-                <a:solidFill>
-                  <a:schemeClr val="tx1"/>
-                </a:solidFill>
-                <a:latin typeface="微软雅黑" panose="020B0503020204020204" charset="-122"/>
-                <a:ea typeface="微软雅黑" panose="020B0503020204020204" charset="-122"/>
-                <a:cs typeface="微软雅黑" panose="020B0503020204020204" charset="-122"/>
-              </a:rPr>
-              <a:t>文件。相应工作已提交</a:t>
-            </a:r>
-            <a:r>
-              <a:rPr lang="en-US" altLang="zh-CN">
-                <a:solidFill>
-                  <a:schemeClr val="tx1"/>
-                </a:solidFill>
-                <a:latin typeface="微软雅黑" panose="020B0503020204020204" charset="-122"/>
-                <a:ea typeface="微软雅黑" panose="020B0503020204020204" charset="-122"/>
-                <a:cs typeface="微软雅黑" panose="020B0503020204020204" charset="-122"/>
-              </a:rPr>
-              <a:t>PR</a:t>
-            </a:r>
-            <a:r>
-              <a:rPr lang="zh-CN" altLang="en-US">
-                <a:solidFill>
-                  <a:schemeClr val="tx1"/>
-                </a:solidFill>
-                <a:latin typeface="微软雅黑" panose="020B0503020204020204" charset="-122"/>
-                <a:ea typeface="微软雅黑" panose="020B0503020204020204" charset="-122"/>
-                <a:cs typeface="微软雅黑" panose="020B0503020204020204" charset="-122"/>
-              </a:rPr>
-              <a:t>到</a:t>
-            </a:r>
-            <a:r>
-              <a:rPr lang="en-US" altLang="zh-CN">
-                <a:solidFill>
-                  <a:schemeClr val="tx1"/>
-                </a:solidFill>
-                <a:latin typeface="微软雅黑" panose="020B0503020204020204" charset="-122"/>
-                <a:ea typeface="微软雅黑" panose="020B0503020204020204" charset="-122"/>
-                <a:cs typeface="微软雅黑" panose="020B0503020204020204" charset="-122"/>
-              </a:rPr>
-              <a:t>Rust</a:t>
-            </a:r>
-            <a:r>
-              <a:rPr lang="zh-CN" altLang="en-US">
-                <a:solidFill>
-                  <a:schemeClr val="tx1"/>
-                </a:solidFill>
-                <a:latin typeface="微软雅黑" panose="020B0503020204020204" charset="-122"/>
-                <a:ea typeface="微软雅黑" panose="020B0503020204020204" charset="-122"/>
-                <a:cs typeface="微软雅黑" panose="020B0503020204020204" charset="-122"/>
-              </a:rPr>
-              <a:t>社区：</a:t>
-            </a:r>
-            <a:r>
-              <a:rPr lang="en-US" altLang="zh-CN">
-                <a:solidFill>
-                  <a:schemeClr val="tx1"/>
-                </a:solidFill>
-                <a:latin typeface="微软雅黑" panose="020B0503020204020204" charset="-122"/>
-                <a:ea typeface="微软雅黑" panose="020B0503020204020204" charset="-122"/>
-                <a:cs typeface="微软雅黑" panose="020B0503020204020204" charset="-122"/>
-              </a:rPr>
-              <a:t>Integrate Arm SVE types and intrinsics into stdarch by GWTINYC · Pull Request #2 · davidtwco/rust</a:t>
-            </a:r>
-            <a:endParaRPr lang="en-US" altLang="zh-CN">
+              <a:rPr lang="zh-CN" altLang="en-US" sz="2400">
+                <a:solidFill>
+                  <a:schemeClr val="tx1"/>
+                </a:solidFill>
+                <a:latin typeface="微软雅黑" panose="020B0503020204020204" charset="-122"/>
+                <a:ea typeface="微软雅黑" panose="020B0503020204020204" charset="-122"/>
+                <a:cs typeface="微软雅黑" panose="020B0503020204020204" charset="-122"/>
+              </a:rPr>
+              <a:t>的</a:t>
+            </a:r>
+            <a:r>
+              <a:rPr lang="en-US" altLang="zh-CN" sz="2400">
+                <a:solidFill>
+                  <a:schemeClr val="tx1"/>
+                </a:solidFill>
+                <a:latin typeface="微软雅黑" panose="020B0503020204020204" charset="-122"/>
+                <a:ea typeface="微软雅黑" panose="020B0503020204020204" charset="-122"/>
+                <a:cs typeface="微软雅黑" panose="020B0503020204020204" charset="-122"/>
+              </a:rPr>
+              <a:t> stdarch </a:t>
+            </a:r>
+            <a:r>
+              <a:rPr lang="zh-CN" altLang="en-US" sz="2400">
+                <a:solidFill>
+                  <a:schemeClr val="tx1"/>
+                </a:solidFill>
+                <a:latin typeface="微软雅黑" panose="020B0503020204020204" charset="-122"/>
+                <a:ea typeface="微软雅黑" panose="020B0503020204020204" charset="-122"/>
+                <a:cs typeface="微软雅黑" panose="020B0503020204020204" charset="-122"/>
+              </a:rPr>
+              <a:t>框架中完整接入</a:t>
+            </a:r>
+            <a:r>
+              <a:rPr lang="en-US" altLang="zh-CN" sz="2400">
+                <a:solidFill>
+                  <a:schemeClr val="tx1"/>
+                </a:solidFill>
+                <a:latin typeface="微软雅黑" panose="020B0503020204020204" charset="-122"/>
+                <a:ea typeface="微软雅黑" panose="020B0503020204020204" charset="-122"/>
+                <a:cs typeface="微软雅黑" panose="020B0503020204020204" charset="-122"/>
+              </a:rPr>
+              <a:t> Aarch64 SVE/SVE2 (Scalable Vector Extension)</a:t>
+            </a:r>
+            <a:r>
+              <a:rPr lang="zh-CN" altLang="en-US" sz="2400">
+                <a:solidFill>
+                  <a:schemeClr val="tx1"/>
+                </a:solidFill>
+                <a:latin typeface="微软雅黑" panose="020B0503020204020204" charset="-122"/>
+                <a:ea typeface="微软雅黑" panose="020B0503020204020204" charset="-122"/>
+                <a:cs typeface="微软雅黑" panose="020B0503020204020204" charset="-122"/>
+              </a:rPr>
+              <a:t>的可扩展向量类型和对应</a:t>
+            </a:r>
+            <a:r>
+              <a:rPr lang="en-US" altLang="zh-CN" sz="2400">
+                <a:solidFill>
+                  <a:schemeClr val="tx1"/>
+                </a:solidFill>
+                <a:latin typeface="微软雅黑" panose="020B0503020204020204" charset="-122"/>
+                <a:ea typeface="微软雅黑" panose="020B0503020204020204" charset="-122"/>
+                <a:cs typeface="微软雅黑" panose="020B0503020204020204" charset="-122"/>
+              </a:rPr>
+              <a:t> Intrinsics</a:t>
+            </a:r>
+            <a:r>
+              <a:rPr lang="zh-CN" altLang="en-US" sz="2400">
+                <a:solidFill>
+                  <a:schemeClr val="tx1"/>
+                </a:solidFill>
+                <a:latin typeface="微软雅黑" panose="020B0503020204020204" charset="-122"/>
+                <a:ea typeface="微软雅黑" panose="020B0503020204020204" charset="-122"/>
+                <a:cs typeface="微软雅黑" panose="020B0503020204020204" charset="-122"/>
+              </a:rPr>
+              <a:t>。</a:t>
+            </a:r>
+            <a:endParaRPr lang="zh-CN" altLang="en-US" sz="2400">
               <a:solidFill>
                 <a:schemeClr val="tx1"/>
               </a:solidFill>
@@ -5031,35 +5780,159 @@
               <a:cs typeface="微软雅黑" panose="020B0503020204020204" charset="-122"/>
             </a:endParaRPr>
           </a:p>
+          <a:p>
+            <a:pPr marL="0" indent="0" algn="l">
+              <a:lnSpc>
+                <a:spcPct val="130000"/>
+              </a:lnSpc>
+              <a:buNone/>
+            </a:pPr>
+            <a:r>
+              <a:rPr lang="en-US" altLang="zh-CN" sz="2400">
+                <a:solidFill>
+                  <a:schemeClr val="tx1"/>
+                </a:solidFill>
+                <a:latin typeface="微软雅黑" panose="020B0503020204020204" charset="-122"/>
+                <a:ea typeface="微软雅黑" panose="020B0503020204020204" charset="-122"/>
+                <a:cs typeface="微软雅黑" panose="020B0503020204020204" charset="-122"/>
+              </a:rPr>
+              <a:t>2. </a:t>
+            </a:r>
+            <a:r>
+              <a:rPr lang="zh-CN" altLang="en-US" sz="2400">
+                <a:solidFill>
+                  <a:schemeClr val="tx1"/>
+                </a:solidFill>
+                <a:latin typeface="微软雅黑" panose="020B0503020204020204" charset="-122"/>
+                <a:ea typeface="微软雅黑" panose="020B0503020204020204" charset="-122"/>
+                <a:cs typeface="微软雅黑" panose="020B0503020204020204" charset="-122"/>
+              </a:rPr>
+              <a:t>使编译器在</a:t>
+            </a:r>
+            <a:r>
+              <a:rPr lang="en-US" altLang="zh-CN" sz="2400">
+                <a:solidFill>
+                  <a:schemeClr val="tx1"/>
+                </a:solidFill>
+                <a:latin typeface="微软雅黑" panose="020B0503020204020204" charset="-122"/>
+                <a:ea typeface="微软雅黑" panose="020B0503020204020204" charset="-122"/>
+                <a:cs typeface="微软雅黑" panose="020B0503020204020204" charset="-122"/>
+              </a:rPr>
+              <a:t> AArch64 </a:t>
+            </a:r>
+            <a:r>
+              <a:rPr lang="zh-CN" altLang="en-US" sz="2400">
+                <a:solidFill>
+                  <a:schemeClr val="tx1"/>
+                </a:solidFill>
+                <a:latin typeface="微软雅黑" panose="020B0503020204020204" charset="-122"/>
+                <a:ea typeface="微软雅黑" panose="020B0503020204020204" charset="-122"/>
+                <a:cs typeface="微软雅黑" panose="020B0503020204020204" charset="-122"/>
+              </a:rPr>
+              <a:t>目标上能够正确处理</a:t>
+            </a:r>
+            <a:r>
+              <a:rPr lang="en-US" altLang="zh-CN" sz="2400" b="1">
+                <a:solidFill>
+                  <a:srgbClr val="C00000"/>
+                </a:solidFill>
+                <a:latin typeface="微软雅黑" panose="020B0503020204020204" charset="-122"/>
+                <a:ea typeface="微软雅黑" panose="020B0503020204020204" charset="-122"/>
+                <a:cs typeface="微软雅黑" panose="020B0503020204020204" charset="-122"/>
+              </a:rPr>
+              <a:t>[rustc_scalable_vector(N)] </a:t>
+            </a:r>
+            <a:r>
+              <a:rPr lang="zh-CN" altLang="en-US" sz="2400">
+                <a:solidFill>
+                  <a:schemeClr val="tx1"/>
+                </a:solidFill>
+                <a:latin typeface="微软雅黑" panose="020B0503020204020204" charset="-122"/>
+                <a:ea typeface="微软雅黑" panose="020B0503020204020204" charset="-122"/>
+                <a:cs typeface="微软雅黑" panose="020B0503020204020204" charset="-122"/>
+              </a:rPr>
+              <a:t>这类</a:t>
+            </a:r>
+            <a:r>
+              <a:rPr lang="en-US" altLang="zh-CN" sz="2400">
+                <a:solidFill>
+                  <a:schemeClr val="tx1"/>
+                </a:solidFill>
+                <a:latin typeface="微软雅黑" panose="020B0503020204020204" charset="-122"/>
+                <a:ea typeface="微软雅黑" panose="020B0503020204020204" charset="-122"/>
+                <a:cs typeface="微软雅黑" panose="020B0503020204020204" charset="-122"/>
+              </a:rPr>
+              <a:t> SVE </a:t>
+            </a:r>
+            <a:r>
+              <a:rPr lang="zh-CN" altLang="en-US" sz="2400">
+                <a:solidFill>
+                  <a:schemeClr val="tx1"/>
+                </a:solidFill>
+                <a:latin typeface="微软雅黑" panose="020B0503020204020204" charset="-122"/>
+                <a:ea typeface="微软雅黑" panose="020B0503020204020204" charset="-122"/>
+                <a:cs typeface="微软雅黑" panose="020B0503020204020204" charset="-122"/>
+              </a:rPr>
+              <a:t>可扩展向量类型，并在标准库中对外提供稳定的</a:t>
+            </a:r>
+            <a:r>
+              <a:rPr lang="en-US" altLang="zh-CN" sz="2400">
+                <a:solidFill>
+                  <a:schemeClr val="tx1"/>
+                </a:solidFill>
+                <a:latin typeface="微软雅黑" panose="020B0503020204020204" charset="-122"/>
+                <a:ea typeface="微软雅黑" panose="020B0503020204020204" charset="-122"/>
+                <a:cs typeface="微软雅黑" panose="020B0503020204020204" charset="-122"/>
+              </a:rPr>
+              <a:t> SVE </a:t>
+            </a:r>
+            <a:r>
+              <a:rPr lang="zh-CN" altLang="en-US" sz="2400">
+                <a:solidFill>
+                  <a:schemeClr val="tx1"/>
+                </a:solidFill>
+                <a:latin typeface="微软雅黑" panose="020B0503020204020204" charset="-122"/>
+                <a:ea typeface="微软雅黑" panose="020B0503020204020204" charset="-122"/>
+                <a:cs typeface="微软雅黑" panose="020B0503020204020204" charset="-122"/>
+              </a:rPr>
+              <a:t>类型与</a:t>
+            </a:r>
+            <a:r>
+              <a:rPr lang="en-US" altLang="zh-CN" sz="2400">
+                <a:solidFill>
+                  <a:schemeClr val="tx1"/>
+                </a:solidFill>
+                <a:latin typeface="微软雅黑" panose="020B0503020204020204" charset="-122"/>
+                <a:ea typeface="微软雅黑" panose="020B0503020204020204" charset="-122"/>
+                <a:cs typeface="微软雅黑" panose="020B0503020204020204" charset="-122"/>
+              </a:rPr>
+              <a:t> Intrinsics API</a:t>
+            </a:r>
+            <a:r>
+              <a:rPr lang="zh-CN" altLang="en-US" sz="2400">
+                <a:solidFill>
+                  <a:schemeClr val="tx1"/>
+                </a:solidFill>
+                <a:latin typeface="微软雅黑" panose="020B0503020204020204" charset="-122"/>
+                <a:ea typeface="微软雅黑" panose="020B0503020204020204" charset="-122"/>
+                <a:cs typeface="微软雅黑" panose="020B0503020204020204" charset="-122"/>
+              </a:rPr>
+              <a:t>。</a:t>
+            </a:r>
+            <a:endParaRPr lang="zh-CN" altLang="en-US" sz="2400">
+              <a:solidFill>
+                <a:schemeClr val="tx1"/>
+              </a:solidFill>
+              <a:latin typeface="微软雅黑" panose="020B0503020204020204" charset="-122"/>
+              <a:ea typeface="微软雅黑" panose="020B0503020204020204" charset="-122"/>
+              <a:cs typeface="微软雅黑" panose="020B0503020204020204" charset="-122"/>
+            </a:endParaRPr>
+          </a:p>
         </p:txBody>
       </p:sp>
-      <p:pic>
-        <p:nvPicPr>
-          <p:cNvPr id="7" name="图片 6"/>
-          <p:cNvPicPr>
-            <a:picLocks noChangeAspect="1"/>
-          </p:cNvPicPr>
-          <p:nvPr/>
-        </p:nvPicPr>
-        <p:blipFill>
-          <a:blip r:embed="rId4"/>
-          <a:stretch>
-            <a:fillRect/>
-          </a:stretch>
-        </p:blipFill>
-        <p:spPr>
-          <a:xfrm>
-            <a:off x="6536055" y="2788920"/>
-            <a:ext cx="4510405" cy="3709670"/>
-          </a:xfrm>
-          <a:prstGeom prst="rect">
-            <a:avLst/>
-          </a:prstGeom>
-        </p:spPr>
-      </p:pic>
     </p:spTree>
     <p:custDataLst>
-      <p:tags r:id="rId5"/>
+      <p:tags r:id="rId3"/>
     </p:custDataLst>
   </p:cSld>
   <p:clrMapOvr>
@@ -5096,15 +5969,12 @@
           <a:bodyPr/>
           <a:p>
             <a:r>
-              <a:rPr lang="zh-CN" altLang="en-US">
-                <a:solidFill>
-                  <a:schemeClr val="tx1"/>
-                </a:solidFill>
+              <a:rPr lang="zh-CN" altLang="en-US" b="1">
                 <a:sym typeface="+mn-ea"/>
               </a:rPr>
-              <a:t>二、当前社区进展</a:t>
-            </a:r>
-            <a:endParaRPr lang="zh-CN" altLang="en-US"/>
+              <a:t>一、项目概况</a:t>
+            </a:r>
+            <a:endParaRPr lang="zh-CN" altLang="en-US" b="1"/>
           </a:p>
         </p:txBody>
       </p:sp>
@@ -5124,7 +5994,7 @@
         <p:spPr>
           <a:xfrm>
             <a:off x="608330" y="1490345"/>
-            <a:ext cx="10968990" cy="1668780"/>
+            <a:ext cx="6725920" cy="648970"/>
           </a:xfrm>
         </p:spPr>
         <p:txBody>
@@ -5134,52 +6004,52 @@
               <a:buNone/>
             </a:pPr>
             <a:r>
-              <a:rPr lang="en-US" altLang="zh-CN">
-                <a:solidFill>
-                  <a:schemeClr val="tx1"/>
-                </a:solidFill>
-                <a:latin typeface="微软雅黑" panose="020B0503020204020204" charset="-122"/>
-                <a:ea typeface="微软雅黑" panose="020B0503020204020204" charset="-122"/>
-                <a:cs typeface="微软雅黑" panose="020B0503020204020204" charset="-122"/>
-              </a:rPr>
-              <a:t>1. Rust </a:t>
-            </a:r>
-            <a:r>
-              <a:rPr lang="zh-CN" altLang="en-US">
-                <a:solidFill>
-                  <a:schemeClr val="tx1"/>
-                </a:solidFill>
-                <a:latin typeface="微软雅黑" panose="020B0503020204020204" charset="-122"/>
-                <a:ea typeface="微软雅黑" panose="020B0503020204020204" charset="-122"/>
-                <a:cs typeface="微软雅黑" panose="020B0503020204020204" charset="-122"/>
-              </a:rPr>
-              <a:t>官方已将</a:t>
-            </a:r>
-            <a:r>
-              <a:rPr lang="en-US" altLang="zh-CN">
-                <a:solidFill>
-                  <a:schemeClr val="tx1"/>
-                </a:solidFill>
-                <a:latin typeface="微软雅黑" panose="020B0503020204020204" charset="-122"/>
-                <a:ea typeface="微软雅黑" panose="020B0503020204020204" charset="-122"/>
-                <a:cs typeface="微软雅黑" panose="020B0503020204020204" charset="-122"/>
-              </a:rPr>
-              <a:t> SVE/SME </a:t>
-            </a:r>
-            <a:r>
-              <a:rPr lang="zh-CN" altLang="en-US">
-                <a:solidFill>
-                  <a:schemeClr val="tx1"/>
-                </a:solidFill>
-                <a:latin typeface="微软雅黑" panose="020B0503020204020204" charset="-122"/>
-                <a:ea typeface="微软雅黑" panose="020B0503020204020204" charset="-122"/>
-                <a:cs typeface="微软雅黑" panose="020B0503020204020204" charset="-122"/>
-              </a:rPr>
-              <a:t>确立为项目级目标</a:t>
-            </a:r>
-            <a:endParaRPr lang="zh-CN" altLang="en-US">
+              <a:rPr lang="en-US" altLang="zh-CN" sz="2400" b="1">
+                <a:solidFill>
+                  <a:srgbClr val="C00000"/>
+                </a:solidFill>
+                <a:latin typeface="微软雅黑" panose="020B0503020204020204" charset="-122"/>
+                <a:ea typeface="微软雅黑" panose="020B0503020204020204" charset="-122"/>
+                <a:cs typeface="微软雅黑" panose="020B0503020204020204" charset="-122"/>
+              </a:rPr>
+              <a:t>Rust </a:t>
+            </a:r>
+            <a:r>
+              <a:rPr lang="zh-CN" altLang="en-US" sz="2400" b="1">
+                <a:solidFill>
+                  <a:srgbClr val="C00000"/>
+                </a:solidFill>
+                <a:latin typeface="微软雅黑" panose="020B0503020204020204" charset="-122"/>
+                <a:ea typeface="微软雅黑" panose="020B0503020204020204" charset="-122"/>
+                <a:cs typeface="微软雅黑" panose="020B0503020204020204" charset="-122"/>
+              </a:rPr>
+              <a:t>社区对</a:t>
+            </a:r>
+            <a:r>
+              <a:rPr lang="en-US" altLang="zh-CN" sz="2400" b="1">
+                <a:solidFill>
+                  <a:srgbClr val="C00000"/>
+                </a:solidFill>
+                <a:latin typeface="微软雅黑" panose="020B0503020204020204" charset="-122"/>
+                <a:ea typeface="微软雅黑" panose="020B0503020204020204" charset="-122"/>
+                <a:cs typeface="微软雅黑" panose="020B0503020204020204" charset="-122"/>
+              </a:rPr>
+              <a:t> SVE </a:t>
+            </a:r>
+            <a:r>
+              <a:rPr lang="zh-CN" altLang="en-US" sz="2400" b="1">
+                <a:solidFill>
+                  <a:srgbClr val="C00000"/>
+                </a:solidFill>
+                <a:latin typeface="微软雅黑" panose="020B0503020204020204" charset="-122"/>
+                <a:ea typeface="微软雅黑" panose="020B0503020204020204" charset="-122"/>
+                <a:cs typeface="微软雅黑" panose="020B0503020204020204" charset="-122"/>
+              </a:rPr>
+              <a:t>的整体推进情况：</a:t>
+            </a:r>
+            <a:endParaRPr lang="zh-CN" altLang="en-US" sz="2400" b="1">
               <a:solidFill>
-                <a:schemeClr val="tx1"/>
+                <a:srgbClr val="C00000"/>
               </a:solidFill>
               <a:latin typeface="微软雅黑" panose="020B0503020204020204" charset="-122"/>
               <a:ea typeface="微软雅黑" panose="020B0503020204020204" charset="-122"/>
@@ -5202,17 +6072,15 @@
         </p:nvSpPr>
         <p:spPr>
           <a:xfrm>
-            <a:off x="608330" y="2880995"/>
-            <a:ext cx="7865110" cy="2065655"/>
+            <a:off x="476885" y="2139315"/>
+            <a:ext cx="11100435" cy="4309745"/>
           </a:xfrm>
           <a:prstGeom prst="rect">
             <a:avLst/>
           </a:prstGeom>
         </p:spPr>
         <p:txBody>
-          <a:bodyPr vert="horz" lIns="90000" tIns="46800" rIns="90000" bIns="46800" rtlCol="0">
-            <a:normAutofit fontScale="80000"/>
-          </a:bodyPr>
+          <a:bodyPr vert="horz" lIns="90000" tIns="46800" rIns="90000" bIns="46800" rtlCol="0"/>
           <a:lstStyle>
             <a:lvl1pPr marL="228600" indent="-228600" algn="l" defTabSz="914400" rtl="0" eaLnBrk="1" fontAlgn="auto" latinLnBrk="0" hangingPunct="1">
               <a:lnSpc>
@@ -5419,44 +6287,344 @@
             </a:lvl9pPr>
           </a:lstStyle>
           <a:p>
-            <a:pPr marL="0" indent="0">
-              <a:buNone/>
+            <a:pPr>
+              <a:spcBef>
+                <a:spcPts val="1500"/>
+              </a:spcBef>
+              <a:spcAft>
+                <a:spcPts val="1500"/>
+              </a:spcAft>
+              <a:buFont typeface="Wingdings" panose="05000000000000000000" charset="0"/>
+              <a:buChar char="Ø"/>
             </a:pPr>
             <a:r>
-              <a:rPr lang="zh-CN" altLang="en-US">
-                <a:solidFill>
-                  <a:schemeClr val="tx1"/>
-                </a:solidFill>
-                <a:latin typeface="微软雅黑" panose="020B0503020204020204" charset="-122"/>
-                <a:ea typeface="微软雅黑" panose="020B0503020204020204" charset="-122"/>
-                <a:cs typeface="微软雅黑" panose="020B0503020204020204" charset="-122"/>
-              </a:rPr>
-              <a:t>早期</a:t>
-            </a:r>
-            <a:r>
-              <a:rPr lang="en-US" altLang="zh-CN">
-                <a:solidFill>
-                  <a:schemeClr val="tx1"/>
-                </a:solidFill>
-                <a:latin typeface="微软雅黑" panose="020B0503020204020204" charset="-122"/>
-                <a:ea typeface="微软雅黑" panose="020B0503020204020204" charset="-122"/>
-                <a:cs typeface="微软雅黑" panose="020B0503020204020204" charset="-122"/>
-              </a:rPr>
-              <a:t> RFC 3268 </a:t>
-            </a:r>
-            <a:r>
-              <a:rPr lang="zh-CN" altLang="en-US">
-                <a:solidFill>
-                  <a:schemeClr val="tx1"/>
-                </a:solidFill>
-                <a:latin typeface="微软雅黑" panose="020B0503020204020204" charset="-122"/>
-                <a:ea typeface="微软雅黑" panose="020B0503020204020204" charset="-122"/>
-                <a:cs typeface="微软雅黑" panose="020B0503020204020204" charset="-122"/>
-              </a:rPr>
-              <a:t>已经被废弃，社区转向</a:t>
-            </a:r>
-            <a:r>
-              <a:rPr lang="en-US" altLang="zh-CN">
+              <a:rPr lang="en-US" altLang="zh-CN" sz="2000">
+                <a:solidFill>
+                  <a:schemeClr val="tx1"/>
+                </a:solidFill>
+                <a:latin typeface="微软雅黑" panose="020B0503020204020204" charset="-122"/>
+                <a:ea typeface="微软雅黑" panose="020B0503020204020204" charset="-122"/>
+                <a:cs typeface="微软雅黑" panose="020B0503020204020204" charset="-122"/>
+              </a:rPr>
+              <a:t>SVE </a:t>
+            </a:r>
+            <a:r>
+              <a:rPr lang="zh-CN" altLang="en-US" sz="2000">
+                <a:solidFill>
+                  <a:schemeClr val="tx1"/>
+                </a:solidFill>
+                <a:latin typeface="微软雅黑" panose="020B0503020204020204" charset="-122"/>
+                <a:ea typeface="微软雅黑" panose="020B0503020204020204" charset="-122"/>
+                <a:cs typeface="微软雅黑" panose="020B0503020204020204" charset="-122"/>
+              </a:rPr>
+              <a:t>项目级目标：</a:t>
+            </a:r>
+            <a:r>
+              <a:rPr lang="en-US" altLang="zh-CN" sz="2000">
+                <a:solidFill>
+                  <a:schemeClr val="tx1"/>
+                </a:solidFill>
+                <a:latin typeface="微软雅黑" panose="020B0503020204020204" charset="-122"/>
+                <a:ea typeface="微软雅黑" panose="020B0503020204020204" charset="-122"/>
+                <a:cs typeface="微软雅黑" panose="020B0503020204020204" charset="-122"/>
+              </a:rPr>
+              <a:t>2025 </a:t>
+            </a:r>
+            <a:r>
+              <a:rPr lang="zh-CN" altLang="en-US" sz="2000">
+                <a:solidFill>
+                  <a:schemeClr val="tx1"/>
+                </a:solidFill>
+                <a:latin typeface="微软雅黑" panose="020B0503020204020204" charset="-122"/>
+                <a:ea typeface="微软雅黑" panose="020B0503020204020204" charset="-122"/>
+                <a:cs typeface="微软雅黑" panose="020B0503020204020204" charset="-122"/>
+              </a:rPr>
+              <a:t>年官方将</a:t>
+            </a:r>
+            <a:r>
+              <a:rPr lang="en-US" altLang="zh-CN" sz="2000">
+                <a:solidFill>
+                  <a:schemeClr val="tx1"/>
+                </a:solidFill>
+                <a:latin typeface="微软雅黑" panose="020B0503020204020204" charset="-122"/>
+                <a:ea typeface="微软雅黑" panose="020B0503020204020204" charset="-122"/>
+                <a:cs typeface="微软雅黑" panose="020B0503020204020204" charset="-122"/>
+              </a:rPr>
+              <a:t> “AArch64 </a:t>
+            </a:r>
+            <a:r>
+              <a:rPr lang="zh-CN" altLang="en-US" sz="2000">
+                <a:solidFill>
+                  <a:schemeClr val="tx1"/>
+                </a:solidFill>
+                <a:latin typeface="微软雅黑" panose="020B0503020204020204" charset="-122"/>
+                <a:ea typeface="微软雅黑" panose="020B0503020204020204" charset="-122"/>
+                <a:cs typeface="微软雅黑" panose="020B0503020204020204" charset="-122"/>
+              </a:rPr>
+              <a:t>上的</a:t>
+            </a:r>
+            <a:r>
+              <a:rPr lang="en-US" altLang="zh-CN" sz="2000">
+                <a:solidFill>
+                  <a:schemeClr val="tx1"/>
+                </a:solidFill>
+                <a:latin typeface="微软雅黑" panose="020B0503020204020204" charset="-122"/>
+                <a:ea typeface="微软雅黑" panose="020B0503020204020204" charset="-122"/>
+                <a:cs typeface="微软雅黑" panose="020B0503020204020204" charset="-122"/>
+              </a:rPr>
+              <a:t> SVE/SME </a:t>
+            </a:r>
+            <a:r>
+              <a:rPr lang="zh-CN" altLang="en-US" sz="2000">
+                <a:solidFill>
+                  <a:schemeClr val="tx1"/>
+                </a:solidFill>
+                <a:latin typeface="微软雅黑" panose="020B0503020204020204" charset="-122"/>
+                <a:ea typeface="微软雅黑" panose="020B0503020204020204" charset="-122"/>
+                <a:cs typeface="微软雅黑" panose="020B0503020204020204" charset="-122"/>
+              </a:rPr>
+              <a:t>与可扩展向量</a:t>
+            </a:r>
+            <a:r>
+              <a:rPr lang="en-US" altLang="zh-CN" sz="2000">
+                <a:solidFill>
+                  <a:schemeClr val="tx1"/>
+                </a:solidFill>
+                <a:latin typeface="微软雅黑" panose="020B0503020204020204" charset="-122"/>
+                <a:ea typeface="微软雅黑" panose="020B0503020204020204" charset="-122"/>
+                <a:cs typeface="微软雅黑" panose="020B0503020204020204" charset="-122"/>
+              </a:rPr>
+              <a:t>” </a:t>
+            </a:r>
+            <a:r>
+              <a:rPr lang="zh-CN" altLang="en-US" sz="2000">
+                <a:solidFill>
+                  <a:schemeClr val="tx1"/>
+                </a:solidFill>
+                <a:latin typeface="微软雅黑" panose="020B0503020204020204" charset="-122"/>
+                <a:ea typeface="微软雅黑" panose="020B0503020204020204" charset="-122"/>
+                <a:cs typeface="微软雅黑" panose="020B0503020204020204" charset="-122"/>
+              </a:rPr>
+              <a:t>列为重点目标，推进</a:t>
+            </a:r>
+            <a:r>
+              <a:rPr lang="en-US" altLang="zh-CN" sz="2000">
+                <a:solidFill>
+                  <a:schemeClr val="tx1"/>
+                </a:solidFill>
+                <a:latin typeface="微软雅黑" panose="020B0503020204020204" charset="-122"/>
+                <a:ea typeface="微软雅黑" panose="020B0503020204020204" charset="-122"/>
+                <a:cs typeface="微软雅黑" panose="020B0503020204020204" charset="-122"/>
+              </a:rPr>
+              <a:t> nightly </a:t>
+            </a:r>
+            <a:r>
+              <a:rPr lang="zh-CN" altLang="en-US" sz="2000">
+                <a:solidFill>
+                  <a:schemeClr val="tx1"/>
+                </a:solidFill>
+                <a:latin typeface="微软雅黑" panose="020B0503020204020204" charset="-122"/>
+                <a:ea typeface="微软雅黑" panose="020B0503020204020204" charset="-122"/>
+                <a:cs typeface="微软雅黑" panose="020B0503020204020204" charset="-122"/>
+              </a:rPr>
+              <a:t>实验类型、</a:t>
+            </a:r>
+            <a:r>
+              <a:rPr lang="en-US" altLang="zh-CN" sz="2000">
+                <a:solidFill>
+                  <a:schemeClr val="tx1"/>
+                </a:solidFill>
+                <a:latin typeface="微软雅黑" panose="020B0503020204020204" charset="-122"/>
+                <a:ea typeface="微软雅黑" panose="020B0503020204020204" charset="-122"/>
+                <a:cs typeface="微软雅黑" panose="020B0503020204020204" charset="-122"/>
+              </a:rPr>
+              <a:t>stdarch Intrinsics </a:t>
+            </a:r>
+            <a:r>
+              <a:rPr lang="zh-CN" altLang="en-US" sz="2000">
+                <a:solidFill>
+                  <a:schemeClr val="tx1"/>
+                </a:solidFill>
+                <a:latin typeface="微软雅黑" panose="020B0503020204020204" charset="-122"/>
+                <a:ea typeface="微软雅黑" panose="020B0503020204020204" charset="-122"/>
+                <a:cs typeface="微软雅黑" panose="020B0503020204020204" charset="-122"/>
+              </a:rPr>
+              <a:t>及通用可扩展向量基础设施。</a:t>
+            </a:r>
+            <a:endParaRPr lang="en-US" altLang="zh-CN" sz="2000">
+              <a:solidFill>
+                <a:schemeClr val="tx1"/>
+              </a:solidFill>
+              <a:latin typeface="微软雅黑" panose="020B0503020204020204" charset="-122"/>
+              <a:ea typeface="微软雅黑" panose="020B0503020204020204" charset="-122"/>
+              <a:cs typeface="微软雅黑" panose="020B0503020204020204" charset="-122"/>
+            </a:endParaRPr>
+          </a:p>
+          <a:p>
+            <a:pPr>
+              <a:spcBef>
+                <a:spcPts val="1500"/>
+              </a:spcBef>
+              <a:spcAft>
+                <a:spcPts val="1500"/>
+              </a:spcAft>
+              <a:buFont typeface="Wingdings" panose="05000000000000000000" charset="0"/>
+              <a:buChar char="Ø"/>
+            </a:pPr>
+            <a:r>
+              <a:rPr lang="en-US" altLang="zh-CN" sz="2000">
+                <a:solidFill>
+                  <a:schemeClr val="tx1"/>
+                </a:solidFill>
+                <a:latin typeface="微软雅黑" panose="020B0503020204020204" charset="-122"/>
+                <a:ea typeface="微软雅黑" panose="020B0503020204020204" charset="-122"/>
+                <a:cs typeface="微软雅黑" panose="020B0503020204020204" charset="-122"/>
+              </a:rPr>
+              <a:t>Sized Trait Hierarchy </a:t>
+            </a:r>
+            <a:r>
+              <a:rPr lang="zh-CN" altLang="en-US" sz="2000">
+                <a:solidFill>
+                  <a:schemeClr val="tx1"/>
+                </a:solidFill>
+                <a:latin typeface="微软雅黑" panose="020B0503020204020204" charset="-122"/>
+                <a:ea typeface="微软雅黑" panose="020B0503020204020204" charset="-122"/>
+                <a:cs typeface="微软雅黑" panose="020B0503020204020204" charset="-122"/>
+              </a:rPr>
+              <a:t>基础设施：基于</a:t>
+            </a:r>
+            <a:r>
+              <a:rPr lang="en-US" altLang="zh-CN" sz="2000">
+                <a:solidFill>
+                  <a:schemeClr val="tx1"/>
+                </a:solidFill>
+                <a:latin typeface="微软雅黑" panose="020B0503020204020204" charset="-122"/>
+                <a:ea typeface="微软雅黑" panose="020B0503020204020204" charset="-122"/>
+                <a:cs typeface="微软雅黑" panose="020B0503020204020204" charset="-122"/>
+              </a:rPr>
+              <a:t> RFC 3729 </a:t>
+            </a:r>
+            <a:r>
+              <a:rPr lang="zh-CN" altLang="en-US" sz="2000">
+                <a:solidFill>
+                  <a:schemeClr val="tx1"/>
+                </a:solidFill>
+                <a:latin typeface="微软雅黑" panose="020B0503020204020204" charset="-122"/>
+                <a:ea typeface="微软雅黑" panose="020B0503020204020204" charset="-122"/>
+                <a:cs typeface="微软雅黑" panose="020B0503020204020204" charset="-122"/>
+              </a:rPr>
+              <a:t>的</a:t>
+            </a:r>
+            <a:r>
+              <a:rPr lang="en-US" altLang="zh-CN" sz="2000">
+                <a:solidFill>
+                  <a:schemeClr val="tx1"/>
+                </a:solidFill>
+                <a:latin typeface="微软雅黑" panose="020B0503020204020204" charset="-122"/>
+                <a:ea typeface="微软雅黑" panose="020B0503020204020204" charset="-122"/>
+                <a:cs typeface="微软雅黑" panose="020B0503020204020204" charset="-122"/>
+              </a:rPr>
+              <a:t> Sized </a:t>
+            </a:r>
+            <a:r>
+              <a:rPr lang="zh-CN" altLang="en-US" sz="2000">
+                <a:solidFill>
+                  <a:schemeClr val="tx1"/>
+                </a:solidFill>
+                <a:latin typeface="微软雅黑" panose="020B0503020204020204" charset="-122"/>
+                <a:ea typeface="微软雅黑" panose="020B0503020204020204" charset="-122"/>
+                <a:cs typeface="微软雅黑" panose="020B0503020204020204" charset="-122"/>
+              </a:rPr>
+              <a:t>层级已进入实验实现阶段，作为支持可扩展向量等</a:t>
+            </a:r>
+            <a:r>
+              <a:rPr lang="en-US" altLang="zh-CN" sz="2000">
+                <a:solidFill>
+                  <a:schemeClr val="tx1"/>
+                </a:solidFill>
+                <a:latin typeface="微软雅黑" panose="020B0503020204020204" charset="-122"/>
+                <a:ea typeface="微软雅黑" panose="020B0503020204020204" charset="-122"/>
+                <a:cs typeface="微软雅黑" panose="020B0503020204020204" charset="-122"/>
+              </a:rPr>
+              <a:t>“</a:t>
+            </a:r>
+            <a:r>
+              <a:rPr lang="zh-CN" altLang="en-US" sz="2000">
+                <a:solidFill>
+                  <a:schemeClr val="tx1"/>
+                </a:solidFill>
+                <a:latin typeface="微软雅黑" panose="020B0503020204020204" charset="-122"/>
+                <a:ea typeface="微软雅黑" panose="020B0503020204020204" charset="-122"/>
+                <a:cs typeface="微软雅黑" panose="020B0503020204020204" charset="-122"/>
+              </a:rPr>
+              <a:t>非常规尺寸类型</a:t>
+            </a:r>
+            <a:r>
+              <a:rPr lang="en-US" altLang="zh-CN" sz="2000">
+                <a:solidFill>
+                  <a:schemeClr val="tx1"/>
+                </a:solidFill>
+                <a:latin typeface="微软雅黑" panose="020B0503020204020204" charset="-122"/>
+                <a:ea typeface="微软雅黑" panose="020B0503020204020204" charset="-122"/>
+                <a:cs typeface="微软雅黑" panose="020B0503020204020204" charset="-122"/>
+              </a:rPr>
+              <a:t>”</a:t>
+            </a:r>
+            <a:r>
+              <a:rPr lang="zh-CN" altLang="en-US" sz="2000">
+                <a:solidFill>
+                  <a:schemeClr val="tx1"/>
+                </a:solidFill>
+                <a:latin typeface="微软雅黑" panose="020B0503020204020204" charset="-122"/>
+                <a:ea typeface="微软雅黑" panose="020B0503020204020204" charset="-122"/>
+                <a:cs typeface="微软雅黑" panose="020B0503020204020204" charset="-122"/>
+              </a:rPr>
+              <a:t>的关键类型系统基础。</a:t>
+            </a:r>
+            <a:endParaRPr lang="en-US" altLang="zh-CN" sz="2000">
+              <a:solidFill>
+                <a:schemeClr val="tx1"/>
+              </a:solidFill>
+              <a:latin typeface="微软雅黑" panose="020B0503020204020204" charset="-122"/>
+              <a:ea typeface="微软雅黑" panose="020B0503020204020204" charset="-122"/>
+              <a:cs typeface="微软雅黑" panose="020B0503020204020204" charset="-122"/>
+            </a:endParaRPr>
+          </a:p>
+          <a:p>
+            <a:pPr>
+              <a:spcBef>
+                <a:spcPts val="1500"/>
+              </a:spcBef>
+              <a:spcAft>
+                <a:spcPts val="1500"/>
+              </a:spcAft>
+              <a:buFont typeface="Wingdings" panose="05000000000000000000" charset="0"/>
+              <a:buChar char="Ø"/>
+            </a:pPr>
+            <a:r>
+              <a:rPr lang="en-US" altLang="zh-CN" sz="2000">
+                <a:solidFill>
+                  <a:schemeClr val="tx1"/>
+                </a:solidFill>
+                <a:latin typeface="微软雅黑" panose="020B0503020204020204" charset="-122"/>
+                <a:ea typeface="微软雅黑" panose="020B0503020204020204" charset="-122"/>
+                <a:cs typeface="微软雅黑" panose="020B0503020204020204" charset="-122"/>
+              </a:rPr>
+              <a:t>Scalable Vectors </a:t>
+            </a:r>
+            <a:r>
+              <a:rPr lang="zh-CN" altLang="en-US" sz="2000">
+                <a:solidFill>
+                  <a:schemeClr val="tx1"/>
+                </a:solidFill>
+                <a:latin typeface="微软雅黑" panose="020B0503020204020204" charset="-122"/>
+                <a:ea typeface="微软雅黑" panose="020B0503020204020204" charset="-122"/>
+                <a:cs typeface="微软雅黑" panose="020B0503020204020204" charset="-122"/>
+              </a:rPr>
+              <a:t>表示：社区以</a:t>
+            </a:r>
+            <a:r>
+              <a:rPr lang="en-US" altLang="zh-CN" sz="2000">
                 <a:solidFill>
                   <a:schemeClr val="tx1"/>
                 </a:solidFill>
@@ -5467,18 +6635,18 @@
               <a:t> RFC 3838 + #[rustc_scalable_vector(N)] </a:t>
             </a:r>
             <a:r>
-              <a:rPr lang="zh-CN" altLang="en-US">
-                <a:solidFill>
-                  <a:schemeClr val="tx1"/>
-                </a:solidFill>
-                <a:latin typeface="微软雅黑" panose="020B0503020204020204" charset="-122"/>
-                <a:ea typeface="微软雅黑" panose="020B0503020204020204" charset="-122"/>
-                <a:cs typeface="微软雅黑" panose="020B0503020204020204" charset="-122"/>
-              </a:rPr>
-              <a:t>内部属性</a:t>
-            </a:r>
-            <a:r>
-              <a:rPr lang="en-US" altLang="zh-CN">
+              <a:rPr lang="zh-CN" altLang="en-US" sz="2000">
+                <a:solidFill>
+                  <a:schemeClr val="tx1"/>
+                </a:solidFill>
+                <a:latin typeface="微软雅黑" panose="020B0503020204020204" charset="-122"/>
+                <a:ea typeface="微软雅黑" panose="020B0503020204020204" charset="-122"/>
+                <a:cs typeface="微软雅黑" panose="020B0503020204020204" charset="-122"/>
+              </a:rPr>
+              <a:t>为方向，提出</a:t>
+            </a:r>
+            <a:r>
+              <a:rPr lang="en-US" altLang="zh-CN" sz="2000">
                 <a:solidFill>
                   <a:schemeClr val="tx1"/>
                 </a:solidFill>
@@ -5489,73 +6657,30 @@
               <a:t> </a:t>
             </a:r>
             <a:r>
-              <a:rPr lang="zh-CN" altLang="en-US">
-                <a:solidFill>
-                  <a:schemeClr val="tx1"/>
-                </a:solidFill>
-                <a:latin typeface="微软雅黑" panose="020B0503020204020204" charset="-122"/>
-                <a:ea typeface="微软雅黑" panose="020B0503020204020204" charset="-122"/>
-                <a:cs typeface="微软雅黑" panose="020B0503020204020204" charset="-122"/>
-              </a:rPr>
-              <a:t>的方案，避免在语言层面直接暴露</a:t>
-            </a:r>
-            <a:r>
-              <a:rPr lang="en-US" altLang="zh-CN">
-                <a:solidFill>
-                  <a:schemeClr val="tx1"/>
-                </a:solidFill>
-                <a:latin typeface="微软雅黑" panose="020B0503020204020204" charset="-122"/>
-                <a:ea typeface="微软雅黑" panose="020B0503020204020204" charset="-122"/>
-                <a:cs typeface="微软雅黑" panose="020B0503020204020204" charset="-122"/>
-              </a:rPr>
-              <a:t> LLVM vscale </a:t>
-            </a:r>
-            <a:r>
-              <a:rPr lang="zh-CN" altLang="en-US">
-                <a:solidFill>
-                  <a:schemeClr val="tx1"/>
-                </a:solidFill>
-                <a:latin typeface="微软雅黑" panose="020B0503020204020204" charset="-122"/>
-                <a:ea typeface="微软雅黑" panose="020B0503020204020204" charset="-122"/>
-                <a:cs typeface="微软雅黑" panose="020B0503020204020204" charset="-122"/>
-              </a:rPr>
-              <a:t>细节。在</a:t>
-            </a:r>
-            <a:r>
-              <a:rPr lang="en-US" altLang="zh-CN">
-                <a:solidFill>
-                  <a:schemeClr val="tx1"/>
-                </a:solidFill>
-                <a:latin typeface="微软雅黑" panose="020B0503020204020204" charset="-122"/>
-                <a:ea typeface="微软雅黑" panose="020B0503020204020204" charset="-122"/>
-                <a:cs typeface="微软雅黑" panose="020B0503020204020204" charset="-122"/>
-              </a:rPr>
-              <a:t> 2025 </a:t>
-            </a:r>
-            <a:r>
-              <a:rPr lang="zh-CN" altLang="en-US">
-                <a:solidFill>
-                  <a:schemeClr val="tx1"/>
-                </a:solidFill>
-                <a:latin typeface="微软雅黑" panose="020B0503020204020204" charset="-122"/>
-                <a:ea typeface="微软雅黑" panose="020B0503020204020204" charset="-122"/>
-                <a:cs typeface="微软雅黑" panose="020B0503020204020204" charset="-122"/>
-              </a:rPr>
-              <a:t>年立项</a:t>
-            </a:r>
-            <a:r>
-              <a:rPr lang="en-US" altLang="zh-CN">
-                <a:solidFill>
-                  <a:schemeClr val="tx1"/>
-                </a:solidFill>
-                <a:latin typeface="微软雅黑" panose="020B0503020204020204" charset="-122"/>
-                <a:ea typeface="微软雅黑" panose="020B0503020204020204" charset="-122"/>
-                <a:cs typeface="微软雅黑" panose="020B0503020204020204" charset="-122"/>
-              </a:rPr>
-              <a:t> Tracking Issue #145052</a:t>
-            </a:r>
-            <a:r>
-              <a:rPr lang="zh-CN" altLang="en-US">
+              <a:rPr lang="en-US" altLang="zh-CN" sz="2000">
+                <a:solidFill>
+                  <a:schemeClr val="tx1"/>
+                </a:solidFill>
+                <a:latin typeface="微软雅黑" panose="020B0503020204020204" charset="-122"/>
+                <a:ea typeface="微软雅黑" panose="020B0503020204020204" charset="-122"/>
+                <a:cs typeface="微软雅黑" panose="020B0503020204020204" charset="-122"/>
+                <a:sym typeface="+mn-ea"/>
+              </a:rPr>
+              <a:t>Tracking Issue </a:t>
+            </a:r>
+            <a:r>
+              <a:rPr lang="en-US" altLang="zh-CN" sz="2000">
+                <a:solidFill>
+                  <a:schemeClr val="tx1"/>
+                </a:solidFill>
+                <a:latin typeface="微软雅黑" panose="020B0503020204020204" charset="-122"/>
+                <a:ea typeface="微软雅黑" panose="020B0503020204020204" charset="-122"/>
+                <a:cs typeface="微软雅黑" panose="020B0503020204020204" charset="-122"/>
+              </a:rPr>
+              <a:t>#145052</a:t>
+            </a:r>
+            <a:r>
+              <a:rPr lang="zh-CN" altLang="en-US" sz="2000">
                 <a:solidFill>
                   <a:schemeClr val="tx1"/>
                 </a:solidFill>
@@ -5566,160 +6691,63 @@
               <a:t>，将</a:t>
             </a:r>
             <a:r>
-              <a:rPr lang="en-US" altLang="zh-CN">
-                <a:solidFill>
-                  <a:schemeClr val="tx1"/>
-                </a:solidFill>
-                <a:latin typeface="微软雅黑" panose="020B0503020204020204" charset="-122"/>
-                <a:ea typeface="微软雅黑" panose="020B0503020204020204" charset="-122"/>
-                <a:cs typeface="微软雅黑" panose="020B0503020204020204" charset="-122"/>
-              </a:rPr>
-              <a:t> “Scalable Vectors” </a:t>
-            </a:r>
-            <a:r>
-              <a:rPr lang="zh-CN" altLang="en-US">
-                <a:solidFill>
-                  <a:schemeClr val="tx1"/>
-                </a:solidFill>
-                <a:latin typeface="微软雅黑" panose="020B0503020204020204" charset="-122"/>
-                <a:ea typeface="微软雅黑" panose="020B0503020204020204" charset="-122"/>
-                <a:cs typeface="微软雅黑" panose="020B0503020204020204" charset="-122"/>
-              </a:rPr>
-              <a:t>作为独立项目推进，首要依赖正是</a:t>
-            </a:r>
-            <a:r>
-              <a:rPr lang="en-US" altLang="zh-CN">
-                <a:solidFill>
-                  <a:schemeClr val="tx1"/>
-                </a:solidFill>
-                <a:latin typeface="微软雅黑" panose="020B0503020204020204" charset="-122"/>
-                <a:ea typeface="微软雅黑" panose="020B0503020204020204" charset="-122"/>
-                <a:cs typeface="微软雅黑" panose="020B0503020204020204" charset="-122"/>
-              </a:rPr>
-              <a:t> Sized Hierarchy </a:t>
-            </a:r>
-            <a:r>
-              <a:rPr lang="zh-CN" altLang="en-US">
-                <a:solidFill>
-                  <a:schemeClr val="tx1"/>
-                </a:solidFill>
-                <a:latin typeface="微软雅黑" panose="020B0503020204020204" charset="-122"/>
-                <a:ea typeface="微软雅黑" panose="020B0503020204020204" charset="-122"/>
-                <a:cs typeface="微软雅黑" panose="020B0503020204020204" charset="-122"/>
-              </a:rPr>
-              <a:t>的稳定。当前已有实验性实现</a:t>
-            </a:r>
-            <a:r>
-              <a:rPr lang="en-US" altLang="zh-CN">
-                <a:solidFill>
-                  <a:schemeClr val="tx1"/>
-                </a:solidFill>
-                <a:latin typeface="微软雅黑" panose="020B0503020204020204" charset="-122"/>
-                <a:ea typeface="微软雅黑" panose="020B0503020204020204" charset="-122"/>
-                <a:cs typeface="微软雅黑" panose="020B0503020204020204" charset="-122"/>
-              </a:rPr>
-              <a:t> PR 143924 </a:t>
-            </a:r>
-            <a:r>
-              <a:rPr lang="zh-CN" altLang="en-US">
-                <a:solidFill>
-                  <a:schemeClr val="tx1"/>
-                </a:solidFill>
-                <a:latin typeface="微软雅黑" panose="020B0503020204020204" charset="-122"/>
-                <a:ea typeface="微软雅黑" panose="020B0503020204020204" charset="-122"/>
-                <a:cs typeface="微软雅黑" panose="020B0503020204020204" charset="-122"/>
-              </a:rPr>
-              <a:t>但尚未合并，接下来将对</a:t>
-            </a:r>
-            <a:r>
-              <a:rPr lang="en-US" altLang="zh-CN">
-                <a:solidFill>
-                  <a:schemeClr val="tx1"/>
-                </a:solidFill>
-                <a:latin typeface="微软雅黑" panose="020B0503020204020204" charset="-122"/>
-                <a:ea typeface="微软雅黑" panose="020B0503020204020204" charset="-122"/>
-                <a:cs typeface="微软雅黑" panose="020B0503020204020204" charset="-122"/>
-              </a:rPr>
-              <a:t> SVE/RVV </a:t>
-            </a:r>
-            <a:r>
-              <a:rPr lang="zh-CN" altLang="en-US">
-                <a:solidFill>
-                  <a:schemeClr val="tx1"/>
-                </a:solidFill>
-                <a:latin typeface="微软雅黑" panose="020B0503020204020204" charset="-122"/>
-                <a:ea typeface="微软雅黑" panose="020B0503020204020204" charset="-122"/>
-                <a:cs typeface="微软雅黑" panose="020B0503020204020204" charset="-122"/>
-              </a:rPr>
-              <a:t>的不稳定</a:t>
-            </a:r>
-            <a:r>
-              <a:rPr lang="en-US" altLang="zh-CN">
-                <a:solidFill>
-                  <a:schemeClr val="tx1"/>
-                </a:solidFill>
-                <a:latin typeface="微软雅黑" panose="020B0503020204020204" charset="-122"/>
-                <a:ea typeface="微软雅黑" panose="020B0503020204020204" charset="-122"/>
-                <a:cs typeface="微软雅黑" panose="020B0503020204020204" charset="-122"/>
-              </a:rPr>
-              <a:t> intrinsics </a:t>
-            </a:r>
-            <a:r>
-              <a:rPr lang="zh-CN" altLang="en-US">
-                <a:solidFill>
-                  <a:schemeClr val="tx1"/>
-                </a:solidFill>
-                <a:latin typeface="微软雅黑" panose="020B0503020204020204" charset="-122"/>
-                <a:ea typeface="微软雅黑" panose="020B0503020204020204" charset="-122"/>
-                <a:cs typeface="微软雅黑" panose="020B0503020204020204" charset="-122"/>
-              </a:rPr>
-              <a:t>进行试验，在验证</a:t>
-            </a:r>
-            <a:r>
-              <a:rPr lang="en-US" altLang="zh-CN">
-                <a:solidFill>
-                  <a:schemeClr val="tx1"/>
-                </a:solidFill>
-                <a:latin typeface="微软雅黑" panose="020B0503020204020204" charset="-122"/>
-                <a:ea typeface="微软雅黑" panose="020B0503020204020204" charset="-122"/>
-                <a:cs typeface="微软雅黑" panose="020B0503020204020204" charset="-122"/>
-              </a:rPr>
-              <a:t> target_feature </a:t>
-            </a:r>
-            <a:r>
-              <a:rPr lang="zh-CN" altLang="en-US">
-                <a:solidFill>
-                  <a:schemeClr val="tx1"/>
-                </a:solidFill>
-                <a:latin typeface="微软雅黑" panose="020B0503020204020204" charset="-122"/>
-                <a:ea typeface="微软雅黑" panose="020B0503020204020204" charset="-122"/>
-                <a:cs typeface="微软雅黑" panose="020B0503020204020204" charset="-122"/>
-              </a:rPr>
-              <a:t>交互、</a:t>
-            </a:r>
-            <a:r>
-              <a:rPr lang="en-US" altLang="zh-CN">
-                <a:solidFill>
-                  <a:schemeClr val="tx1"/>
-                </a:solidFill>
-                <a:latin typeface="微软雅黑" panose="020B0503020204020204" charset="-122"/>
-                <a:ea typeface="微软雅黑" panose="020B0503020204020204" charset="-122"/>
-                <a:cs typeface="微软雅黑" panose="020B0503020204020204" charset="-122"/>
-              </a:rPr>
-              <a:t>FFI </a:t>
-            </a:r>
-            <a:r>
-              <a:rPr lang="zh-CN" altLang="en-US">
-                <a:solidFill>
-                  <a:schemeClr val="tx1"/>
-                </a:solidFill>
-                <a:latin typeface="微软雅黑" panose="020B0503020204020204" charset="-122"/>
-                <a:ea typeface="微软雅黑" panose="020B0503020204020204" charset="-122"/>
-                <a:cs typeface="微软雅黑" panose="020B0503020204020204" charset="-122"/>
-              </a:rPr>
-              <a:t>安全和复合类型语义后，再考虑对可伸缩向量表示进行正式稳定化。</a:t>
-            </a:r>
-            <a:endParaRPr lang="zh-CN" altLang="en-US">
+              <a:rPr lang="en-US" altLang="zh-CN" sz="2000">
+                <a:solidFill>
+                  <a:schemeClr val="tx1"/>
+                </a:solidFill>
+                <a:latin typeface="微软雅黑" panose="020B0503020204020204" charset="-122"/>
+                <a:ea typeface="微软雅黑" panose="020B0503020204020204" charset="-122"/>
+                <a:cs typeface="微软雅黑" panose="020B0503020204020204" charset="-122"/>
+                <a:sym typeface="+mn-ea"/>
+              </a:rPr>
+              <a:t>Scalable Vectors</a:t>
+            </a:r>
+            <a:r>
+              <a:rPr lang="zh-CN" altLang="en-US" sz="2000">
+                <a:solidFill>
+                  <a:schemeClr val="tx1"/>
+                </a:solidFill>
+                <a:latin typeface="微软雅黑" panose="020B0503020204020204" charset="-122"/>
+                <a:ea typeface="微软雅黑" panose="020B0503020204020204" charset="-122"/>
+                <a:cs typeface="微软雅黑" panose="020B0503020204020204" charset="-122"/>
+                <a:sym typeface="+mn-ea"/>
+              </a:rPr>
+              <a:t>作为独立项目推进，后续</a:t>
+            </a:r>
+            <a:r>
+              <a:rPr lang="zh-CN" altLang="en-US" sz="2000">
+                <a:solidFill>
+                  <a:schemeClr val="tx1"/>
+                </a:solidFill>
+                <a:latin typeface="微软雅黑" panose="020B0503020204020204" charset="-122"/>
+                <a:ea typeface="微软雅黑" panose="020B0503020204020204" charset="-122"/>
+                <a:cs typeface="微软雅黑" panose="020B0503020204020204" charset="-122"/>
+              </a:rPr>
+              <a:t>围绕</a:t>
+            </a:r>
+            <a:r>
+              <a:rPr lang="en-US" altLang="zh-CN" sz="2000">
+                <a:solidFill>
+                  <a:schemeClr val="tx1"/>
+                </a:solidFill>
+                <a:latin typeface="微软雅黑" panose="020B0503020204020204" charset="-122"/>
+                <a:ea typeface="微软雅黑" panose="020B0503020204020204" charset="-122"/>
+                <a:cs typeface="微软雅黑" panose="020B0503020204020204" charset="-122"/>
+              </a:rPr>
+              <a:t> SVE/RVV Intrinsics </a:t>
+            </a:r>
+            <a:r>
+              <a:rPr lang="zh-CN" altLang="en-US" sz="2000">
+                <a:solidFill>
+                  <a:schemeClr val="tx1"/>
+                </a:solidFill>
+                <a:latin typeface="微软雅黑" panose="020B0503020204020204" charset="-122"/>
+                <a:ea typeface="微软雅黑" panose="020B0503020204020204" charset="-122"/>
+                <a:cs typeface="微软雅黑" panose="020B0503020204020204" charset="-122"/>
+              </a:rPr>
+              <a:t>进行试验与稳定化设计。</a:t>
+            </a:r>
+            <a:endParaRPr lang="zh-CN" altLang="en-US" sz="2000">
               <a:solidFill>
                 <a:schemeClr val="tx1"/>
               </a:solidFill>
@@ -5769,66 +6797,180 @@
           <a:bodyPr/>
           <a:p>
             <a:r>
-              <a:rPr lang="zh-CN" altLang="en-US">
-                <a:solidFill>
-                  <a:schemeClr val="tx1"/>
-                </a:solidFill>
-                <a:sym typeface="+mn-ea"/>
-              </a:rPr>
-              <a:t>二、当前社区进展</a:t>
-            </a:r>
-            <a:endParaRPr lang="zh-CN" altLang="en-US"/>
+              <a:rPr lang="zh-CN" altLang="en-US" b="1"/>
+              <a:t>一、项目概况</a:t>
+            </a:r>
+            <a:endParaRPr lang="zh-CN" altLang="en-US" b="1"/>
           </a:p>
         </p:txBody>
       </p:sp>
+      <p:pic>
+        <p:nvPicPr>
+          <p:cNvPr id="7" name="图片 6"/>
+          <p:cNvPicPr>
+            <a:picLocks noChangeAspect="1"/>
+          </p:cNvPicPr>
+          <p:nvPr/>
+        </p:nvPicPr>
+        <p:blipFill>
+          <a:blip r:embed="rId2"/>
+          <a:stretch>
+            <a:fillRect/>
+          </a:stretch>
+        </p:blipFill>
+        <p:spPr>
+          <a:xfrm>
+            <a:off x="6970395" y="2995295"/>
+            <a:ext cx="4676775" cy="3749675"/>
+          </a:xfrm>
+          <a:prstGeom prst="rect">
+            <a:avLst/>
+          </a:prstGeom>
+          <a:ln>
+            <a:solidFill>
+              <a:schemeClr val="bg2"/>
+            </a:solidFill>
+          </a:ln>
+        </p:spPr>
+      </p:pic>
       <p:sp>
         <p:nvSpPr>
-          <p:cNvPr id="3" name="内容占位符 2"/>
-          <p:cNvSpPr>
-            <a:spLocks noGrp="1"/>
-          </p:cNvSpPr>
+          <p:cNvPr id="5" name="内容占位符 4"/>
+          <p:cNvSpPr/>
           <p:nvPr>
             <p:ph idx="1"/>
             <p:custDataLst>
-              <p:tags r:id="rId2"/>
+              <p:tags r:id="rId3"/>
             </p:custDataLst>
           </p:nvPr>
         </p:nvSpPr>
         <p:spPr>
           <a:xfrm>
-            <a:off x="608330" y="1490345"/>
-            <a:ext cx="10968990" cy="1668780"/>
+            <a:off x="381070" y="1194490"/>
+            <a:ext cx="10969200" cy="4759200"/>
           </a:xfrm>
         </p:spPr>
         <p:txBody>
           <a:bodyPr/>
           <a:p>
-            <a:pPr marL="0" indent="0">
-              <a:buNone/>
+            <a:pPr>
+              <a:lnSpc>
+                <a:spcPct val="150000"/>
+              </a:lnSpc>
+              <a:buFont typeface="Wingdings" panose="05000000000000000000" charset="0"/>
+              <a:buChar char="ü"/>
             </a:pPr>
             <a:r>
-              <a:rPr lang="en-US" altLang="zh-CN">
-                <a:solidFill>
-                  <a:schemeClr val="tx1"/>
-                </a:solidFill>
-                <a:latin typeface="微软雅黑" panose="020B0503020204020204" charset="-122"/>
-                <a:ea typeface="微软雅黑" panose="020B0503020204020204" charset="-122"/>
-                <a:cs typeface="微软雅黑" panose="020B0503020204020204" charset="-122"/>
-              </a:rPr>
-              <a:t>2. Sized Hierarchy </a:t>
-            </a:r>
-            <a:r>
-              <a:rPr lang="zh-CN" altLang="en-US">
-                <a:solidFill>
-                  <a:schemeClr val="tx1"/>
-                </a:solidFill>
-                <a:latin typeface="微软雅黑" panose="020B0503020204020204" charset="-122"/>
-                <a:ea typeface="微软雅黑" panose="020B0503020204020204" charset="-122"/>
-                <a:cs typeface="微软雅黑" panose="020B0503020204020204" charset="-122"/>
-              </a:rPr>
-              <a:t>的社区进展</a:t>
-            </a:r>
-            <a:endParaRPr lang="zh-CN" altLang="en-US">
+              <a:rPr lang="zh-CN" altLang="en-US" sz="2400" b="1">
+                <a:solidFill>
+                  <a:schemeClr val="tx1"/>
+                </a:solidFill>
+                <a:latin typeface="微软雅黑" panose="020B0503020204020204" charset="-122"/>
+                <a:ea typeface="微软雅黑" panose="020B0503020204020204" charset="-122"/>
+                <a:cs typeface="微软雅黑" panose="020B0503020204020204" charset="-122"/>
+              </a:rPr>
+              <a:t>类型与</a:t>
+            </a:r>
+            <a:r>
+              <a:rPr lang="en-US" altLang="zh-CN" sz="2400" b="1">
+                <a:solidFill>
+                  <a:schemeClr val="tx1"/>
+                </a:solidFill>
+                <a:latin typeface="微软雅黑" panose="020B0503020204020204" charset="-122"/>
+                <a:ea typeface="微软雅黑" panose="020B0503020204020204" charset="-122"/>
+                <a:cs typeface="微软雅黑" panose="020B0503020204020204" charset="-122"/>
+              </a:rPr>
+              <a:t> Intrinsics </a:t>
+            </a:r>
+            <a:r>
+              <a:rPr lang="zh-CN" altLang="en-US" sz="2400" b="1">
+                <a:solidFill>
+                  <a:schemeClr val="tx1"/>
+                </a:solidFill>
+                <a:latin typeface="微软雅黑" panose="020B0503020204020204" charset="-122"/>
+                <a:ea typeface="微软雅黑" panose="020B0503020204020204" charset="-122"/>
+                <a:cs typeface="微软雅黑" panose="020B0503020204020204" charset="-122"/>
+              </a:rPr>
+              <a:t>集成进度：</a:t>
+            </a:r>
+            <a:r>
+              <a:rPr lang="zh-CN" altLang="en-US" sz="2400">
+                <a:solidFill>
+                  <a:schemeClr val="tx1"/>
+                </a:solidFill>
+                <a:latin typeface="微软雅黑" panose="020B0503020204020204" charset="-122"/>
+                <a:ea typeface="微软雅黑" panose="020B0503020204020204" charset="-122"/>
+                <a:cs typeface="微软雅黑" panose="020B0503020204020204" charset="-122"/>
+              </a:rPr>
+              <a:t>核心</a:t>
+            </a:r>
+            <a:r>
+              <a:rPr lang="en-US" altLang="zh-CN" sz="2400">
+                <a:solidFill>
+                  <a:schemeClr val="tx1"/>
+                </a:solidFill>
+                <a:latin typeface="微软雅黑" panose="020B0503020204020204" charset="-122"/>
+                <a:ea typeface="微软雅黑" panose="020B0503020204020204" charset="-122"/>
+                <a:cs typeface="微软雅黑" panose="020B0503020204020204" charset="-122"/>
+              </a:rPr>
+              <a:t> SVE </a:t>
+            </a:r>
+            <a:r>
+              <a:rPr lang="zh-CN" altLang="en-US" sz="2400">
+                <a:solidFill>
+                  <a:schemeClr val="tx1"/>
+                </a:solidFill>
+                <a:latin typeface="微软雅黑" panose="020B0503020204020204" charset="-122"/>
+                <a:ea typeface="微软雅黑" panose="020B0503020204020204" charset="-122"/>
+                <a:cs typeface="微软雅黑" panose="020B0503020204020204" charset="-122"/>
+              </a:rPr>
+              <a:t>类型已全部接入，</a:t>
+            </a:r>
+            <a:r>
+              <a:rPr lang="en-US" altLang="zh-CN" sz="2400">
+                <a:solidFill>
+                  <a:schemeClr val="tx1"/>
+                </a:solidFill>
+                <a:latin typeface="微软雅黑" panose="020B0503020204020204" charset="-122"/>
+                <a:ea typeface="微软雅黑" panose="020B0503020204020204" charset="-122"/>
+                <a:cs typeface="微软雅黑" panose="020B0503020204020204" charset="-122"/>
+              </a:rPr>
+              <a:t>1852 </a:t>
+            </a:r>
+            <a:r>
+              <a:rPr lang="zh-CN" altLang="en-US" sz="2400">
+                <a:solidFill>
+                  <a:schemeClr val="tx1"/>
+                </a:solidFill>
+                <a:latin typeface="微软雅黑" panose="020B0503020204020204" charset="-122"/>
+                <a:ea typeface="微软雅黑" panose="020B0503020204020204" charset="-122"/>
+                <a:cs typeface="微软雅黑" panose="020B0503020204020204" charset="-122"/>
+              </a:rPr>
+              <a:t>个</a:t>
+            </a:r>
+            <a:r>
+              <a:rPr lang="en-US" altLang="zh-CN" sz="2400">
+                <a:solidFill>
+                  <a:schemeClr val="tx1"/>
+                </a:solidFill>
+                <a:latin typeface="微软雅黑" panose="020B0503020204020204" charset="-122"/>
+                <a:ea typeface="微软雅黑" panose="020B0503020204020204" charset="-122"/>
+                <a:cs typeface="微软雅黑" panose="020B0503020204020204" charset="-122"/>
+              </a:rPr>
+              <a:t> SVE/SVE2 Intrinsics </a:t>
+            </a:r>
+            <a:r>
+              <a:rPr lang="zh-CN" altLang="en-US" sz="2400">
+                <a:solidFill>
+                  <a:schemeClr val="tx1"/>
+                </a:solidFill>
+                <a:latin typeface="微软雅黑" panose="020B0503020204020204" charset="-122"/>
+                <a:ea typeface="微软雅黑" panose="020B0503020204020204" charset="-122"/>
+                <a:cs typeface="微软雅黑" panose="020B0503020204020204" charset="-122"/>
+              </a:rPr>
+              <a:t>已完成集成。</a:t>
+            </a:r>
+            <a:endParaRPr lang="zh-CN" altLang="en-US" sz="2400">
               <a:solidFill>
                 <a:schemeClr val="tx1"/>
               </a:solidFill>
@@ -5837,33 +6979,227 @@
               <a:cs typeface="微软雅黑" panose="020B0503020204020204" charset="-122"/>
             </a:endParaRPr>
           </a:p>
+          <a:p>
+            <a:pPr>
+              <a:lnSpc>
+                <a:spcPct val="150000"/>
+              </a:lnSpc>
+              <a:buFont typeface="Wingdings" panose="05000000000000000000" charset="0"/>
+              <a:buChar char="ü"/>
+            </a:pPr>
+            <a:r>
+              <a:rPr lang="zh-CN" altLang="en-US" sz="2400" b="1">
+                <a:solidFill>
+                  <a:schemeClr val="tx1"/>
+                </a:solidFill>
+                <a:latin typeface="微软雅黑" panose="020B0503020204020204" charset="-122"/>
+                <a:ea typeface="微软雅黑" panose="020B0503020204020204" charset="-122"/>
+                <a:cs typeface="微软雅黑" panose="020B0503020204020204" charset="-122"/>
+              </a:rPr>
+              <a:t>编译链路状态：</a:t>
+            </a:r>
+            <a:r>
+              <a:rPr lang="zh-CN" altLang="en-US" sz="2400">
+                <a:solidFill>
+                  <a:schemeClr val="tx1"/>
+                </a:solidFill>
+                <a:latin typeface="微软雅黑" panose="020B0503020204020204" charset="-122"/>
+                <a:ea typeface="微软雅黑" panose="020B0503020204020204" charset="-122"/>
+                <a:cs typeface="微软雅黑" panose="020B0503020204020204" charset="-122"/>
+              </a:rPr>
+              <a:t>从</a:t>
+            </a:r>
+            <a:r>
+              <a:rPr lang="zh-CN" altLang="en-US" sz="2400" b="1">
+                <a:solidFill>
+                  <a:srgbClr val="C00000"/>
+                </a:solidFill>
+                <a:latin typeface="微软雅黑" panose="020B0503020204020204" charset="-122"/>
+                <a:ea typeface="微软雅黑" panose="020B0503020204020204" charset="-122"/>
+                <a:cs typeface="微软雅黑" panose="020B0503020204020204" charset="-122"/>
+              </a:rPr>
+              <a:t>类型定义</a:t>
+            </a:r>
+            <a:r>
+              <a:rPr lang="en-US" altLang="zh-CN" sz="2400" b="1">
+                <a:solidFill>
+                  <a:srgbClr val="C00000"/>
+                </a:solidFill>
+                <a:latin typeface="微软雅黑" panose="020B0503020204020204" charset="-122"/>
+                <a:ea typeface="微软雅黑" panose="020B0503020204020204" charset="-122"/>
+                <a:cs typeface="微软雅黑" panose="020B0503020204020204" charset="-122"/>
+              </a:rPr>
+              <a:t> </a:t>
+            </a:r>
+            <a:r>
+              <a:rPr lang="en-US" altLang="en-US" sz="2400" b="1">
+                <a:solidFill>
+                  <a:srgbClr val="C00000"/>
+                </a:solidFill>
+                <a:latin typeface="微软雅黑" panose="020B0503020204020204" charset="-122"/>
+                <a:ea typeface="微软雅黑" panose="020B0503020204020204" charset="-122"/>
+                <a:cs typeface="微软雅黑" panose="020B0503020204020204" charset="-122"/>
+              </a:rPr>
+              <a:t>→</a:t>
+            </a:r>
+            <a:r>
+              <a:rPr lang="en-US" altLang="zh-CN" sz="2400" b="1">
+                <a:solidFill>
+                  <a:srgbClr val="C00000"/>
+                </a:solidFill>
+                <a:latin typeface="微软雅黑" panose="020B0503020204020204" charset="-122"/>
+                <a:ea typeface="微软雅黑" panose="020B0503020204020204" charset="-122"/>
+                <a:cs typeface="微软雅黑" panose="020B0503020204020204" charset="-122"/>
+              </a:rPr>
+              <a:t> Intrinsics </a:t>
+            </a:r>
+            <a:r>
+              <a:rPr lang="zh-CN" altLang="en-US" sz="2400" b="1">
+                <a:solidFill>
+                  <a:srgbClr val="C00000"/>
+                </a:solidFill>
+                <a:latin typeface="微软雅黑" panose="020B0503020204020204" charset="-122"/>
+                <a:ea typeface="微软雅黑" panose="020B0503020204020204" charset="-122"/>
+                <a:cs typeface="微软雅黑" panose="020B0503020204020204" charset="-122"/>
+              </a:rPr>
+              <a:t>封装</a:t>
+            </a:r>
+            <a:r>
+              <a:rPr lang="en-US" altLang="zh-CN" sz="2400" b="1">
+                <a:solidFill>
+                  <a:srgbClr val="C00000"/>
+                </a:solidFill>
+                <a:latin typeface="微软雅黑" panose="020B0503020204020204" charset="-122"/>
+                <a:ea typeface="微软雅黑" panose="020B0503020204020204" charset="-122"/>
+                <a:cs typeface="微软雅黑" panose="020B0503020204020204" charset="-122"/>
+              </a:rPr>
+              <a:t> </a:t>
+            </a:r>
+            <a:r>
+              <a:rPr lang="en-US" altLang="en-US" sz="2400" b="1">
+                <a:solidFill>
+                  <a:srgbClr val="C00000"/>
+                </a:solidFill>
+                <a:latin typeface="微软雅黑" panose="020B0503020204020204" charset="-122"/>
+                <a:ea typeface="微软雅黑" panose="020B0503020204020204" charset="-122"/>
+                <a:cs typeface="微软雅黑" panose="020B0503020204020204" charset="-122"/>
+              </a:rPr>
+              <a:t>→</a:t>
+            </a:r>
+            <a:r>
+              <a:rPr lang="en-US" altLang="zh-CN" sz="2400" b="1">
+                <a:solidFill>
+                  <a:srgbClr val="C00000"/>
+                </a:solidFill>
+                <a:latin typeface="微软雅黑" panose="020B0503020204020204" charset="-122"/>
+                <a:ea typeface="微软雅黑" panose="020B0503020204020204" charset="-122"/>
+                <a:cs typeface="微软雅黑" panose="020B0503020204020204" charset="-122"/>
+              </a:rPr>
+              <a:t> </a:t>
+            </a:r>
+            <a:r>
+              <a:rPr lang="zh-CN" altLang="zh-CN" sz="2400" b="1">
+                <a:solidFill>
+                  <a:srgbClr val="C00000"/>
+                </a:solidFill>
+                <a:latin typeface="微软雅黑" panose="020B0503020204020204" charset="-122"/>
+                <a:ea typeface="微软雅黑" panose="020B0503020204020204" charset="-122"/>
+                <a:cs typeface="微软雅黑" panose="020B0503020204020204" charset="-122"/>
+              </a:rPr>
+              <a:t>源码</a:t>
+            </a:r>
+            <a:r>
+              <a:rPr lang="zh-CN" altLang="en-US" sz="2400" b="1">
+                <a:solidFill>
+                  <a:srgbClr val="C00000"/>
+                </a:solidFill>
+                <a:latin typeface="微软雅黑" panose="020B0503020204020204" charset="-122"/>
+                <a:ea typeface="微软雅黑" panose="020B0503020204020204" charset="-122"/>
+                <a:cs typeface="微软雅黑" panose="020B0503020204020204" charset="-122"/>
+              </a:rPr>
+              <a:t>编译生成</a:t>
+            </a:r>
+            <a:r>
+              <a:rPr lang="en-US" altLang="zh-CN" sz="2400" b="1">
+                <a:solidFill>
+                  <a:srgbClr val="C00000"/>
+                </a:solidFill>
+                <a:latin typeface="微软雅黑" panose="020B0503020204020204" charset="-122"/>
+                <a:ea typeface="微软雅黑" panose="020B0503020204020204" charset="-122"/>
+                <a:cs typeface="微软雅黑" panose="020B0503020204020204" charset="-122"/>
+              </a:rPr>
+              <a:t> IR</a:t>
+            </a:r>
+            <a:r>
+              <a:rPr lang="en-US" altLang="zh-CN" sz="2400" b="1">
+                <a:solidFill>
+                  <a:srgbClr val="00B050"/>
+                </a:solidFill>
+                <a:latin typeface="微软雅黑" panose="020B0503020204020204" charset="-122"/>
+                <a:ea typeface="微软雅黑" panose="020B0503020204020204" charset="-122"/>
+                <a:cs typeface="微软雅黑" panose="020B0503020204020204" charset="-122"/>
+              </a:rPr>
+              <a:t> </a:t>
+            </a:r>
+            <a:r>
+              <a:rPr lang="zh-CN" altLang="en-US" sz="2400">
+                <a:solidFill>
+                  <a:schemeClr val="tx1"/>
+                </a:solidFill>
+                <a:latin typeface="微软雅黑" panose="020B0503020204020204" charset="-122"/>
+                <a:ea typeface="微软雅黑" panose="020B0503020204020204" charset="-122"/>
+                <a:cs typeface="微软雅黑" panose="020B0503020204020204" charset="-122"/>
+              </a:rPr>
+              <a:t>的链路已打通，相关编译错误已解决。</a:t>
+            </a:r>
+            <a:endParaRPr lang="zh-CN" altLang="en-US" sz="2400">
+              <a:solidFill>
+                <a:schemeClr val="tx1"/>
+              </a:solidFill>
+              <a:latin typeface="微软雅黑" panose="020B0503020204020204" charset="-122"/>
+              <a:ea typeface="微软雅黑" panose="020B0503020204020204" charset="-122"/>
+              <a:cs typeface="微软雅黑" panose="020B0503020204020204" charset="-122"/>
+            </a:endParaRPr>
+          </a:p>
+          <a:p>
+            <a:pPr>
+              <a:lnSpc>
+                <a:spcPct val="150000"/>
+              </a:lnSpc>
+            </a:pPr>
+            <a:endParaRPr lang="zh-CN" altLang="en-US" sz="2400">
+              <a:solidFill>
+                <a:schemeClr val="tx1"/>
+              </a:solidFill>
+              <a:latin typeface="微软雅黑" panose="020B0503020204020204" charset="-122"/>
+              <a:ea typeface="微软雅黑" panose="020B0503020204020204" charset="-122"/>
+              <a:cs typeface="微软雅黑" panose="020B0503020204020204" charset="-122"/>
+              <a:hlinkClick r:id="rId4" action="ppaction://hlinkfile"/>
+            </a:endParaRPr>
+          </a:p>
         </p:txBody>
       </p:sp>
       <p:sp>
         <p:nvSpPr>
-          <p:cNvPr id="4" name="内容占位符 2"/>
-          <p:cNvSpPr>
-            <a:spLocks noGrp="1"/>
-          </p:cNvSpPr>
+          <p:cNvPr id="8" name="内容占位符 4"/>
+          <p:cNvSpPr/>
           <p:nvPr>
             <p:custDataLst>
-              <p:tags r:id="rId3"/>
+              <p:tags r:id="rId5"/>
             </p:custDataLst>
           </p:nvPr>
         </p:nvSpPr>
         <p:spPr>
           <a:xfrm>
-            <a:off x="608330" y="2765425"/>
-            <a:ext cx="7706995" cy="2181225"/>
+            <a:off x="381000" y="3641725"/>
+            <a:ext cx="6856730" cy="2360295"/>
           </a:xfrm>
           <a:prstGeom prst="rect">
             <a:avLst/>
           </a:prstGeom>
         </p:spPr>
         <p:txBody>
-          <a:bodyPr vert="horz" lIns="90000" tIns="46800" rIns="90000" bIns="46800" rtlCol="0">
-            <a:normAutofit fontScale="90000"/>
-          </a:bodyPr>
+          <a:bodyPr vert="horz" lIns="90000" tIns="46800" rIns="90000" bIns="46800" rtlCol="0"/>
           <a:lstStyle>
             <a:lvl1pPr marL="228600" indent="-228600" algn="l" defTabSz="914400" rtl="0" eaLnBrk="1" fontAlgn="auto" latinLnBrk="0" hangingPunct="1">
               <a:lnSpc>
@@ -6070,274 +7406,62 @@
             </a:lvl9pPr>
           </a:lstStyle>
           <a:p>
-            <a:pPr marL="0" indent="0">
-              <a:buNone/>
+            <a:pPr>
+              <a:lnSpc>
+                <a:spcPct val="150000"/>
+              </a:lnSpc>
+              <a:buFont typeface="Wingdings" panose="05000000000000000000" charset="0"/>
+              <a:buChar char="ü"/>
             </a:pPr>
             <a:r>
-              <a:rPr lang="en-US" altLang="zh-CN">
-                <a:solidFill>
-                  <a:schemeClr val="tx1"/>
-                </a:solidFill>
-                <a:latin typeface="微软雅黑" panose="020B0503020204020204" charset="-122"/>
-                <a:ea typeface="微软雅黑" panose="020B0503020204020204" charset="-122"/>
-                <a:cs typeface="微软雅黑" panose="020B0503020204020204" charset="-122"/>
-              </a:rPr>
-              <a:t>Rust </a:t>
-            </a:r>
-            <a:r>
-              <a:rPr lang="zh-CN" altLang="en-US">
-                <a:solidFill>
-                  <a:schemeClr val="tx1"/>
-                </a:solidFill>
-                <a:latin typeface="微软雅黑" panose="020B0503020204020204" charset="-122"/>
-                <a:ea typeface="微软雅黑" panose="020B0503020204020204" charset="-122"/>
-                <a:cs typeface="微软雅黑" panose="020B0503020204020204" charset="-122"/>
-              </a:rPr>
-              <a:t>已经合并了</a:t>
-            </a:r>
-            <a:r>
-              <a:rPr lang="en-US" altLang="zh-CN">
-                <a:solidFill>
-                  <a:schemeClr val="tx1"/>
-                </a:solidFill>
-                <a:latin typeface="微软雅黑" panose="020B0503020204020204" charset="-122"/>
-                <a:ea typeface="微软雅黑" panose="020B0503020204020204" charset="-122"/>
-                <a:cs typeface="微软雅黑" panose="020B0503020204020204" charset="-122"/>
-              </a:rPr>
-              <a:t> RFC 3729 </a:t>
-            </a:r>
-            <a:r>
-              <a:rPr lang="zh-CN" altLang="en-US">
-                <a:solidFill>
-                  <a:schemeClr val="tx1"/>
-                </a:solidFill>
-                <a:latin typeface="微软雅黑" panose="020B0503020204020204" charset="-122"/>
-                <a:ea typeface="微软雅黑" panose="020B0503020204020204" charset="-122"/>
-                <a:cs typeface="微软雅黑" panose="020B0503020204020204" charset="-122"/>
-              </a:rPr>
-              <a:t>的第一阶段实现（</a:t>
-            </a:r>
-            <a:r>
-              <a:rPr lang="en-US" altLang="zh-CN">
-                <a:solidFill>
-                  <a:schemeClr val="tx1"/>
-                </a:solidFill>
-                <a:latin typeface="微软雅黑" panose="020B0503020204020204" charset="-122"/>
-                <a:ea typeface="微软雅黑" panose="020B0503020204020204" charset="-122"/>
-                <a:cs typeface="微软雅黑" panose="020B0503020204020204" charset="-122"/>
-              </a:rPr>
-              <a:t>PR 137944</a:t>
-            </a:r>
-            <a:r>
-              <a:rPr lang="zh-CN" altLang="en-US">
-                <a:solidFill>
-                  <a:schemeClr val="tx1"/>
-                </a:solidFill>
-                <a:latin typeface="微软雅黑" panose="020B0503020204020204" charset="-122"/>
-                <a:ea typeface="微软雅黑" panose="020B0503020204020204" charset="-122"/>
-                <a:cs typeface="微软雅黑" panose="020B0503020204020204" charset="-122"/>
-              </a:rPr>
-              <a:t>），通过</a:t>
-            </a:r>
-            <a:r>
-              <a:rPr lang="en-US" altLang="zh-CN">
-                <a:solidFill>
-                  <a:schemeClr val="tx1"/>
-                </a:solidFill>
-                <a:latin typeface="微软雅黑" panose="020B0503020204020204" charset="-122"/>
-                <a:ea typeface="微软雅黑" panose="020B0503020204020204" charset="-122"/>
-                <a:cs typeface="微软雅黑" panose="020B0503020204020204" charset="-122"/>
-              </a:rPr>
-              <a:t> MetaSized / PointeeSized </a:t>
-            </a:r>
-            <a:r>
-              <a:rPr lang="zh-CN" altLang="en-US">
-                <a:solidFill>
-                  <a:schemeClr val="tx1"/>
-                </a:solidFill>
-                <a:latin typeface="微软雅黑" panose="020B0503020204020204" charset="-122"/>
-                <a:ea typeface="微软雅黑" panose="020B0503020204020204" charset="-122"/>
-                <a:cs typeface="微软雅黑" panose="020B0503020204020204" charset="-122"/>
-              </a:rPr>
-              <a:t>扩展了</a:t>
-            </a:r>
-            <a:r>
-              <a:rPr lang="en-US" altLang="zh-CN">
-                <a:solidFill>
-                  <a:schemeClr val="tx1"/>
-                </a:solidFill>
-                <a:latin typeface="微软雅黑" panose="020B0503020204020204" charset="-122"/>
-                <a:ea typeface="微软雅黑" panose="020B0503020204020204" charset="-122"/>
-                <a:cs typeface="微软雅黑" panose="020B0503020204020204" charset="-122"/>
-              </a:rPr>
-              <a:t> Sized </a:t>
-            </a:r>
-            <a:r>
-              <a:rPr lang="zh-CN" altLang="en-US">
-                <a:solidFill>
-                  <a:schemeClr val="tx1"/>
-                </a:solidFill>
-                <a:latin typeface="微软雅黑" panose="020B0503020204020204" charset="-122"/>
-                <a:ea typeface="微软雅黑" panose="020B0503020204020204" charset="-122"/>
-                <a:cs typeface="微软雅黑" panose="020B0503020204020204" charset="-122"/>
-              </a:rPr>
-              <a:t>概念，并在</a:t>
-            </a:r>
-            <a:r>
-              <a:rPr lang="en-US" altLang="zh-CN">
-                <a:solidFill>
-                  <a:schemeClr val="tx1"/>
-                </a:solidFill>
-                <a:latin typeface="微软雅黑" panose="020B0503020204020204" charset="-122"/>
-                <a:ea typeface="微软雅黑" panose="020B0503020204020204" charset="-122"/>
-                <a:cs typeface="微软雅黑" panose="020B0503020204020204" charset="-122"/>
-              </a:rPr>
-              <a:t> 2025 </a:t>
-            </a:r>
-            <a:r>
-              <a:rPr lang="zh-CN" altLang="en-US">
-                <a:solidFill>
-                  <a:schemeClr val="tx1"/>
-                </a:solidFill>
-                <a:latin typeface="微软雅黑" panose="020B0503020204020204" charset="-122"/>
-                <a:ea typeface="微软雅黑" panose="020B0503020204020204" charset="-122"/>
-                <a:cs typeface="微软雅黑" panose="020B0503020204020204" charset="-122"/>
-              </a:rPr>
-              <a:t>年正式立项</a:t>
-            </a:r>
-            <a:r>
-              <a:rPr lang="en-US" altLang="zh-CN">
-                <a:solidFill>
-                  <a:schemeClr val="tx1"/>
-                </a:solidFill>
-                <a:latin typeface="微软雅黑" panose="020B0503020204020204" charset="-122"/>
-                <a:ea typeface="微软雅黑" panose="020B0503020204020204" charset="-122"/>
-                <a:cs typeface="微软雅黑" panose="020B0503020204020204" charset="-122"/>
-              </a:rPr>
-              <a:t>Tracking Issue #144404</a:t>
-            </a:r>
-            <a:r>
-              <a:rPr lang="zh-CN" altLang="en-US">
-                <a:solidFill>
-                  <a:schemeClr val="tx1"/>
-                </a:solidFill>
-                <a:latin typeface="微软雅黑" panose="020B0503020204020204" charset="-122"/>
-                <a:ea typeface="微软雅黑" panose="020B0503020204020204" charset="-122"/>
-                <a:cs typeface="微软雅黑" panose="020B0503020204020204" charset="-122"/>
-              </a:rPr>
-              <a:t>，将其纳入</a:t>
-            </a:r>
-            <a:r>
-              <a:rPr lang="en-US" altLang="zh-CN">
-                <a:solidFill>
-                  <a:schemeClr val="tx1"/>
-                </a:solidFill>
-                <a:latin typeface="微软雅黑" panose="020B0503020204020204" charset="-122"/>
-                <a:ea typeface="微软雅黑" panose="020B0503020204020204" charset="-122"/>
-                <a:cs typeface="微软雅黑" panose="020B0503020204020204" charset="-122"/>
-              </a:rPr>
-              <a:t> “Scalable Vectors” </a:t>
-            </a:r>
-            <a:r>
-              <a:rPr lang="zh-CN" altLang="en-US">
-                <a:solidFill>
-                  <a:schemeClr val="tx1"/>
-                </a:solidFill>
-                <a:latin typeface="微软雅黑" panose="020B0503020204020204" charset="-122"/>
-                <a:ea typeface="微软雅黑" panose="020B0503020204020204" charset="-122"/>
-                <a:cs typeface="微软雅黑" panose="020B0503020204020204" charset="-122"/>
-              </a:rPr>
-              <a:t>项目目标体系中。当前重点是修复已知回归、设计</a:t>
-            </a:r>
-            <a:r>
-              <a:rPr lang="en-US" altLang="zh-CN">
-                <a:solidFill>
-                  <a:schemeClr val="tx1"/>
-                </a:solidFill>
-                <a:latin typeface="微软雅黑" panose="020B0503020204020204" charset="-122"/>
-                <a:ea typeface="微软雅黑" panose="020B0503020204020204" charset="-122"/>
-                <a:cs typeface="微软雅黑" panose="020B0503020204020204" charset="-122"/>
-              </a:rPr>
-              <a:t> const </a:t>
-            </a:r>
-            <a:r>
-              <a:rPr lang="zh-CN" altLang="en-US">
-                <a:solidFill>
-                  <a:schemeClr val="tx1"/>
-                </a:solidFill>
-                <a:latin typeface="微软雅黑" panose="020B0503020204020204" charset="-122"/>
-                <a:ea typeface="微软雅黑" panose="020B0503020204020204" charset="-122"/>
-                <a:cs typeface="微软雅黑" panose="020B0503020204020204" charset="-122"/>
-              </a:rPr>
-              <a:t>语义并处理</a:t>
-            </a:r>
-            <a:r>
-              <a:rPr lang="en-US" altLang="zh-CN">
-                <a:solidFill>
-                  <a:schemeClr val="tx1"/>
-                </a:solidFill>
-                <a:latin typeface="微软雅黑" panose="020B0503020204020204" charset="-122"/>
-                <a:ea typeface="微软雅黑" panose="020B0503020204020204" charset="-122"/>
-                <a:cs typeface="微软雅黑" panose="020B0503020204020204" charset="-122"/>
-              </a:rPr>
-              <a:t> extern type </a:t>
-            </a:r>
-            <a:r>
-              <a:rPr lang="zh-CN" altLang="en-US">
-                <a:solidFill>
-                  <a:schemeClr val="tx1"/>
-                </a:solidFill>
-                <a:latin typeface="微软雅黑" panose="020B0503020204020204" charset="-122"/>
-                <a:ea typeface="微软雅黑" panose="020B0503020204020204" charset="-122"/>
-                <a:cs typeface="微软雅黑" panose="020B0503020204020204" charset="-122"/>
-              </a:rPr>
-              <a:t>等边界场景，</a:t>
-            </a:r>
-            <a:r>
-              <a:rPr lang="en-US" altLang="zh-CN">
-                <a:solidFill>
-                  <a:schemeClr val="tx1"/>
-                </a:solidFill>
-                <a:latin typeface="微软雅黑" panose="020B0503020204020204" charset="-122"/>
-                <a:ea typeface="微软雅黑" panose="020B0503020204020204" charset="-122"/>
-                <a:cs typeface="微软雅黑" panose="020B0503020204020204" charset="-122"/>
-              </a:rPr>
-              <a:t>Sized Hierarchy </a:t>
-            </a:r>
-            <a:r>
-              <a:rPr lang="zh-CN" altLang="en-US">
-                <a:solidFill>
-                  <a:schemeClr val="tx1"/>
-                </a:solidFill>
-                <a:latin typeface="微软雅黑" panose="020B0503020204020204" charset="-122"/>
-                <a:ea typeface="微软雅黑" panose="020B0503020204020204" charset="-122"/>
-                <a:cs typeface="微软雅黑" panose="020B0503020204020204" charset="-122"/>
-              </a:rPr>
-              <a:t>已被视为未来类型系统演进的基础设施，而不仅是为</a:t>
-            </a:r>
-            <a:r>
-              <a:rPr lang="en-US" altLang="zh-CN">
-                <a:solidFill>
-                  <a:schemeClr val="tx1"/>
-                </a:solidFill>
-                <a:latin typeface="微软雅黑" panose="020B0503020204020204" charset="-122"/>
-                <a:ea typeface="微软雅黑" panose="020B0503020204020204" charset="-122"/>
-                <a:cs typeface="微软雅黑" panose="020B0503020204020204" charset="-122"/>
-              </a:rPr>
-              <a:t> SVE </a:t>
-            </a:r>
-            <a:r>
-              <a:rPr lang="zh-CN" altLang="en-US">
-                <a:solidFill>
-                  <a:schemeClr val="tx1"/>
-                </a:solidFill>
-                <a:latin typeface="微软雅黑" panose="020B0503020204020204" charset="-122"/>
-                <a:ea typeface="微软雅黑" panose="020B0503020204020204" charset="-122"/>
-                <a:cs typeface="微软雅黑" panose="020B0503020204020204" charset="-122"/>
-              </a:rPr>
-              <a:t>打的补丁。</a:t>
-            </a:r>
-            <a:endParaRPr lang="zh-CN" altLang="en-US">
+              <a:rPr lang="zh-CN" altLang="en-US" sz="2400" b="1">
+                <a:solidFill>
+                  <a:schemeClr val="tx1"/>
+                </a:solidFill>
+                <a:latin typeface="微软雅黑" panose="020B0503020204020204" charset="-122"/>
+                <a:ea typeface="微软雅黑" panose="020B0503020204020204" charset="-122"/>
+                <a:cs typeface="微软雅黑" panose="020B0503020204020204" charset="-122"/>
+                <a:sym typeface="+mn-ea"/>
+              </a:rPr>
+              <a:t>社区工作：</a:t>
+            </a:r>
+            <a:r>
+              <a:rPr lang="zh-CN" altLang="en-US" sz="2400">
+                <a:solidFill>
+                  <a:schemeClr val="tx1"/>
+                </a:solidFill>
+                <a:latin typeface="微软雅黑" panose="020B0503020204020204" charset="-122"/>
+                <a:ea typeface="微软雅黑" panose="020B0503020204020204" charset="-122"/>
+                <a:cs typeface="微软雅黑" panose="020B0503020204020204" charset="-122"/>
+                <a:sym typeface="+mn-ea"/>
+              </a:rPr>
+              <a:t>已基于本地分支工作提交</a:t>
+            </a:r>
+            <a:r>
+              <a:rPr lang="en-US" altLang="zh-CN" sz="2400">
+                <a:solidFill>
+                  <a:schemeClr val="tx1"/>
+                </a:solidFill>
+                <a:latin typeface="微软雅黑" panose="020B0503020204020204" charset="-122"/>
+                <a:ea typeface="微软雅黑" panose="020B0503020204020204" charset="-122"/>
+                <a:cs typeface="微软雅黑" panose="020B0503020204020204" charset="-122"/>
+                <a:sym typeface="+mn-ea"/>
+              </a:rPr>
+              <a:t> PR </a:t>
+            </a:r>
+            <a:r>
+              <a:rPr lang="zh-CN" altLang="en-US" sz="2400">
+                <a:solidFill>
+                  <a:schemeClr val="tx1"/>
+                </a:solidFill>
+                <a:latin typeface="微软雅黑" panose="020B0503020204020204" charset="-122"/>
+                <a:ea typeface="微软雅黑" panose="020B0503020204020204" charset="-122"/>
+                <a:cs typeface="微软雅黑" panose="020B0503020204020204" charset="-122"/>
+                <a:sym typeface="+mn-ea"/>
+              </a:rPr>
+              <a:t>至社区</a:t>
+            </a:r>
+            <a:endParaRPr lang="zh-CN" altLang="en-US" sz="2400">
               <a:solidFill>
                 <a:schemeClr val="tx1"/>
               </a:solidFill>
@@ -6346,11 +7470,36 @@
               <a:cs typeface="微软雅黑" panose="020B0503020204020204" charset="-122"/>
             </a:endParaRPr>
           </a:p>
+          <a:p>
+            <a:pPr marL="0" indent="0">
+              <a:buNone/>
+            </a:pPr>
+            <a:r>
+              <a:rPr lang="en-US" altLang="zh-CN" sz="2400">
+                <a:latin typeface="微软雅黑" panose="020B0503020204020204" charset="-122"/>
+                <a:ea typeface="微软雅黑" panose="020B0503020204020204" charset="-122"/>
+                <a:cs typeface="微软雅黑" panose="020B0503020204020204" charset="-122"/>
+                <a:sym typeface="+mn-ea"/>
+                <a:hlinkClick r:id="rId4" action="ppaction://hlinkfile"/>
+              </a:rPr>
+              <a:t>Integrate Arm SVE types and intrinsics into stdarch</a:t>
+            </a:r>
+            <a:endParaRPr lang="en-US" altLang="zh-CN" sz="2400">
+              <a:solidFill>
+                <a:schemeClr val="tx1"/>
+              </a:solidFill>
+              <a:latin typeface="微软雅黑" panose="020B0503020204020204" charset="-122"/>
+              <a:ea typeface="微软雅黑" panose="020B0503020204020204" charset="-122"/>
+              <a:cs typeface="微软雅黑" panose="020B0503020204020204" charset="-122"/>
+              <a:sym typeface="+mn-ea"/>
+              <a:hlinkClick r:id="rId4" action="ppaction://hlinkfile"/>
+            </a:endParaRPr>
+          </a:p>
         </p:txBody>
       </p:sp>
     </p:spTree>
     <p:custDataLst>
-      <p:tags r:id="rId4"/>
+      <p:tags r:id="rId6"/>
     </p:custDataLst>
   </p:cSld>
   <p:clrMapOvr>
@@ -6387,15 +7536,15 @@
           <a:bodyPr/>
           <a:p>
             <a:r>
-              <a:rPr lang="zh-CN" altLang="en-US">
+              <a:rPr lang="zh-CN" altLang="en-US" b="1">
                 <a:solidFill>
                   <a:schemeClr val="tx1"/>
                 </a:solidFill>
                 <a:sym typeface="+mn-ea"/>
               </a:rPr>
-              <a:t>二、当前社区进展</a:t>
-            </a:r>
-            <a:endParaRPr lang="zh-CN" altLang="en-US"/>
+              <a:t>二、关键难点与解决方案</a:t>
+            </a:r>
+            <a:endParaRPr lang="zh-CN" altLang="en-US" b="1"/>
           </a:p>
         </p:txBody>
       </p:sp>
@@ -6415,38 +7564,219 @@
         <p:spPr>
           <a:xfrm>
             <a:off x="608330" y="1490345"/>
-            <a:ext cx="10968990" cy="1668780"/>
+            <a:ext cx="10968990" cy="4966970"/>
           </a:xfrm>
         </p:spPr>
         <p:txBody>
-          <a:bodyPr/>
+          <a:bodyPr>
+            <a:noAutofit/>
+          </a:bodyPr>
           <a:p>
             <a:pPr marL="0" indent="0">
+              <a:spcBef>
+                <a:spcPts val="1500"/>
+              </a:spcBef>
+              <a:spcAft>
+                <a:spcPts val="1500"/>
+              </a:spcAft>
               <a:buNone/>
             </a:pPr>
             <a:r>
-              <a:rPr lang="en-US" altLang="zh-CN">
-                <a:solidFill>
-                  <a:schemeClr val="tx1"/>
-                </a:solidFill>
-                <a:latin typeface="微软雅黑" panose="020B0503020204020204" charset="-122"/>
-                <a:ea typeface="微软雅黑" panose="020B0503020204020204" charset="-122"/>
-                <a:cs typeface="微软雅黑" panose="020B0503020204020204" charset="-122"/>
-              </a:rPr>
-              <a:t>3. Scalable Vector </a:t>
-            </a:r>
-            <a:r>
-              <a:rPr lang="zh-CN" altLang="en-US">
-                <a:solidFill>
-                  <a:schemeClr val="tx1"/>
-                </a:solidFill>
-                <a:latin typeface="微软雅黑" panose="020B0503020204020204" charset="-122"/>
-                <a:ea typeface="微软雅黑" panose="020B0503020204020204" charset="-122"/>
-                <a:cs typeface="微软雅黑" panose="020B0503020204020204" charset="-122"/>
-              </a:rPr>
-              <a:t>表示的社区进展</a:t>
-            </a:r>
-            <a:endParaRPr lang="zh-CN" altLang="en-US">
+              <a:rPr lang="zh-CN" altLang="en-US" sz="2800" b="1">
+                <a:solidFill>
+                  <a:srgbClr val="C00000"/>
+                </a:solidFill>
+                <a:latin typeface="微软雅黑" panose="020B0503020204020204" charset="-122"/>
+                <a:ea typeface="微软雅黑" panose="020B0503020204020204" charset="-122"/>
+                <a:cs typeface="微软雅黑" panose="020B0503020204020204" charset="-122"/>
+              </a:rPr>
+              <a:t>关键技术难点</a:t>
+            </a:r>
+            <a:endParaRPr lang="zh-CN" altLang="en-US" sz="2800" b="1">
+              <a:solidFill>
+                <a:srgbClr val="C00000"/>
+              </a:solidFill>
+              <a:latin typeface="微软雅黑" panose="020B0503020204020204" charset="-122"/>
+              <a:ea typeface="微软雅黑" panose="020B0503020204020204" charset="-122"/>
+              <a:cs typeface="微软雅黑" panose="020B0503020204020204" charset="-122"/>
+            </a:endParaRPr>
+          </a:p>
+          <a:p>
+            <a:pPr marL="0" indent="0">
+              <a:spcBef>
+                <a:spcPts val="1500"/>
+              </a:spcBef>
+              <a:spcAft>
+                <a:spcPts val="1500"/>
+              </a:spcAft>
+              <a:buNone/>
+            </a:pPr>
+            <a:r>
+              <a:rPr lang="en-US" altLang="zh-CN" sz="2400">
+                <a:solidFill>
+                  <a:schemeClr val="tx1"/>
+                </a:solidFill>
+                <a:latin typeface="微软雅黑" panose="020B0503020204020204" charset="-122"/>
+                <a:ea typeface="微软雅黑" panose="020B0503020204020204" charset="-122"/>
+                <a:cs typeface="微软雅黑" panose="020B0503020204020204" charset="-122"/>
+              </a:rPr>
+              <a:t>Rust </a:t>
+            </a:r>
+            <a:r>
+              <a:rPr lang="zh-CN" altLang="en-US" sz="2400">
+                <a:solidFill>
+                  <a:schemeClr val="tx1"/>
+                </a:solidFill>
+                <a:latin typeface="微软雅黑" panose="020B0503020204020204" charset="-122"/>
+                <a:ea typeface="微软雅黑" panose="020B0503020204020204" charset="-122"/>
+                <a:cs typeface="微软雅黑" panose="020B0503020204020204" charset="-122"/>
+              </a:rPr>
+              <a:t>编译器不能直接兼容</a:t>
+            </a:r>
+            <a:r>
+              <a:rPr lang="en-US" altLang="zh-CN" sz="2400">
+                <a:solidFill>
+                  <a:schemeClr val="tx1"/>
+                </a:solidFill>
+                <a:latin typeface="微软雅黑" panose="020B0503020204020204" charset="-122"/>
+                <a:ea typeface="微软雅黑" panose="020B0503020204020204" charset="-122"/>
+                <a:cs typeface="微软雅黑" panose="020B0503020204020204" charset="-122"/>
+              </a:rPr>
+              <a:t>SVE </a:t>
+            </a:r>
+            <a:r>
+              <a:rPr lang="zh-CN" altLang="en-US" sz="2400">
+                <a:solidFill>
+                  <a:schemeClr val="tx1"/>
+                </a:solidFill>
+                <a:latin typeface="微软雅黑" panose="020B0503020204020204" charset="-122"/>
+                <a:ea typeface="微软雅黑" panose="020B0503020204020204" charset="-122"/>
+                <a:cs typeface="微软雅黑" panose="020B0503020204020204" charset="-122"/>
+              </a:rPr>
+              <a:t>这种可变长度向量，主要有三个</a:t>
+            </a:r>
+            <a:r>
+              <a:rPr lang="zh-CN" altLang="en-US" sz="2400" b="1">
+                <a:solidFill>
+                  <a:srgbClr val="C00000"/>
+                </a:solidFill>
+                <a:latin typeface="微软雅黑" panose="020B0503020204020204" charset="-122"/>
+                <a:ea typeface="微软雅黑" panose="020B0503020204020204" charset="-122"/>
+                <a:cs typeface="微软雅黑" panose="020B0503020204020204" charset="-122"/>
+              </a:rPr>
+              <a:t>兼容性相关问题：</a:t>
+            </a:r>
+            <a:endParaRPr lang="en-US" altLang="zh-CN" sz="2400" b="1">
+              <a:solidFill>
+                <a:srgbClr val="C00000"/>
+              </a:solidFill>
+              <a:latin typeface="微软雅黑" panose="020B0503020204020204" charset="-122"/>
+              <a:ea typeface="微软雅黑" panose="020B0503020204020204" charset="-122"/>
+              <a:cs typeface="微软雅黑" panose="020B0503020204020204" charset="-122"/>
+            </a:endParaRPr>
+          </a:p>
+          <a:p>
+            <a:pPr marL="457200" indent="-457200">
+              <a:spcBef>
+                <a:spcPts val="1500"/>
+              </a:spcBef>
+              <a:spcAft>
+                <a:spcPts val="1500"/>
+              </a:spcAft>
+              <a:buFont typeface="+mj-lt"/>
+              <a:buAutoNum type="arabicPeriod"/>
+            </a:pPr>
+            <a:r>
+              <a:rPr lang="zh-CN" altLang="en-US" sz="2400" b="1">
+                <a:solidFill>
+                  <a:srgbClr val="C00000"/>
+                </a:solidFill>
+                <a:latin typeface="微软雅黑" panose="020B0503020204020204" charset="-122"/>
+                <a:ea typeface="微软雅黑" panose="020B0503020204020204" charset="-122"/>
+                <a:cs typeface="微软雅黑" panose="020B0503020204020204" charset="-122"/>
+              </a:rPr>
+              <a:t>类型转换受限：</a:t>
+            </a:r>
+            <a:r>
+              <a:rPr lang="zh-CN" altLang="en-US" sz="2400">
+                <a:solidFill>
+                  <a:schemeClr val="tx1"/>
+                </a:solidFill>
+                <a:latin typeface="微软雅黑" panose="020B0503020204020204" charset="-122"/>
+                <a:ea typeface="微软雅黑" panose="020B0503020204020204" charset="-122"/>
+                <a:cs typeface="微软雅黑" panose="020B0503020204020204" charset="-122"/>
+              </a:rPr>
+              <a:t>编译器只支持旧</a:t>
+            </a:r>
+            <a:r>
+              <a:rPr lang="en-US" altLang="zh-CN" sz="2400">
+                <a:solidFill>
+                  <a:schemeClr val="tx1"/>
+                </a:solidFill>
+                <a:latin typeface="微软雅黑" panose="020B0503020204020204" charset="-122"/>
+                <a:ea typeface="微软雅黑" panose="020B0503020204020204" charset="-122"/>
+                <a:cs typeface="微软雅黑" panose="020B0503020204020204" charset="-122"/>
+              </a:rPr>
+              <a:t> SIMD </a:t>
+            </a:r>
+            <a:r>
+              <a:rPr lang="zh-CN" altLang="en-US" sz="2400">
+                <a:solidFill>
+                  <a:schemeClr val="tx1"/>
+                </a:solidFill>
+                <a:latin typeface="微软雅黑" panose="020B0503020204020204" charset="-122"/>
+                <a:ea typeface="微软雅黑" panose="020B0503020204020204" charset="-122"/>
+                <a:cs typeface="微软雅黑" panose="020B0503020204020204" charset="-122"/>
+              </a:rPr>
+              <a:t>类型，不认</a:t>
+            </a:r>
+            <a:r>
+              <a:rPr lang="zh-CN" altLang="en-US" sz="2400">
+                <a:solidFill>
+                  <a:schemeClr val="tx1"/>
+                </a:solidFill>
+                <a:latin typeface="微软雅黑" panose="020B0503020204020204" charset="-122"/>
+                <a:ea typeface="微软雅黑" panose="020B0503020204020204" charset="-122"/>
+                <a:cs typeface="微软雅黑" panose="020B0503020204020204" charset="-122"/>
+                <a:sym typeface="+mn-ea"/>
+              </a:rPr>
+              <a:t>新的</a:t>
+            </a:r>
+            <a:r>
+              <a:rPr lang="en-US" altLang="zh-CN" sz="2400">
+                <a:solidFill>
+                  <a:schemeClr val="tx1"/>
+                </a:solidFill>
+                <a:latin typeface="微软雅黑" panose="020B0503020204020204" charset="-122"/>
+                <a:ea typeface="微软雅黑" panose="020B0503020204020204" charset="-122"/>
+                <a:cs typeface="微软雅黑" panose="020B0503020204020204" charset="-122"/>
+                <a:sym typeface="+mn-ea"/>
+              </a:rPr>
+              <a:t> </a:t>
+            </a:r>
+            <a:r>
+              <a:rPr lang="en-US" altLang="zh-CN" sz="2400">
+                <a:solidFill>
+                  <a:schemeClr val="tx1"/>
+                </a:solidFill>
+                <a:latin typeface="微软雅黑" panose="020B0503020204020204" charset="-122"/>
+                <a:ea typeface="微软雅黑" panose="020B0503020204020204" charset="-122"/>
+                <a:cs typeface="微软雅黑" panose="020B0503020204020204" charset="-122"/>
+              </a:rPr>
+              <a:t>SVE </a:t>
+            </a:r>
+            <a:r>
+              <a:rPr lang="zh-CN" altLang="en-US" sz="2400">
+                <a:solidFill>
+                  <a:schemeClr val="tx1"/>
+                </a:solidFill>
+                <a:latin typeface="微软雅黑" panose="020B0503020204020204" charset="-122"/>
+                <a:ea typeface="微软雅黑" panose="020B0503020204020204" charset="-122"/>
+                <a:cs typeface="微软雅黑" panose="020B0503020204020204" charset="-122"/>
+              </a:rPr>
+              <a:t>类型</a:t>
+            </a:r>
+            <a:endParaRPr lang="en-US" altLang="zh-CN" sz="2400">
               <a:solidFill>
                 <a:schemeClr val="tx1"/>
               </a:solidFill>
@@ -6455,540 +7785,62 @@
               <a:cs typeface="微软雅黑" panose="020B0503020204020204" charset="-122"/>
             </a:endParaRPr>
           </a:p>
-        </p:txBody>
-      </p:sp>
-      <p:sp>
-        <p:nvSpPr>
-          <p:cNvPr id="4" name="内容占位符 2"/>
-          <p:cNvSpPr>
-            <a:spLocks noGrp="1"/>
-          </p:cNvSpPr>
-          <p:nvPr>
-            <p:custDataLst>
-              <p:tags r:id="rId3"/>
-            </p:custDataLst>
-          </p:nvPr>
-        </p:nvSpPr>
-        <p:spPr>
-          <a:xfrm>
-            <a:off x="608330" y="2606675"/>
-            <a:ext cx="8501380" cy="2339975"/>
-          </a:xfrm>
-          <a:prstGeom prst="rect">
-            <a:avLst/>
-          </a:prstGeom>
-        </p:spPr>
-        <p:txBody>
-          <a:bodyPr vert="horz" lIns="90000" tIns="46800" rIns="90000" bIns="46800" rtlCol="0">
-            <a:normAutofit fontScale="90000"/>
-          </a:bodyPr>
-          <a:lstStyle>
-            <a:lvl1pPr marL="228600" indent="-228600" algn="l" defTabSz="914400" rtl="0" eaLnBrk="1" fontAlgn="auto" latinLnBrk="0" hangingPunct="1">
-              <a:lnSpc>
-                <a:spcPct val="130000"/>
-              </a:lnSpc>
+          <a:p>
+            <a:pPr marL="457200" indent="-457200">
               <a:spcBef>
-                <a:spcPts val="0"/>
+                <a:spcPts val="1500"/>
               </a:spcBef>
               <a:spcAft>
-                <a:spcPts val="1000"/>
+                <a:spcPts val="1500"/>
               </a:spcAft>
-              <a:buFont typeface="Arial" panose="020B0604020202020204" pitchFamily="34" charset="0"/>
-              <a:buChar char="●"/>
-              <a:defRPr sz="1800" u="none" strike="noStrike" kern="1200" cap="none" spc="150" normalizeH="0" baseline="0">
-                <a:solidFill>
-                  <a:schemeClr val="tx1">
-                    <a:lumMod val="65000"/>
-                    <a:lumOff val="35000"/>
-                  </a:schemeClr>
-                </a:solidFill>
-                <a:uFillTx/>
-                <a:latin typeface="+mn-lt"/>
-                <a:ea typeface="+mn-ea"/>
-                <a:cs typeface="+mn-cs"/>
-              </a:defRPr>
-            </a:lvl1pPr>
-            <a:lvl2pPr marL="685800" indent="-228600" algn="l" defTabSz="914400" rtl="0" eaLnBrk="1" fontAlgn="auto" latinLnBrk="0" hangingPunct="1">
-              <a:lnSpc>
-                <a:spcPct val="120000"/>
-              </a:lnSpc>
-              <a:spcBef>
-                <a:spcPts val="0"/>
-              </a:spcBef>
-              <a:spcAft>
-                <a:spcPts val="600"/>
-              </a:spcAft>
-              <a:buFont typeface="Arial" panose="020B0604020202020204" pitchFamily="34" charset="0"/>
-              <a:buChar char="●"/>
-              <a:tabLst>
-                <a:tab pos="1609725" algn="l"/>
-                <a:tab pos="1609725" algn="l"/>
-                <a:tab pos="1609725" algn="l"/>
-                <a:tab pos="1609725" algn="l"/>
-              </a:tabLst>
-              <a:defRPr sz="1600" u="none" strike="noStrike" kern="1200" cap="none" spc="150" normalizeH="0" baseline="0">
-                <a:solidFill>
-                  <a:schemeClr val="tx1">
-                    <a:lumMod val="65000"/>
-                    <a:lumOff val="35000"/>
-                  </a:schemeClr>
-                </a:solidFill>
-                <a:uFillTx/>
-                <a:latin typeface="+mn-lt"/>
-                <a:ea typeface="+mn-ea"/>
-                <a:cs typeface="+mn-cs"/>
-              </a:defRPr>
-            </a:lvl2pPr>
-            <a:lvl3pPr marL="1143000" indent="-228600" algn="l" defTabSz="914400" rtl="0" eaLnBrk="1" fontAlgn="auto" latinLnBrk="0" hangingPunct="1">
-              <a:lnSpc>
-                <a:spcPct val="120000"/>
-              </a:lnSpc>
-              <a:spcBef>
-                <a:spcPts val="0"/>
-              </a:spcBef>
-              <a:spcAft>
-                <a:spcPts val="600"/>
-              </a:spcAft>
-              <a:buFont typeface="Arial" panose="020B0604020202020204" pitchFamily="34" charset="0"/>
-              <a:buChar char="●"/>
-              <a:defRPr sz="1600" u="none" strike="noStrike" kern="1200" cap="none" spc="150" normalizeH="0" baseline="0">
-                <a:solidFill>
-                  <a:schemeClr val="tx1">
-                    <a:lumMod val="65000"/>
-                    <a:lumOff val="35000"/>
-                  </a:schemeClr>
-                </a:solidFill>
-                <a:uFillTx/>
-                <a:latin typeface="+mn-lt"/>
-                <a:ea typeface="+mn-ea"/>
-                <a:cs typeface="+mn-cs"/>
-              </a:defRPr>
-            </a:lvl3pPr>
-            <a:lvl4pPr marL="1600200" indent="-228600" algn="l" defTabSz="914400" rtl="0" eaLnBrk="1" fontAlgn="auto" latinLnBrk="0" hangingPunct="1">
-              <a:lnSpc>
-                <a:spcPct val="120000"/>
-              </a:lnSpc>
-              <a:spcBef>
-                <a:spcPts val="0"/>
-              </a:spcBef>
-              <a:spcAft>
-                <a:spcPts val="300"/>
-              </a:spcAft>
-              <a:buFont typeface="Wingdings" panose="05000000000000000000" charset="0"/>
-              <a:buChar char=""/>
-              <a:defRPr sz="1400" u="none" strike="noStrike" kern="1200" cap="none" spc="150" normalizeH="0" baseline="0">
-                <a:solidFill>
-                  <a:schemeClr val="tx1">
-                    <a:lumMod val="65000"/>
-                    <a:lumOff val="35000"/>
-                  </a:schemeClr>
-                </a:solidFill>
-                <a:uFillTx/>
-                <a:latin typeface="+mn-lt"/>
-                <a:ea typeface="+mn-ea"/>
-                <a:cs typeface="+mn-cs"/>
-              </a:defRPr>
-            </a:lvl4pPr>
-            <a:lvl5pPr marL="2057400" indent="-228600" algn="l" defTabSz="914400" rtl="0" eaLnBrk="1" fontAlgn="auto" latinLnBrk="0" hangingPunct="1">
-              <a:lnSpc>
-                <a:spcPct val="120000"/>
-              </a:lnSpc>
-              <a:spcBef>
-                <a:spcPts val="0"/>
-              </a:spcBef>
-              <a:spcAft>
-                <a:spcPts val="300"/>
-              </a:spcAft>
-              <a:buFont typeface="Arial" panose="020B0604020202020204" pitchFamily="34" charset="0"/>
-              <a:buChar char="•"/>
-              <a:defRPr sz="1400" u="none" strike="noStrike" kern="1200" cap="none" spc="150" normalizeH="0" baseline="0">
-                <a:solidFill>
-                  <a:schemeClr val="tx1">
-                    <a:lumMod val="65000"/>
-                    <a:lumOff val="35000"/>
-                  </a:schemeClr>
-                </a:solidFill>
-                <a:uFillTx/>
-                <a:latin typeface="+mn-lt"/>
-                <a:ea typeface="+mn-ea"/>
-                <a:cs typeface="+mn-cs"/>
-              </a:defRPr>
-            </a:lvl5pPr>
-            <a:lvl6pPr marL="2514600" indent="-228600" algn="l" defTabSz="914400" rtl="0" eaLnBrk="1" latinLnBrk="0" hangingPunct="1">
-              <a:lnSpc>
-                <a:spcPct val="90000"/>
-              </a:lnSpc>
-              <a:spcBef>
-                <a:spcPts val="500"/>
-              </a:spcBef>
-              <a:buFont typeface="Arial" panose="020B0604020202020204" pitchFamily="34" charset="0"/>
-              <a:buChar char="•"/>
-              <a:defRPr sz="1800" kern="1200">
-                <a:solidFill>
-                  <a:schemeClr val="tx1"/>
-                </a:solidFill>
-                <a:latin typeface="+mn-lt"/>
-                <a:ea typeface="+mn-ea"/>
-                <a:cs typeface="+mn-cs"/>
-              </a:defRPr>
-            </a:lvl6pPr>
-            <a:lvl7pPr marL="2971800" indent="-228600" algn="l" defTabSz="914400" rtl="0" eaLnBrk="1" latinLnBrk="0" hangingPunct="1">
-              <a:lnSpc>
-                <a:spcPct val="90000"/>
-              </a:lnSpc>
-              <a:spcBef>
-                <a:spcPts val="500"/>
-              </a:spcBef>
-              <a:buFont typeface="Arial" panose="020B0604020202020204" pitchFamily="34" charset="0"/>
-              <a:buChar char="•"/>
-              <a:defRPr sz="1800" kern="1200">
-                <a:solidFill>
-                  <a:schemeClr val="tx1"/>
-                </a:solidFill>
-                <a:latin typeface="+mn-lt"/>
-                <a:ea typeface="+mn-ea"/>
-                <a:cs typeface="+mn-cs"/>
-              </a:defRPr>
-            </a:lvl7pPr>
-            <a:lvl8pPr marL="3429000" indent="-228600" algn="l" defTabSz="914400" rtl="0" eaLnBrk="1" latinLnBrk="0" hangingPunct="1">
-              <a:lnSpc>
-                <a:spcPct val="90000"/>
-              </a:lnSpc>
-              <a:spcBef>
-                <a:spcPts val="500"/>
-              </a:spcBef>
-              <a:buFont typeface="Arial" panose="020B0604020202020204" pitchFamily="34" charset="0"/>
-              <a:buChar char="•"/>
-              <a:defRPr sz="1800" kern="1200">
-                <a:solidFill>
-                  <a:schemeClr val="tx1"/>
-                </a:solidFill>
-                <a:latin typeface="+mn-lt"/>
-                <a:ea typeface="+mn-ea"/>
-                <a:cs typeface="+mn-cs"/>
-              </a:defRPr>
-            </a:lvl8pPr>
-            <a:lvl9pPr marL="3886200" indent="-228600" algn="l" defTabSz="914400" rtl="0" eaLnBrk="1" latinLnBrk="0" hangingPunct="1">
-              <a:lnSpc>
-                <a:spcPct val="90000"/>
-              </a:lnSpc>
-              <a:spcBef>
-                <a:spcPts val="500"/>
-              </a:spcBef>
-              <a:buFont typeface="Arial" panose="020B0604020202020204" pitchFamily="34" charset="0"/>
-              <a:buChar char="•"/>
-              <a:defRPr sz="1800" kern="1200">
-                <a:solidFill>
-                  <a:schemeClr val="tx1"/>
-                </a:solidFill>
-                <a:latin typeface="+mn-lt"/>
-                <a:ea typeface="+mn-ea"/>
-                <a:cs typeface="+mn-cs"/>
-              </a:defRPr>
-            </a:lvl9pPr>
-          </a:lstStyle>
-          <a:p>
-            <a:pPr marL="0" indent="0">
-              <a:buNone/>
+              <a:buFont typeface="+mj-lt"/>
+              <a:buAutoNum type="arabicPeriod"/>
             </a:pPr>
             <a:r>
-              <a:rPr lang="zh-CN" altLang="en-US">
-                <a:solidFill>
-                  <a:schemeClr val="tx1"/>
-                </a:solidFill>
-                <a:latin typeface="微软雅黑" panose="020B0503020204020204" charset="-122"/>
-                <a:ea typeface="微软雅黑" panose="020B0503020204020204" charset="-122"/>
-                <a:cs typeface="微软雅黑" panose="020B0503020204020204" charset="-122"/>
-              </a:rPr>
-              <a:t>早期</a:t>
-            </a:r>
-            <a:r>
-              <a:rPr lang="en-US" altLang="zh-CN">
-                <a:solidFill>
-                  <a:schemeClr val="tx1"/>
-                </a:solidFill>
-                <a:latin typeface="微软雅黑" panose="020B0503020204020204" charset="-122"/>
-                <a:ea typeface="微软雅黑" panose="020B0503020204020204" charset="-122"/>
-                <a:cs typeface="微软雅黑" panose="020B0503020204020204" charset="-122"/>
-              </a:rPr>
-              <a:t> RFC 3268 </a:t>
-            </a:r>
-            <a:r>
-              <a:rPr lang="zh-CN" altLang="en-US">
-                <a:solidFill>
-                  <a:schemeClr val="tx1"/>
-                </a:solidFill>
-                <a:latin typeface="微软雅黑" panose="020B0503020204020204" charset="-122"/>
-                <a:ea typeface="微软雅黑" panose="020B0503020204020204" charset="-122"/>
-                <a:cs typeface="微软雅黑" panose="020B0503020204020204" charset="-122"/>
-              </a:rPr>
-              <a:t>已经被废弃，社区转向</a:t>
-            </a:r>
-            <a:r>
-              <a:rPr lang="en-US" altLang="zh-CN">
-                <a:solidFill>
-                  <a:schemeClr val="tx1"/>
-                </a:solidFill>
-                <a:latin typeface="微软雅黑" panose="020B0503020204020204" charset="-122"/>
-                <a:ea typeface="微软雅黑" panose="020B0503020204020204" charset="-122"/>
-                <a:cs typeface="微软雅黑" panose="020B0503020204020204" charset="-122"/>
-              </a:rPr>
-              <a:t> RFC 3838 + #[rustc_scalable_vector(N)] </a:t>
-            </a:r>
-            <a:r>
-              <a:rPr lang="zh-CN" altLang="en-US">
-                <a:solidFill>
-                  <a:schemeClr val="tx1"/>
-                </a:solidFill>
-                <a:latin typeface="微软雅黑" panose="020B0503020204020204" charset="-122"/>
-                <a:ea typeface="微软雅黑" panose="020B0503020204020204" charset="-122"/>
-                <a:cs typeface="微软雅黑" panose="020B0503020204020204" charset="-122"/>
-              </a:rPr>
-              <a:t>内部属性</a:t>
-            </a:r>
-            <a:r>
-              <a:rPr lang="en-US" altLang="zh-CN">
-                <a:solidFill>
-                  <a:schemeClr val="tx1"/>
-                </a:solidFill>
-                <a:latin typeface="微软雅黑" panose="020B0503020204020204" charset="-122"/>
-                <a:ea typeface="微软雅黑" panose="020B0503020204020204" charset="-122"/>
-                <a:cs typeface="微软雅黑" panose="020B0503020204020204" charset="-122"/>
-              </a:rPr>
-              <a:t> </a:t>
-            </a:r>
-            <a:r>
-              <a:rPr lang="zh-CN" altLang="en-US">
-                <a:solidFill>
-                  <a:schemeClr val="tx1"/>
-                </a:solidFill>
-                <a:latin typeface="微软雅黑" panose="020B0503020204020204" charset="-122"/>
-                <a:ea typeface="微软雅黑" panose="020B0503020204020204" charset="-122"/>
-                <a:cs typeface="微软雅黑" panose="020B0503020204020204" charset="-122"/>
-              </a:rPr>
-              <a:t>的方案，避免在语言层面直接暴露</a:t>
-            </a:r>
-            <a:r>
-              <a:rPr lang="en-US" altLang="zh-CN">
-                <a:solidFill>
-                  <a:schemeClr val="tx1"/>
-                </a:solidFill>
-                <a:latin typeface="微软雅黑" panose="020B0503020204020204" charset="-122"/>
-                <a:ea typeface="微软雅黑" panose="020B0503020204020204" charset="-122"/>
-                <a:cs typeface="微软雅黑" panose="020B0503020204020204" charset="-122"/>
-              </a:rPr>
-              <a:t> LLVM vscale </a:t>
-            </a:r>
-            <a:r>
-              <a:rPr lang="zh-CN" altLang="en-US">
-                <a:solidFill>
-                  <a:schemeClr val="tx1"/>
-                </a:solidFill>
-                <a:latin typeface="微软雅黑" panose="020B0503020204020204" charset="-122"/>
-                <a:ea typeface="微软雅黑" panose="020B0503020204020204" charset="-122"/>
-                <a:cs typeface="微软雅黑" panose="020B0503020204020204" charset="-122"/>
-              </a:rPr>
-              <a:t>细节。在</a:t>
-            </a:r>
-            <a:r>
-              <a:rPr lang="en-US" altLang="zh-CN">
-                <a:solidFill>
-                  <a:schemeClr val="tx1"/>
-                </a:solidFill>
-                <a:latin typeface="微软雅黑" panose="020B0503020204020204" charset="-122"/>
-                <a:ea typeface="微软雅黑" panose="020B0503020204020204" charset="-122"/>
-                <a:cs typeface="微软雅黑" panose="020B0503020204020204" charset="-122"/>
-              </a:rPr>
-              <a:t> 2025 </a:t>
-            </a:r>
-            <a:r>
-              <a:rPr lang="zh-CN" altLang="en-US">
-                <a:solidFill>
-                  <a:schemeClr val="tx1"/>
-                </a:solidFill>
-                <a:latin typeface="微软雅黑" panose="020B0503020204020204" charset="-122"/>
-                <a:ea typeface="微软雅黑" panose="020B0503020204020204" charset="-122"/>
-                <a:cs typeface="微软雅黑" panose="020B0503020204020204" charset="-122"/>
-              </a:rPr>
-              <a:t>年立项</a:t>
-            </a:r>
-            <a:r>
-              <a:rPr lang="en-US" altLang="zh-CN">
-                <a:solidFill>
-                  <a:schemeClr val="tx1"/>
-                </a:solidFill>
-                <a:latin typeface="微软雅黑" panose="020B0503020204020204" charset="-122"/>
-                <a:ea typeface="微软雅黑" panose="020B0503020204020204" charset="-122"/>
-                <a:cs typeface="微软雅黑" panose="020B0503020204020204" charset="-122"/>
-              </a:rPr>
-              <a:t> Tracking Issue #145052</a:t>
-            </a:r>
-            <a:r>
-              <a:rPr lang="zh-CN" altLang="en-US">
-                <a:solidFill>
-                  <a:schemeClr val="tx1"/>
-                </a:solidFill>
-                <a:latin typeface="微软雅黑" panose="020B0503020204020204" charset="-122"/>
-                <a:ea typeface="微软雅黑" panose="020B0503020204020204" charset="-122"/>
-                <a:cs typeface="微软雅黑" panose="020B0503020204020204" charset="-122"/>
-              </a:rPr>
-              <a:t>，将</a:t>
-            </a:r>
-            <a:r>
-              <a:rPr lang="en-US" altLang="zh-CN">
-                <a:solidFill>
-                  <a:schemeClr val="tx1"/>
-                </a:solidFill>
-                <a:latin typeface="微软雅黑" panose="020B0503020204020204" charset="-122"/>
-                <a:ea typeface="微软雅黑" panose="020B0503020204020204" charset="-122"/>
-                <a:cs typeface="微软雅黑" panose="020B0503020204020204" charset="-122"/>
-              </a:rPr>
-              <a:t> “Scalable Vectors” </a:t>
-            </a:r>
-            <a:r>
-              <a:rPr lang="zh-CN" altLang="en-US">
-                <a:solidFill>
-                  <a:schemeClr val="tx1"/>
-                </a:solidFill>
-                <a:latin typeface="微软雅黑" panose="020B0503020204020204" charset="-122"/>
-                <a:ea typeface="微软雅黑" panose="020B0503020204020204" charset="-122"/>
-                <a:cs typeface="微软雅黑" panose="020B0503020204020204" charset="-122"/>
-              </a:rPr>
-              <a:t>作为独立项目推进，首要依赖正是</a:t>
-            </a:r>
-            <a:r>
-              <a:rPr lang="en-US" altLang="zh-CN">
-                <a:solidFill>
-                  <a:schemeClr val="tx1"/>
-                </a:solidFill>
-                <a:latin typeface="微软雅黑" panose="020B0503020204020204" charset="-122"/>
-                <a:ea typeface="微软雅黑" panose="020B0503020204020204" charset="-122"/>
-                <a:cs typeface="微软雅黑" panose="020B0503020204020204" charset="-122"/>
-              </a:rPr>
-              <a:t> Sized Hierarchy </a:t>
-            </a:r>
-            <a:r>
-              <a:rPr lang="zh-CN" altLang="en-US">
-                <a:solidFill>
-                  <a:schemeClr val="tx1"/>
-                </a:solidFill>
-                <a:latin typeface="微软雅黑" panose="020B0503020204020204" charset="-122"/>
-                <a:ea typeface="微软雅黑" panose="020B0503020204020204" charset="-122"/>
-                <a:cs typeface="微软雅黑" panose="020B0503020204020204" charset="-122"/>
-              </a:rPr>
-              <a:t>的稳定。当前已有实验性实现</a:t>
-            </a:r>
-            <a:r>
-              <a:rPr lang="en-US" altLang="zh-CN">
-                <a:solidFill>
-                  <a:schemeClr val="tx1"/>
-                </a:solidFill>
-                <a:latin typeface="微软雅黑" panose="020B0503020204020204" charset="-122"/>
-                <a:ea typeface="微软雅黑" panose="020B0503020204020204" charset="-122"/>
-                <a:cs typeface="微软雅黑" panose="020B0503020204020204" charset="-122"/>
-              </a:rPr>
-              <a:t> PR 143924 </a:t>
-            </a:r>
-            <a:r>
-              <a:rPr lang="zh-CN" altLang="en-US">
-                <a:solidFill>
-                  <a:schemeClr val="tx1"/>
-                </a:solidFill>
-                <a:latin typeface="微软雅黑" panose="020B0503020204020204" charset="-122"/>
-                <a:ea typeface="微软雅黑" panose="020B0503020204020204" charset="-122"/>
-                <a:cs typeface="微软雅黑" panose="020B0503020204020204" charset="-122"/>
-              </a:rPr>
-              <a:t>但尚未合并，接下来将对</a:t>
-            </a:r>
-            <a:r>
-              <a:rPr lang="en-US" altLang="zh-CN">
-                <a:solidFill>
-                  <a:schemeClr val="tx1"/>
-                </a:solidFill>
-                <a:latin typeface="微软雅黑" panose="020B0503020204020204" charset="-122"/>
-                <a:ea typeface="微软雅黑" panose="020B0503020204020204" charset="-122"/>
-                <a:cs typeface="微软雅黑" panose="020B0503020204020204" charset="-122"/>
-              </a:rPr>
-              <a:t> SVE/RVV </a:t>
-            </a:r>
-            <a:r>
-              <a:rPr lang="zh-CN" altLang="en-US">
-                <a:solidFill>
-                  <a:schemeClr val="tx1"/>
-                </a:solidFill>
-                <a:latin typeface="微软雅黑" panose="020B0503020204020204" charset="-122"/>
-                <a:ea typeface="微软雅黑" panose="020B0503020204020204" charset="-122"/>
-                <a:cs typeface="微软雅黑" panose="020B0503020204020204" charset="-122"/>
-              </a:rPr>
-              <a:t>的不稳定</a:t>
-            </a:r>
-            <a:r>
-              <a:rPr lang="en-US" altLang="zh-CN">
-                <a:solidFill>
-                  <a:schemeClr val="tx1"/>
-                </a:solidFill>
-                <a:latin typeface="微软雅黑" panose="020B0503020204020204" charset="-122"/>
-                <a:ea typeface="微软雅黑" panose="020B0503020204020204" charset="-122"/>
-                <a:cs typeface="微软雅黑" panose="020B0503020204020204" charset="-122"/>
-              </a:rPr>
-              <a:t> intrinsics </a:t>
-            </a:r>
-            <a:r>
-              <a:rPr lang="zh-CN" altLang="en-US">
-                <a:solidFill>
-                  <a:schemeClr val="tx1"/>
-                </a:solidFill>
-                <a:latin typeface="微软雅黑" panose="020B0503020204020204" charset="-122"/>
-                <a:ea typeface="微软雅黑" panose="020B0503020204020204" charset="-122"/>
-                <a:cs typeface="微软雅黑" panose="020B0503020204020204" charset="-122"/>
-              </a:rPr>
-              <a:t>进行试验，在验证</a:t>
-            </a:r>
-            <a:r>
-              <a:rPr lang="en-US" altLang="zh-CN">
-                <a:solidFill>
-                  <a:schemeClr val="tx1"/>
-                </a:solidFill>
-                <a:latin typeface="微软雅黑" panose="020B0503020204020204" charset="-122"/>
-                <a:ea typeface="微软雅黑" panose="020B0503020204020204" charset="-122"/>
-                <a:cs typeface="微软雅黑" panose="020B0503020204020204" charset="-122"/>
-              </a:rPr>
-              <a:t> target_feature </a:t>
-            </a:r>
-            <a:r>
-              <a:rPr lang="zh-CN" altLang="en-US">
-                <a:solidFill>
-                  <a:schemeClr val="tx1"/>
-                </a:solidFill>
-                <a:latin typeface="微软雅黑" panose="020B0503020204020204" charset="-122"/>
-                <a:ea typeface="微软雅黑" panose="020B0503020204020204" charset="-122"/>
-                <a:cs typeface="微软雅黑" panose="020B0503020204020204" charset="-122"/>
-              </a:rPr>
-              <a:t>交互、</a:t>
-            </a:r>
-            <a:r>
-              <a:rPr lang="en-US" altLang="zh-CN">
-                <a:solidFill>
-                  <a:schemeClr val="tx1"/>
-                </a:solidFill>
-                <a:latin typeface="微软雅黑" panose="020B0503020204020204" charset="-122"/>
-                <a:ea typeface="微软雅黑" panose="020B0503020204020204" charset="-122"/>
-                <a:cs typeface="微软雅黑" panose="020B0503020204020204" charset="-122"/>
-              </a:rPr>
-              <a:t>FFI </a:t>
-            </a:r>
-            <a:r>
-              <a:rPr lang="zh-CN" altLang="en-US">
-                <a:solidFill>
-                  <a:schemeClr val="tx1"/>
-                </a:solidFill>
-                <a:latin typeface="微软雅黑" panose="020B0503020204020204" charset="-122"/>
-                <a:ea typeface="微软雅黑" panose="020B0503020204020204" charset="-122"/>
-                <a:cs typeface="微软雅黑" panose="020B0503020204020204" charset="-122"/>
-              </a:rPr>
-              <a:t>安全和复合类型语义后，再考虑对可伸缩向量表示进行正式稳定化。</a:t>
-            </a:r>
-            <a:endParaRPr lang="zh-CN" altLang="en-US">
+              <a:rPr lang="zh-CN" altLang="en-US" sz="2400" b="1">
+                <a:solidFill>
+                  <a:srgbClr val="C00000"/>
+                </a:solidFill>
+                <a:latin typeface="微软雅黑" panose="020B0503020204020204" charset="-122"/>
+                <a:ea typeface="微软雅黑" panose="020B0503020204020204" charset="-122"/>
+                <a:cs typeface="微软雅黑" panose="020B0503020204020204" charset="-122"/>
+              </a:rPr>
+              <a:t>谓词类型不一致：</a:t>
+            </a:r>
+            <a:r>
+              <a:rPr lang="zh-CN" altLang="en-US" sz="2400">
+                <a:solidFill>
+                  <a:schemeClr val="tx1"/>
+                </a:solidFill>
+                <a:latin typeface="微软雅黑" panose="020B0503020204020204" charset="-122"/>
+                <a:ea typeface="微软雅黑" panose="020B0503020204020204" charset="-122"/>
+                <a:cs typeface="微软雅黑" panose="020B0503020204020204" charset="-122"/>
+              </a:rPr>
+              <a:t>有多种谓词格式，难以在</a:t>
+            </a:r>
+            <a:r>
+              <a:rPr lang="en-US" altLang="zh-CN" sz="2400">
+                <a:solidFill>
+                  <a:schemeClr val="tx1"/>
+                </a:solidFill>
+                <a:latin typeface="微软雅黑" panose="020B0503020204020204" charset="-122"/>
+                <a:ea typeface="微软雅黑" panose="020B0503020204020204" charset="-122"/>
+                <a:cs typeface="微软雅黑" panose="020B0503020204020204" charset="-122"/>
+              </a:rPr>
+              <a:t> Rust </a:t>
+            </a:r>
+            <a:r>
+              <a:rPr lang="zh-CN" altLang="en-US" sz="2400">
+                <a:solidFill>
+                  <a:schemeClr val="tx1"/>
+                </a:solidFill>
+                <a:latin typeface="微软雅黑" panose="020B0503020204020204" charset="-122"/>
+                <a:ea typeface="微软雅黑" panose="020B0503020204020204" charset="-122"/>
+                <a:cs typeface="微软雅黑" panose="020B0503020204020204" charset="-122"/>
+              </a:rPr>
+              <a:t>中抽象成统一接口</a:t>
+            </a:r>
+            <a:endParaRPr lang="en-US" altLang="zh-CN" sz="2400">
               <a:solidFill>
                 <a:schemeClr val="tx1"/>
               </a:solidFill>
@@ -6997,11 +7849,75 @@
               <a:cs typeface="微软雅黑" panose="020B0503020204020204" charset="-122"/>
             </a:endParaRPr>
           </a:p>
+          <a:p>
+            <a:pPr marL="457200" indent="-457200">
+              <a:spcBef>
+                <a:spcPts val="1500"/>
+              </a:spcBef>
+              <a:spcAft>
+                <a:spcPts val="1500"/>
+              </a:spcAft>
+              <a:buFont typeface="+mj-lt"/>
+              <a:buAutoNum type="arabicPeriod"/>
+            </a:pPr>
+            <a:r>
+              <a:rPr lang="en-US" altLang="zh-CN" sz="2400" b="1">
+                <a:solidFill>
+                  <a:srgbClr val="C00000"/>
+                </a:solidFill>
+                <a:latin typeface="微软雅黑" panose="020B0503020204020204" charset="-122"/>
+                <a:ea typeface="微软雅黑" panose="020B0503020204020204" charset="-122"/>
+                <a:cs typeface="微软雅黑" panose="020B0503020204020204" charset="-122"/>
+              </a:rPr>
+              <a:t>SVE </a:t>
+            </a:r>
+            <a:r>
+              <a:rPr lang="zh-CN" altLang="en-US" sz="2400" b="1">
+                <a:solidFill>
+                  <a:srgbClr val="C00000"/>
+                </a:solidFill>
+                <a:latin typeface="微软雅黑" panose="020B0503020204020204" charset="-122"/>
+                <a:ea typeface="微软雅黑" panose="020B0503020204020204" charset="-122"/>
+                <a:cs typeface="微软雅黑" panose="020B0503020204020204" charset="-122"/>
+              </a:rPr>
+              <a:t>函数数量繁多：</a:t>
+            </a:r>
+            <a:r>
+              <a:rPr lang="en-US" altLang="zh-CN" sz="2400">
+                <a:solidFill>
+                  <a:schemeClr val="tx1"/>
+                </a:solidFill>
+                <a:latin typeface="微软雅黑" panose="020B0503020204020204" charset="-122"/>
+                <a:ea typeface="微软雅黑" panose="020B0503020204020204" charset="-122"/>
+                <a:cs typeface="微软雅黑" panose="020B0503020204020204" charset="-122"/>
+              </a:rPr>
+              <a:t>Intrinsics </a:t>
+            </a:r>
+            <a:r>
+              <a:rPr lang="zh-CN" altLang="en-US" sz="2400">
+                <a:solidFill>
+                  <a:schemeClr val="tx1"/>
+                </a:solidFill>
+                <a:latin typeface="微软雅黑" panose="020B0503020204020204" charset="-122"/>
+                <a:ea typeface="微软雅黑" panose="020B0503020204020204" charset="-122"/>
+                <a:cs typeface="微软雅黑" panose="020B0503020204020204" charset="-122"/>
+              </a:rPr>
+              <a:t>手写易错、易冲突，难以长期维护</a:t>
+            </a:r>
+            <a:endParaRPr lang="zh-CN" altLang="en-US" sz="2400">
+              <a:solidFill>
+                <a:schemeClr val="tx1"/>
+              </a:solidFill>
+              <a:latin typeface="微软雅黑" panose="020B0503020204020204" charset="-122"/>
+              <a:ea typeface="微软雅黑" panose="020B0503020204020204" charset="-122"/>
+              <a:cs typeface="微软雅黑" panose="020B0503020204020204" charset="-122"/>
+            </a:endParaRPr>
+          </a:p>
         </p:txBody>
       </p:sp>
     </p:spTree>
     <p:custDataLst>
-      <p:tags r:id="rId4"/>
+      <p:tags r:id="rId3"/>
     </p:custDataLst>
   </p:cSld>
   <p:clrMapOvr>
@@ -7038,141 +7954,15 @@
           <a:bodyPr/>
           <a:p>
             <a:r>
-              <a:rPr lang="zh-CN" altLang="en-US">
+              <a:rPr lang="zh-CN" altLang="en-US" b="1">
                 <a:solidFill>
                   <a:schemeClr val="tx1"/>
                 </a:solidFill>
                 <a:sym typeface="+mn-ea"/>
               </a:rPr>
-              <a:t>三、关键难点与解决方案</a:t>
-            </a:r>
-            <a:endParaRPr lang="zh-CN" altLang="en-US"/>
-          </a:p>
-        </p:txBody>
-      </p:sp>
-      <p:sp>
-        <p:nvSpPr>
-          <p:cNvPr id="3" name="内容占位符 2"/>
-          <p:cNvSpPr>
-            <a:spLocks noGrp="1"/>
-          </p:cNvSpPr>
-          <p:nvPr>
-            <p:ph idx="1"/>
-            <p:custDataLst>
-              <p:tags r:id="rId2"/>
-            </p:custDataLst>
-          </p:nvPr>
-        </p:nvSpPr>
-        <p:spPr>
-          <a:xfrm>
-            <a:off x="608330" y="1490345"/>
-            <a:ext cx="10968990" cy="1116965"/>
-          </a:xfrm>
-        </p:spPr>
-        <p:txBody>
-          <a:bodyPr/>
-          <a:p>
-            <a:pPr marL="0" indent="0">
-              <a:buNone/>
-            </a:pPr>
-            <a:r>
-              <a:rPr lang="en-US" altLang="zh-CN">
-                <a:solidFill>
-                  <a:schemeClr val="tx1"/>
-                </a:solidFill>
-                <a:latin typeface="微软雅黑" panose="020B0503020204020204" charset="-122"/>
-                <a:ea typeface="微软雅黑" panose="020B0503020204020204" charset="-122"/>
-                <a:cs typeface="微软雅黑" panose="020B0503020204020204" charset="-122"/>
-              </a:rPr>
-              <a:t>Rust </a:t>
-            </a:r>
-            <a:r>
-              <a:rPr lang="zh-CN" altLang="en-US">
-                <a:solidFill>
-                  <a:schemeClr val="tx1"/>
-                </a:solidFill>
-                <a:latin typeface="微软雅黑" panose="020B0503020204020204" charset="-122"/>
-                <a:ea typeface="微软雅黑" panose="020B0503020204020204" charset="-122"/>
-                <a:cs typeface="微软雅黑" panose="020B0503020204020204" charset="-122"/>
-              </a:rPr>
-              <a:t>编译器不能直接兼容</a:t>
-            </a:r>
-            <a:r>
-              <a:rPr lang="en-US" altLang="zh-CN">
-                <a:solidFill>
-                  <a:schemeClr val="tx1"/>
-                </a:solidFill>
-                <a:latin typeface="微软雅黑" panose="020B0503020204020204" charset="-122"/>
-                <a:ea typeface="微软雅黑" panose="020B0503020204020204" charset="-122"/>
-                <a:cs typeface="微软雅黑" panose="020B0503020204020204" charset="-122"/>
-              </a:rPr>
-              <a:t>SVE </a:t>
-            </a:r>
-            <a:r>
-              <a:rPr lang="zh-CN" altLang="en-US">
-                <a:solidFill>
-                  <a:schemeClr val="tx1"/>
-                </a:solidFill>
-                <a:latin typeface="微软雅黑" panose="020B0503020204020204" charset="-122"/>
-                <a:ea typeface="微软雅黑" panose="020B0503020204020204" charset="-122"/>
-                <a:cs typeface="微软雅黑" panose="020B0503020204020204" charset="-122"/>
-              </a:rPr>
-              <a:t>这种可变长度向量，主要有三个兼容性相关问题：</a:t>
-            </a:r>
-            <a:endParaRPr lang="en-US" altLang="zh-CN">
-              <a:solidFill>
-                <a:schemeClr val="tx1"/>
-              </a:solidFill>
-              <a:latin typeface="微软雅黑" panose="020B0503020204020204" charset="-122"/>
-              <a:ea typeface="微软雅黑" panose="020B0503020204020204" charset="-122"/>
-              <a:cs typeface="微软雅黑" panose="020B0503020204020204" charset="-122"/>
-            </a:endParaRPr>
-          </a:p>
-          <a:p>
-            <a:pPr marL="0" indent="0">
-              <a:buNone/>
-            </a:pPr>
-            <a:r>
-              <a:rPr lang="zh-CN" altLang="en-US">
-                <a:solidFill>
-                  <a:schemeClr val="tx1"/>
-                </a:solidFill>
-                <a:latin typeface="微软雅黑" panose="020B0503020204020204" charset="-122"/>
-                <a:ea typeface="微软雅黑" panose="020B0503020204020204" charset="-122"/>
-                <a:cs typeface="微软雅黑" panose="020B0503020204020204" charset="-122"/>
-              </a:rPr>
-              <a:t>类型转换受限，谓词类型不统一和</a:t>
-            </a:r>
-            <a:r>
-              <a:rPr lang="en-US" altLang="zh-CN">
-                <a:solidFill>
-                  <a:schemeClr val="tx1"/>
-                </a:solidFill>
-                <a:latin typeface="微软雅黑" panose="020B0503020204020204" charset="-122"/>
-                <a:ea typeface="微软雅黑" panose="020B0503020204020204" charset="-122"/>
-                <a:cs typeface="微软雅黑" panose="020B0503020204020204" charset="-122"/>
-              </a:rPr>
-              <a:t>SVE</a:t>
-            </a:r>
-            <a:r>
-              <a:rPr lang="zh-CN" altLang="en-US">
-                <a:solidFill>
-                  <a:schemeClr val="tx1"/>
-                </a:solidFill>
-                <a:latin typeface="微软雅黑" panose="020B0503020204020204" charset="-122"/>
-                <a:ea typeface="微软雅黑" panose="020B0503020204020204" charset="-122"/>
-                <a:cs typeface="微软雅黑" panose="020B0503020204020204" charset="-122"/>
-              </a:rPr>
-              <a:t>函数支持不全面</a:t>
-            </a:r>
-            <a:endParaRPr lang="zh-CN" altLang="en-US">
-              <a:solidFill>
-                <a:schemeClr val="tx1"/>
-              </a:solidFill>
-              <a:latin typeface="微软雅黑" panose="020B0503020204020204" charset="-122"/>
-              <a:ea typeface="微软雅黑" panose="020B0503020204020204" charset="-122"/>
-              <a:cs typeface="微软雅黑" panose="020B0503020204020204" charset="-122"/>
-            </a:endParaRPr>
+              <a:t>二、关键难点与解决方案</a:t>
+            </a:r>
+            <a:endParaRPr lang="zh-CN" altLang="en-US" b="1"/>
           </a:p>
         </p:txBody>
       </p:sp>
@@ -7184,23 +7974,21 @@
           </p:cNvSpPr>
           <p:nvPr>
             <p:custDataLst>
-              <p:tags r:id="rId3"/>
+              <p:tags r:id="rId2"/>
             </p:custDataLst>
           </p:nvPr>
         </p:nvSpPr>
         <p:spPr>
           <a:xfrm>
-            <a:off x="608330" y="2606675"/>
-            <a:ext cx="9093200" cy="2672080"/>
+            <a:off x="608330" y="1539240"/>
+            <a:ext cx="11194415" cy="5318125"/>
           </a:xfrm>
           <a:prstGeom prst="rect">
             <a:avLst/>
           </a:prstGeom>
         </p:spPr>
         <p:txBody>
-          <a:bodyPr vert="horz" lIns="90000" tIns="46800" rIns="90000" bIns="46800" rtlCol="0">
-            <a:normAutofit fontScale="70000"/>
-          </a:bodyPr>
+          <a:bodyPr vert="horz" lIns="90000" tIns="46800" rIns="90000" bIns="46800" rtlCol="0"/>
           <a:lstStyle>
             <a:lvl1pPr marL="228600" indent="-228600" algn="l" defTabSz="914400" rtl="0" eaLnBrk="1" fontAlgn="auto" latinLnBrk="0" hangingPunct="1">
               <a:lnSpc>
@@ -7411,6 +8199,132 @@
               <a:buNone/>
             </a:pPr>
             <a:r>
+              <a:rPr lang="zh-CN" altLang="en-US" sz="2400" b="1">
+                <a:solidFill>
+                  <a:srgbClr val="C00000"/>
+                </a:solidFill>
+                <a:latin typeface="微软雅黑" panose="020B0503020204020204" charset="-122"/>
+                <a:ea typeface="微软雅黑" panose="020B0503020204020204" charset="-122"/>
+                <a:cs typeface="微软雅黑" panose="020B0503020204020204" charset="-122"/>
+              </a:rPr>
+              <a:t>难点</a:t>
+            </a:r>
+            <a:r>
+              <a:rPr lang="en-US" altLang="zh-CN" sz="2400" b="1">
+                <a:solidFill>
+                  <a:srgbClr val="C00000"/>
+                </a:solidFill>
+                <a:latin typeface="微软雅黑" panose="020B0503020204020204" charset="-122"/>
+                <a:ea typeface="微软雅黑" panose="020B0503020204020204" charset="-122"/>
+                <a:cs typeface="微软雅黑" panose="020B0503020204020204" charset="-122"/>
+              </a:rPr>
+              <a:t>1: </a:t>
+            </a:r>
+            <a:r>
+              <a:rPr lang="zh-CN" altLang="en-US" sz="2400" b="1">
+                <a:solidFill>
+                  <a:srgbClr val="C00000"/>
+                </a:solidFill>
+                <a:latin typeface="微软雅黑" panose="020B0503020204020204" charset="-122"/>
+                <a:ea typeface="微软雅黑" panose="020B0503020204020204" charset="-122"/>
+                <a:cs typeface="微软雅黑" panose="020B0503020204020204" charset="-122"/>
+              </a:rPr>
+              <a:t>类型转换受限</a:t>
+            </a:r>
+            <a:r>
+              <a:rPr lang="en-US" altLang="zh-CN" sz="2400" b="1">
+                <a:solidFill>
+                  <a:srgbClr val="C00000"/>
+                </a:solidFill>
+                <a:latin typeface="微软雅黑" panose="020B0503020204020204" charset="-122"/>
+                <a:ea typeface="微软雅黑" panose="020B0503020204020204" charset="-122"/>
+                <a:cs typeface="微软雅黑" panose="020B0503020204020204" charset="-122"/>
+              </a:rPr>
+              <a:t> </a:t>
+            </a:r>
+            <a:r>
+              <a:rPr lang="en-US" altLang="en-US" sz="2400" b="1">
+                <a:solidFill>
+                  <a:srgbClr val="C00000"/>
+                </a:solidFill>
+                <a:latin typeface="微软雅黑" panose="020B0503020204020204" charset="-122"/>
+                <a:ea typeface="微软雅黑" panose="020B0503020204020204" charset="-122"/>
+                <a:cs typeface="微软雅黑" panose="020B0503020204020204" charset="-122"/>
+              </a:rPr>
+              <a:t>→</a:t>
+            </a:r>
+            <a:r>
+              <a:rPr lang="en-US" altLang="zh-CN" sz="2400" b="1">
+                <a:solidFill>
+                  <a:srgbClr val="C00000"/>
+                </a:solidFill>
+                <a:latin typeface="微软雅黑" panose="020B0503020204020204" charset="-122"/>
+                <a:ea typeface="微软雅黑" panose="020B0503020204020204" charset="-122"/>
+                <a:cs typeface="微软雅黑" panose="020B0503020204020204" charset="-122"/>
+              </a:rPr>
+              <a:t> </a:t>
+            </a:r>
+            <a:r>
+              <a:rPr lang="zh-CN" altLang="en-US" sz="2400" b="1">
+                <a:solidFill>
+                  <a:srgbClr val="C00000"/>
+                </a:solidFill>
+                <a:latin typeface="微软雅黑" panose="020B0503020204020204" charset="-122"/>
+                <a:ea typeface="微软雅黑" panose="020B0503020204020204" charset="-122"/>
+                <a:cs typeface="微软雅黑" panose="020B0503020204020204" charset="-122"/>
+              </a:rPr>
+              <a:t>自建适配层</a:t>
+            </a:r>
+            <a:endParaRPr lang="zh-CN" altLang="en-US" sz="2400" b="1">
+              <a:solidFill>
+                <a:srgbClr val="C00000"/>
+              </a:solidFill>
+              <a:latin typeface="微软雅黑" panose="020B0503020204020204" charset="-122"/>
+              <a:ea typeface="微软雅黑" panose="020B0503020204020204" charset="-122"/>
+              <a:cs typeface="微软雅黑" panose="020B0503020204020204" charset="-122"/>
+            </a:endParaRPr>
+          </a:p>
+          <a:p>
+            <a:pPr>
+              <a:buFont typeface="Wingdings" panose="05000000000000000000" charset="0"/>
+              <a:buChar char="Ø"/>
+            </a:pPr>
+            <a:r>
+              <a:rPr lang="zh-CN" altLang="en-US" b="1">
+                <a:solidFill>
+                  <a:schemeClr val="tx1"/>
+                </a:solidFill>
+                <a:latin typeface="微软雅黑" panose="020B0503020204020204" charset="-122"/>
+                <a:ea typeface="微软雅黑" panose="020B0503020204020204" charset="-122"/>
+                <a:cs typeface="微软雅黑" panose="020B0503020204020204" charset="-122"/>
+              </a:rPr>
+              <a:t>问题：</a:t>
+            </a:r>
+            <a:endParaRPr lang="en-US" altLang="zh-CN" b="1">
+              <a:solidFill>
+                <a:schemeClr val="tx1"/>
+              </a:solidFill>
+              <a:latin typeface="微软雅黑" panose="020B0503020204020204" charset="-122"/>
+              <a:ea typeface="微软雅黑" panose="020B0503020204020204" charset="-122"/>
+              <a:cs typeface="微软雅黑" panose="020B0503020204020204" charset="-122"/>
+            </a:endParaRPr>
+          </a:p>
+          <a:p>
+            <a:pPr marL="0" indent="0">
+              <a:buNone/>
+            </a:pPr>
+            <a:r>
+              <a:rPr lang="zh-CN" altLang="en-US">
+                <a:solidFill>
+                  <a:schemeClr val="tx1"/>
+                </a:solidFill>
+                <a:latin typeface="微软雅黑" panose="020B0503020204020204" charset="-122"/>
+                <a:ea typeface="微软雅黑" panose="020B0503020204020204" charset="-122"/>
+                <a:cs typeface="微软雅黑" panose="020B0503020204020204" charset="-122"/>
+              </a:rPr>
+              <a:t>需要对向量进行数据类型转换时，</a:t>
+            </a:r>
+            <a:r>
               <a:rPr lang="en-US" altLang="zh-CN">
                 <a:solidFill>
                   <a:schemeClr val="tx1"/>
@@ -7419,7 +8333,7 @@
                 <a:ea typeface="微软雅黑" panose="020B0503020204020204" charset="-122"/>
                 <a:cs typeface="微软雅黑" panose="020B0503020204020204" charset="-122"/>
               </a:rPr>
-              <a:t>1.</a:t>
+              <a:t>Rust </a:t>
             </a:r>
             <a:r>
               <a:rPr lang="zh-CN" altLang="en-US">
@@ -7430,7 +8344,459 @@
                 <a:ea typeface="微软雅黑" panose="020B0503020204020204" charset="-122"/>
                 <a:cs typeface="微软雅黑" panose="020B0503020204020204" charset="-122"/>
               </a:rPr>
-              <a:t>类型转换受限：做一层适配器</a:t>
+              <a:t>编译器的通用</a:t>
+            </a:r>
+            <a:r>
+              <a:rPr lang="en-US" altLang="zh-CN">
+                <a:solidFill>
+                  <a:schemeClr val="tx1"/>
+                </a:solidFill>
+                <a:latin typeface="微软雅黑" panose="020B0503020204020204" charset="-122"/>
+                <a:ea typeface="微软雅黑" panose="020B0503020204020204" charset="-122"/>
+                <a:cs typeface="微软雅黑" panose="020B0503020204020204" charset="-122"/>
+              </a:rPr>
+              <a:t> SIMD </a:t>
+            </a:r>
+            <a:r>
+              <a:rPr lang="zh-CN" altLang="en-US">
+                <a:solidFill>
+                  <a:schemeClr val="tx1"/>
+                </a:solidFill>
+                <a:latin typeface="微软雅黑" panose="020B0503020204020204" charset="-122"/>
+                <a:ea typeface="微软雅黑" panose="020B0503020204020204" charset="-122"/>
+                <a:cs typeface="微软雅黑" panose="020B0503020204020204" charset="-122"/>
+              </a:rPr>
+              <a:t>转换（</a:t>
+            </a:r>
+            <a:r>
+              <a:rPr lang="en-US" altLang="zh-CN">
+                <a:solidFill>
+                  <a:schemeClr val="tx1"/>
+                </a:solidFill>
+                <a:latin typeface="微软雅黑" panose="020B0503020204020204" charset="-122"/>
+                <a:ea typeface="微软雅黑" panose="020B0503020204020204" charset="-122"/>
+                <a:cs typeface="微软雅黑" panose="020B0503020204020204" charset="-122"/>
+              </a:rPr>
+              <a:t>simd_cast</a:t>
+            </a:r>
+            <a:r>
+              <a:rPr lang="zh-CN" altLang="en-US">
+                <a:solidFill>
+                  <a:schemeClr val="tx1"/>
+                </a:solidFill>
+                <a:latin typeface="微软雅黑" panose="020B0503020204020204" charset="-122"/>
+                <a:ea typeface="微软雅黑" panose="020B0503020204020204" charset="-122"/>
+                <a:cs typeface="微软雅黑" panose="020B0503020204020204" charset="-122"/>
+              </a:rPr>
+              <a:t>）只支持旧的</a:t>
+            </a:r>
+            <a:r>
+              <a:rPr lang="en-US" altLang="zh-CN">
+                <a:solidFill>
+                  <a:schemeClr val="tx1"/>
+                </a:solidFill>
+                <a:latin typeface="微软雅黑" panose="020B0503020204020204" charset="-122"/>
+                <a:ea typeface="微软雅黑" panose="020B0503020204020204" charset="-122"/>
+                <a:cs typeface="微软雅黑" panose="020B0503020204020204" charset="-122"/>
+              </a:rPr>
+              <a:t> #[repr(simd)]</a:t>
+            </a:r>
+            <a:r>
+              <a:rPr lang="zh-CN" altLang="en-US">
+                <a:solidFill>
+                  <a:schemeClr val="tx1"/>
+                </a:solidFill>
+                <a:latin typeface="微软雅黑" panose="020B0503020204020204" charset="-122"/>
+                <a:ea typeface="微软雅黑" panose="020B0503020204020204" charset="-122"/>
+                <a:cs typeface="微软雅黑" panose="020B0503020204020204" charset="-122"/>
+              </a:rPr>
+              <a:t>属性对应的固定长度向量，对</a:t>
+            </a:r>
+            <a:r>
+              <a:rPr lang="en-US" altLang="zh-CN">
+                <a:solidFill>
+                  <a:schemeClr val="tx1"/>
+                </a:solidFill>
+                <a:latin typeface="微软雅黑" panose="020B0503020204020204" charset="-122"/>
+                <a:ea typeface="微软雅黑" panose="020B0503020204020204" charset="-122"/>
+                <a:cs typeface="微软雅黑" panose="020B0503020204020204" charset="-122"/>
+              </a:rPr>
+              <a:t> SVE </a:t>
+            </a:r>
+            <a:r>
+              <a:rPr lang="zh-CN" altLang="en-US">
+                <a:solidFill>
+                  <a:schemeClr val="tx1"/>
+                </a:solidFill>
+                <a:latin typeface="微软雅黑" panose="020B0503020204020204" charset="-122"/>
+                <a:ea typeface="微软雅黑" panose="020B0503020204020204" charset="-122"/>
+                <a:cs typeface="微软雅黑" panose="020B0503020204020204" charset="-122"/>
+              </a:rPr>
+              <a:t>使用的</a:t>
+            </a:r>
+            <a:r>
+              <a:rPr lang="en-US" altLang="zh-CN">
+                <a:solidFill>
+                  <a:schemeClr val="tx1"/>
+                </a:solidFill>
+                <a:latin typeface="微软雅黑" panose="020B0503020204020204" charset="-122"/>
+                <a:ea typeface="微软雅黑" panose="020B0503020204020204" charset="-122"/>
+                <a:cs typeface="微软雅黑" panose="020B0503020204020204" charset="-122"/>
+              </a:rPr>
+              <a:t> #[rustc_scalable_vector(N)] </a:t>
+            </a:r>
+            <a:r>
+              <a:rPr lang="zh-CN" altLang="en-US">
+                <a:solidFill>
+                  <a:schemeClr val="tx1"/>
+                </a:solidFill>
+                <a:latin typeface="微软雅黑" panose="020B0503020204020204" charset="-122"/>
+                <a:ea typeface="微软雅黑" panose="020B0503020204020204" charset="-122"/>
+                <a:cs typeface="微软雅黑" panose="020B0503020204020204" charset="-122"/>
+              </a:rPr>
+              <a:t>属性不兼容，会直接报错。</a:t>
+            </a:r>
+            <a:endParaRPr lang="en-US" altLang="zh-CN">
+              <a:solidFill>
+                <a:schemeClr val="tx1"/>
+              </a:solidFill>
+              <a:latin typeface="微软雅黑" panose="020B0503020204020204" charset="-122"/>
+              <a:ea typeface="微软雅黑" panose="020B0503020204020204" charset="-122"/>
+              <a:cs typeface="微软雅黑" panose="020B0503020204020204" charset="-122"/>
+            </a:endParaRPr>
+          </a:p>
+          <a:p>
+            <a:pPr>
+              <a:buFont typeface="Wingdings" panose="05000000000000000000" charset="0"/>
+              <a:buChar char="Ø"/>
+            </a:pPr>
+            <a:r>
+              <a:rPr lang="zh-CN" altLang="en-US" b="1">
+                <a:solidFill>
+                  <a:schemeClr val="tx1"/>
+                </a:solidFill>
+                <a:latin typeface="微软雅黑" panose="020B0503020204020204" charset="-122"/>
+                <a:ea typeface="微软雅黑" panose="020B0503020204020204" charset="-122"/>
+                <a:cs typeface="微软雅黑" panose="020B0503020204020204" charset="-122"/>
+              </a:rPr>
+              <a:t>解决方案：</a:t>
+            </a:r>
+            <a:endParaRPr lang="en-US" altLang="zh-CN" b="1">
+              <a:solidFill>
+                <a:schemeClr val="tx1"/>
+              </a:solidFill>
+              <a:latin typeface="微软雅黑" panose="020B0503020204020204" charset="-122"/>
+              <a:ea typeface="微软雅黑" panose="020B0503020204020204" charset="-122"/>
+              <a:cs typeface="微软雅黑" panose="020B0503020204020204" charset="-122"/>
+            </a:endParaRPr>
+          </a:p>
+          <a:p>
+            <a:pPr marL="0" indent="0">
+              <a:buNone/>
+            </a:pPr>
+            <a:r>
+              <a:rPr lang="zh-CN" altLang="en-US">
+                <a:solidFill>
+                  <a:schemeClr val="tx1"/>
+                </a:solidFill>
+                <a:latin typeface="微软雅黑" panose="020B0503020204020204" charset="-122"/>
+                <a:ea typeface="微软雅黑" panose="020B0503020204020204" charset="-122"/>
+                <a:cs typeface="微软雅黑" panose="020B0503020204020204" charset="-122"/>
+              </a:rPr>
+              <a:t>在</a:t>
+            </a:r>
+            <a:r>
+              <a:rPr lang="en-US" altLang="zh-CN">
+                <a:solidFill>
+                  <a:schemeClr val="tx1"/>
+                </a:solidFill>
+                <a:latin typeface="微软雅黑" panose="020B0503020204020204" charset="-122"/>
+                <a:ea typeface="微软雅黑" panose="020B0503020204020204" charset="-122"/>
+                <a:cs typeface="微软雅黑" panose="020B0503020204020204" charset="-122"/>
+              </a:rPr>
+              <a:t> aarch64::sve::mod.rs </a:t>
+            </a:r>
+            <a:r>
+              <a:rPr lang="zh-CN" altLang="en-US">
+                <a:solidFill>
+                  <a:schemeClr val="tx1"/>
+                </a:solidFill>
+                <a:latin typeface="微软雅黑" panose="020B0503020204020204" charset="-122"/>
+                <a:ea typeface="微软雅黑" panose="020B0503020204020204" charset="-122"/>
+                <a:cs typeface="微软雅黑" panose="020B0503020204020204" charset="-122"/>
+              </a:rPr>
+              <a:t>中自定义一层使用</a:t>
+            </a:r>
+            <a:r>
+              <a:rPr lang="en-US" altLang="zh-CN">
+                <a:solidFill>
+                  <a:schemeClr val="tx1"/>
+                </a:solidFill>
+                <a:latin typeface="微软雅黑" panose="020B0503020204020204" charset="-122"/>
+                <a:ea typeface="微软雅黑" panose="020B0503020204020204" charset="-122"/>
+                <a:cs typeface="微软雅黑" panose="020B0503020204020204" charset="-122"/>
+              </a:rPr>
+              <a:t>“</a:t>
+            </a:r>
+            <a:r>
+              <a:rPr lang="zh-CN" altLang="en-US">
+                <a:solidFill>
+                  <a:schemeClr val="tx1"/>
+                </a:solidFill>
+                <a:latin typeface="微软雅黑" panose="020B0503020204020204" charset="-122"/>
+                <a:ea typeface="微软雅黑" panose="020B0503020204020204" charset="-122"/>
+                <a:cs typeface="微软雅黑" panose="020B0503020204020204" charset="-122"/>
+              </a:rPr>
+              <a:t>位级重解释</a:t>
+            </a:r>
+            <a:r>
+              <a:rPr lang="en-US" altLang="zh-CN">
+                <a:solidFill>
+                  <a:schemeClr val="tx1"/>
+                </a:solidFill>
+                <a:latin typeface="微软雅黑" panose="020B0503020204020204" charset="-122"/>
+                <a:ea typeface="微软雅黑" panose="020B0503020204020204" charset="-122"/>
+                <a:cs typeface="微软雅黑" panose="020B0503020204020204" charset="-122"/>
+              </a:rPr>
+              <a:t>”</a:t>
+            </a:r>
+            <a:r>
+              <a:rPr lang="zh-CN" altLang="en-US">
+                <a:solidFill>
+                  <a:schemeClr val="tx1"/>
+                </a:solidFill>
+                <a:latin typeface="微软雅黑" panose="020B0503020204020204" charset="-122"/>
+                <a:ea typeface="微软雅黑" panose="020B0503020204020204" charset="-122"/>
+                <a:cs typeface="微软雅黑" panose="020B0503020204020204" charset="-122"/>
+              </a:rPr>
+              <a:t>实现</a:t>
+            </a:r>
+            <a:r>
+              <a:rPr lang="en-US" altLang="zh-CN">
+                <a:solidFill>
+                  <a:schemeClr val="tx1"/>
+                </a:solidFill>
+                <a:latin typeface="微软雅黑" panose="020B0503020204020204" charset="-122"/>
+                <a:ea typeface="微软雅黑" panose="020B0503020204020204" charset="-122"/>
+                <a:cs typeface="微软雅黑" panose="020B0503020204020204" charset="-122"/>
+              </a:rPr>
+              <a:t>“</a:t>
+            </a:r>
+            <a:r>
+              <a:rPr lang="zh-CN" altLang="en-US">
+                <a:solidFill>
+                  <a:schemeClr val="tx1"/>
+                </a:solidFill>
+                <a:latin typeface="微软雅黑" panose="020B0503020204020204" charset="-122"/>
+                <a:ea typeface="微软雅黑" panose="020B0503020204020204" charset="-122"/>
+                <a:cs typeface="微软雅黑" panose="020B0503020204020204" charset="-122"/>
+              </a:rPr>
+              <a:t>类型转换</a:t>
+            </a:r>
+            <a:r>
+              <a:rPr lang="en-US" altLang="zh-CN">
+                <a:solidFill>
+                  <a:schemeClr val="tx1"/>
+                </a:solidFill>
+                <a:latin typeface="微软雅黑" panose="020B0503020204020204" charset="-122"/>
+                <a:ea typeface="微软雅黑" panose="020B0503020204020204" charset="-122"/>
+                <a:cs typeface="微软雅黑" panose="020B0503020204020204" charset="-122"/>
+              </a:rPr>
+              <a:t>”</a:t>
+            </a:r>
+            <a:r>
+              <a:rPr lang="zh-CN" altLang="en-US">
+                <a:solidFill>
+                  <a:schemeClr val="tx1"/>
+                </a:solidFill>
+                <a:latin typeface="微软雅黑" panose="020B0503020204020204" charset="-122"/>
+                <a:ea typeface="微软雅黑" panose="020B0503020204020204" charset="-122"/>
+                <a:cs typeface="微软雅黑" panose="020B0503020204020204" charset="-122"/>
+              </a:rPr>
+              <a:t>的封装，</a:t>
+            </a:r>
+            <a:endParaRPr lang="en-US" altLang="zh-CN">
+              <a:solidFill>
+                <a:schemeClr val="tx1"/>
+              </a:solidFill>
+              <a:latin typeface="微软雅黑" panose="020B0503020204020204" charset="-122"/>
+              <a:ea typeface="微软雅黑" panose="020B0503020204020204" charset="-122"/>
+              <a:cs typeface="微软雅黑" panose="020B0503020204020204" charset="-122"/>
+            </a:endParaRPr>
+          </a:p>
+          <a:p>
+            <a:pPr marL="0" indent="0">
+              <a:buNone/>
+            </a:pPr>
+            <a:r>
+              <a:rPr lang="zh-CN" altLang="en-US">
+                <a:solidFill>
+                  <a:schemeClr val="tx1"/>
+                </a:solidFill>
+                <a:latin typeface="微软雅黑" panose="020B0503020204020204" charset="-122"/>
+                <a:ea typeface="微软雅黑" panose="020B0503020204020204" charset="-122"/>
+                <a:cs typeface="微软雅黑" panose="020B0503020204020204" charset="-122"/>
+              </a:rPr>
+              <a:t>使用</a:t>
+            </a:r>
+            <a:r>
+              <a:rPr lang="en-US" altLang="zh-CN">
+                <a:solidFill>
+                  <a:schemeClr val="tx1"/>
+                </a:solidFill>
+                <a:latin typeface="微软雅黑" panose="020B0503020204020204" charset="-122"/>
+                <a:ea typeface="微软雅黑" panose="020B0503020204020204" charset="-122"/>
+                <a:cs typeface="微软雅黑" panose="020B0503020204020204" charset="-122"/>
+              </a:rPr>
+              <a:t> transmute_copy </a:t>
+            </a:r>
+            <a:r>
+              <a:rPr lang="zh-CN" altLang="en-US">
+                <a:solidFill>
+                  <a:schemeClr val="tx1"/>
+                </a:solidFill>
+                <a:latin typeface="微软雅黑" panose="020B0503020204020204" charset="-122"/>
+                <a:ea typeface="微软雅黑" panose="020B0503020204020204" charset="-122"/>
+                <a:cs typeface="微软雅黑" panose="020B0503020204020204" charset="-122"/>
+              </a:rPr>
+              <a:t>实现</a:t>
+            </a:r>
+            <a:r>
+              <a:rPr lang="en-US" altLang="zh-CN">
+                <a:solidFill>
+                  <a:schemeClr val="tx1"/>
+                </a:solidFill>
+                <a:latin typeface="微软雅黑" panose="020B0503020204020204" charset="-122"/>
+                <a:ea typeface="微软雅黑" panose="020B0503020204020204" charset="-122"/>
+                <a:cs typeface="微软雅黑" panose="020B0503020204020204" charset="-122"/>
+              </a:rPr>
+              <a:t> simd_cast / simd_reinterpret</a:t>
+            </a:r>
+            <a:r>
+              <a:rPr lang="zh-CN" altLang="en-US">
+                <a:solidFill>
+                  <a:schemeClr val="tx1"/>
+                </a:solidFill>
+                <a:latin typeface="微软雅黑" panose="020B0503020204020204" charset="-122"/>
+                <a:ea typeface="微软雅黑" panose="020B0503020204020204" charset="-122"/>
+                <a:cs typeface="微软雅黑" panose="020B0503020204020204" charset="-122"/>
+              </a:rPr>
+              <a:t>，可对</a:t>
+            </a:r>
+            <a:r>
+              <a:rPr lang="en-US" altLang="zh-CN">
+                <a:solidFill>
+                  <a:schemeClr val="tx1"/>
+                </a:solidFill>
+                <a:latin typeface="微软雅黑" panose="020B0503020204020204" charset="-122"/>
+                <a:ea typeface="微软雅黑" panose="020B0503020204020204" charset="-122"/>
+                <a:cs typeface="微软雅黑" panose="020B0503020204020204" charset="-122"/>
+              </a:rPr>
+              <a:t>SVE</a:t>
+            </a:r>
+            <a:r>
+              <a:rPr lang="zh-CN" altLang="en-US">
+                <a:solidFill>
+                  <a:schemeClr val="tx1"/>
+                </a:solidFill>
+                <a:latin typeface="微软雅黑" panose="020B0503020204020204" charset="-122"/>
+                <a:ea typeface="微软雅黑" panose="020B0503020204020204" charset="-122"/>
+                <a:cs typeface="微软雅黑" panose="020B0503020204020204" charset="-122"/>
+              </a:rPr>
+              <a:t>类型进行操作。</a:t>
+            </a:r>
+            <a:endParaRPr lang="en-US" altLang="zh-CN">
+              <a:solidFill>
+                <a:schemeClr val="tx1"/>
+              </a:solidFill>
+              <a:latin typeface="微软雅黑" panose="020B0503020204020204" charset="-122"/>
+              <a:ea typeface="微软雅黑" panose="020B0503020204020204" charset="-122"/>
+              <a:cs typeface="微软雅黑" panose="020B0503020204020204" charset="-122"/>
+            </a:endParaRPr>
+          </a:p>
+          <a:p>
+            <a:pPr>
+              <a:buFont typeface="Wingdings" panose="05000000000000000000" charset="0"/>
+              <a:buChar char="Ø"/>
+            </a:pPr>
+            <a:r>
+              <a:rPr lang="zh-CN" altLang="en-US" b="1">
+                <a:solidFill>
+                  <a:schemeClr val="tx1"/>
+                </a:solidFill>
+                <a:latin typeface="微软雅黑" panose="020B0503020204020204" charset="-122"/>
+                <a:ea typeface="微软雅黑" panose="020B0503020204020204" charset="-122"/>
+                <a:cs typeface="微软雅黑" panose="020B0503020204020204" charset="-122"/>
+              </a:rPr>
+              <a:t>效果：</a:t>
+            </a:r>
+            <a:endParaRPr lang="en-US" altLang="zh-CN" b="1">
+              <a:solidFill>
+                <a:schemeClr val="tx1"/>
+              </a:solidFill>
+              <a:latin typeface="微软雅黑" panose="020B0503020204020204" charset="-122"/>
+              <a:ea typeface="微软雅黑" panose="020B0503020204020204" charset="-122"/>
+              <a:cs typeface="微软雅黑" panose="020B0503020204020204" charset="-122"/>
+            </a:endParaRPr>
+          </a:p>
+          <a:p>
+            <a:pPr marL="0" indent="0">
+              <a:buNone/>
+            </a:pPr>
+            <a:r>
+              <a:rPr lang="zh-CN" altLang="en-US">
+                <a:solidFill>
+                  <a:schemeClr val="tx1"/>
+                </a:solidFill>
+                <a:latin typeface="微软雅黑" panose="020B0503020204020204" charset="-122"/>
+                <a:ea typeface="微软雅黑" panose="020B0503020204020204" charset="-122"/>
+                <a:cs typeface="微软雅黑" panose="020B0503020204020204" charset="-122"/>
+              </a:rPr>
+              <a:t>上层的</a:t>
+            </a:r>
+            <a:r>
+              <a:rPr lang="en-US" altLang="zh-CN">
+                <a:solidFill>
+                  <a:schemeClr val="tx1"/>
+                </a:solidFill>
+                <a:latin typeface="微软雅黑" panose="020B0503020204020204" charset="-122"/>
+                <a:ea typeface="微软雅黑" panose="020B0503020204020204" charset="-122"/>
+                <a:cs typeface="微软雅黑" panose="020B0503020204020204" charset="-122"/>
+              </a:rPr>
+              <a:t> SVE </a:t>
+            </a:r>
+            <a:r>
+              <a:rPr lang="zh-CN" altLang="en-US">
+                <a:solidFill>
+                  <a:schemeClr val="tx1"/>
+                </a:solidFill>
+                <a:latin typeface="微软雅黑" panose="020B0503020204020204" charset="-122"/>
+                <a:ea typeface="微软雅黑" panose="020B0503020204020204" charset="-122"/>
+                <a:cs typeface="微软雅黑" panose="020B0503020204020204" charset="-122"/>
+              </a:rPr>
+              <a:t>代码调用封装后的转换函数，就可以对</a:t>
+            </a:r>
+            <a:r>
+              <a:rPr lang="en-US" altLang="zh-CN">
+                <a:solidFill>
+                  <a:schemeClr val="tx1"/>
+                </a:solidFill>
+                <a:latin typeface="微软雅黑" panose="020B0503020204020204" charset="-122"/>
+                <a:ea typeface="微软雅黑" panose="020B0503020204020204" charset="-122"/>
+                <a:cs typeface="微软雅黑" panose="020B0503020204020204" charset="-122"/>
+              </a:rPr>
+              <a:t>SVE</a:t>
+            </a:r>
+            <a:r>
+              <a:rPr lang="zh-CN" altLang="en-US">
+                <a:solidFill>
+                  <a:schemeClr val="tx1"/>
+                </a:solidFill>
+                <a:latin typeface="微软雅黑" panose="020B0503020204020204" charset="-122"/>
+                <a:ea typeface="微软雅黑" panose="020B0503020204020204" charset="-122"/>
+                <a:cs typeface="微软雅黑" panose="020B0503020204020204" charset="-122"/>
+              </a:rPr>
+              <a:t>向量进行类型转换，实现兼容。</a:t>
             </a:r>
             <a:endParaRPr lang="zh-CN" altLang="en-US">
               <a:solidFill>
@@ -7441,435 +8807,11 @@
               <a:cs typeface="微软雅黑" panose="020B0503020204020204" charset="-122"/>
             </a:endParaRPr>
           </a:p>
-          <a:p>
-            <a:pPr marL="0" indent="0">
-              <a:buNone/>
-            </a:pPr>
-            <a:r>
-              <a:rPr lang="zh-CN" altLang="en-US">
-                <a:solidFill>
-                  <a:schemeClr val="tx1"/>
-                </a:solidFill>
-                <a:latin typeface="微软雅黑" panose="020B0503020204020204" charset="-122"/>
-                <a:ea typeface="微软雅黑" panose="020B0503020204020204" charset="-122"/>
-                <a:cs typeface="微软雅黑" panose="020B0503020204020204" charset="-122"/>
-              </a:rPr>
-              <a:t>编译器现有的通用</a:t>
-            </a:r>
-            <a:r>
-              <a:rPr lang="en-US" altLang="zh-CN">
-                <a:solidFill>
-                  <a:schemeClr val="tx1"/>
-                </a:solidFill>
-                <a:latin typeface="微软雅黑" panose="020B0503020204020204" charset="-122"/>
-                <a:ea typeface="微软雅黑" panose="020B0503020204020204" charset="-122"/>
-                <a:cs typeface="微软雅黑" panose="020B0503020204020204" charset="-122"/>
-              </a:rPr>
-              <a:t> SIMD </a:t>
-            </a:r>
-            <a:r>
-              <a:rPr lang="zh-CN" altLang="en-US">
-                <a:solidFill>
-                  <a:schemeClr val="tx1"/>
-                </a:solidFill>
-                <a:latin typeface="微软雅黑" panose="020B0503020204020204" charset="-122"/>
-                <a:ea typeface="微软雅黑" panose="020B0503020204020204" charset="-122"/>
-                <a:cs typeface="微软雅黑" panose="020B0503020204020204" charset="-122"/>
-              </a:rPr>
-              <a:t>转换接口（类似</a:t>
-            </a:r>
-            <a:r>
-              <a:rPr lang="en-US" altLang="zh-CN">
-                <a:solidFill>
-                  <a:schemeClr val="tx1"/>
-                </a:solidFill>
-                <a:latin typeface="微软雅黑" panose="020B0503020204020204" charset="-122"/>
-                <a:ea typeface="微软雅黑" panose="020B0503020204020204" charset="-122"/>
-                <a:cs typeface="微软雅黑" panose="020B0503020204020204" charset="-122"/>
-              </a:rPr>
-              <a:t> simd_cast</a:t>
-            </a:r>
-            <a:r>
-              <a:rPr lang="zh-CN" altLang="en-US">
-                <a:solidFill>
-                  <a:schemeClr val="tx1"/>
-                </a:solidFill>
-                <a:latin typeface="微软雅黑" panose="020B0503020204020204" charset="-122"/>
-                <a:ea typeface="微软雅黑" panose="020B0503020204020204" charset="-122"/>
-                <a:cs typeface="微软雅黑" panose="020B0503020204020204" charset="-122"/>
-              </a:rPr>
-              <a:t>）只支持老的固定长度</a:t>
-            </a:r>
-            <a:r>
-              <a:rPr lang="en-US" altLang="zh-CN">
-                <a:solidFill>
-                  <a:schemeClr val="tx1"/>
-                </a:solidFill>
-                <a:latin typeface="微软雅黑" panose="020B0503020204020204" charset="-122"/>
-                <a:ea typeface="微软雅黑" panose="020B0503020204020204" charset="-122"/>
-                <a:cs typeface="微软雅黑" panose="020B0503020204020204" charset="-122"/>
-              </a:rPr>
-              <a:t> SIMD </a:t>
-            </a:r>
-            <a:r>
-              <a:rPr lang="zh-CN" altLang="en-US">
-                <a:solidFill>
-                  <a:schemeClr val="tx1"/>
-                </a:solidFill>
-                <a:latin typeface="微软雅黑" panose="020B0503020204020204" charset="-122"/>
-                <a:ea typeface="微软雅黑" panose="020B0503020204020204" charset="-122"/>
-                <a:cs typeface="微软雅黑" panose="020B0503020204020204" charset="-122"/>
-              </a:rPr>
-              <a:t>类型</a:t>
-            </a:r>
-            <a:r>
-              <a:rPr lang="en-US" altLang="zh-CN">
-                <a:solidFill>
-                  <a:schemeClr val="tx1"/>
-                </a:solidFill>
-                <a:latin typeface="微软雅黑" panose="020B0503020204020204" charset="-122"/>
-                <a:ea typeface="微软雅黑" panose="020B0503020204020204" charset="-122"/>
-                <a:cs typeface="微软雅黑" panose="020B0503020204020204" charset="-122"/>
-              </a:rPr>
-              <a:t>#[repr(simd)]</a:t>
-            </a:r>
-            <a:r>
-              <a:rPr lang="zh-CN" altLang="en-US">
-                <a:solidFill>
-                  <a:schemeClr val="tx1"/>
-                </a:solidFill>
-                <a:latin typeface="微软雅黑" panose="020B0503020204020204" charset="-122"/>
-                <a:ea typeface="微软雅黑" panose="020B0503020204020204" charset="-122"/>
-                <a:cs typeface="微软雅黑" panose="020B0503020204020204" charset="-122"/>
-              </a:rPr>
-              <a:t>，对</a:t>
-            </a:r>
-            <a:r>
-              <a:rPr lang="en-US" altLang="zh-CN">
-                <a:solidFill>
-                  <a:schemeClr val="tx1"/>
-                </a:solidFill>
-                <a:latin typeface="微软雅黑" panose="020B0503020204020204" charset="-122"/>
-                <a:ea typeface="微软雅黑" panose="020B0503020204020204" charset="-122"/>
-                <a:cs typeface="微软雅黑" panose="020B0503020204020204" charset="-122"/>
-              </a:rPr>
-              <a:t> SVE </a:t>
-            </a:r>
-            <a:r>
-              <a:rPr lang="zh-CN" altLang="en-US">
-                <a:solidFill>
-                  <a:schemeClr val="tx1"/>
-                </a:solidFill>
-                <a:latin typeface="微软雅黑" panose="020B0503020204020204" charset="-122"/>
-                <a:ea typeface="微软雅黑" panose="020B0503020204020204" charset="-122"/>
-                <a:cs typeface="微软雅黑" panose="020B0503020204020204" charset="-122"/>
-              </a:rPr>
-              <a:t>的新属性</a:t>
-            </a:r>
-            <a:r>
-              <a:rPr lang="en-US" altLang="zh-CN">
-                <a:solidFill>
-                  <a:schemeClr val="tx1"/>
-                </a:solidFill>
-                <a:latin typeface="微软雅黑" panose="020B0503020204020204" charset="-122"/>
-                <a:ea typeface="微软雅黑" panose="020B0503020204020204" charset="-122"/>
-                <a:cs typeface="微软雅黑" panose="020B0503020204020204" charset="-122"/>
-              </a:rPr>
-              <a:t> #[rustc_scalable_vector(N)] </a:t>
-            </a:r>
-            <a:r>
-              <a:rPr lang="zh-CN" altLang="en-US">
-                <a:solidFill>
-                  <a:schemeClr val="tx1"/>
-                </a:solidFill>
-                <a:latin typeface="微软雅黑" panose="020B0503020204020204" charset="-122"/>
-                <a:ea typeface="微软雅黑" panose="020B0503020204020204" charset="-122"/>
-                <a:cs typeface="微软雅黑" panose="020B0503020204020204" charset="-122"/>
-              </a:rPr>
-              <a:t>不兼容，会直接报错。</a:t>
-            </a:r>
-            <a:endParaRPr lang="zh-CN" altLang="en-US">
-              <a:solidFill>
-                <a:schemeClr val="tx1"/>
-              </a:solidFill>
-              <a:latin typeface="微软雅黑" panose="020B0503020204020204" charset="-122"/>
-              <a:ea typeface="微软雅黑" panose="020B0503020204020204" charset="-122"/>
-              <a:cs typeface="微软雅黑" panose="020B0503020204020204" charset="-122"/>
-            </a:endParaRPr>
-          </a:p>
-          <a:p>
-            <a:pPr marL="0" indent="0">
-              <a:buNone/>
-            </a:pPr>
-            <a:r>
-              <a:rPr lang="zh-CN" altLang="en-US">
-                <a:solidFill>
-                  <a:schemeClr val="tx1"/>
-                </a:solidFill>
-                <a:latin typeface="微软雅黑" panose="020B0503020204020204" charset="-122"/>
-                <a:ea typeface="微软雅黑" panose="020B0503020204020204" charset="-122"/>
-                <a:cs typeface="微软雅黑" panose="020B0503020204020204" charset="-122"/>
-              </a:rPr>
-              <a:t>解决方案是自定义一层</a:t>
-            </a:r>
-            <a:r>
-              <a:rPr lang="en-US" altLang="zh-CN">
-                <a:solidFill>
-                  <a:schemeClr val="tx1"/>
-                </a:solidFill>
-                <a:latin typeface="微软雅黑" panose="020B0503020204020204" charset="-122"/>
-                <a:ea typeface="微软雅黑" panose="020B0503020204020204" charset="-122"/>
-                <a:cs typeface="微软雅黑" panose="020B0503020204020204" charset="-122"/>
-              </a:rPr>
-              <a:t>“</a:t>
-            </a:r>
-            <a:r>
-              <a:rPr lang="zh-CN" altLang="en-US">
-                <a:solidFill>
-                  <a:schemeClr val="tx1"/>
-                </a:solidFill>
-                <a:latin typeface="微软雅黑" panose="020B0503020204020204" charset="-122"/>
-                <a:ea typeface="微软雅黑" panose="020B0503020204020204" charset="-122"/>
-                <a:cs typeface="微软雅黑" panose="020B0503020204020204" charset="-122"/>
-              </a:rPr>
-              <a:t>位级重解释</a:t>
-            </a:r>
-            <a:r>
-              <a:rPr lang="en-US" altLang="zh-CN">
-                <a:solidFill>
-                  <a:schemeClr val="tx1"/>
-                </a:solidFill>
-                <a:latin typeface="微软雅黑" panose="020B0503020204020204" charset="-122"/>
-                <a:ea typeface="微软雅黑" panose="020B0503020204020204" charset="-122"/>
-                <a:cs typeface="微软雅黑" panose="020B0503020204020204" charset="-122"/>
-              </a:rPr>
-              <a:t>”</a:t>
-            </a:r>
-            <a:r>
-              <a:rPr lang="zh-CN" altLang="en-US">
-                <a:solidFill>
-                  <a:schemeClr val="tx1"/>
-                </a:solidFill>
-                <a:latin typeface="微软雅黑" panose="020B0503020204020204" charset="-122"/>
-                <a:ea typeface="微软雅黑" panose="020B0503020204020204" charset="-122"/>
-                <a:cs typeface="微软雅黑" panose="020B0503020204020204" charset="-122"/>
-              </a:rPr>
-              <a:t>封装，使用</a:t>
-            </a:r>
-            <a:r>
-              <a:rPr lang="en-US" altLang="zh-CN">
-                <a:solidFill>
-                  <a:schemeClr val="tx1"/>
-                </a:solidFill>
-                <a:latin typeface="微软雅黑" panose="020B0503020204020204" charset="-122"/>
-                <a:ea typeface="微软雅黑" panose="020B0503020204020204" charset="-122"/>
-                <a:cs typeface="微软雅黑" panose="020B0503020204020204" charset="-122"/>
-              </a:rPr>
-              <a:t> transmute_copy </a:t>
-            </a:r>
-            <a:r>
-              <a:rPr lang="zh-CN" altLang="en-US">
-                <a:solidFill>
-                  <a:schemeClr val="tx1"/>
-                </a:solidFill>
-                <a:latin typeface="微软雅黑" panose="020B0503020204020204" charset="-122"/>
-                <a:ea typeface="微软雅黑" panose="020B0503020204020204" charset="-122"/>
-                <a:cs typeface="微软雅黑" panose="020B0503020204020204" charset="-122"/>
-              </a:rPr>
-              <a:t>替代直接调用标准</a:t>
-            </a:r>
-            <a:r>
-              <a:rPr lang="en-US" altLang="zh-CN">
-                <a:solidFill>
-                  <a:schemeClr val="tx1"/>
-                </a:solidFill>
-                <a:latin typeface="微软雅黑" panose="020B0503020204020204" charset="-122"/>
-                <a:ea typeface="微软雅黑" panose="020B0503020204020204" charset="-122"/>
-                <a:cs typeface="微软雅黑" panose="020B0503020204020204" charset="-122"/>
-              </a:rPr>
-              <a:t> SIMD Intrinsic</a:t>
-            </a:r>
-            <a:r>
-              <a:rPr lang="zh-CN" altLang="en-US">
-                <a:solidFill>
-                  <a:schemeClr val="tx1"/>
-                </a:solidFill>
-                <a:latin typeface="微软雅黑" panose="020B0503020204020204" charset="-122"/>
-                <a:ea typeface="微软雅黑" panose="020B0503020204020204" charset="-122"/>
-                <a:cs typeface="微软雅黑" panose="020B0503020204020204" charset="-122"/>
-              </a:rPr>
-              <a:t>，在</a:t>
-            </a:r>
-            <a:r>
-              <a:rPr lang="en-US" altLang="zh-CN">
-                <a:solidFill>
-                  <a:schemeClr val="tx1"/>
-                </a:solidFill>
-                <a:latin typeface="微软雅黑" panose="020B0503020204020204" charset="-122"/>
-                <a:ea typeface="微软雅黑" panose="020B0503020204020204" charset="-122"/>
-                <a:cs typeface="微软雅黑" panose="020B0503020204020204" charset="-122"/>
-              </a:rPr>
-              <a:t> aarch64/sve/mod.rs </a:t>
-            </a:r>
-            <a:r>
-              <a:rPr lang="zh-CN" altLang="en-US">
-                <a:solidFill>
-                  <a:schemeClr val="tx1"/>
-                </a:solidFill>
-                <a:latin typeface="微软雅黑" panose="020B0503020204020204" charset="-122"/>
-                <a:ea typeface="微软雅黑" panose="020B0503020204020204" charset="-122"/>
-                <a:cs typeface="微软雅黑" panose="020B0503020204020204" charset="-122"/>
-              </a:rPr>
-              <a:t>中实现统一的</a:t>
-            </a:r>
-            <a:r>
-              <a:rPr lang="en-US" altLang="zh-CN">
-                <a:solidFill>
-                  <a:schemeClr val="tx1"/>
-                </a:solidFill>
-                <a:latin typeface="微软雅黑" panose="020B0503020204020204" charset="-122"/>
-                <a:ea typeface="微软雅黑" panose="020B0503020204020204" charset="-122"/>
-                <a:cs typeface="微软雅黑" panose="020B0503020204020204" charset="-122"/>
-              </a:rPr>
-              <a:t> simd_cast / simd_reinterpret </a:t>
-            </a:r>
-            <a:r>
-              <a:rPr lang="zh-CN" altLang="en-US">
-                <a:solidFill>
-                  <a:schemeClr val="tx1"/>
-                </a:solidFill>
-                <a:latin typeface="微软雅黑" panose="020B0503020204020204" charset="-122"/>
-                <a:ea typeface="微软雅黑" panose="020B0503020204020204" charset="-122"/>
-                <a:cs typeface="微软雅黑" panose="020B0503020204020204" charset="-122"/>
-              </a:rPr>
-              <a:t>函数，用作</a:t>
-            </a:r>
-            <a:r>
-              <a:rPr lang="en-US" altLang="zh-CN">
-                <a:solidFill>
-                  <a:schemeClr val="tx1"/>
-                </a:solidFill>
-                <a:latin typeface="微软雅黑" panose="020B0503020204020204" charset="-122"/>
-                <a:ea typeface="微软雅黑" panose="020B0503020204020204" charset="-122"/>
-                <a:cs typeface="微软雅黑" panose="020B0503020204020204" charset="-122"/>
-              </a:rPr>
-              <a:t> SVE </a:t>
-            </a:r>
-            <a:r>
-              <a:rPr lang="zh-CN" altLang="en-US">
-                <a:solidFill>
-                  <a:schemeClr val="tx1"/>
-                </a:solidFill>
-                <a:latin typeface="微软雅黑" panose="020B0503020204020204" charset="-122"/>
-                <a:ea typeface="微软雅黑" panose="020B0503020204020204" charset="-122"/>
-                <a:cs typeface="微软雅黑" panose="020B0503020204020204" charset="-122"/>
-              </a:rPr>
-              <a:t>内部转换层，从而绕过编译器对</a:t>
-            </a:r>
-            <a:r>
-              <a:rPr lang="en-US" altLang="zh-CN">
-                <a:solidFill>
-                  <a:schemeClr val="tx1"/>
-                </a:solidFill>
-                <a:latin typeface="微软雅黑" panose="020B0503020204020204" charset="-122"/>
-                <a:ea typeface="微软雅黑" panose="020B0503020204020204" charset="-122"/>
-                <a:cs typeface="微软雅黑" panose="020B0503020204020204" charset="-122"/>
-              </a:rPr>
-              <a:t> SIMD </a:t>
-            </a:r>
-            <a:r>
-              <a:rPr lang="zh-CN" altLang="en-US">
-                <a:solidFill>
-                  <a:schemeClr val="tx1"/>
-                </a:solidFill>
-                <a:latin typeface="微软雅黑" panose="020B0503020204020204" charset="-122"/>
-                <a:ea typeface="微软雅黑" panose="020B0503020204020204" charset="-122"/>
-                <a:cs typeface="微软雅黑" panose="020B0503020204020204" charset="-122"/>
-              </a:rPr>
-              <a:t>类型的硬编码限制。</a:t>
-            </a:r>
-            <a:endParaRPr lang="zh-CN" altLang="en-US">
-              <a:solidFill>
-                <a:schemeClr val="tx1"/>
-              </a:solidFill>
-              <a:latin typeface="微软雅黑" panose="020B0503020204020204" charset="-122"/>
-              <a:ea typeface="微软雅黑" panose="020B0503020204020204" charset="-122"/>
-              <a:cs typeface="微软雅黑" panose="020B0503020204020204" charset="-122"/>
-            </a:endParaRPr>
-          </a:p>
-          <a:p>
-            <a:pPr marL="0" indent="0">
-              <a:buNone/>
-            </a:pPr>
-            <a:r>
-              <a:rPr lang="zh-CN" altLang="en-US">
-                <a:solidFill>
-                  <a:schemeClr val="tx1"/>
-                </a:solidFill>
-                <a:latin typeface="微软雅黑" panose="020B0503020204020204" charset="-122"/>
-                <a:ea typeface="微软雅黑" panose="020B0503020204020204" charset="-122"/>
-                <a:cs typeface="微软雅黑" panose="020B0503020204020204" charset="-122"/>
-              </a:rPr>
-              <a:t>上层写</a:t>
-            </a:r>
-            <a:r>
-              <a:rPr lang="en-US" altLang="zh-CN">
-                <a:solidFill>
-                  <a:schemeClr val="tx1"/>
-                </a:solidFill>
-                <a:latin typeface="微软雅黑" panose="020B0503020204020204" charset="-122"/>
-                <a:ea typeface="微软雅黑" panose="020B0503020204020204" charset="-122"/>
-                <a:cs typeface="微软雅黑" panose="020B0503020204020204" charset="-122"/>
-              </a:rPr>
-              <a:t> SVE </a:t>
-            </a:r>
-            <a:r>
-              <a:rPr lang="zh-CN" altLang="en-US">
-                <a:solidFill>
-                  <a:schemeClr val="tx1"/>
-                </a:solidFill>
-                <a:latin typeface="微软雅黑" panose="020B0503020204020204" charset="-122"/>
-                <a:ea typeface="微软雅黑" panose="020B0503020204020204" charset="-122"/>
-                <a:cs typeface="微软雅黑" panose="020B0503020204020204" charset="-122"/>
-              </a:rPr>
-              <a:t>代码时，调用的是我们这层统一的转换函数，具体怎么跟底层</a:t>
-            </a:r>
-            <a:r>
-              <a:rPr lang="en-US" altLang="zh-CN">
-                <a:solidFill>
-                  <a:schemeClr val="tx1"/>
-                </a:solidFill>
-                <a:latin typeface="微软雅黑" panose="020B0503020204020204" charset="-122"/>
-                <a:ea typeface="微软雅黑" panose="020B0503020204020204" charset="-122"/>
-                <a:cs typeface="微软雅黑" panose="020B0503020204020204" charset="-122"/>
-              </a:rPr>
-              <a:t> LLVM Intrinsics </a:t>
-            </a:r>
-            <a:r>
-              <a:rPr lang="zh-CN" altLang="en-US">
-                <a:solidFill>
-                  <a:schemeClr val="tx1"/>
-                </a:solidFill>
-                <a:latin typeface="微软雅黑" panose="020B0503020204020204" charset="-122"/>
-                <a:ea typeface="微软雅黑" panose="020B0503020204020204" charset="-122"/>
-                <a:cs typeface="微软雅黑" panose="020B0503020204020204" charset="-122"/>
-              </a:rPr>
-              <a:t>对接，由这层适配器负责。</a:t>
-            </a:r>
-            <a:endParaRPr lang="zh-CN" altLang="en-US">
-              <a:solidFill>
-                <a:schemeClr val="tx1"/>
-              </a:solidFill>
-              <a:latin typeface="微软雅黑" panose="020B0503020204020204" charset="-122"/>
-              <a:ea typeface="微软雅黑" panose="020B0503020204020204" charset="-122"/>
-              <a:cs typeface="微软雅黑" panose="020B0503020204020204" charset="-122"/>
-            </a:endParaRPr>
-          </a:p>
         </p:txBody>
       </p:sp>
     </p:spTree>
     <p:custDataLst>
-      <p:tags r:id="rId4"/>
+      <p:tags r:id="rId3"/>
     </p:custDataLst>
   </p:cSld>
   <p:clrMapOvr>
@@ -7906,15 +8848,15 @@
           <a:bodyPr/>
           <a:p>
             <a:r>
-              <a:rPr lang="zh-CN" altLang="en-US">
+              <a:rPr lang="zh-CN" altLang="en-US" b="1">
                 <a:solidFill>
                   <a:schemeClr val="tx1"/>
                 </a:solidFill>
                 <a:sym typeface="+mn-ea"/>
               </a:rPr>
-              <a:t>三、关键难点与解决方案</a:t>
-            </a:r>
-            <a:endParaRPr lang="zh-CN" altLang="en-US"/>
+              <a:t>二、关键难点与解决方案</a:t>
+            </a:r>
+            <a:endParaRPr lang="zh-CN" altLang="en-US" b="1"/>
           </a:p>
         </p:txBody>
       </p:sp>
@@ -7933,16 +8875,14 @@
         <p:spPr>
           <a:xfrm>
             <a:off x="608330" y="1539240"/>
-            <a:ext cx="9093200" cy="2672080"/>
+            <a:ext cx="10969625" cy="5102225"/>
           </a:xfrm>
           <a:prstGeom prst="rect">
             <a:avLst/>
           </a:prstGeom>
         </p:spPr>
         <p:txBody>
-          <a:bodyPr vert="horz" lIns="90000" tIns="46800" rIns="90000" bIns="46800" rtlCol="0">
-            <a:normAutofit fontScale="90000" lnSpcReduction="10000"/>
-          </a:bodyPr>
+          <a:bodyPr vert="horz" lIns="90000" tIns="46800" rIns="90000" bIns="46800" rtlCol="0"/>
           <a:lstStyle>
             <a:lvl1pPr marL="228600" indent="-228600" algn="l" defTabSz="914400" rtl="0" eaLnBrk="1" fontAlgn="auto" latinLnBrk="0" hangingPunct="1">
               <a:lnSpc>
@@ -8153,28 +9093,122 @@
               <a:buNone/>
             </a:pPr>
             <a:r>
-              <a:rPr lang="en-US" altLang="zh-CN">
-                <a:solidFill>
-                  <a:schemeClr val="tx1"/>
-                </a:solidFill>
-                <a:latin typeface="微软雅黑" panose="020B0503020204020204" charset="-122"/>
-                <a:ea typeface="微软雅黑" panose="020B0503020204020204" charset="-122"/>
-                <a:cs typeface="微软雅黑" panose="020B0503020204020204" charset="-122"/>
-              </a:rPr>
-              <a:t>2.</a:t>
-            </a:r>
-            <a:r>
-              <a:rPr lang="zh-CN" altLang="en-US">
-                <a:solidFill>
-                  <a:schemeClr val="tx1"/>
-                </a:solidFill>
-                <a:latin typeface="微软雅黑" panose="020B0503020204020204" charset="-122"/>
-                <a:ea typeface="微软雅黑" panose="020B0503020204020204" charset="-122"/>
-                <a:cs typeface="微软雅黑" panose="020B0503020204020204" charset="-122"/>
-              </a:rPr>
-              <a:t>谓词类型不统一：做一套统一掩码</a:t>
-            </a:r>
-            <a:endParaRPr lang="zh-CN" altLang="en-US">
+              <a:rPr lang="zh-CN" altLang="en-US" sz="2400" b="1">
+                <a:solidFill>
+                  <a:srgbClr val="C00000"/>
+                </a:solidFill>
+                <a:latin typeface="微软雅黑" panose="020B0503020204020204" charset="-122"/>
+                <a:ea typeface="微软雅黑" panose="020B0503020204020204" charset="-122"/>
+                <a:cs typeface="微软雅黑" panose="020B0503020204020204" charset="-122"/>
+                <a:sym typeface="+mn-ea"/>
+              </a:rPr>
+              <a:t>难点</a:t>
+            </a:r>
+            <a:r>
+              <a:rPr lang="en-US" altLang="zh-CN" sz="2400" b="1">
+                <a:solidFill>
+                  <a:srgbClr val="C00000"/>
+                </a:solidFill>
+                <a:latin typeface="微软雅黑" panose="020B0503020204020204" charset="-122"/>
+                <a:ea typeface="微软雅黑" panose="020B0503020204020204" charset="-122"/>
+                <a:cs typeface="微软雅黑" panose="020B0503020204020204" charset="-122"/>
+                <a:sym typeface="+mn-ea"/>
+              </a:rPr>
+              <a:t>2: </a:t>
+            </a:r>
+            <a:r>
+              <a:rPr lang="zh-CN" altLang="en-US" sz="2400" b="1">
+                <a:solidFill>
+                  <a:srgbClr val="C00000"/>
+                </a:solidFill>
+                <a:latin typeface="微软雅黑" panose="020B0503020204020204" charset="-122"/>
+                <a:ea typeface="微软雅黑" panose="020B0503020204020204" charset="-122"/>
+                <a:cs typeface="微软雅黑" panose="020B0503020204020204" charset="-122"/>
+              </a:rPr>
+              <a:t>谓词类型不一致</a:t>
+            </a:r>
+            <a:r>
+              <a:rPr lang="en-US" altLang="zh-CN" sz="2400" b="1">
+                <a:solidFill>
+                  <a:srgbClr val="C00000"/>
+                </a:solidFill>
+                <a:latin typeface="微软雅黑" panose="020B0503020204020204" charset="-122"/>
+                <a:ea typeface="微软雅黑" panose="020B0503020204020204" charset="-122"/>
+                <a:cs typeface="微软雅黑" panose="020B0503020204020204" charset="-122"/>
+              </a:rPr>
+              <a:t> </a:t>
+            </a:r>
+            <a:r>
+              <a:rPr lang="en-US" altLang="en-US" sz="2400" b="1">
+                <a:solidFill>
+                  <a:srgbClr val="C00000"/>
+                </a:solidFill>
+                <a:latin typeface="微软雅黑" panose="020B0503020204020204" charset="-122"/>
+                <a:ea typeface="微软雅黑" panose="020B0503020204020204" charset="-122"/>
+                <a:cs typeface="微软雅黑" panose="020B0503020204020204" charset="-122"/>
+              </a:rPr>
+              <a:t>→</a:t>
+            </a:r>
+            <a:r>
+              <a:rPr lang="en-US" altLang="zh-CN" sz="2400" b="1">
+                <a:solidFill>
+                  <a:srgbClr val="C00000"/>
+                </a:solidFill>
+                <a:latin typeface="微软雅黑" panose="020B0503020204020204" charset="-122"/>
+                <a:ea typeface="微软雅黑" panose="020B0503020204020204" charset="-122"/>
+                <a:cs typeface="微软雅黑" panose="020B0503020204020204" charset="-122"/>
+              </a:rPr>
+              <a:t> </a:t>
+            </a:r>
+            <a:r>
+              <a:rPr lang="zh-CN" altLang="en-US" sz="2400" b="1">
+                <a:solidFill>
+                  <a:srgbClr val="C00000"/>
+                </a:solidFill>
+                <a:latin typeface="微软雅黑" panose="020B0503020204020204" charset="-122"/>
+                <a:ea typeface="微软雅黑" panose="020B0503020204020204" charset="-122"/>
+                <a:cs typeface="微软雅黑" panose="020B0503020204020204" charset="-122"/>
+              </a:rPr>
+              <a:t>统一成标准</a:t>
+            </a:r>
+            <a:r>
+              <a:rPr lang="zh-CN" altLang="en-US" sz="2400" b="1">
+                <a:solidFill>
+                  <a:srgbClr val="C00000"/>
+                </a:solidFill>
+                <a:latin typeface="微软雅黑" panose="020B0503020204020204" charset="-122"/>
+                <a:ea typeface="微软雅黑" panose="020B0503020204020204" charset="-122"/>
+                <a:cs typeface="微软雅黑" panose="020B0503020204020204" charset="-122"/>
+                <a:sym typeface="+mn-ea"/>
+              </a:rPr>
+              <a:t>谓词类型</a:t>
+            </a:r>
+            <a:endParaRPr lang="zh-CN" altLang="en-US" sz="2400" b="1">
+              <a:solidFill>
+                <a:srgbClr val="C00000"/>
+              </a:solidFill>
+              <a:latin typeface="微软雅黑" panose="020B0503020204020204" charset="-122"/>
+              <a:ea typeface="微软雅黑" panose="020B0503020204020204" charset="-122"/>
+              <a:cs typeface="微软雅黑" panose="020B0503020204020204" charset="-122"/>
+            </a:endParaRPr>
+          </a:p>
+          <a:p>
+            <a:pPr>
+              <a:buFont typeface="Wingdings" panose="05000000000000000000" charset="0"/>
+              <a:buChar char="Ø"/>
+            </a:pPr>
+            <a:r>
+              <a:rPr lang="zh-CN" altLang="en-US" b="1">
+                <a:solidFill>
+                  <a:schemeClr val="tx1"/>
+                </a:solidFill>
+                <a:latin typeface="微软雅黑" panose="020B0503020204020204" charset="-122"/>
+                <a:ea typeface="微软雅黑" panose="020B0503020204020204" charset="-122"/>
+                <a:cs typeface="微软雅黑" panose="020B0503020204020204" charset="-122"/>
+              </a:rPr>
+              <a:t>问题：</a:t>
+            </a:r>
+            <a:endParaRPr lang="en-US" altLang="zh-CN" b="1">
               <a:solidFill>
                 <a:schemeClr val="tx1"/>
               </a:solidFill>
@@ -8207,7 +9241,7 @@
                 <a:ea typeface="微软雅黑" panose="020B0503020204020204" charset="-122"/>
                 <a:cs typeface="微软雅黑" panose="020B0503020204020204" charset="-122"/>
               </a:rPr>
-              <a:t>有多种谓词类型（类似</a:t>
+              <a:t>有多种谓词类型（不同宽度的</a:t>
             </a:r>
             <a:r>
               <a:rPr lang="en-US" altLang="zh-CN">
@@ -8218,7 +9252,19 @@
                 <a:ea typeface="微软雅黑" panose="020B0503020204020204" charset="-122"/>
                 <a:cs typeface="微软雅黑" panose="020B0503020204020204" charset="-122"/>
               </a:rPr>
-              <a:t>“</a:t>
+              <a:t> </a:t>
+            </a:r>
+            <a:r>
+              <a:rPr lang="en-US" altLang="zh-CN">
+                <a:solidFill>
+                  <a:schemeClr val="tx1"/>
+                </a:solidFill>
+                <a:latin typeface="微软雅黑" panose="020B0503020204020204" charset="-122"/>
+                <a:ea typeface="微软雅黑" panose="020B0503020204020204" charset="-122"/>
+                <a:cs typeface="微软雅黑" panose="020B0503020204020204" charset="-122"/>
+                <a:sym typeface="+mn-ea"/>
+              </a:rPr>
+              <a:t>svboolX_t</a:t>
             </a:r>
             <a:r>
               <a:rPr lang="zh-CN" altLang="en-US">
@@ -8229,31 +9275,9 @@
                 <a:ea typeface="微软雅黑" panose="020B0503020204020204" charset="-122"/>
                 <a:cs typeface="微软雅黑" panose="020B0503020204020204" charset="-122"/>
               </a:rPr>
-              <a:t>布尔掩码</a:t>
-            </a:r>
-            <a:r>
-              <a:rPr lang="en-US" altLang="zh-CN">
-                <a:solidFill>
-                  <a:schemeClr val="tx1"/>
-                </a:solidFill>
-                <a:latin typeface="微软雅黑" panose="020B0503020204020204" charset="-122"/>
-                <a:ea typeface="微软雅黑" panose="020B0503020204020204" charset="-122"/>
-                <a:cs typeface="微软雅黑" panose="020B0503020204020204" charset="-122"/>
-              </a:rPr>
-              <a:t>”</a:t>
-            </a:r>
-            <a:r>
-              <a:rPr lang="zh-CN" altLang="en-US">
-                <a:solidFill>
-                  <a:schemeClr val="tx1"/>
-                </a:solidFill>
-                <a:latin typeface="微软雅黑" panose="020B0503020204020204" charset="-122"/>
-                <a:ea typeface="微软雅黑" panose="020B0503020204020204" charset="-122"/>
-                <a:cs typeface="微软雅黑" panose="020B0503020204020204" charset="-122"/>
-              </a:rPr>
-              <a:t>），不同指令族要求的谓词格式不完全一致。</a:t>
-            </a:r>
-            <a:endParaRPr lang="zh-CN" altLang="en-US">
+              <a:t>），不同指令族对谓词格式要求不一致，使用多种宽度的掩码时，重复代码较多。</a:t>
+            </a:r>
+            <a:endParaRPr lang="en-US" altLang="zh-CN">
               <a:solidFill>
                 <a:schemeClr val="tx1"/>
               </a:solidFill>
@@ -8263,175 +9287,22 @@
             </a:endParaRPr>
           </a:p>
           <a:p>
-            <a:pPr marL="0" indent="0">
-              <a:buNone/>
+            <a:pPr>
+              <a:buFont typeface="Wingdings" panose="05000000000000000000" charset="0"/>
+              <a:buChar char="Ø"/>
             </a:pPr>
             <a:r>
-              <a:rPr lang="zh-CN" altLang="en-US">
-                <a:solidFill>
-                  <a:schemeClr val="tx1"/>
-                </a:solidFill>
-                <a:latin typeface="微软雅黑" panose="020B0503020204020204" charset="-122"/>
-                <a:ea typeface="微软雅黑" panose="020B0503020204020204" charset="-122"/>
-                <a:cs typeface="微软雅黑" panose="020B0503020204020204" charset="-122"/>
-              </a:rPr>
-              <a:t>我们在内部把这些谓词统一收敛到一个</a:t>
-            </a:r>
-            <a:r>
-              <a:rPr lang="en-US" altLang="zh-CN">
-                <a:solidFill>
-                  <a:schemeClr val="tx1"/>
-                </a:solidFill>
-                <a:latin typeface="微软雅黑" panose="020B0503020204020204" charset="-122"/>
-                <a:ea typeface="微软雅黑" panose="020B0503020204020204" charset="-122"/>
-                <a:cs typeface="微软雅黑" panose="020B0503020204020204" charset="-122"/>
-              </a:rPr>
-              <a:t>“</a:t>
-            </a:r>
-            <a:r>
-              <a:rPr lang="zh-CN" altLang="en-US">
-                <a:solidFill>
-                  <a:schemeClr val="tx1"/>
-                </a:solidFill>
-                <a:latin typeface="微软雅黑" panose="020B0503020204020204" charset="-122"/>
-                <a:ea typeface="微软雅黑" panose="020B0503020204020204" charset="-122"/>
-                <a:cs typeface="微软雅黑" panose="020B0503020204020204" charset="-122"/>
-              </a:rPr>
-              <a:t>标准谓词类型</a:t>
-            </a:r>
-            <a:r>
-              <a:rPr lang="en-US" altLang="zh-CN">
-                <a:solidFill>
-                  <a:schemeClr val="tx1"/>
-                </a:solidFill>
-                <a:latin typeface="微软雅黑" panose="020B0503020204020204" charset="-122"/>
-                <a:ea typeface="微软雅黑" panose="020B0503020204020204" charset="-122"/>
-                <a:cs typeface="微软雅黑" panose="020B0503020204020204" charset="-122"/>
-              </a:rPr>
-              <a:t>”</a:t>
-            </a:r>
-            <a:r>
-              <a:rPr lang="zh-CN" altLang="en-US">
-                <a:solidFill>
-                  <a:schemeClr val="tx1"/>
-                </a:solidFill>
-                <a:latin typeface="微软雅黑" panose="020B0503020204020204" charset="-122"/>
-                <a:ea typeface="微软雅黑" panose="020B0503020204020204" charset="-122"/>
-                <a:cs typeface="微软雅黑" panose="020B0503020204020204" charset="-122"/>
-              </a:rPr>
-              <a:t>，对外暴露一个统一的</a:t>
-            </a:r>
-            <a:r>
-              <a:rPr lang="en-US" altLang="zh-CN">
-                <a:solidFill>
-                  <a:schemeClr val="tx1"/>
-                </a:solidFill>
-                <a:latin typeface="微软雅黑" panose="020B0503020204020204" charset="-122"/>
-                <a:ea typeface="微软雅黑" panose="020B0503020204020204" charset="-122"/>
-                <a:cs typeface="微软雅黑" panose="020B0503020204020204" charset="-122"/>
-              </a:rPr>
-              <a:t> simd_select </a:t>
-            </a:r>
-            <a:r>
-              <a:rPr lang="zh-CN" altLang="en-US">
-                <a:solidFill>
-                  <a:schemeClr val="tx1"/>
-                </a:solidFill>
-                <a:latin typeface="微软雅黑" panose="020B0503020204020204" charset="-122"/>
-                <a:ea typeface="微软雅黑" panose="020B0503020204020204" charset="-122"/>
-                <a:cs typeface="微软雅黑" panose="020B0503020204020204" charset="-122"/>
-              </a:rPr>
-              <a:t>入口，用</a:t>
-            </a:r>
-            <a:r>
-              <a:rPr lang="en-US" altLang="zh-CN">
-                <a:solidFill>
-                  <a:schemeClr val="tx1"/>
-                </a:solidFill>
-                <a:latin typeface="微软雅黑" panose="020B0503020204020204" charset="-122"/>
-                <a:ea typeface="微软雅黑" panose="020B0503020204020204" charset="-122"/>
-                <a:cs typeface="微软雅黑" panose="020B0503020204020204" charset="-122"/>
-              </a:rPr>
-              <a:t> transmute_copy </a:t>
-            </a:r>
-            <a:r>
-              <a:rPr lang="zh-CN" altLang="en-US">
-                <a:solidFill>
-                  <a:schemeClr val="tx1"/>
-                </a:solidFill>
-                <a:latin typeface="微软雅黑" panose="020B0503020204020204" charset="-122"/>
-                <a:ea typeface="微软雅黑" panose="020B0503020204020204" charset="-122"/>
-                <a:cs typeface="微软雅黑" panose="020B0503020204020204" charset="-122"/>
-              </a:rPr>
-              <a:t>将不同形态的</a:t>
-            </a:r>
-            <a:r>
-              <a:rPr lang="en-US" altLang="zh-CN">
-                <a:solidFill>
-                  <a:schemeClr val="tx1"/>
-                </a:solidFill>
-                <a:latin typeface="微软雅黑" panose="020B0503020204020204" charset="-122"/>
-                <a:ea typeface="微软雅黑" panose="020B0503020204020204" charset="-122"/>
-                <a:cs typeface="微软雅黑" panose="020B0503020204020204" charset="-122"/>
-              </a:rPr>
-              <a:t> svboolX_t </a:t>
-            </a:r>
-            <a:r>
-              <a:rPr lang="zh-CN" altLang="en-US">
-                <a:solidFill>
-                  <a:schemeClr val="tx1"/>
-                </a:solidFill>
-                <a:latin typeface="微软雅黑" panose="020B0503020204020204" charset="-122"/>
-                <a:ea typeface="微软雅黑" panose="020B0503020204020204" charset="-122"/>
-                <a:cs typeface="微软雅黑" panose="020B0503020204020204" charset="-122"/>
-              </a:rPr>
-              <a:t>谓词转换成内部统一的</a:t>
-            </a:r>
-            <a:r>
-              <a:rPr lang="en-US" altLang="zh-CN">
-                <a:solidFill>
-                  <a:schemeClr val="tx1"/>
-                </a:solidFill>
-                <a:latin typeface="微软雅黑" panose="020B0503020204020204" charset="-122"/>
-                <a:ea typeface="微软雅黑" panose="020B0503020204020204" charset="-122"/>
-                <a:cs typeface="微软雅黑" panose="020B0503020204020204" charset="-122"/>
-              </a:rPr>
-              <a:t> svbool_t </a:t>
-            </a:r>
-            <a:r>
-              <a:rPr lang="zh-CN" altLang="en-US">
-                <a:solidFill>
-                  <a:schemeClr val="tx1"/>
-                </a:solidFill>
-                <a:latin typeface="微软雅黑" panose="020B0503020204020204" charset="-122"/>
-                <a:ea typeface="微软雅黑" panose="020B0503020204020204" charset="-122"/>
-                <a:cs typeface="微软雅黑" panose="020B0503020204020204" charset="-122"/>
-              </a:rPr>
-              <a:t>掩码，从而兼容各类谓词</a:t>
-            </a:r>
-            <a:r>
-              <a:rPr lang="en-US" altLang="zh-CN">
-                <a:solidFill>
-                  <a:schemeClr val="tx1"/>
-                </a:solidFill>
-                <a:latin typeface="微软雅黑" panose="020B0503020204020204" charset="-122"/>
-                <a:ea typeface="微软雅黑" panose="020B0503020204020204" charset="-122"/>
-                <a:cs typeface="微软雅黑" panose="020B0503020204020204" charset="-122"/>
-              </a:rPr>
-              <a:t> Intrinsics</a:t>
-            </a:r>
-            <a:r>
-              <a:rPr lang="zh-CN" altLang="en-US">
-                <a:solidFill>
-                  <a:schemeClr val="tx1"/>
-                </a:solidFill>
-                <a:latin typeface="微软雅黑" panose="020B0503020204020204" charset="-122"/>
-                <a:ea typeface="微软雅黑" panose="020B0503020204020204" charset="-122"/>
-                <a:cs typeface="微软雅黑" panose="020B0503020204020204" charset="-122"/>
-              </a:rPr>
-              <a:t>。</a:t>
-            </a:r>
-            <a:endParaRPr lang="zh-CN" altLang="en-US">
+              <a:rPr lang="zh-CN" altLang="en-US" b="1">
+                <a:solidFill>
+                  <a:schemeClr val="tx1"/>
+                </a:solidFill>
+                <a:latin typeface="微软雅黑" panose="020B0503020204020204" charset="-122"/>
+                <a:ea typeface="微软雅黑" panose="020B0503020204020204" charset="-122"/>
+                <a:cs typeface="微软雅黑" panose="020B0503020204020204" charset="-122"/>
+              </a:rPr>
+              <a:t>解决方案：</a:t>
+            </a:r>
+            <a:endParaRPr lang="en-US" altLang="zh-CN" b="1">
               <a:solidFill>
                 <a:schemeClr val="tx1"/>
               </a:solidFill>
@@ -8453,7 +9324,7 @@
                 <a:ea typeface="微软雅黑" panose="020B0503020204020204" charset="-122"/>
                 <a:cs typeface="微软雅黑" panose="020B0503020204020204" charset="-122"/>
               </a:rPr>
-              <a:t>改造完成后，目前</a:t>
+              <a:t>在内部选定一个统一的标准谓词类型</a:t>
             </a:r>
             <a:r>
               <a:rPr lang="en-US" altLang="zh-CN">
@@ -8464,6 +9335,209 @@
                 <a:ea typeface="微软雅黑" panose="020B0503020204020204" charset="-122"/>
                 <a:cs typeface="微软雅黑" panose="020B0503020204020204" charset="-122"/>
               </a:rPr>
+              <a:t> svbool_t</a:t>
+            </a:r>
+            <a:r>
+              <a:rPr lang="zh-CN" altLang="en-US">
+                <a:solidFill>
+                  <a:schemeClr val="tx1"/>
+                </a:solidFill>
+                <a:latin typeface="微软雅黑" panose="020B0503020204020204" charset="-122"/>
+                <a:ea typeface="微软雅黑" panose="020B0503020204020204" charset="-122"/>
+                <a:cs typeface="微软雅黑" panose="020B0503020204020204" charset="-122"/>
+              </a:rPr>
+              <a:t>，用</a:t>
+            </a:r>
+            <a:r>
+              <a:rPr lang="en-US" altLang="zh-CN">
+                <a:solidFill>
+                  <a:schemeClr val="tx1"/>
+                </a:solidFill>
+                <a:latin typeface="微软雅黑" panose="020B0503020204020204" charset="-122"/>
+                <a:ea typeface="微软雅黑" panose="020B0503020204020204" charset="-122"/>
+                <a:cs typeface="微软雅黑" panose="020B0503020204020204" charset="-122"/>
+              </a:rPr>
+              <a:t> transmute_copy </a:t>
+            </a:r>
+            <a:r>
+              <a:rPr lang="zh-CN" altLang="en-US">
+                <a:solidFill>
+                  <a:schemeClr val="tx1"/>
+                </a:solidFill>
+                <a:latin typeface="微软雅黑" panose="020B0503020204020204" charset="-122"/>
+                <a:ea typeface="微软雅黑" panose="020B0503020204020204" charset="-122"/>
+                <a:cs typeface="微软雅黑" panose="020B0503020204020204" charset="-122"/>
+              </a:rPr>
+              <a:t>把各类</a:t>
+            </a:r>
+            <a:r>
+              <a:rPr lang="en-US" altLang="zh-CN">
+                <a:solidFill>
+                  <a:schemeClr val="tx1"/>
+                </a:solidFill>
+                <a:latin typeface="微软雅黑" panose="020B0503020204020204" charset="-122"/>
+                <a:ea typeface="微软雅黑" panose="020B0503020204020204" charset="-122"/>
+                <a:cs typeface="微软雅黑" panose="020B0503020204020204" charset="-122"/>
+              </a:rPr>
+              <a:t> svboolX_t </a:t>
+            </a:r>
+            <a:r>
+              <a:rPr lang="zh-CN" altLang="en-US">
+                <a:solidFill>
+                  <a:schemeClr val="tx1"/>
+                </a:solidFill>
+                <a:latin typeface="微软雅黑" panose="020B0503020204020204" charset="-122"/>
+                <a:ea typeface="微软雅黑" panose="020B0503020204020204" charset="-122"/>
+                <a:cs typeface="微软雅黑" panose="020B0503020204020204" charset="-122"/>
+              </a:rPr>
+              <a:t>谓词转换到统一类型再进行操作，对外暴露一个统一的</a:t>
+            </a:r>
+            <a:r>
+              <a:rPr lang="en-US" altLang="zh-CN">
+                <a:solidFill>
+                  <a:schemeClr val="tx1"/>
+                </a:solidFill>
+                <a:latin typeface="微软雅黑" panose="020B0503020204020204" charset="-122"/>
+                <a:ea typeface="微软雅黑" panose="020B0503020204020204" charset="-122"/>
+                <a:cs typeface="微软雅黑" panose="020B0503020204020204" charset="-122"/>
+              </a:rPr>
+              <a:t> simd_select </a:t>
+            </a:r>
+            <a:r>
+              <a:rPr lang="zh-CN" altLang="en-US">
+                <a:solidFill>
+                  <a:schemeClr val="tx1"/>
+                </a:solidFill>
+                <a:latin typeface="微软雅黑" panose="020B0503020204020204" charset="-122"/>
+                <a:ea typeface="微软雅黑" panose="020B0503020204020204" charset="-122"/>
+                <a:cs typeface="微软雅黑" panose="020B0503020204020204" charset="-122"/>
+              </a:rPr>
+              <a:t>接口。</a:t>
+            </a:r>
+            <a:endParaRPr lang="en-US" altLang="zh-CN">
+              <a:solidFill>
+                <a:schemeClr val="tx1"/>
+              </a:solidFill>
+              <a:latin typeface="微软雅黑" panose="020B0503020204020204" charset="-122"/>
+              <a:ea typeface="微软雅黑" panose="020B0503020204020204" charset="-122"/>
+              <a:cs typeface="微软雅黑" panose="020B0503020204020204" charset="-122"/>
+            </a:endParaRPr>
+          </a:p>
+          <a:p>
+            <a:pPr>
+              <a:buFont typeface="Wingdings" panose="05000000000000000000" charset="0"/>
+              <a:buChar char="Ø"/>
+            </a:pPr>
+            <a:r>
+              <a:rPr lang="zh-CN" altLang="en-US" b="1">
+                <a:solidFill>
+                  <a:schemeClr val="tx1"/>
+                </a:solidFill>
+                <a:latin typeface="微软雅黑" panose="020B0503020204020204" charset="-122"/>
+                <a:ea typeface="微软雅黑" panose="020B0503020204020204" charset="-122"/>
+                <a:cs typeface="微软雅黑" panose="020B0503020204020204" charset="-122"/>
+              </a:rPr>
+              <a:t>效果：</a:t>
+            </a:r>
+            <a:endParaRPr lang="en-US" altLang="zh-CN" b="1">
+              <a:solidFill>
+                <a:schemeClr val="tx1"/>
+              </a:solidFill>
+              <a:latin typeface="微软雅黑" panose="020B0503020204020204" charset="-122"/>
+              <a:ea typeface="微软雅黑" panose="020B0503020204020204" charset="-122"/>
+              <a:cs typeface="微软雅黑" panose="020B0503020204020204" charset="-122"/>
+            </a:endParaRPr>
+          </a:p>
+          <a:p>
+            <a:pPr marL="0" indent="0">
+              <a:buNone/>
+            </a:pPr>
+            <a:r>
+              <a:rPr lang="zh-CN" altLang="en-US">
+                <a:solidFill>
+                  <a:schemeClr val="tx1"/>
+                </a:solidFill>
+                <a:latin typeface="微软雅黑" panose="020B0503020204020204" charset="-122"/>
+                <a:ea typeface="微软雅黑" panose="020B0503020204020204" charset="-122"/>
+                <a:cs typeface="微软雅黑" panose="020B0503020204020204" charset="-122"/>
+              </a:rPr>
+              <a:t>上层使用一个统一的</a:t>
+            </a:r>
+            <a:r>
+              <a:rPr lang="en-US" altLang="zh-CN">
+                <a:solidFill>
+                  <a:schemeClr val="tx1"/>
+                </a:solidFill>
+                <a:latin typeface="微软雅黑" panose="020B0503020204020204" charset="-122"/>
+                <a:ea typeface="微软雅黑" panose="020B0503020204020204" charset="-122"/>
+                <a:cs typeface="微软雅黑" panose="020B0503020204020204" charset="-122"/>
+              </a:rPr>
+              <a:t> </a:t>
+            </a:r>
+            <a:r>
+              <a:rPr lang="zh-CN" altLang="en-US">
+                <a:solidFill>
+                  <a:schemeClr val="tx1"/>
+                </a:solidFill>
+                <a:latin typeface="微软雅黑" panose="020B0503020204020204" charset="-122"/>
+                <a:ea typeface="微软雅黑" panose="020B0503020204020204" charset="-122"/>
+                <a:cs typeface="微软雅黑" panose="020B0503020204020204" charset="-122"/>
+              </a:rPr>
+              <a:t>掩码</a:t>
+            </a:r>
+            <a:r>
+              <a:rPr lang="en-US" altLang="zh-CN">
+                <a:solidFill>
+                  <a:schemeClr val="tx1"/>
+                </a:solidFill>
+                <a:latin typeface="微软雅黑" panose="020B0503020204020204" charset="-122"/>
+                <a:ea typeface="微软雅黑" panose="020B0503020204020204" charset="-122"/>
+                <a:cs typeface="微软雅黑" panose="020B0503020204020204" charset="-122"/>
+              </a:rPr>
+              <a:t> + </a:t>
+            </a:r>
+            <a:r>
+              <a:rPr lang="zh-CN" altLang="en-US">
+                <a:solidFill>
+                  <a:schemeClr val="tx1"/>
+                </a:solidFill>
+                <a:latin typeface="微软雅黑" panose="020B0503020204020204" charset="-122"/>
+                <a:ea typeface="微软雅黑" panose="020B0503020204020204" charset="-122"/>
+                <a:cs typeface="微软雅黑" panose="020B0503020204020204" charset="-122"/>
+              </a:rPr>
+              <a:t>向量</a:t>
+            </a:r>
+            <a:r>
+              <a:rPr lang="en-US" altLang="zh-CN">
+                <a:solidFill>
+                  <a:schemeClr val="tx1"/>
+                </a:solidFill>
+                <a:latin typeface="微软雅黑" panose="020B0503020204020204" charset="-122"/>
+                <a:ea typeface="微软雅黑" panose="020B0503020204020204" charset="-122"/>
+                <a:cs typeface="微软雅黑" panose="020B0503020204020204" charset="-122"/>
+              </a:rPr>
+              <a:t> </a:t>
+            </a:r>
+            <a:r>
+              <a:rPr lang="zh-CN" altLang="en-US">
+                <a:solidFill>
+                  <a:schemeClr val="tx1"/>
+                </a:solidFill>
+                <a:latin typeface="微软雅黑" panose="020B0503020204020204" charset="-122"/>
+                <a:ea typeface="微软雅黑" panose="020B0503020204020204" charset="-122"/>
+                <a:cs typeface="微软雅黑" panose="020B0503020204020204" charset="-122"/>
+              </a:rPr>
+              <a:t>函数接口，底层自动适配不同</a:t>
+            </a:r>
+            <a:r>
+              <a:rPr lang="en-US" altLang="zh-CN">
+                <a:solidFill>
+                  <a:schemeClr val="tx1"/>
+                </a:solidFill>
+                <a:latin typeface="微软雅黑" panose="020B0503020204020204" charset="-122"/>
+                <a:ea typeface="微软雅黑" panose="020B0503020204020204" charset="-122"/>
+                <a:cs typeface="微软雅黑" panose="020B0503020204020204" charset="-122"/>
+              </a:rPr>
               <a:t> SVE </a:t>
             </a:r>
             <a:r>
@@ -8475,51 +9549,7 @@
                 <a:ea typeface="微软雅黑" panose="020B0503020204020204" charset="-122"/>
                 <a:cs typeface="微软雅黑" panose="020B0503020204020204" charset="-122"/>
               </a:rPr>
-              <a:t>的核心算术、谓词选择、计数等用例都能在</a:t>
-            </a:r>
-            <a:r>
-              <a:rPr lang="en-US" altLang="zh-CN">
-                <a:solidFill>
-                  <a:schemeClr val="tx1"/>
-                </a:solidFill>
-                <a:latin typeface="微软雅黑" panose="020B0503020204020204" charset="-122"/>
-                <a:ea typeface="微软雅黑" panose="020B0503020204020204" charset="-122"/>
-                <a:cs typeface="微软雅黑" panose="020B0503020204020204" charset="-122"/>
-              </a:rPr>
-              <a:t> Rust </a:t>
-            </a:r>
-            <a:r>
-              <a:rPr lang="zh-CN" altLang="en-US">
-                <a:solidFill>
-                  <a:schemeClr val="tx1"/>
-                </a:solidFill>
-                <a:latin typeface="微软雅黑" panose="020B0503020204020204" charset="-122"/>
-                <a:ea typeface="微软雅黑" panose="020B0503020204020204" charset="-122"/>
-                <a:cs typeface="微软雅黑" panose="020B0503020204020204" charset="-122"/>
-              </a:rPr>
-              <a:t>中正常编译，并生成预期的</a:t>
-            </a:r>
-            <a:r>
-              <a:rPr lang="en-US" altLang="zh-CN">
-                <a:solidFill>
-                  <a:schemeClr val="tx1"/>
-                </a:solidFill>
-                <a:latin typeface="微软雅黑" panose="020B0503020204020204" charset="-122"/>
-                <a:ea typeface="微软雅黑" panose="020B0503020204020204" charset="-122"/>
-                <a:cs typeface="微软雅黑" panose="020B0503020204020204" charset="-122"/>
-              </a:rPr>
-              <a:t> LLVM IR</a:t>
-            </a:r>
-            <a:r>
-              <a:rPr lang="zh-CN" altLang="en-US">
-                <a:solidFill>
-                  <a:schemeClr val="tx1"/>
-                </a:solidFill>
-                <a:latin typeface="微软雅黑" panose="020B0503020204020204" charset="-122"/>
-                <a:ea typeface="微软雅黑" panose="020B0503020204020204" charset="-122"/>
-                <a:cs typeface="微软雅黑" panose="020B0503020204020204" charset="-122"/>
-              </a:rPr>
-              <a:t>。</a:t>
+              <a:t>指令所需的具体谓词形式。</a:t>
             </a:r>
             <a:endParaRPr lang="zh-CN" altLang="en-US">
               <a:solidFill>
@@ -8571,15 +9601,15 @@
           <a:bodyPr/>
           <a:p>
             <a:r>
-              <a:rPr lang="zh-CN" altLang="en-US">
+              <a:rPr lang="zh-CN" altLang="en-US" b="1">
                 <a:solidFill>
                   <a:schemeClr val="tx1"/>
                 </a:solidFill>
                 <a:sym typeface="+mn-ea"/>
               </a:rPr>
-              <a:t>三、关键难点与解决方案</a:t>
-            </a:r>
-            <a:endParaRPr lang="zh-CN" altLang="en-US"/>
+              <a:t>二、关键难点与解决方案</a:t>
+            </a:r>
+            <a:endParaRPr lang="zh-CN" altLang="en-US" b="1"/>
           </a:p>
         </p:txBody>
       </p:sp>
@@ -8597,8 +9627,8 @@
         </p:nvSpPr>
         <p:spPr>
           <a:xfrm>
-            <a:off x="608330" y="1539240"/>
-            <a:ext cx="9093200" cy="2672080"/>
+            <a:off x="478155" y="1539240"/>
+            <a:ext cx="11205845" cy="5049520"/>
           </a:xfrm>
           <a:prstGeom prst="rect">
             <a:avLst/>
@@ -8606,7 +9636,7 @@
         </p:spPr>
         <p:txBody>
           <a:bodyPr vert="horz" lIns="90000" tIns="46800" rIns="90000" bIns="46800" rtlCol="0">
-            <a:normAutofit fontScale="90000"/>
+            <a:normAutofit fontScale="95000" lnSpcReduction="20000"/>
           </a:bodyPr>
           <a:lstStyle>
             <a:lvl1pPr marL="228600" indent="-228600" algn="l" defTabSz="914400" rtl="0" eaLnBrk="1" fontAlgn="auto" latinLnBrk="0" hangingPunct="1">
@@ -8818,39 +9848,123 @@
               <a:buNone/>
             </a:pPr>
             <a:r>
-              <a:rPr lang="en-US" altLang="zh-CN">
-                <a:solidFill>
-                  <a:schemeClr val="tx1"/>
-                </a:solidFill>
-                <a:latin typeface="微软雅黑" panose="020B0503020204020204" charset="-122"/>
-                <a:ea typeface="微软雅黑" panose="020B0503020204020204" charset="-122"/>
-                <a:cs typeface="微软雅黑" panose="020B0503020204020204" charset="-122"/>
-              </a:rPr>
-              <a:t>3.SVE</a:t>
-            </a:r>
-            <a:r>
-              <a:rPr lang="zh-CN" altLang="en-US">
-                <a:solidFill>
-                  <a:schemeClr val="tx1"/>
-                </a:solidFill>
-                <a:latin typeface="微软雅黑" panose="020B0503020204020204" charset="-122"/>
-                <a:ea typeface="微软雅黑" panose="020B0503020204020204" charset="-122"/>
-                <a:cs typeface="微软雅黑" panose="020B0503020204020204" charset="-122"/>
-              </a:rPr>
-              <a:t>函数支持不全面：使用代码生成器批量生成</a:t>
-            </a:r>
-            <a:r>
-              <a:rPr lang="en-US" altLang="zh-CN">
-                <a:solidFill>
-                  <a:schemeClr val="tx1"/>
-                </a:solidFill>
-                <a:latin typeface="微软雅黑" panose="020B0503020204020204" charset="-122"/>
-                <a:ea typeface="微软雅黑" panose="020B0503020204020204" charset="-122"/>
-                <a:cs typeface="微软雅黑" panose="020B0503020204020204" charset="-122"/>
-              </a:rPr>
-              <a:t>Intrinsics</a:t>
-            </a:r>
-            <a:endParaRPr lang="en-US" altLang="zh-CN">
+              <a:rPr lang="zh-CN" altLang="en-US" sz="2500" b="1">
+                <a:solidFill>
+                  <a:srgbClr val="C00000"/>
+                </a:solidFill>
+                <a:latin typeface="微软雅黑" panose="020B0503020204020204" charset="-122"/>
+                <a:ea typeface="微软雅黑" panose="020B0503020204020204" charset="-122"/>
+                <a:cs typeface="微软雅黑" panose="020B0503020204020204" charset="-122"/>
+                <a:sym typeface="+mn-ea"/>
+              </a:rPr>
+              <a:t>难点</a:t>
+            </a:r>
+            <a:r>
+              <a:rPr lang="en-US" altLang="zh-CN" sz="2500" b="1">
+                <a:solidFill>
+                  <a:srgbClr val="C00000"/>
+                </a:solidFill>
+                <a:latin typeface="微软雅黑" panose="020B0503020204020204" charset="-122"/>
+                <a:ea typeface="微软雅黑" panose="020B0503020204020204" charset="-122"/>
+                <a:cs typeface="微软雅黑" panose="020B0503020204020204" charset="-122"/>
+                <a:sym typeface="+mn-ea"/>
+              </a:rPr>
+              <a:t>3: </a:t>
+            </a:r>
+            <a:r>
+              <a:rPr lang="en-US" altLang="zh-CN" sz="2500" b="1">
+                <a:solidFill>
+                  <a:srgbClr val="C00000"/>
+                </a:solidFill>
+                <a:latin typeface="微软雅黑" panose="020B0503020204020204" charset="-122"/>
+                <a:ea typeface="微软雅黑" panose="020B0503020204020204" charset="-122"/>
+                <a:cs typeface="微软雅黑" panose="020B0503020204020204" charset="-122"/>
+                <a:sym typeface="+mn-ea"/>
+              </a:rPr>
+              <a:t>SVE</a:t>
+            </a:r>
+            <a:r>
+              <a:rPr lang="zh-CN" altLang="en-US" sz="2500" b="1">
+                <a:solidFill>
+                  <a:srgbClr val="C00000"/>
+                </a:solidFill>
+                <a:latin typeface="微软雅黑" panose="020B0503020204020204" charset="-122"/>
+                <a:ea typeface="微软雅黑" panose="020B0503020204020204" charset="-122"/>
+                <a:cs typeface="微软雅黑" panose="020B0503020204020204" charset="-122"/>
+                <a:sym typeface="+mn-ea"/>
+              </a:rPr>
+              <a:t>函数数量繁多</a:t>
+            </a:r>
+            <a:r>
+              <a:rPr lang="en-US" altLang="zh-CN" sz="2500" b="1">
+                <a:solidFill>
+                  <a:srgbClr val="C00000"/>
+                </a:solidFill>
+                <a:latin typeface="微软雅黑" panose="020B0503020204020204" charset="-122"/>
+                <a:ea typeface="微软雅黑" panose="020B0503020204020204" charset="-122"/>
+                <a:cs typeface="微软雅黑" panose="020B0503020204020204" charset="-122"/>
+              </a:rPr>
+              <a:t> </a:t>
+            </a:r>
+            <a:r>
+              <a:rPr lang="en-US" altLang="en-US" sz="2500" b="1">
+                <a:solidFill>
+                  <a:srgbClr val="C00000"/>
+                </a:solidFill>
+                <a:latin typeface="微软雅黑" panose="020B0503020204020204" charset="-122"/>
+                <a:ea typeface="微软雅黑" panose="020B0503020204020204" charset="-122"/>
+                <a:cs typeface="微软雅黑" panose="020B0503020204020204" charset="-122"/>
+              </a:rPr>
+              <a:t>→</a:t>
+            </a:r>
+            <a:r>
+              <a:rPr lang="en-US" altLang="zh-CN" sz="2500" b="1">
+                <a:solidFill>
+                  <a:srgbClr val="C00000"/>
+                </a:solidFill>
+                <a:latin typeface="微软雅黑" panose="020B0503020204020204" charset="-122"/>
+                <a:ea typeface="微软雅黑" panose="020B0503020204020204" charset="-122"/>
+                <a:cs typeface="微软雅黑" panose="020B0503020204020204" charset="-122"/>
+              </a:rPr>
+              <a:t> </a:t>
+            </a:r>
+            <a:r>
+              <a:rPr lang="zh-CN" altLang="en-US" sz="2500" b="1">
+                <a:solidFill>
+                  <a:srgbClr val="C00000"/>
+                </a:solidFill>
+                <a:latin typeface="微软雅黑" panose="020B0503020204020204" charset="-122"/>
+                <a:ea typeface="微软雅黑" panose="020B0503020204020204" charset="-122"/>
+                <a:cs typeface="微软雅黑" panose="020B0503020204020204" charset="-122"/>
+              </a:rPr>
+              <a:t>引入代码生成器</a:t>
+            </a:r>
+            <a:endParaRPr lang="zh-CN" altLang="en-US" sz="2500" b="1">
+              <a:solidFill>
+                <a:srgbClr val="C00000"/>
+              </a:solidFill>
+              <a:latin typeface="微软雅黑" panose="020B0503020204020204" charset="-122"/>
+              <a:ea typeface="微软雅黑" panose="020B0503020204020204" charset="-122"/>
+              <a:cs typeface="微软雅黑" panose="020B0503020204020204" charset="-122"/>
+            </a:endParaRPr>
+          </a:p>
+          <a:p>
+            <a:pPr>
+              <a:buFont typeface="Wingdings" panose="05000000000000000000" charset="0"/>
+              <a:buChar char="Ø"/>
+            </a:pPr>
+            <a:r>
+              <a:rPr lang="zh-CN" altLang="en-US" sz="1900" b="1">
+                <a:solidFill>
+                  <a:schemeClr val="tx1"/>
+                </a:solidFill>
+                <a:latin typeface="微软雅黑" panose="020B0503020204020204" charset="-122"/>
+                <a:ea typeface="微软雅黑" panose="020B0503020204020204" charset="-122"/>
+                <a:cs typeface="微软雅黑" panose="020B0503020204020204" charset="-122"/>
+              </a:rPr>
+              <a:t>问题：</a:t>
+            </a:r>
+            <a:endParaRPr lang="en-US" altLang="zh-CN" sz="1900" b="1">
               <a:solidFill>
                 <a:schemeClr val="tx1"/>
               </a:solidFill>
@@ -8860,175 +9974,34 @@
             </a:endParaRPr>
           </a:p>
           <a:p>
-            <a:pPr marL="0" indent="0">
+            <a:pPr marL="0" algn="l">
+              <a:buClrTx/>
+              <a:buSzTx/>
               <a:buNone/>
             </a:pPr>
             <a:r>
-              <a:rPr lang="zh-CN" altLang="en-US">
-                <a:solidFill>
-                  <a:schemeClr val="tx1"/>
-                </a:solidFill>
-                <a:latin typeface="微软雅黑" panose="020B0503020204020204" charset="-122"/>
-                <a:ea typeface="微软雅黑" panose="020B0503020204020204" charset="-122"/>
-                <a:cs typeface="微软雅黑" panose="020B0503020204020204" charset="-122"/>
-              </a:rPr>
-              <a:t>为了提供更丰富的</a:t>
-            </a:r>
-            <a:r>
-              <a:rPr lang="en-US" altLang="zh-CN">
-                <a:solidFill>
-                  <a:schemeClr val="tx1"/>
-                </a:solidFill>
-                <a:latin typeface="微软雅黑" panose="020B0503020204020204" charset="-122"/>
-                <a:ea typeface="微软雅黑" panose="020B0503020204020204" charset="-122"/>
-                <a:cs typeface="微软雅黑" panose="020B0503020204020204" charset="-122"/>
-              </a:rPr>
-              <a:t>SVE</a:t>
-            </a:r>
-            <a:r>
-              <a:rPr lang="zh-CN" altLang="en-US">
-                <a:solidFill>
-                  <a:schemeClr val="tx1"/>
-                </a:solidFill>
-                <a:latin typeface="微软雅黑" panose="020B0503020204020204" charset="-122"/>
-                <a:ea typeface="微软雅黑" panose="020B0503020204020204" charset="-122"/>
-                <a:cs typeface="微软雅黑" panose="020B0503020204020204" charset="-122"/>
-              </a:rPr>
-              <a:t>函数接口支持，需要在标准库中尽可能全面地集成</a:t>
-            </a:r>
-            <a:r>
-              <a:rPr lang="en-US" altLang="zh-CN">
-                <a:solidFill>
-                  <a:schemeClr val="tx1"/>
-                </a:solidFill>
-                <a:latin typeface="微软雅黑" panose="020B0503020204020204" charset="-122"/>
-                <a:ea typeface="微软雅黑" panose="020B0503020204020204" charset="-122"/>
-                <a:cs typeface="微软雅黑" panose="020B0503020204020204" charset="-122"/>
-              </a:rPr>
-              <a:t>Intrinsics</a:t>
-            </a:r>
-            <a:r>
-              <a:rPr lang="zh-CN" altLang="en-US">
-                <a:solidFill>
-                  <a:schemeClr val="tx1"/>
-                </a:solidFill>
-                <a:latin typeface="微软雅黑" panose="020B0503020204020204" charset="-122"/>
-                <a:ea typeface="微软雅黑" panose="020B0503020204020204" charset="-122"/>
-                <a:cs typeface="微软雅黑" panose="020B0503020204020204" charset="-122"/>
-              </a:rPr>
-              <a:t>，因为每个</a:t>
-            </a:r>
-            <a:r>
-              <a:rPr lang="en-US" altLang="zh-CN">
-                <a:solidFill>
-                  <a:schemeClr val="tx1"/>
-                </a:solidFill>
-                <a:latin typeface="微软雅黑" panose="020B0503020204020204" charset="-122"/>
-                <a:ea typeface="微软雅黑" panose="020B0503020204020204" charset="-122"/>
-                <a:cs typeface="微软雅黑" panose="020B0503020204020204" charset="-122"/>
-              </a:rPr>
-              <a:t>SVE </a:t>
-            </a:r>
-            <a:r>
-              <a:rPr lang="zh-CN" altLang="en-US">
-                <a:solidFill>
-                  <a:schemeClr val="tx1"/>
-                </a:solidFill>
-                <a:latin typeface="微软雅黑" panose="020B0503020204020204" charset="-122"/>
-                <a:ea typeface="微软雅黑" panose="020B0503020204020204" charset="-122"/>
-                <a:cs typeface="微软雅黑" panose="020B0503020204020204" charset="-122"/>
-              </a:rPr>
-              <a:t>函数底层都要通过</a:t>
-            </a:r>
-            <a:r>
-              <a:rPr lang="en-US" altLang="zh-CN">
-                <a:solidFill>
-                  <a:schemeClr val="tx1"/>
-                </a:solidFill>
-                <a:latin typeface="微软雅黑" panose="020B0503020204020204" charset="-122"/>
-                <a:ea typeface="微软雅黑" panose="020B0503020204020204" charset="-122"/>
-                <a:cs typeface="微软雅黑" panose="020B0503020204020204" charset="-122"/>
-              </a:rPr>
-              <a:t>link_name</a:t>
-            </a:r>
-            <a:r>
-              <a:rPr lang="zh-CN" altLang="en-US">
-                <a:solidFill>
-                  <a:schemeClr val="tx1"/>
-                </a:solidFill>
-                <a:latin typeface="微软雅黑" panose="020B0503020204020204" charset="-122"/>
-                <a:ea typeface="微软雅黑" panose="020B0503020204020204" charset="-122"/>
-                <a:cs typeface="微软雅黑" panose="020B0503020204020204" charset="-122"/>
-              </a:rPr>
-              <a:t>精确绑定到一个</a:t>
-            </a:r>
-            <a:r>
-              <a:rPr lang="en-US" altLang="zh-CN">
-                <a:solidFill>
-                  <a:schemeClr val="tx1"/>
-                </a:solidFill>
-                <a:latin typeface="微软雅黑" panose="020B0503020204020204" charset="-122"/>
-                <a:ea typeface="微软雅黑" panose="020B0503020204020204" charset="-122"/>
-                <a:cs typeface="微软雅黑" panose="020B0503020204020204" charset="-122"/>
-              </a:rPr>
-              <a:t> LLVM Intrinsic</a:t>
-            </a:r>
-            <a:r>
-              <a:rPr lang="zh-CN" altLang="en-US">
-                <a:solidFill>
-                  <a:schemeClr val="tx1"/>
-                </a:solidFill>
-                <a:latin typeface="微软雅黑" panose="020B0503020204020204" charset="-122"/>
-                <a:ea typeface="微软雅黑" panose="020B0503020204020204" charset="-122"/>
-                <a:cs typeface="微软雅黑" panose="020B0503020204020204" charset="-122"/>
-              </a:rPr>
-              <a:t>，比如</a:t>
-            </a:r>
-            <a:r>
-              <a:rPr lang="en-US" altLang="zh-CN">
-                <a:solidFill>
-                  <a:schemeClr val="tx1"/>
-                </a:solidFill>
-                <a:latin typeface="微软雅黑" panose="020B0503020204020204" charset="-122"/>
-                <a:ea typeface="微软雅黑" panose="020B0503020204020204" charset="-122"/>
-                <a:cs typeface="微软雅黑" panose="020B0503020204020204" charset="-122"/>
-              </a:rPr>
-              <a:t>llvm.aarch64.sve.add.nxv8i16</a:t>
-            </a:r>
-            <a:r>
-              <a:rPr lang="zh-CN" altLang="en-US">
-                <a:solidFill>
-                  <a:schemeClr val="tx1"/>
-                </a:solidFill>
-                <a:latin typeface="微软雅黑" panose="020B0503020204020204" charset="-122"/>
-                <a:ea typeface="微软雅黑" panose="020B0503020204020204" charset="-122"/>
-                <a:cs typeface="微软雅黑" panose="020B0503020204020204" charset="-122"/>
-              </a:rPr>
-              <a:t>就是一个加法函数的</a:t>
-            </a:r>
-            <a:r>
-              <a:rPr lang="en-US" altLang="zh-CN">
-                <a:solidFill>
-                  <a:schemeClr val="tx1"/>
-                </a:solidFill>
-                <a:latin typeface="微软雅黑" panose="020B0503020204020204" charset="-122"/>
-                <a:ea typeface="微软雅黑" panose="020B0503020204020204" charset="-122"/>
-                <a:cs typeface="微软雅黑" panose="020B0503020204020204" charset="-122"/>
-              </a:rPr>
-              <a:t>link_name</a:t>
-            </a:r>
-            <a:r>
-              <a:rPr lang="zh-CN" altLang="en-US">
-                <a:solidFill>
-                  <a:schemeClr val="tx1"/>
-                </a:solidFill>
-                <a:latin typeface="微软雅黑" panose="020B0503020204020204" charset="-122"/>
-                <a:ea typeface="微软雅黑" panose="020B0503020204020204" charset="-122"/>
-                <a:cs typeface="微软雅黑" panose="020B0503020204020204" charset="-122"/>
-              </a:rPr>
-              <a:t>。</a:t>
-            </a:r>
-            <a:endParaRPr lang="zh-CN" altLang="en-US">
+              <a:rPr lang="en-US" altLang="zh-CN" sz="1900">
+                <a:solidFill>
+                  <a:schemeClr val="tx1"/>
+                </a:solidFill>
+                <a:latin typeface="微软雅黑" panose="020B0503020204020204" charset="-122"/>
+                <a:ea typeface="微软雅黑" panose="020B0503020204020204" charset="-122"/>
+                <a:cs typeface="微软雅黑" panose="020B0503020204020204" charset="-122"/>
+              </a:rPr>
+              <a:t>SVE/SVE2 Intrinsics 数量繁多（上千个），每个都要通过 link_name 精确绑定 LLVM 对应函数</a:t>
+            </a:r>
+            <a:r>
+              <a:rPr lang="zh-CN" altLang="en-US" sz="1900">
+                <a:solidFill>
+                  <a:schemeClr val="tx1"/>
+                </a:solidFill>
+                <a:latin typeface="微软雅黑" panose="020B0503020204020204" charset="-122"/>
+                <a:ea typeface="微软雅黑" panose="020B0503020204020204" charset="-122"/>
+                <a:cs typeface="微软雅黑" panose="020B0503020204020204" charset="-122"/>
+              </a:rPr>
+              <a:t>；</a:t>
+            </a:r>
+            <a:endParaRPr lang="en-US" altLang="zh-CN" sz="1900">
               <a:solidFill>
                 <a:schemeClr val="tx1"/>
               </a:solidFill>
@@ -9038,153 +10011,405 @@
             </a:endParaRPr>
           </a:p>
           <a:p>
+            <a:pPr marL="0" algn="l">
+              <a:buClrTx/>
+              <a:buSzTx/>
+              <a:buNone/>
+            </a:pPr>
+            <a:r>
+              <a:rPr lang="en-US" altLang="zh-CN" sz="1900">
+                <a:solidFill>
+                  <a:schemeClr val="tx1"/>
+                </a:solidFill>
+                <a:latin typeface="微软雅黑" panose="020B0503020204020204" charset="-122"/>
+                <a:ea typeface="微软雅黑" panose="020B0503020204020204" charset="-122"/>
+                <a:cs typeface="微软雅黑" panose="020B0503020204020204" charset="-122"/>
+              </a:rPr>
+              <a:t>例</a:t>
+            </a:r>
+            <a:r>
+              <a:rPr lang="zh-CN" altLang="en-US" sz="1900">
+                <a:solidFill>
+                  <a:schemeClr val="tx1"/>
+                </a:solidFill>
+                <a:latin typeface="微软雅黑" panose="020B0503020204020204" charset="-122"/>
+                <a:ea typeface="微软雅黑" panose="020B0503020204020204" charset="-122"/>
+                <a:cs typeface="微软雅黑" panose="020B0503020204020204" charset="-122"/>
+              </a:rPr>
+              <a:t>如</a:t>
+            </a:r>
+            <a:r>
+              <a:rPr lang="en-US" altLang="zh-CN" sz="1900">
+                <a:solidFill>
+                  <a:schemeClr val="tx1"/>
+                </a:solidFill>
+                <a:latin typeface="微软雅黑" panose="020B0503020204020204" charset="-122"/>
+                <a:ea typeface="微软雅黑" panose="020B0503020204020204" charset="-122"/>
+                <a:cs typeface="微软雅黑" panose="020B0503020204020204" charset="-122"/>
+              </a:rPr>
+              <a:t>：svabd_f32_m </a:t>
+            </a:r>
+            <a:r>
+              <a:rPr lang="zh-CN" altLang="en-US" sz="1900">
+                <a:solidFill>
+                  <a:schemeClr val="tx1"/>
+                </a:solidFill>
+                <a:latin typeface="微软雅黑" panose="020B0503020204020204" charset="-122"/>
+                <a:ea typeface="微软雅黑" panose="020B0503020204020204" charset="-122"/>
+                <a:cs typeface="微软雅黑" panose="020B0503020204020204" charset="-122"/>
+              </a:rPr>
+              <a:t>绑定</a:t>
+            </a:r>
+            <a:r>
+              <a:rPr lang="en-US" altLang="zh-CN" sz="1900">
+                <a:solidFill>
+                  <a:schemeClr val="tx1"/>
+                </a:solidFill>
+                <a:latin typeface="微软雅黑" panose="020B0503020204020204" charset="-122"/>
+                <a:ea typeface="微软雅黑" panose="020B0503020204020204" charset="-122"/>
+                <a:cs typeface="微软雅黑" panose="020B0503020204020204" charset="-122"/>
+              </a:rPr>
+              <a:t> llvm.aarch64.sve.fabd.nxv4f32</a:t>
+            </a:r>
+            <a:r>
+              <a:rPr lang="zh-CN" altLang="en-US" sz="1900">
+                <a:solidFill>
+                  <a:schemeClr val="tx1"/>
+                </a:solidFill>
+                <a:latin typeface="微软雅黑" panose="020B0503020204020204" charset="-122"/>
+                <a:ea typeface="微软雅黑" panose="020B0503020204020204" charset="-122"/>
+                <a:cs typeface="微软雅黑" panose="020B0503020204020204" charset="-122"/>
+              </a:rPr>
+              <a:t>；</a:t>
+            </a:r>
+            <a:endParaRPr lang="en-US" altLang="zh-CN" sz="1900">
+              <a:solidFill>
+                <a:schemeClr val="tx1"/>
+              </a:solidFill>
+              <a:latin typeface="微软雅黑" panose="020B0503020204020204" charset="-122"/>
+              <a:ea typeface="微软雅黑" panose="020B0503020204020204" charset="-122"/>
+              <a:cs typeface="微软雅黑" panose="020B0503020204020204" charset="-122"/>
+            </a:endParaRPr>
+          </a:p>
+          <a:p>
+            <a:pPr marL="0" algn="l">
+              <a:buClrTx/>
+              <a:buSzTx/>
+              <a:buNone/>
+            </a:pPr>
+            <a:r>
+              <a:rPr lang="en-US" altLang="zh-CN" sz="1900">
+                <a:solidFill>
+                  <a:schemeClr val="tx1"/>
+                </a:solidFill>
+                <a:latin typeface="微软雅黑" panose="020B0503020204020204" charset="-122"/>
+                <a:ea typeface="微软雅黑" panose="020B0503020204020204" charset="-122"/>
+                <a:cs typeface="微软雅黑" panose="020B0503020204020204" charset="-122"/>
+              </a:rPr>
+              <a:t>如果在多个地方“手写绑定”</a:t>
+            </a:r>
+            <a:r>
+              <a:rPr lang="en-US" altLang="zh-CN" sz="1900">
+                <a:solidFill>
+                  <a:schemeClr val="tx1"/>
+                </a:solidFill>
+                <a:latin typeface="微软雅黑" panose="020B0503020204020204" charset="-122"/>
+                <a:ea typeface="微软雅黑" panose="020B0503020204020204" charset="-122"/>
+                <a:cs typeface="微软雅黑" panose="020B0503020204020204" charset="-122"/>
+              </a:rPr>
+              <a:t>，容易造成重名、冲突或与 LLVM 版本脱节。</a:t>
+            </a:r>
+            <a:endParaRPr lang="en-US" altLang="zh-CN" sz="1900">
+              <a:solidFill>
+                <a:schemeClr val="tx1"/>
+              </a:solidFill>
+              <a:latin typeface="微软雅黑" panose="020B0503020204020204" charset="-122"/>
+              <a:ea typeface="微软雅黑" panose="020B0503020204020204" charset="-122"/>
+              <a:cs typeface="微软雅黑" panose="020B0503020204020204" charset="-122"/>
+            </a:endParaRPr>
+          </a:p>
+          <a:p>
+            <a:pPr>
+              <a:buFont typeface="Wingdings" panose="05000000000000000000" charset="0"/>
+              <a:buChar char="Ø"/>
+            </a:pPr>
+            <a:r>
+              <a:rPr lang="zh-CN" altLang="en-US" sz="1900" b="1">
+                <a:solidFill>
+                  <a:schemeClr val="tx1"/>
+                </a:solidFill>
+                <a:latin typeface="微软雅黑" panose="020B0503020204020204" charset="-122"/>
+                <a:ea typeface="微软雅黑" panose="020B0503020204020204" charset="-122"/>
+                <a:cs typeface="微软雅黑" panose="020B0503020204020204" charset="-122"/>
+              </a:rPr>
+              <a:t>解决方案：</a:t>
+            </a:r>
+            <a:endParaRPr lang="en-US" altLang="zh-CN" sz="1900" b="1">
+              <a:solidFill>
+                <a:schemeClr val="tx1"/>
+              </a:solidFill>
+              <a:latin typeface="微软雅黑" panose="020B0503020204020204" charset="-122"/>
+              <a:ea typeface="微软雅黑" panose="020B0503020204020204" charset="-122"/>
+              <a:cs typeface="微软雅黑" panose="020B0503020204020204" charset="-122"/>
+            </a:endParaRPr>
+          </a:p>
+          <a:p>
             <a:pPr marL="0" indent="0">
               <a:buNone/>
             </a:pPr>
             <a:r>
-              <a:rPr lang="zh-CN" altLang="en-US">
-                <a:solidFill>
-                  <a:schemeClr val="tx1"/>
-                </a:solidFill>
-                <a:latin typeface="微软雅黑" panose="020B0503020204020204" charset="-122"/>
-                <a:ea typeface="微软雅黑" panose="020B0503020204020204" charset="-122"/>
-                <a:cs typeface="微软雅黑" panose="020B0503020204020204" charset="-122"/>
-              </a:rPr>
-              <a:t>同一个功能如果在多个地方</a:t>
-            </a:r>
-            <a:r>
-              <a:rPr lang="en-US" altLang="zh-CN">
-                <a:solidFill>
-                  <a:schemeClr val="tx1"/>
-                </a:solidFill>
-                <a:latin typeface="微软雅黑" panose="020B0503020204020204" charset="-122"/>
-                <a:ea typeface="微软雅黑" panose="020B0503020204020204" charset="-122"/>
-                <a:cs typeface="微软雅黑" panose="020B0503020204020204" charset="-122"/>
-              </a:rPr>
-              <a:t>“</a:t>
-            </a:r>
-            <a:r>
-              <a:rPr lang="zh-CN" altLang="en-US">
-                <a:solidFill>
-                  <a:schemeClr val="tx1"/>
-                </a:solidFill>
-                <a:latin typeface="微软雅黑" panose="020B0503020204020204" charset="-122"/>
-                <a:ea typeface="微软雅黑" panose="020B0503020204020204" charset="-122"/>
-                <a:cs typeface="微软雅黑" panose="020B0503020204020204" charset="-122"/>
-              </a:rPr>
-              <a:t>手写绑定</a:t>
-            </a:r>
-            <a:r>
-              <a:rPr lang="en-US" altLang="zh-CN">
-                <a:solidFill>
-                  <a:schemeClr val="tx1"/>
-                </a:solidFill>
-                <a:latin typeface="微软雅黑" panose="020B0503020204020204" charset="-122"/>
-                <a:ea typeface="微软雅黑" panose="020B0503020204020204" charset="-122"/>
-                <a:cs typeface="微软雅黑" panose="020B0503020204020204" charset="-122"/>
-              </a:rPr>
-              <a:t>”</a:t>
-            </a:r>
-            <a:r>
-              <a:rPr lang="zh-CN" altLang="en-US">
-                <a:solidFill>
-                  <a:schemeClr val="tx1"/>
-                </a:solidFill>
-                <a:latin typeface="微软雅黑" panose="020B0503020204020204" charset="-122"/>
-                <a:ea typeface="微软雅黑" panose="020B0503020204020204" charset="-122"/>
-                <a:cs typeface="微软雅黑" panose="020B0503020204020204" charset="-122"/>
-              </a:rPr>
-              <a:t>，非常容易重名、冲突或与</a:t>
-            </a:r>
-            <a:r>
-              <a:rPr lang="en-US" altLang="zh-CN">
-                <a:solidFill>
-                  <a:schemeClr val="tx1"/>
-                </a:solidFill>
-                <a:latin typeface="微软雅黑" panose="020B0503020204020204" charset="-122"/>
-                <a:ea typeface="微软雅黑" panose="020B0503020204020204" charset="-122"/>
-                <a:cs typeface="微软雅黑" panose="020B0503020204020204" charset="-122"/>
-              </a:rPr>
-              <a:t> LLVM </a:t>
-            </a:r>
-            <a:r>
-              <a:rPr lang="zh-CN" altLang="en-US">
-                <a:solidFill>
-                  <a:schemeClr val="tx1"/>
-                </a:solidFill>
-                <a:latin typeface="微软雅黑" panose="020B0503020204020204" charset="-122"/>
-                <a:ea typeface="微软雅黑" panose="020B0503020204020204" charset="-122"/>
-                <a:cs typeface="微软雅黑" panose="020B0503020204020204" charset="-122"/>
-              </a:rPr>
-              <a:t>版本脱节。对此，可以使用</a:t>
-            </a:r>
-            <a:r>
-              <a:rPr lang="en-US" altLang="zh-CN">
-                <a:solidFill>
-                  <a:schemeClr val="tx1"/>
-                </a:solidFill>
-                <a:latin typeface="微软雅黑" panose="020B0503020204020204" charset="-122"/>
-                <a:ea typeface="微软雅黑" panose="020B0503020204020204" charset="-122"/>
-                <a:cs typeface="微软雅黑" panose="020B0503020204020204" charset="-122"/>
-              </a:rPr>
-              <a:t>stdarch-gen2 </a:t>
-            </a:r>
-            <a:r>
-              <a:rPr lang="zh-CN" altLang="en-US">
-                <a:solidFill>
-                  <a:schemeClr val="tx1"/>
-                </a:solidFill>
-                <a:latin typeface="微软雅黑" panose="020B0503020204020204" charset="-122"/>
-                <a:ea typeface="微软雅黑" panose="020B0503020204020204" charset="-122"/>
-                <a:cs typeface="微软雅黑" panose="020B0503020204020204" charset="-122"/>
-              </a:rPr>
-              <a:t>通过模板自动生成</a:t>
-            </a:r>
-            <a:r>
-              <a:rPr lang="en-US" altLang="zh-CN">
-                <a:solidFill>
-                  <a:schemeClr val="tx1"/>
-                </a:solidFill>
-                <a:latin typeface="微软雅黑" panose="020B0503020204020204" charset="-122"/>
-                <a:ea typeface="微软雅黑" panose="020B0503020204020204" charset="-122"/>
-                <a:cs typeface="微软雅黑" panose="020B0503020204020204" charset="-122"/>
-              </a:rPr>
-              <a:t> SVE Intrinsics</a:t>
-            </a:r>
-            <a:r>
-              <a:rPr lang="zh-CN" altLang="en-US">
-                <a:solidFill>
-                  <a:schemeClr val="tx1"/>
-                </a:solidFill>
-                <a:latin typeface="微软雅黑" panose="020B0503020204020204" charset="-122"/>
-                <a:ea typeface="微软雅黑" panose="020B0503020204020204" charset="-122"/>
-                <a:cs typeface="微软雅黑" panose="020B0503020204020204" charset="-122"/>
-              </a:rPr>
-              <a:t>，再导入标准库中，可实现较全面的</a:t>
-            </a:r>
-            <a:r>
-              <a:rPr lang="en-US" altLang="zh-CN">
-                <a:solidFill>
-                  <a:schemeClr val="tx1"/>
-                </a:solidFill>
-                <a:latin typeface="微软雅黑" panose="020B0503020204020204" charset="-122"/>
-                <a:ea typeface="微软雅黑" panose="020B0503020204020204" charset="-122"/>
-                <a:cs typeface="微软雅黑" panose="020B0503020204020204" charset="-122"/>
-              </a:rPr>
-              <a:t>SVE</a:t>
-            </a:r>
-            <a:r>
-              <a:rPr lang="zh-CN" altLang="en-US">
-                <a:solidFill>
-                  <a:schemeClr val="tx1"/>
-                </a:solidFill>
-                <a:latin typeface="微软雅黑" panose="020B0503020204020204" charset="-122"/>
-                <a:ea typeface="微软雅黑" panose="020B0503020204020204" charset="-122"/>
-                <a:cs typeface="微软雅黑" panose="020B0503020204020204" charset="-122"/>
-              </a:rPr>
-              <a:t>函数接口支持。</a:t>
-            </a:r>
-            <a:endParaRPr lang="zh-CN" altLang="en-US">
+              <a:rPr lang="zh-CN" altLang="en-US" sz="1900">
+                <a:solidFill>
+                  <a:schemeClr val="tx1"/>
+                </a:solidFill>
+                <a:latin typeface="微软雅黑" panose="020B0503020204020204" charset="-122"/>
+                <a:ea typeface="微软雅黑" panose="020B0503020204020204" charset="-122"/>
+                <a:cs typeface="微软雅黑" panose="020B0503020204020204" charset="-122"/>
+              </a:rPr>
+              <a:t>使用</a:t>
+            </a:r>
+            <a:r>
+              <a:rPr lang="en-US" altLang="zh-CN" sz="1900">
+                <a:solidFill>
+                  <a:schemeClr val="tx1"/>
+                </a:solidFill>
+                <a:latin typeface="微软雅黑" panose="020B0503020204020204" charset="-122"/>
+                <a:ea typeface="微软雅黑" panose="020B0503020204020204" charset="-122"/>
+                <a:cs typeface="微软雅黑" panose="020B0503020204020204" charset="-122"/>
+              </a:rPr>
+              <a:t> stdarch-gen2 </a:t>
+            </a:r>
+            <a:r>
+              <a:rPr lang="zh-CN" altLang="en-US" sz="1900">
+                <a:solidFill>
+                  <a:schemeClr val="tx1"/>
+                </a:solidFill>
+                <a:latin typeface="微软雅黑" panose="020B0503020204020204" charset="-122"/>
+                <a:ea typeface="微软雅黑" panose="020B0503020204020204" charset="-122"/>
+                <a:cs typeface="微软雅黑" panose="020B0503020204020204" charset="-122"/>
+              </a:rPr>
+              <a:t>工具，基于模板自动生成</a:t>
+            </a:r>
+            <a:r>
+              <a:rPr lang="en-US" altLang="zh-CN" sz="1900">
+                <a:solidFill>
+                  <a:schemeClr val="tx1"/>
+                </a:solidFill>
+                <a:latin typeface="微软雅黑" panose="020B0503020204020204" charset="-122"/>
+                <a:ea typeface="微软雅黑" panose="020B0503020204020204" charset="-122"/>
+                <a:cs typeface="微软雅黑" panose="020B0503020204020204" charset="-122"/>
+              </a:rPr>
+              <a:t> SVE </a:t>
+            </a:r>
+            <a:r>
+              <a:rPr lang="zh-CN" altLang="en-US" sz="1900">
+                <a:solidFill>
+                  <a:schemeClr val="tx1"/>
+                </a:solidFill>
+                <a:latin typeface="微软雅黑" panose="020B0503020204020204" charset="-122"/>
+                <a:ea typeface="微软雅黑" panose="020B0503020204020204" charset="-122"/>
+                <a:cs typeface="微软雅黑" panose="020B0503020204020204" charset="-122"/>
+              </a:rPr>
+              <a:t>和</a:t>
+            </a:r>
+            <a:r>
+              <a:rPr lang="en-US" altLang="zh-CN" sz="1900">
+                <a:solidFill>
+                  <a:schemeClr val="tx1"/>
+                </a:solidFill>
+                <a:latin typeface="微软雅黑" panose="020B0503020204020204" charset="-122"/>
+                <a:ea typeface="微软雅黑" panose="020B0503020204020204" charset="-122"/>
+                <a:cs typeface="微软雅黑" panose="020B0503020204020204" charset="-122"/>
+              </a:rPr>
+              <a:t> LLVM Intrinsics </a:t>
+            </a:r>
+            <a:r>
+              <a:rPr lang="zh-CN" altLang="en-US" sz="1900">
+                <a:solidFill>
+                  <a:schemeClr val="tx1"/>
+                </a:solidFill>
+                <a:latin typeface="微软雅黑" panose="020B0503020204020204" charset="-122"/>
+                <a:ea typeface="微软雅黑" panose="020B0503020204020204" charset="-122"/>
+                <a:cs typeface="微软雅黑" panose="020B0503020204020204" charset="-122"/>
+              </a:rPr>
+              <a:t>的绑定代码；</a:t>
+            </a:r>
+            <a:endParaRPr lang="en-US" altLang="zh-CN" sz="1900">
+              <a:solidFill>
+                <a:schemeClr val="tx1"/>
+              </a:solidFill>
+              <a:latin typeface="微软雅黑" panose="020B0503020204020204" charset="-122"/>
+              <a:ea typeface="微软雅黑" panose="020B0503020204020204" charset="-122"/>
+              <a:cs typeface="微软雅黑" panose="020B0503020204020204" charset="-122"/>
+            </a:endParaRPr>
+          </a:p>
+          <a:p>
+            <a:pPr marL="0" indent="0">
+              <a:buNone/>
+            </a:pPr>
+            <a:r>
+              <a:rPr lang="zh-CN" altLang="en-US" sz="1900">
+                <a:solidFill>
+                  <a:schemeClr val="tx1"/>
+                </a:solidFill>
+                <a:latin typeface="微软雅黑" panose="020B0503020204020204" charset="-122"/>
+                <a:ea typeface="微软雅黑" panose="020B0503020204020204" charset="-122"/>
+                <a:cs typeface="微软雅黑" panose="020B0503020204020204" charset="-122"/>
+              </a:rPr>
+              <a:t>统一导入标准库，形成集中、规范的</a:t>
+            </a:r>
+            <a:r>
+              <a:rPr lang="en-US" altLang="zh-CN" sz="1900">
+                <a:solidFill>
+                  <a:schemeClr val="tx1"/>
+                </a:solidFill>
+                <a:latin typeface="微软雅黑" panose="020B0503020204020204" charset="-122"/>
+                <a:ea typeface="微软雅黑" panose="020B0503020204020204" charset="-122"/>
+                <a:cs typeface="微软雅黑" panose="020B0503020204020204" charset="-122"/>
+              </a:rPr>
+              <a:t> SVE API </a:t>
+            </a:r>
+            <a:r>
+              <a:rPr lang="zh-CN" altLang="en-US" sz="1900">
+                <a:solidFill>
+                  <a:schemeClr val="tx1"/>
+                </a:solidFill>
+                <a:latin typeface="微软雅黑" panose="020B0503020204020204" charset="-122"/>
+                <a:ea typeface="微软雅黑" panose="020B0503020204020204" charset="-122"/>
+                <a:cs typeface="微软雅黑" panose="020B0503020204020204" charset="-122"/>
+              </a:rPr>
+              <a:t>接口支持。</a:t>
+            </a:r>
+            <a:endParaRPr lang="en-US" altLang="zh-CN" sz="1900">
+              <a:solidFill>
+                <a:schemeClr val="tx1"/>
+              </a:solidFill>
+              <a:latin typeface="微软雅黑" panose="020B0503020204020204" charset="-122"/>
+              <a:ea typeface="微软雅黑" panose="020B0503020204020204" charset="-122"/>
+              <a:cs typeface="微软雅黑" panose="020B0503020204020204" charset="-122"/>
+            </a:endParaRPr>
+          </a:p>
+          <a:p>
+            <a:pPr>
+              <a:buFont typeface="Wingdings" panose="05000000000000000000" charset="0"/>
+              <a:buChar char="Ø"/>
+            </a:pPr>
+            <a:r>
+              <a:rPr lang="zh-CN" altLang="en-US" sz="1900" b="1">
+                <a:solidFill>
+                  <a:schemeClr val="tx1"/>
+                </a:solidFill>
+                <a:latin typeface="微软雅黑" panose="020B0503020204020204" charset="-122"/>
+                <a:ea typeface="微软雅黑" panose="020B0503020204020204" charset="-122"/>
+                <a:cs typeface="微软雅黑" panose="020B0503020204020204" charset="-122"/>
+              </a:rPr>
+              <a:t>效果：</a:t>
+            </a:r>
+            <a:endParaRPr lang="en-US" altLang="zh-CN" sz="1900" b="1">
+              <a:solidFill>
+                <a:schemeClr val="tx1"/>
+              </a:solidFill>
+              <a:latin typeface="微软雅黑" panose="020B0503020204020204" charset="-122"/>
+              <a:ea typeface="微软雅黑" panose="020B0503020204020204" charset="-122"/>
+              <a:cs typeface="微软雅黑" panose="020B0503020204020204" charset="-122"/>
+            </a:endParaRPr>
+          </a:p>
+          <a:p>
+            <a:pPr marL="0" indent="0">
+              <a:buNone/>
+            </a:pPr>
+            <a:r>
+              <a:rPr lang="zh-CN" altLang="en-US" sz="1900">
+                <a:solidFill>
+                  <a:schemeClr val="tx1"/>
+                </a:solidFill>
+                <a:latin typeface="微软雅黑" panose="020B0503020204020204" charset="-122"/>
+                <a:ea typeface="微软雅黑" panose="020B0503020204020204" charset="-122"/>
+                <a:cs typeface="微软雅黑" panose="020B0503020204020204" charset="-122"/>
+              </a:rPr>
+              <a:t>已实现</a:t>
+            </a:r>
+            <a:r>
+              <a:rPr lang="en-US" altLang="zh-CN" sz="1900">
+                <a:solidFill>
+                  <a:schemeClr val="tx1"/>
+                </a:solidFill>
+                <a:latin typeface="微软雅黑" panose="020B0503020204020204" charset="-122"/>
+                <a:ea typeface="微软雅黑" panose="020B0503020204020204" charset="-122"/>
+                <a:cs typeface="微软雅黑" panose="020B0503020204020204" charset="-122"/>
+              </a:rPr>
+              <a:t>1852 </a:t>
+            </a:r>
+            <a:r>
+              <a:rPr lang="zh-CN" altLang="en-US" sz="1900">
+                <a:solidFill>
+                  <a:schemeClr val="tx1"/>
+                </a:solidFill>
+                <a:latin typeface="微软雅黑" panose="020B0503020204020204" charset="-122"/>
+                <a:ea typeface="微软雅黑" panose="020B0503020204020204" charset="-122"/>
+                <a:cs typeface="微软雅黑" panose="020B0503020204020204" charset="-122"/>
+              </a:rPr>
+              <a:t>个</a:t>
+            </a:r>
+            <a:r>
+              <a:rPr lang="en-US" altLang="zh-CN" sz="1900">
+                <a:solidFill>
+                  <a:schemeClr val="tx1"/>
+                </a:solidFill>
+                <a:latin typeface="微软雅黑" panose="020B0503020204020204" charset="-122"/>
+                <a:ea typeface="微软雅黑" panose="020B0503020204020204" charset="-122"/>
+                <a:cs typeface="微软雅黑" panose="020B0503020204020204" charset="-122"/>
+              </a:rPr>
+              <a:t> Intrinsics </a:t>
+            </a:r>
+            <a:r>
+              <a:rPr lang="zh-CN" altLang="en-US" sz="1900">
+                <a:solidFill>
+                  <a:schemeClr val="tx1"/>
+                </a:solidFill>
+                <a:latin typeface="微软雅黑" panose="020B0503020204020204" charset="-122"/>
+                <a:ea typeface="微软雅黑" panose="020B0503020204020204" charset="-122"/>
+                <a:cs typeface="微软雅黑" panose="020B0503020204020204" charset="-122"/>
+              </a:rPr>
+              <a:t>批量接入；</a:t>
+            </a:r>
+            <a:endParaRPr lang="en-US" altLang="zh-CN" sz="1900">
+              <a:solidFill>
+                <a:schemeClr val="tx1"/>
+              </a:solidFill>
+              <a:latin typeface="微软雅黑" panose="020B0503020204020204" charset="-122"/>
+              <a:ea typeface="微软雅黑" panose="020B0503020204020204" charset="-122"/>
+              <a:cs typeface="微软雅黑" panose="020B0503020204020204" charset="-122"/>
+            </a:endParaRPr>
+          </a:p>
+          <a:p>
+            <a:pPr marL="0" indent="0">
+              <a:buNone/>
+            </a:pPr>
+            <a:r>
+              <a:rPr lang="zh-CN" altLang="en-US" sz="1900">
+                <a:solidFill>
+                  <a:schemeClr val="tx1"/>
+                </a:solidFill>
+                <a:latin typeface="微软雅黑" panose="020B0503020204020204" charset="-122"/>
+                <a:ea typeface="微软雅黑" panose="020B0503020204020204" charset="-122"/>
+                <a:cs typeface="微软雅黑" panose="020B0503020204020204" charset="-122"/>
+              </a:rPr>
+              <a:t>降低了维护成本，后续只需维护模板，而不用逐个函数</a:t>
+            </a:r>
+            <a:r>
+              <a:rPr lang="zh-CN" altLang="en-US" sz="1900">
+                <a:solidFill>
+                  <a:schemeClr val="tx1"/>
+                </a:solidFill>
+                <a:latin typeface="微软雅黑" panose="020B0503020204020204" charset="-122"/>
+                <a:ea typeface="微软雅黑" panose="020B0503020204020204" charset="-122"/>
+                <a:cs typeface="微软雅黑" panose="020B0503020204020204" charset="-122"/>
+                <a:sym typeface="+mn-ea"/>
+              </a:rPr>
+              <a:t>维护。</a:t>
+            </a:r>
+            <a:endParaRPr lang="zh-CN" altLang="en-US" sz="1900">
               <a:solidFill>
                 <a:schemeClr val="tx1"/>
               </a:solidFill>
@@ -10024,6 +11249,28 @@
 
 <file path=ppt/tags/tag65.xml><?xml version="1.0" encoding="utf-8"?>
 <p:tagLst xmlns:p="http://schemas.openxmlformats.org/presentationml/2006/main">
+  <p:tag name="KSO_WM_UNIT_ISCONTENTSTITLE" val="0"/>
+  <p:tag name="KSO_WM_UNIT_ISNUMDGMTITLE" val="0"/>
+  <p:tag name="KSO_WM_UNIT_NOCLEAR" val="0"/>
+  <p:tag name="KSO_WM_UNIT_SHOW_EDIT_AREA_INDICATION" val="1"/>
+  <p:tag name="KSO_WM_UNIT_VALUE" val="28"/>
+  <p:tag name="KSO_WM_UNIT_HIGHLIGHT" val="0"/>
+  <p:tag name="KSO_WM_UNIT_COMPATIBLE" val="0"/>
+  <p:tag name="KSO_WM_UNIT_DIAGRAM_ISNUMVISUAL" val="0"/>
+  <p:tag name="KSO_WM_UNIT_DIAGRAM_ISREFERUNIT" val="0"/>
+  <p:tag name="KSO_WM_UNIT_TYPE" val="a"/>
+  <p:tag name="KSO_WM_UNIT_INDEX" val="1"/>
+  <p:tag name="KSO_WM_UNIT_ID" val="custom20205081_1*a*1"/>
+  <p:tag name="KSO_WM_TEMPLATE_CATEGORY" val="custom"/>
+  <p:tag name="KSO_WM_TEMPLATE_INDEX" val="20205081"/>
+  <p:tag name="KSO_WM_UNIT_LAYERLEVEL" val="1"/>
+  <p:tag name="KSO_WM_TAG_VERSION" val="1.0"/>
+  <p:tag name="KSO_WM_BEAUTIFY_FLAG" val="#wm#"/>
+</p:tagLst>
+</file>
+
+<file path=ppt/tags/tag66.xml><?xml version="1.0" encoding="utf-8"?>
+<p:tagLst xmlns:p="http://schemas.openxmlformats.org/presentationml/2006/main">
   <p:tag name="KSO_WM_SLIDE_ID" val="custom20205081_1"/>
   <p:tag name="KSO_WM_TEMPLATE_SUBCATEGORY" val="19"/>
   <p:tag name="KSO_WM_TEMPLATE_MASTER_TYPE" val="0"/>
@@ -10043,19 +11290,6 @@
 </p:tagLst>
 </file>
 
-<file path=ppt/tags/tag66.xml><?xml version="1.0" encoding="utf-8"?>
-<p:tagLst xmlns:p="http://schemas.openxmlformats.org/presentationml/2006/main">
-  <p:tag name="KSO_WM_UNIT_HIGHLIGHT" val="0"/>
-  <p:tag name="KSO_WM_UNIT_COMPATIBLE" val="0"/>
-  <p:tag name="KSO_WM_UNIT_DIAGRAM_ISNUMVISUAL" val="0"/>
-  <p:tag name="KSO_WM_UNIT_DIAGRAM_ISREFERUNIT" val="0"/>
-  <p:tag name="KSO_WM_UNIT_ID" val="_2**"/>
-  <p:tag name="KSO_WM_UNIT_LAYERLEVEL" val="1"/>
-  <p:tag name="KSO_WM_TAG_VERSION" val="1.0"/>
-  <p:tag name="KSO_WM_BEAUTIFY_FLAG" val="#wm#"/>
-</p:tagLst>
-</file>
-
 <file path=ppt/tags/tag67.xml><?xml version="1.0" encoding="utf-8"?>
 <p:tagLst xmlns:p="http://schemas.openxmlformats.org/presentationml/2006/main">
   <p:tag name="KSO_WM_UNIT_HIGHLIGHT" val="0"/>
@@ -10071,14 +11305,6 @@
 
 <file path=ppt/tags/tag68.xml><?xml version="1.0" encoding="utf-8"?>
 <p:tagLst xmlns:p="http://schemas.openxmlformats.org/presentationml/2006/main">
-  <p:tag name="KSO_WM_BEAUTIFY_FLAG" val="#wm#"/>
-  <p:tag name="KSO_WM_TEMPLATE_CATEGORY" val="custom"/>
-  <p:tag name="KSO_WM_TEMPLATE_INDEX" val="20205081"/>
-</p:tagLst>
-</file>
-
-<file path=ppt/tags/tag69.xml><?xml version="1.0" encoding="utf-8"?>
-<p:tagLst xmlns:p="http://schemas.openxmlformats.org/presentationml/2006/main">
   <p:tag name="KSO_WM_UNIT_HIGHLIGHT" val="0"/>
   <p:tag name="KSO_WM_UNIT_COMPATIBLE" val="0"/>
   <p:tag name="KSO_WM_UNIT_DIAGRAM_ISNUMVISUAL" val="0"/>
@@ -10087,6 +11313,14 @@
   <p:tag name="KSO_WM_UNIT_LAYERLEVEL" val="1"/>
   <p:tag name="KSO_WM_TAG_VERSION" val="1.0"/>
   <p:tag name="KSO_WM_BEAUTIFY_FLAG" val="#wm#"/>
+</p:tagLst>
+</file>
+
+<file path=ppt/tags/tag69.xml><?xml version="1.0" encoding="utf-8"?>
+<p:tagLst xmlns:p="http://schemas.openxmlformats.org/presentationml/2006/main">
+  <p:tag name="KSO_WM_BEAUTIFY_FLAG" val="#wm#"/>
+  <p:tag name="KSO_WM_TEMPLATE_CATEGORY" val="custom"/>
+  <p:tag name="KSO_WM_TEMPLATE_INDEX" val="20205081"/>
 </p:tagLst>
 </file>
 
@@ -10272,6 +11506,14 @@
 
 <file path=ppt/tags/tag83.xml><?xml version="1.0" encoding="utf-8"?>
 <p:tagLst xmlns:p="http://schemas.openxmlformats.org/presentationml/2006/main">
+  <p:tag name="KSO_WM_BEAUTIFY_FLAG" val="#wm#"/>
+  <p:tag name="KSO_WM_TEMPLATE_CATEGORY" val="custom"/>
+  <p:tag name="KSO_WM_TEMPLATE_INDEX" val="20205081"/>
+</p:tagLst>
+</file>
+
+<file path=ppt/tags/tag84.xml><?xml version="1.0" encoding="utf-8"?>
+<p:tagLst xmlns:p="http://schemas.openxmlformats.org/presentationml/2006/main">
   <p:tag name="KSO_WM_UNIT_HIGHLIGHT" val="0"/>
   <p:tag name="KSO_WM_UNIT_COMPATIBLE" val="0"/>
   <p:tag name="KSO_WM_UNIT_DIAGRAM_ISNUMVISUAL" val="0"/>
@@ -10280,14 +11522,6 @@
   <p:tag name="KSO_WM_UNIT_LAYERLEVEL" val="1"/>
   <p:tag name="KSO_WM_TAG_VERSION" val="1.0"/>
   <p:tag name="KSO_WM_BEAUTIFY_FLAG" val="#wm#"/>
-</p:tagLst>
-</file>
-
-<file path=ppt/tags/tag84.xml><?xml version="1.0" encoding="utf-8"?>
-<p:tagLst xmlns:p="http://schemas.openxmlformats.org/presentationml/2006/main">
-  <p:tag name="KSO_WM_BEAUTIFY_FLAG" val="#wm#"/>
-  <p:tag name="KSO_WM_TEMPLATE_CATEGORY" val="custom"/>
-  <p:tag name="KSO_WM_TEMPLATE_INDEX" val="20205081"/>
 </p:tagLst>
 </file>
 
@@ -10306,14 +11540,9 @@
 
 <file path=ppt/tags/tag86.xml><?xml version="1.0" encoding="utf-8"?>
 <p:tagLst xmlns:p="http://schemas.openxmlformats.org/presentationml/2006/main">
-  <p:tag name="KSO_WM_UNIT_HIGHLIGHT" val="0"/>
-  <p:tag name="KSO_WM_UNIT_COMPATIBLE" val="0"/>
-  <p:tag name="KSO_WM_UNIT_DIAGRAM_ISNUMVISUAL" val="0"/>
-  <p:tag name="KSO_WM_UNIT_DIAGRAM_ISREFERUNIT" val="0"/>
-  <p:tag name="KSO_WM_UNIT_ID" val="_2**"/>
-  <p:tag name="KSO_WM_UNIT_LAYERLEVEL" val="1"/>
-  <p:tag name="KSO_WM_TAG_VERSION" val="1.0"/>
   <p:tag name="KSO_WM_BEAUTIFY_FLAG" val="#wm#"/>
+  <p:tag name="KSO_WM_TEMPLATE_CATEGORY" val="custom"/>
+  <p:tag name="KSO_WM_TEMPLATE_INDEX" val="20205081"/>
 </p:tagLst>
 </file>
 
@@ -10332,14 +11561,6 @@
 
 <file path=ppt/tags/tag88.xml><?xml version="1.0" encoding="utf-8"?>
 <p:tagLst xmlns:p="http://schemas.openxmlformats.org/presentationml/2006/main">
-  <p:tag name="KSO_WM_BEAUTIFY_FLAG" val="#wm#"/>
-  <p:tag name="KSO_WM_TEMPLATE_CATEGORY" val="custom"/>
-  <p:tag name="KSO_WM_TEMPLATE_INDEX" val="20205081"/>
-</p:tagLst>
-</file>
-
-<file path=ppt/tags/tag89.xml><?xml version="1.0" encoding="utf-8"?>
-<p:tagLst xmlns:p="http://schemas.openxmlformats.org/presentationml/2006/main">
   <p:tag name="KSO_WM_UNIT_HIGHLIGHT" val="0"/>
   <p:tag name="KSO_WM_UNIT_COMPATIBLE" val="0"/>
   <p:tag name="KSO_WM_UNIT_DIAGRAM_ISNUMVISUAL" val="0"/>
@@ -10348,6 +11569,14 @@
   <p:tag name="KSO_WM_UNIT_LAYERLEVEL" val="1"/>
   <p:tag name="KSO_WM_TAG_VERSION" val="1.0"/>
   <p:tag name="KSO_WM_BEAUTIFY_FLAG" val="#wm#"/>
+</p:tagLst>
+</file>
+
+<file path=ppt/tags/tag89.xml><?xml version="1.0" encoding="utf-8"?>
+<p:tagLst xmlns:p="http://schemas.openxmlformats.org/presentationml/2006/main">
+  <p:tag name="KSO_WM_BEAUTIFY_FLAG" val="#wm#"/>
+  <p:tag name="KSO_WM_TEMPLATE_CATEGORY" val="custom"/>
+  <p:tag name="KSO_WM_TEMPLATE_INDEX" val="20205081"/>
 </p:tagLst>
 </file>
 
@@ -10379,14 +11608,6 @@
 
 <file path=ppt/tags/tag91.xml><?xml version="1.0" encoding="utf-8"?>
 <p:tagLst xmlns:p="http://schemas.openxmlformats.org/presentationml/2006/main">
-  <p:tag name="KSO_WM_BEAUTIFY_FLAG" val="#wm#"/>
-  <p:tag name="KSO_WM_TEMPLATE_CATEGORY" val="custom"/>
-  <p:tag name="KSO_WM_TEMPLATE_INDEX" val="20205081"/>
-</p:tagLst>
-</file>
-
-<file path=ppt/tags/tag92.xml><?xml version="1.0" encoding="utf-8"?>
-<p:tagLst xmlns:p="http://schemas.openxmlformats.org/presentationml/2006/main">
   <p:tag name="KSO_WM_UNIT_HIGHLIGHT" val="0"/>
   <p:tag name="KSO_WM_UNIT_COMPATIBLE" val="0"/>
   <p:tag name="KSO_WM_UNIT_DIAGRAM_ISNUMVISUAL" val="0"/>
@@ -10395,6 +11616,14 @@
   <p:tag name="KSO_WM_UNIT_LAYERLEVEL" val="1"/>
   <p:tag name="KSO_WM_TAG_VERSION" val="1.0"/>
   <p:tag name="KSO_WM_BEAUTIFY_FLAG" val="#wm#"/>
+</p:tagLst>
+</file>
+
+<file path=ppt/tags/tag92.xml><?xml version="1.0" encoding="utf-8"?>
+<p:tagLst xmlns:p="http://schemas.openxmlformats.org/presentationml/2006/main">
+  <p:tag name="KSO_WM_BEAUTIFY_FLAG" val="#wm#"/>
+  <p:tag name="KSO_WM_TEMPLATE_CATEGORY" val="custom"/>
+  <p:tag name="KSO_WM_TEMPLATE_INDEX" val="20205081"/>
 </p:tagLst>
 </file>
 
@@ -10413,14 +11642,6 @@
 
 <file path=ppt/tags/tag94.xml><?xml version="1.0" encoding="utf-8"?>
 <p:tagLst xmlns:p="http://schemas.openxmlformats.org/presentationml/2006/main">
-  <p:tag name="KSO_WM_BEAUTIFY_FLAG" val="#wm#"/>
-  <p:tag name="KSO_WM_TEMPLATE_CATEGORY" val="custom"/>
-  <p:tag name="KSO_WM_TEMPLATE_INDEX" val="20205081"/>
-</p:tagLst>
-</file>
-
-<file path=ppt/tags/tag95.xml><?xml version="1.0" encoding="utf-8"?>
-<p:tagLst xmlns:p="http://schemas.openxmlformats.org/presentationml/2006/main">
   <p:tag name="KSO_WM_UNIT_HIGHLIGHT" val="0"/>
   <p:tag name="KSO_WM_UNIT_COMPATIBLE" val="0"/>
   <p:tag name="KSO_WM_UNIT_DIAGRAM_ISNUMVISUAL" val="0"/>
@@ -10429,6 +11650,14 @@
   <p:tag name="KSO_WM_UNIT_LAYERLEVEL" val="1"/>
   <p:tag name="KSO_WM_TAG_VERSION" val="1.0"/>
   <p:tag name="KSO_WM_BEAUTIFY_FLAG" val="#wm#"/>
+</p:tagLst>
+</file>
+
+<file path=ppt/tags/tag95.xml><?xml version="1.0" encoding="utf-8"?>
+<p:tagLst xmlns:p="http://schemas.openxmlformats.org/presentationml/2006/main">
+  <p:tag name="KSO_WM_BEAUTIFY_FLAG" val="#wm#"/>
+  <p:tag name="KSO_WM_TEMPLATE_CATEGORY" val="custom"/>
+  <p:tag name="KSO_WM_TEMPLATE_INDEX" val="20205081"/>
 </p:tagLst>
 </file>
 
@@ -10446,6 +11675,19 @@
 </file>
 
 <file path=ppt/tags/tag97.xml><?xml version="1.0" encoding="utf-8"?>
+<p:tagLst xmlns:p="http://schemas.openxmlformats.org/presentationml/2006/main">
+  <p:tag name="KSO_WM_UNIT_HIGHLIGHT" val="0"/>
+  <p:tag name="KSO_WM_UNIT_COMPATIBLE" val="0"/>
+  <p:tag name="KSO_WM_UNIT_DIAGRAM_ISNUMVISUAL" val="0"/>
+  <p:tag name="KSO_WM_UNIT_DIAGRAM_ISREFERUNIT" val="0"/>
+  <p:tag name="KSO_WM_UNIT_ID" val="_2**"/>
+  <p:tag name="KSO_WM_UNIT_LAYERLEVEL" val="1"/>
+  <p:tag name="KSO_WM_TAG_VERSION" val="1.0"/>
+  <p:tag name="KSO_WM_BEAUTIFY_FLAG" val="#wm#"/>
+</p:tagLst>
+</file>
+
+<file path=ppt/tags/tag98.xml><?xml version="1.0" encoding="utf-8"?>
 <p:tagLst xmlns:p="http://schemas.openxmlformats.org/presentationml/2006/main">
   <p:tag name="KSO_WM_BEAUTIFY_FLAG" val="#wm#"/>
   <p:tag name="KSO_WM_TEMPLATE_CATEGORY" val="custom"/>
